--- a/Aegis-Master-Deck.pptx
+++ b/Aegis-Master-Deck.pptx
@@ -20,6 +20,7 @@
     <p:sldId id="268" r:id="rId20"/>
     <p:sldId id="269" r:id="rId21"/>
     <p:sldId id="270" r:id="rId22"/>
+    <p:sldId id="279" r:id="rId31"/>
     <p:sldId id="271" r:id="rId23"/>
     <p:sldId id="272" r:id="rId24"/>
     <p:sldId id="273" r:id="rId25"/>
@@ -5944,7 +5945,7 @@
                 </a:solidFill>
                 <a:latin typeface="Calibri"/>
               </a:rPr>
-              <a:t>   →   </a:t>
+              <a:t xml:space="preserve">   →   </a:t>
             </a:r>
             <a:r>
               <a:rPr sz="1250" b="1" i="0">
@@ -5962,7 +5963,7 @@
                 </a:solidFill>
                 <a:latin typeface="Calibri"/>
               </a:rPr>
-              <a:t>   →   </a:t>
+              <a:t xml:space="preserve">   →   </a:t>
             </a:r>
             <a:r>
               <a:rPr sz="1250" b="1" i="0">
@@ -5980,7 +5981,7 @@
                 </a:solidFill>
                 <a:latin typeface="Calibri"/>
               </a:rPr>
-              <a:t>   →   </a:t>
+              <a:t xml:space="preserve">   →   </a:t>
             </a:r>
             <a:r>
               <a:rPr sz="1250" b="0" i="0">
@@ -5998,7 +5999,7 @@
                 </a:solidFill>
                 <a:latin typeface="Calibri"/>
               </a:rPr>
-              <a:t>   →   </a:t>
+              <a:t xml:space="preserve">   →   </a:t>
             </a:r>
             <a:r>
               <a:rPr sz="1250" b="0" i="0">
@@ -6016,7 +6017,7 @@
                 </a:solidFill>
                 <a:latin typeface="Calibri"/>
               </a:rPr>
-              <a:t>   →   </a:t>
+              <a:t xml:space="preserve">   →   </a:t>
             </a:r>
             <a:r>
               <a:rPr sz="1250" b="1" i="0">
@@ -6372,7 +6373,7 @@
                 </a:solidFill>
                 <a:latin typeface="Consolas"/>
               </a:rPr>
-              <a:t>     --id billing-inquiry --owner dept-finance \</a:t>
+              <a:t xml:space="preserve">     --id billing-inquiry --owner dept-finance \</a:t>
             </a:r>
           </a:p>
           <a:p>
@@ -6394,7 +6395,7 @@
                 </a:solidFill>
                 <a:latin typeface="Consolas"/>
               </a:rPr>
-              <a:t>     --pack enterprise --blast-radius low</a:t>
+              <a:t xml:space="preserve">     --pack enterprise --blast-radius low</a:t>
             </a:r>
           </a:p>
           <a:p>
@@ -6493,7 +6494,7 @@
                 </a:solidFill>
                 <a:latin typeface="Consolas"/>
               </a:rPr>
-              <a:t>• agent.manifest.yaml  </a:t>
+              <a:t xml:space="preserve">• agent.manifest.yaml  </a:t>
             </a:r>
             <a:r>
               <a:rPr sz="1100" b="0" i="0">
@@ -6521,7 +6522,7 @@
                 </a:solidFill>
                 <a:latin typeface="Consolas"/>
               </a:rPr>
-              <a:t>• prompts/system.md  </a:t>
+              <a:t xml:space="preserve">• prompts/system.md  </a:t>
             </a:r>
             <a:r>
               <a:rPr sz="1100" b="0" i="0">
@@ -6549,7 +6550,7 @@
                 </a:solidFill>
                 <a:latin typeface="Consolas"/>
               </a:rPr>
-              <a:t>• evals/suite.md  </a:t>
+              <a:t xml:space="preserve">• evals/suite.md  </a:t>
             </a:r>
             <a:r>
               <a:rPr sz="1100" b="0" i="0">
@@ -6577,7 +6578,7 @@
                 </a:solidFill>
                 <a:latin typeface="Consolas"/>
               </a:rPr>
-              <a:t>• runbook.md  ·  README.md  </a:t>
+              <a:t xml:space="preserve">• runbook.md  ·  README.md  </a:t>
             </a:r>
             <a:r>
               <a:rPr sz="1100" b="0" i="0">
@@ -6696,7 +6697,7 @@
                 </a:solidFill>
                 <a:latin typeface="Calibri"/>
               </a:rPr>
-              <a:t>✓  </a:t>
+              <a:t xml:space="preserve">✓  </a:t>
             </a:r>
             <a:r>
               <a:rPr sz="1250" b="0" i="0">
@@ -6727,7 +6728,7 @@
                 </a:solidFill>
                 <a:latin typeface="Calibri"/>
               </a:rPr>
-              <a:t>✓  </a:t>
+              <a:t xml:space="preserve">✓  </a:t>
             </a:r>
             <a:r>
               <a:rPr sz="1250" b="0" i="0">
@@ -6758,7 +6759,7 @@
                 </a:solidFill>
                 <a:latin typeface="Calibri"/>
               </a:rPr>
-              <a:t>✓  </a:t>
+              <a:t xml:space="preserve">✓  </a:t>
             </a:r>
             <a:r>
               <a:rPr sz="1250" b="0" i="0">
@@ -6789,7 +6790,7 @@
                 </a:solidFill>
                 <a:latin typeface="Calibri"/>
               </a:rPr>
-              <a:t>✓  </a:t>
+              <a:t xml:space="preserve">✓  </a:t>
             </a:r>
             <a:r>
               <a:rPr sz="1250" b="0" i="0">
@@ -6820,7 +6821,7 @@
                 </a:solidFill>
                 <a:latin typeface="Calibri"/>
               </a:rPr>
-              <a:t>✓  </a:t>
+              <a:t xml:space="preserve">✓  </a:t>
             </a:r>
             <a:r>
               <a:rPr sz="1250" b="0" i="0">
@@ -6851,7 +6852,7 @@
                 </a:solidFill>
                 <a:latin typeface="Calibri"/>
               </a:rPr>
-              <a:t>✓  </a:t>
+              <a:t xml:space="preserve">✓  </a:t>
             </a:r>
             <a:r>
               <a:rPr sz="1250" b="0" i="0">
@@ -6882,7 +6883,7 @@
                 </a:solidFill>
                 <a:latin typeface="Calibri"/>
               </a:rPr>
-              <a:t>✓  </a:t>
+              <a:t xml:space="preserve">✓  </a:t>
             </a:r>
             <a:r>
               <a:rPr sz="1250" b="0" i="0">
@@ -6913,7 +6914,7 @@
                 </a:solidFill>
                 <a:latin typeface="Calibri"/>
               </a:rPr>
-              <a:t>✓  </a:t>
+              <a:t xml:space="preserve">✓  </a:t>
             </a:r>
             <a:r>
               <a:rPr sz="1250" b="0" i="0">
@@ -6944,7 +6945,7 @@
                 </a:solidFill>
                 <a:latin typeface="Calibri"/>
               </a:rPr>
-              <a:t>✓  </a:t>
+              <a:t xml:space="preserve">✓  </a:t>
             </a:r>
             <a:r>
               <a:rPr sz="1250" b="0" i="0">
@@ -8989,7 +8990,7 @@
                 </a:solidFill>
                 <a:latin typeface="Consolas"/>
               </a:rPr>
-              <a:t>RESULT:  </a:t>
+              <a:t xml:space="preserve">RESULT:  </a:t>
             </a:r>
             <a:r>
               <a:rPr sz="1500" b="1" i="0">
@@ -9007,7 +9008,7 @@
                 </a:solidFill>
                 <a:latin typeface="Consolas"/>
               </a:rPr>
-              <a:t>     ·  exits non-zero if any step fails</a:t>
+              <a:t xml:space="preserve">     ·  exits non-zero if any step fails</a:t>
             </a:r>
           </a:p>
         </p:txBody>
@@ -9052,7 +9053,7 @@
                 </a:solidFill>
                 <a:latin typeface="Calibri"/>
               </a:rPr>
-              <a:t>✓  </a:t>
+              <a:t xml:space="preserve">✓  </a:t>
             </a:r>
             <a:r>
               <a:rPr sz="1200" b="0" i="0">
@@ -9106,7 +9107,7 @@
                 </a:solidFill>
                 <a:latin typeface="Calibri"/>
               </a:rPr>
-              <a:t>✓  </a:t>
+              <a:t xml:space="preserve">✓  </a:t>
             </a:r>
             <a:r>
               <a:rPr sz="1200" b="0" i="0">
@@ -9160,7 +9161,7 @@
                 </a:solidFill>
                 <a:latin typeface="Calibri"/>
               </a:rPr>
-              <a:t>✓  </a:t>
+              <a:t xml:space="preserve">✓  </a:t>
             </a:r>
             <a:r>
               <a:rPr sz="1200" b="0" i="0">
@@ -9214,7 +9215,7 @@
                 </a:solidFill>
                 <a:latin typeface="Calibri"/>
               </a:rPr>
-              <a:t>✓  </a:t>
+              <a:t xml:space="preserve">✓  </a:t>
             </a:r>
             <a:r>
               <a:rPr sz="1200" b="0" i="0">
@@ -9268,7 +9269,7 @@
                 </a:solidFill>
                 <a:latin typeface="Calibri"/>
               </a:rPr>
-              <a:t>✓  </a:t>
+              <a:t xml:space="preserve">✓  </a:t>
             </a:r>
             <a:r>
               <a:rPr sz="1200" b="0" i="0">
@@ -9322,7 +9323,7 @@
                 </a:solidFill>
                 <a:latin typeface="Calibri"/>
               </a:rPr>
-              <a:t>✓  </a:t>
+              <a:t xml:space="preserve">✓  </a:t>
             </a:r>
             <a:r>
               <a:rPr sz="1200" b="0" i="0">
@@ -9672,7 +9673,7 @@
                 </a:solidFill>
                 <a:latin typeface="Calibri"/>
               </a:rPr>
-              <a:t>✓  </a:t>
+              <a:t xml:space="preserve">✓  </a:t>
             </a:r>
             <a:r>
               <a:rPr sz="1150" b="0" i="0">
@@ -9703,7 +9704,7 @@
                 </a:solidFill>
                 <a:latin typeface="Calibri"/>
               </a:rPr>
-              <a:t>✓  </a:t>
+              <a:t xml:space="preserve">✓  </a:t>
             </a:r>
             <a:r>
               <a:rPr sz="1150" b="0" i="0">
@@ -9734,7 +9735,7 @@
                 </a:solidFill>
                 <a:latin typeface="Calibri"/>
               </a:rPr>
-              <a:t>✓  </a:t>
+              <a:t xml:space="preserve">✓  </a:t>
             </a:r>
             <a:r>
               <a:rPr sz="1150" b="0" i="0">
@@ -9765,7 +9766,7 @@
                 </a:solidFill>
                 <a:latin typeface="Calibri"/>
               </a:rPr>
-              <a:t>✓  </a:t>
+              <a:t xml:space="preserve">✓  </a:t>
             </a:r>
             <a:r>
               <a:rPr sz="1150" b="0" i="0">
@@ -9796,7 +9797,7 @@
                 </a:solidFill>
                 <a:latin typeface="Calibri"/>
               </a:rPr>
-              <a:t>✓  </a:t>
+              <a:t xml:space="preserve">✓  </a:t>
             </a:r>
             <a:r>
               <a:rPr sz="1150" b="0" i="0">
@@ -9827,7 +9828,7 @@
                 </a:solidFill>
                 <a:latin typeface="Calibri"/>
               </a:rPr>
-              <a:t>✓  </a:t>
+              <a:t xml:space="preserve">✓  </a:t>
             </a:r>
             <a:r>
               <a:rPr sz="1150" b="0" i="0">
@@ -9858,7 +9859,7 @@
                 </a:solidFill>
                 <a:latin typeface="Calibri"/>
               </a:rPr>
-              <a:t>✓  </a:t>
+              <a:t xml:space="preserve">✓  </a:t>
             </a:r>
             <a:r>
               <a:rPr sz="1150" b="0" i="0">
@@ -9889,7 +9890,7 @@
                 </a:solidFill>
                 <a:latin typeface="Calibri"/>
               </a:rPr>
-              <a:t>✓  </a:t>
+              <a:t xml:space="preserve">✓  </a:t>
             </a:r>
             <a:r>
               <a:rPr sz="1150" b="0" i="0">
@@ -10006,7 +10007,7 @@
                 </a:solidFill>
                 <a:latin typeface="Calibri"/>
               </a:rPr>
-              <a:t>+  </a:t>
+              <a:t xml:space="preserve">+  </a:t>
             </a:r>
             <a:r>
               <a:rPr sz="1150" b="0" i="0">
@@ -10037,7 +10038,7 @@
                 </a:solidFill>
                 <a:latin typeface="Calibri"/>
               </a:rPr>
-              <a:t>+  </a:t>
+              <a:t xml:space="preserve">+  </a:t>
             </a:r>
             <a:r>
               <a:rPr sz="1150" b="0" i="0">
@@ -10068,7 +10069,7 @@
                 </a:solidFill>
                 <a:latin typeface="Calibri"/>
               </a:rPr>
-              <a:t>+  </a:t>
+              <a:t xml:space="preserve">+  </a:t>
             </a:r>
             <a:r>
               <a:rPr sz="1150" b="0" i="0">
@@ -10099,7 +10100,7 @@
                 </a:solidFill>
                 <a:latin typeface="Calibri"/>
               </a:rPr>
-              <a:t>+  </a:t>
+              <a:t xml:space="preserve">+  </a:t>
             </a:r>
             <a:r>
               <a:rPr sz="1150" b="0" i="0">
@@ -10130,7 +10131,7 @@
                 </a:solidFill>
                 <a:latin typeface="Calibri"/>
               </a:rPr>
-              <a:t>+  </a:t>
+              <a:t xml:space="preserve">+  </a:t>
             </a:r>
             <a:r>
               <a:rPr sz="1150" b="0" i="0">
@@ -10161,7 +10162,7 @@
                 </a:solidFill>
                 <a:latin typeface="Calibri"/>
               </a:rPr>
-              <a:t>+  </a:t>
+              <a:t xml:space="preserve">+  </a:t>
             </a:r>
             <a:r>
               <a:rPr sz="1150" b="0" i="0">
@@ -10192,7 +10193,7 @@
                 </a:solidFill>
                 <a:latin typeface="Calibri"/>
               </a:rPr>
-              <a:t>+  </a:t>
+              <a:t xml:space="preserve">+  </a:t>
             </a:r>
             <a:r>
               <a:rPr sz="1150" b="0" i="0">
@@ -10502,7 +10503,7 @@
                 </a:solidFill>
                 <a:latin typeface="Calibri"/>
               </a:rPr>
-              <a:t>✓  </a:t>
+              <a:t xml:space="preserve">✓  </a:t>
             </a:r>
             <a:r>
               <a:rPr sz="1150" b="0" i="0">
@@ -10533,7 +10534,7 @@
                 </a:solidFill>
                 <a:latin typeface="Calibri"/>
               </a:rPr>
-              <a:t>✓  </a:t>
+              <a:t xml:space="preserve">✓  </a:t>
             </a:r>
             <a:r>
               <a:rPr sz="1150" b="0" i="0">
@@ -10564,7 +10565,7 @@
                 </a:solidFill>
                 <a:latin typeface="Calibri"/>
               </a:rPr>
-              <a:t>✓  </a:t>
+              <a:t xml:space="preserve">✓  </a:t>
             </a:r>
             <a:r>
               <a:rPr sz="1150" b="0" i="0">
@@ -10595,7 +10596,7 @@
                 </a:solidFill>
                 <a:latin typeface="Calibri"/>
               </a:rPr>
-              <a:t>✓  </a:t>
+              <a:t xml:space="preserve">✓  </a:t>
             </a:r>
             <a:r>
               <a:rPr sz="1150" b="0" i="0">
@@ -10626,7 +10627,7 @@
                 </a:solidFill>
                 <a:latin typeface="Calibri"/>
               </a:rPr>
-              <a:t>✓  </a:t>
+              <a:t xml:space="preserve">✓  </a:t>
             </a:r>
             <a:r>
               <a:rPr sz="1150" b="0" i="0">
@@ -10657,7 +10658,7 @@
                 </a:solidFill>
                 <a:latin typeface="Calibri"/>
               </a:rPr>
-              <a:t>✓  </a:t>
+              <a:t xml:space="preserve">✓  </a:t>
             </a:r>
             <a:r>
               <a:rPr sz="1150" b="0" i="0">
@@ -10688,7 +10689,7 @@
                 </a:solidFill>
                 <a:latin typeface="Calibri"/>
               </a:rPr>
-              <a:t>✓  </a:t>
+              <a:t xml:space="preserve">✓  </a:t>
             </a:r>
             <a:r>
               <a:rPr sz="1150" b="0" i="0">
@@ -10719,7 +10720,7 @@
                 </a:solidFill>
                 <a:latin typeface="Calibri"/>
               </a:rPr>
-              <a:t>✓  </a:t>
+              <a:t xml:space="preserve">✓  </a:t>
             </a:r>
             <a:r>
               <a:rPr sz="1150" b="0" i="0">
@@ -10838,7 +10839,7 @@
                 </a:solidFill>
                 <a:latin typeface="Calibri"/>
               </a:rPr>
-              <a:t>○  </a:t>
+              <a:t xml:space="preserve">○  </a:t>
             </a:r>
             <a:r>
               <a:rPr sz="1150" b="0" i="0">
@@ -10869,7 +10870,7 @@
                 </a:solidFill>
                 <a:latin typeface="Calibri"/>
               </a:rPr>
-              <a:t>○  </a:t>
+              <a:t xml:space="preserve">○  </a:t>
             </a:r>
             <a:r>
               <a:rPr sz="1150" b="0" i="0">
@@ -10900,7 +10901,7 @@
                 </a:solidFill>
                 <a:latin typeface="Calibri"/>
               </a:rPr>
-              <a:t>○  </a:t>
+              <a:t xml:space="preserve">○  </a:t>
             </a:r>
             <a:r>
               <a:rPr sz="1150" b="0" i="0">
@@ -10931,7 +10932,7 @@
                 </a:solidFill>
                 <a:latin typeface="Calibri"/>
               </a:rPr>
-              <a:t>○  </a:t>
+              <a:t xml:space="preserve">○  </a:t>
             </a:r>
             <a:r>
               <a:rPr sz="1150" b="0" i="0">
@@ -10962,7 +10963,7 @@
                 </a:solidFill>
                 <a:latin typeface="Calibri"/>
               </a:rPr>
-              <a:t>○  </a:t>
+              <a:t xml:space="preserve">○  </a:t>
             </a:r>
             <a:r>
               <a:rPr sz="1150" b="0" i="0">
@@ -10993,7 +10994,7 @@
                 </a:solidFill>
                 <a:latin typeface="Calibri"/>
               </a:rPr>
-              <a:t>○  </a:t>
+              <a:t xml:space="preserve">○  </a:t>
             </a:r>
             <a:r>
               <a:rPr sz="1150" b="0" i="0">
@@ -11024,7 +11025,7 @@
                 </a:solidFill>
                 <a:latin typeface="Calibri"/>
               </a:rPr>
-              <a:t>○  </a:t>
+              <a:t xml:space="preserve">○  </a:t>
             </a:r>
             <a:r>
               <a:rPr sz="1150" b="0" i="0">
@@ -11055,7 +11056,7 @@
                 </a:solidFill>
                 <a:latin typeface="Calibri"/>
               </a:rPr>
-              <a:t>○  </a:t>
+              <a:t xml:space="preserve">○  </a:t>
             </a:r>
             <a:r>
               <a:rPr sz="1150" b="0" i="0">
@@ -11142,7 +11143,7 @@
                 </a:solidFill>
                 <a:latin typeface="Cambria"/>
               </a:rPr>
-              <a:t>"HIPAA-eligible" ≠ "HIPAA-compliant."  </a:t>
+              <a:t xml:space="preserve">"HIPAA-eligible" ≠ "HIPAA-compliant."  </a:t>
             </a:r>
             <a:r>
               <a:rPr sz="1200" b="0" i="0">
@@ -11523,7 +11524,7 @@
                 </a:solidFill>
                 <a:latin typeface="Cambria"/>
               </a:rPr>
-              <a:t>Discovery + architecture workshop   </a:t>
+              <a:t xml:space="preserve">Discovery + architecture workshop   </a:t>
             </a:r>
             <a:r>
               <a:rPr sz="1250" b="0" i="0">
@@ -11624,7 +11625,7 @@
                 </a:solidFill>
                 <a:latin typeface="Cambria"/>
               </a:rPr>
-              <a:t>Stand up the golden path   </a:t>
+              <a:t xml:space="preserve">Stand up the golden path   </a:t>
             </a:r>
             <a:r>
               <a:rPr sz="1250" b="0" i="0">
@@ -11725,7 +11726,7 @@
                 </a:solidFill>
                 <a:latin typeface="Cambria"/>
               </a:rPr>
-              <a:t>Prove a documented outcome   </a:t>
+              <a:t xml:space="preserve">Prove a documented outcome   </a:t>
             </a:r>
             <a:r>
               <a:rPr sz="1250" b="0" i="0">
@@ -11826,7 +11827,7 @@
                 </a:solidFill>
                 <a:latin typeface="Cambria"/>
               </a:rPr>
-              <a:t>Sign the shared-responsibility plan   </a:t>
+              <a:t xml:space="preserve">Sign the shared-responsibility plan   </a:t>
             </a:r>
             <a:r>
               <a:rPr sz="1250" b="0" i="0">
@@ -20488,7 +20489,7 @@
                 </a:solidFill>
                 <a:latin typeface="Calibri"/>
               </a:rPr>
-              <a:t>▪ </a:t>
+              <a:t xml:space="preserve">▪ </a:t>
             </a:r>
             <a:r>
               <a:rPr sz="1250" b="1" i="0">
@@ -20497,7 +20498,7 @@
                 </a:solidFill>
                 <a:latin typeface="Calibri"/>
               </a:rPr>
-              <a:t>Amazon Bedrock + Guardrails  </a:t>
+              <a:t xml:space="preserve">Amazon Bedrock + Guardrails  </a:t>
             </a:r>
             <a:r>
               <a:rPr sz="1100" b="0" i="0">
@@ -20525,7 +20526,7 @@
                 </a:solidFill>
                 <a:latin typeface="Calibri"/>
               </a:rPr>
-              <a:t>▪ </a:t>
+              <a:t xml:space="preserve">▪ </a:t>
             </a:r>
             <a:r>
               <a:rPr sz="1250" b="1" i="0">
@@ -20534,7 +20535,7 @@
                 </a:solidFill>
                 <a:latin typeface="Calibri"/>
               </a:rPr>
-              <a:t>AgentCore  </a:t>
+              <a:t xml:space="preserve">AgentCore  </a:t>
             </a:r>
             <a:r>
               <a:rPr sz="1100" b="0" i="0">
@@ -20562,7 +20563,7 @@
                 </a:solidFill>
                 <a:latin typeface="Calibri"/>
               </a:rPr>
-              <a:t>▪ </a:t>
+              <a:t xml:space="preserve">▪ </a:t>
             </a:r>
             <a:r>
               <a:rPr sz="1250" b="1" i="0">
@@ -20571,7 +20572,7 @@
                 </a:solidFill>
                 <a:latin typeface="Calibri"/>
               </a:rPr>
-              <a:t>AWS GovCloud (US)  </a:t>
+              <a:t xml:space="preserve">AWS GovCloud (US)  </a:t>
             </a:r>
             <a:r>
               <a:rPr sz="1100" b="0" i="0">
@@ -20599,7 +20600,7 @@
                 </a:solidFill>
                 <a:latin typeface="Calibri"/>
               </a:rPr>
-              <a:t>▪ </a:t>
+              <a:t xml:space="preserve">▪ </a:t>
             </a:r>
             <a:r>
               <a:rPr sz="1250" b="1" i="0">
@@ -20608,7 +20609,7 @@
                 </a:solidFill>
                 <a:latin typeface="Calibri"/>
               </a:rPr>
-              <a:t>KMS  </a:t>
+              <a:t xml:space="preserve">KMS  </a:t>
             </a:r>
             <a:r>
               <a:rPr sz="1100" b="0" i="0">
@@ -20636,7 +20637,7 @@
                 </a:solidFill>
                 <a:latin typeface="Calibri"/>
               </a:rPr>
-              <a:t>▪ </a:t>
+              <a:t xml:space="preserve">▪ </a:t>
             </a:r>
             <a:r>
               <a:rPr sz="1250" b="1" i="0">
@@ -20645,7 +20646,7 @@
                 </a:solidFill>
                 <a:latin typeface="Calibri"/>
               </a:rPr>
-              <a:t>Macie / Comprehend  </a:t>
+              <a:t xml:space="preserve">Macie / Comprehend  </a:t>
             </a:r>
             <a:r>
               <a:rPr sz="1100" b="0" i="0">
@@ -20673,7 +20674,7 @@
                 </a:solidFill>
                 <a:latin typeface="Calibri"/>
               </a:rPr>
-              <a:t>▪ </a:t>
+              <a:t xml:space="preserve">▪ </a:t>
             </a:r>
             <a:r>
               <a:rPr sz="1250" b="1" i="0">
@@ -20682,7 +20683,7 @@
                 </a:solidFill>
                 <a:latin typeface="Calibri"/>
               </a:rPr>
-              <a:t>FinOps stack  </a:t>
+              <a:t xml:space="preserve">FinOps stack  </a:t>
             </a:r>
             <a:r>
               <a:rPr sz="1100" b="0" i="0">
@@ -20710,7 +20711,7 @@
                 </a:solidFill>
                 <a:latin typeface="Calibri"/>
               </a:rPr>
-              <a:t>▪ </a:t>
+              <a:t xml:space="preserve">▪ </a:t>
             </a:r>
             <a:r>
               <a:rPr sz="1250" b="1" i="0">
@@ -20719,7 +20720,7 @@
                 </a:solidFill>
                 <a:latin typeface="Calibri"/>
               </a:rPr>
-              <a:t>Edge &amp; posture  </a:t>
+              <a:t xml:space="preserve">Edge &amp; posture  </a:t>
             </a:r>
             <a:r>
               <a:rPr sz="1100" b="0" i="0">
@@ -20838,7 +20839,7 @@
                 </a:solidFill>
                 <a:latin typeface="Calibri"/>
               </a:rPr>
-              <a:t>›  </a:t>
+              <a:t xml:space="preserve">›  </a:t>
             </a:r>
             <a:r>
               <a:rPr sz="1250" b="0" i="0">
@@ -20869,7 +20870,7 @@
                 </a:solidFill>
                 <a:latin typeface="Calibri"/>
               </a:rPr>
-              <a:t>›  </a:t>
+              <a:t xml:space="preserve">›  </a:t>
             </a:r>
             <a:r>
               <a:rPr sz="1250" b="0" i="0">
@@ -20900,7 +20901,7 @@
                 </a:solidFill>
                 <a:latin typeface="Calibri"/>
               </a:rPr>
-              <a:t>›  </a:t>
+              <a:t xml:space="preserve">›  </a:t>
             </a:r>
             <a:r>
               <a:rPr sz="1250" b="0" i="0">
@@ -20931,7 +20932,7 @@
                 </a:solidFill>
                 <a:latin typeface="Calibri"/>
               </a:rPr>
-              <a:t>›  </a:t>
+              <a:t xml:space="preserve">›  </a:t>
             </a:r>
             <a:r>
               <a:rPr sz="1250" b="0" i="0">
@@ -21309,7 +21310,7 @@
                 </a:solidFill>
                 <a:latin typeface="Cambria"/>
               </a:rPr>
-              <a:t>Package  </a:t>
+              <a:t xml:space="preserve">Package  </a:t>
             </a:r>
             <a:r>
               <a:rPr sz="1150" b="0" i="0">
@@ -21410,7 +21411,7 @@
                 </a:solidFill>
                 <a:latin typeface="Cambria"/>
               </a:rPr>
-              <a:t>List  </a:t>
+              <a:t xml:space="preserve">List  </a:t>
             </a:r>
             <a:r>
               <a:rPr sz="1150" b="0" i="0">
@@ -21511,7 +21512,7 @@
                 </a:solidFill>
                 <a:latin typeface="Cambria"/>
               </a:rPr>
-              <a:t>Deploy  </a:t>
+              <a:t xml:space="preserve">Deploy  </a:t>
             </a:r>
             <a:r>
               <a:rPr sz="1150" b="0" i="0">
@@ -21612,7 +21613,7 @@
                 </a:solidFill>
                 <a:latin typeface="Cambria"/>
               </a:rPr>
-              <a:t>Compound  </a:t>
+              <a:t xml:space="preserve">Compound  </a:t>
             </a:r>
             <a:r>
               <a:rPr sz="1150" b="0" i="0">
@@ -21801,7 +21802,7 @@
                 </a:solidFill>
                 <a:latin typeface="Cambria"/>
               </a:rPr>
-              <a:t>LAND  </a:t>
+              <a:t xml:space="preserve">LAND  </a:t>
             </a:r>
             <a:r>
               <a:rPr sz="1150" b="0" i="0">
@@ -21902,7 +21903,7 @@
                 </a:solidFill>
                 <a:latin typeface="Cambria"/>
               </a:rPr>
-              <a:t>PROVE  </a:t>
+              <a:t xml:space="preserve">PROVE  </a:t>
             </a:r>
             <a:r>
               <a:rPr sz="1150" b="0" i="0">
@@ -22003,7 +22004,7 @@
                 </a:solidFill>
                 <a:latin typeface="Cambria"/>
               </a:rPr>
-              <a:t>EXPAND  </a:t>
+              <a:t xml:space="preserve">EXPAND  </a:t>
             </a:r>
             <a:r>
               <a:rPr sz="1150" b="0" i="0">
@@ -22104,7 +22105,7 @@
                 </a:solidFill>
                 <a:latin typeface="Cambria"/>
               </a:rPr>
-              <a:t>ORCHESTRATE  </a:t>
+              <a:t xml:space="preserve">ORCHESTRATE  </a:t>
             </a:r>
             <a:r>
               <a:rPr sz="1150" b="0" i="0">
@@ -22201,6 +22202,733 @@
                 <a:latin typeface="Calibri"/>
               </a:rPr>
               <a:t>Aegis  ·  23</a:t>
+            </a:r>
+          </a:p>
+        </p:txBody>
+      </p:sp>
+    </p:spTree>
+  </p:cSld>
+  <p:clrMapOvr>
+    <a:masterClrMapping/>
+  </p:clrMapOvr>
+</p:sld>
+</file>
+
+<file path=ppt/slides/slide24.xml><?xml version="1.0" encoding="utf-8"?>
+<p:sld xmlns:a="http://schemas.openxmlformats.org/drawingml/2006/main" xmlns:p="http://schemas.openxmlformats.org/presentationml/2006/main" xmlns:r="http://schemas.openxmlformats.org/officeDocument/2006/relationships">
+  <p:cSld>
+    <p:spTree>
+      <p:nvGrpSpPr>
+        <p:cNvPr id="1" name=""/>
+        <p:cNvGrpSpPr/>
+        <p:nvPr/>
+      </p:nvGrpSpPr>
+      <p:grpSpPr/>
+      <p:sp>
+        <p:nvSpPr>
+          <p:cNvPr id="2" name="Background"/>
+          <p:cNvSpPr/>
+          <p:nvPr/>
+        </p:nvSpPr>
+        <p:spPr>
+          <a:xfrm>
+            <a:off x="0" y="0"/>
+            <a:ext cx="12191695" cy="6858000"/>
+          </a:xfrm>
+          <a:prstGeom prst="rect">
+            <a:avLst/>
+          </a:prstGeom>
+          <a:solidFill>
+            <a:srgbClr val="121820"/>
+          </a:solidFill>
+          <a:ln>
+            <a:noFill/>
+          </a:ln>
+          <a:effectLst/>
+        </p:spPr>
+        <p:style>
+          <a:lnRef idx="1">
+            <a:schemeClr val="accent1"/>
+          </a:lnRef>
+          <a:fillRef idx="3">
+            <a:schemeClr val="accent1"/>
+          </a:fillRef>
+          <a:effectRef idx="2">
+            <a:schemeClr val="accent1"/>
+          </a:effectRef>
+          <a:fontRef idx="minor">
+            <a:schemeClr val="lt1"/>
+          </a:fontRef>
+        </p:style>
+        <p:txBody>
+          <a:bodyPr rtlCol="0" anchor="ctr"/>
+          <a:lstStyle/>
+          <a:p>
+            <a:pPr algn="ctr"/>
+          </a:p>
+        </p:txBody>
+      </p:sp>
+      <p:sp>
+        <p:nvSpPr>
+          <p:cNvPr id="3" name="Eyebrow"/>
+          <p:cNvSpPr txBox="1"/>
+          <p:nvPr/>
+        </p:nvSpPr>
+        <p:spPr>
+          <a:xfrm>
+            <a:off x="640080" y="411480"/>
+            <a:ext cx="10881360" cy="277200"/>
+          </a:xfrm>
+          <a:prstGeom prst="rect">
+            <a:avLst/>
+          </a:prstGeom>
+          <a:noFill/>
+        </p:spPr>
+        <p:txBody>
+          <a:bodyPr wrap="square" anchor="t" lIns="0" rIns="0" tIns="0" bIns="0">
+            <a:spAutoFit/>
+          </a:bodyPr>
+          <a:lstStyle/>
+          <a:p>
+            <a:pPr algn="l">
+              <a:spcBef>
+                <a:spcPts val="0"/>
+              </a:spcBef>
+              <a:spcAft>
+                <a:spcPts val="0"/>
+              </a:spcAft>
+            </a:pPr>
+            <a:r>
+              <a:rPr sz="1250" b="1" i="0">
+                <a:solidFill>
+                  <a:srgbClr val="F5A623"/>
+                </a:solidFill>
+                <a:latin typeface="Calibri"/>
+              </a:rPr>
+              <a:t>PROVEN ON AWS</a:t>
+            </a:r>
+          </a:p>
+        </p:txBody>
+      </p:sp>
+      <p:sp>
+        <p:nvSpPr>
+          <p:cNvPr id="4" name="Title"/>
+          <p:cNvSpPr txBox="1"/>
+          <p:nvPr/>
+        </p:nvSpPr>
+        <p:spPr>
+          <a:xfrm>
+            <a:off x="640080" y="704088"/>
+            <a:ext cx="10881360" cy="512064"/>
+          </a:xfrm>
+          <a:prstGeom prst="rect">
+            <a:avLst/>
+          </a:prstGeom>
+          <a:noFill/>
+        </p:spPr>
+        <p:txBody>
+          <a:bodyPr wrap="square" anchor="t" lIns="0" rIns="0" tIns="0" bIns="0">
+            <a:spAutoFit/>
+          </a:bodyPr>
+          <a:lstStyle/>
+          <a:p>
+            <a:pPr algn="l">
+              <a:lnSpc>
+                <a:spcPct val="102000"/>
+              </a:lnSpc>
+              <a:spcBef>
+                <a:spcPts val="0"/>
+              </a:spcBef>
+              <a:spcAft>
+                <a:spcPts val="0"/>
+              </a:spcAft>
+            </a:pPr>
+            <a:r>
+              <a:rPr sz="3300" b="1" i="0">
+                <a:solidFill>
+                  <a:srgbClr val="F4F6F8"/>
+                </a:solidFill>
+                <a:latin typeface="Cambria"/>
+              </a:rPr>
+              <a:t>Proven on AWS — nine live runs</a:t>
+            </a:r>
+          </a:p>
+        </p:txBody>
+      </p:sp>
+      <p:sp>
+        <p:nvSpPr>
+          <p:cNvPr id="5" name="Subtitle"/>
+          <p:cNvSpPr txBox="1"/>
+          <p:nvPr/>
+        </p:nvSpPr>
+        <p:spPr>
+          <a:xfrm>
+            <a:off x="640080" y="1252728"/>
+            <a:ext cx="10881360" cy="329184"/>
+          </a:xfrm>
+          <a:prstGeom prst="rect">
+            <a:avLst/>
+          </a:prstGeom>
+          <a:noFill/>
+        </p:spPr>
+        <p:txBody>
+          <a:bodyPr wrap="square" anchor="t" lIns="0" rIns="0" tIns="0" bIns="0">
+            <a:spAutoFit/>
+          </a:bodyPr>
+          <a:lstStyle/>
+          <a:p>
+            <a:pPr algn="l">
+              <a:spcBef>
+                <a:spcPts val="0"/>
+              </a:spcBef>
+              <a:spcAft>
+                <a:spcPts val="0"/>
+              </a:spcAft>
+            </a:pPr>
+            <a:r>
+              <a:rPr sz="1200" b="0" i="0">
+                <a:solidFill>
+                  <a:srgbClr val="9FADBC"/>
+                </a:solidFill>
+                <a:latin typeface="Calibri"/>
+              </a:rPr>
+              <a:t>Each control deployed to a live AWS account, exercised with real requests, then torn down (account 864217980669, us-east-1).</a:t>
+            </a:r>
+          </a:p>
+        </p:txBody>
+      </p:sp>
+      <p:sp>
+        <p:nvSpPr>
+          <p:cNvPr id="6" name="LeftCard"/>
+          <p:cNvSpPr/>
+          <p:nvPr/>
+        </p:nvSpPr>
+        <p:spPr>
+          <a:xfrm>
+            <a:off x="640080" y="1691640"/>
+            <a:ext cx="5349240" cy="4023360"/>
+          </a:xfrm>
+          <a:prstGeom prst="roundRect">
+            <a:avLst/>
+          </a:prstGeom>
+          <a:solidFill>
+            <a:srgbClr val="1B242F"/>
+          </a:solidFill>
+          <a:ln w="12700">
+            <a:solidFill>
+              <a:srgbClr val="5CB85C"/>
+            </a:solidFill>
+          </a:ln>
+          <a:effectLst/>
+        </p:spPr>
+        <p:style>
+          <a:lnRef idx="1">
+            <a:schemeClr val="accent1"/>
+          </a:lnRef>
+          <a:fillRef idx="3">
+            <a:schemeClr val="accent1"/>
+          </a:fillRef>
+          <a:effectRef idx="2">
+            <a:schemeClr val="accent1"/>
+          </a:effectRef>
+          <a:fontRef idx="minor">
+            <a:schemeClr val="lt1"/>
+          </a:fontRef>
+        </p:style>
+        <p:txBody>
+          <a:bodyPr rtlCol="0" anchor="ctr"/>
+          <a:lstStyle/>
+          <a:p>
+            <a:pPr algn="ctr"/>
+          </a:p>
+        </p:txBody>
+      </p:sp>
+      <p:sp>
+        <p:nvSpPr>
+          <p:cNvPr id="7" name="LeftText"/>
+          <p:cNvSpPr txBox="1"/>
+          <p:nvPr/>
+        </p:nvSpPr>
+        <p:spPr>
+          <a:xfrm>
+            <a:off x="868680" y="1874520"/>
+            <a:ext cx="4892040" cy="3657600"/>
+          </a:xfrm>
+          <a:prstGeom prst="rect">
+            <a:avLst/>
+          </a:prstGeom>
+          <a:noFill/>
+        </p:spPr>
+        <p:txBody>
+          <a:bodyPr wrap="square" anchor="t" lIns="0" rIns="0" tIns="0" bIns="0"/>
+          <a:lstStyle/>
+          <a:p>
+            <a:pPr algn="l">
+              <a:spcBef>
+                <a:spcPts val="0"/>
+              </a:spcBef>
+              <a:spcAft>
+                <a:spcPts val="900"/>
+              </a:spcAft>
+            </a:pPr>
+            <a:r>
+              <a:rPr sz="1450" b="1" i="0">
+                <a:solidFill>
+                  <a:srgbClr val="5CB85C"/>
+                </a:solidFill>
+                <a:latin typeface="Cambria"/>
+              </a:rPr>
+              <a:t>Runs 1–5</a:t>
+            </a:r>
+          </a:p>
+          <a:p>
+            <a:pPr algn="l">
+              <a:lnSpc>
+                <a:spcPct val="106000"/>
+              </a:lnSpc>
+              <a:spcBef>
+                <a:spcPts val="0"/>
+              </a:spcBef>
+              <a:spcAft>
+                <a:spcPts val="700"/>
+              </a:spcAft>
+            </a:pPr>
+            <a:r>
+              <a:rPr sz="1150" b="1" i="0">
+                <a:solidFill>
+                  <a:srgbClr val="5CB85C"/>
+                </a:solidFill>
+                <a:latin typeface="Calibri"/>
+              </a:rPr>
+              <a:t xml:space="preserve">1  Governance core.  </a:t>
+            </a:r>
+            <a:r>
+              <a:rPr sz="1150" b="0" i="0">
+                <a:solidFill>
+                  <a:srgbClr val="F4F6F8"/>
+                </a:solidFill>
+                <a:latin typeface="Calibri"/>
+              </a:rPr>
+              <a:t>KMS CMK, append-only audit, WORM, Bedrock Guardrail, Cognito, gateway — CREATE_COMPLETE.</a:t>
+            </a:r>
+          </a:p>
+          <a:p>
+            <a:pPr algn="l">
+              <a:lnSpc>
+                <a:spcPct val="106000"/>
+              </a:lnSpc>
+              <a:spcBef>
+                <a:spcPts val="0"/>
+              </a:spcBef>
+              <a:spcAft>
+                <a:spcPts val="700"/>
+              </a:spcAft>
+            </a:pPr>
+            <a:r>
+              <a:rPr sz="1150" b="1" i="0">
+                <a:solidFill>
+                  <a:srgbClr val="5CB85C"/>
+                </a:solidFill>
+                <a:latin typeface="Calibri"/>
+              </a:rPr>
+              <a:t xml:space="preserve">2  Human gate.  </a:t>
+            </a:r>
+            <a:r>
+              <a:rPr sz="1150" b="0" i="0">
+                <a:solidFill>
+                  <a:srgbClr val="F4F6F8"/>
+                </a:solidFill>
+                <a:latin typeface="Calibri"/>
+              </a:rPr>
+              <a:t>Step Functions waitForTaskToken holds the consequential step until approval.</a:t>
+            </a:r>
+          </a:p>
+          <a:p>
+            <a:pPr algn="l">
+              <a:lnSpc>
+                <a:spcPct val="106000"/>
+              </a:lnSpc>
+              <a:spcBef>
+                <a:spcPts val="0"/>
+              </a:spcBef>
+              <a:spcAft>
+                <a:spcPts val="700"/>
+              </a:spcAft>
+            </a:pPr>
+            <a:r>
+              <a:rPr sz="1150" b="1" i="0">
+                <a:solidFill>
+                  <a:srgbClr val="5CB85C"/>
+                </a:solidFill>
+                <a:latin typeface="Calibri"/>
+              </a:rPr>
+              <a:t xml:space="preserve">3  Cedar authorization.  </a:t>
+            </a:r>
+            <a:r>
+              <a:rPr sz="1150" b="0" i="0">
+                <a:solidFill>
+                  <a:srgbClr val="F4F6F8"/>
+                </a:solidFill>
+                <a:latin typeface="Calibri"/>
+              </a:rPr>
+              <a:t>Verified Permissions + real Bedrock (Haiku 4.5) — ALLOW + 2 DENY.</a:t>
+            </a:r>
+          </a:p>
+          <a:p>
+            <a:pPr algn="l">
+              <a:lnSpc>
+                <a:spcPct val="106000"/>
+              </a:lnSpc>
+              <a:spcBef>
+                <a:spcPts val="0"/>
+              </a:spcBef>
+              <a:spcAft>
+                <a:spcPts val="700"/>
+              </a:spcAft>
+            </a:pPr>
+            <a:r>
+              <a:rPr sz="1150" b="1" i="0">
+                <a:solidFill>
+                  <a:srgbClr val="5CB85C"/>
+                </a:solidFill>
+                <a:latin typeface="Calibri"/>
+              </a:rPr>
+              <a:t xml:space="preserve">4  Hardened Cognito MFA.  </a:t>
+            </a:r>
+            <a:r>
+              <a:rPr sz="1150" b="0" i="0">
+                <a:solidFill>
+                  <a:srgbClr val="F4F6F8"/>
+                </a:solidFill>
+                <a:latin typeface="Calibri"/>
+              </a:rPr>
+              <a:t>Cryptographic JWT verification — tampered / wrong-audience tokens rejected.</a:t>
+            </a:r>
+          </a:p>
+          <a:p>
+            <a:pPr algn="l">
+              <a:lnSpc>
+                <a:spcPct val="106000"/>
+              </a:lnSpc>
+              <a:spcBef>
+                <a:spcPts val="0"/>
+              </a:spcBef>
+              <a:spcAft>
+                <a:spcPts val="0"/>
+              </a:spcAft>
+            </a:pPr>
+            <a:r>
+              <a:rPr sz="1150" b="1" i="0">
+                <a:solidFill>
+                  <a:srgbClr val="5CB85C"/>
+                </a:solidFill>
+                <a:latin typeface="Calibri"/>
+              </a:rPr>
+              <a:t xml:space="preserve">5  Approval reviewer service.  </a:t>
+            </a:r>
+            <a:r>
+              <a:rPr sz="1150" b="0" i="0">
+                <a:solidFill>
+                  <a:srgbClr val="F4F6F8"/>
+                </a:solidFill>
+                <a:latin typeface="Calibri"/>
+              </a:rPr>
+              <a:t>Wrong role, self-approval, and replay all rejected.</a:t>
+            </a:r>
+          </a:p>
+        </p:txBody>
+      </p:sp>
+      <p:sp>
+        <p:nvSpPr>
+          <p:cNvPr id="8" name="RightCard"/>
+          <p:cNvSpPr/>
+          <p:nvPr/>
+        </p:nvSpPr>
+        <p:spPr>
+          <a:xfrm>
+            <a:off x="6126480" y="1691640"/>
+            <a:ext cx="5394960" cy="4023360"/>
+          </a:xfrm>
+          <a:prstGeom prst="roundRect">
+            <a:avLst/>
+          </a:prstGeom>
+          <a:solidFill>
+            <a:srgbClr val="1B242F"/>
+          </a:solidFill>
+          <a:ln w="12700">
+            <a:solidFill>
+              <a:srgbClr val="F5A623"/>
+            </a:solidFill>
+          </a:ln>
+          <a:effectLst/>
+        </p:spPr>
+        <p:style>
+          <a:lnRef idx="1">
+            <a:schemeClr val="accent1"/>
+          </a:lnRef>
+          <a:fillRef idx="3">
+            <a:schemeClr val="accent1"/>
+          </a:fillRef>
+          <a:effectRef idx="2">
+            <a:schemeClr val="accent1"/>
+          </a:effectRef>
+          <a:fontRef idx="minor">
+            <a:schemeClr val="lt1"/>
+          </a:fontRef>
+        </p:style>
+        <p:txBody>
+          <a:bodyPr rtlCol="0" anchor="ctr"/>
+          <a:lstStyle/>
+          <a:p>
+            <a:pPr algn="ctr"/>
+          </a:p>
+        </p:txBody>
+      </p:sp>
+      <p:sp>
+        <p:nvSpPr>
+          <p:cNvPr id="9" name="RightText"/>
+          <p:cNvSpPr txBox="1"/>
+          <p:nvPr/>
+        </p:nvSpPr>
+        <p:spPr>
+          <a:xfrm>
+            <a:off x="6355080" y="1874520"/>
+            <a:ext cx="4937760" cy="3657600"/>
+          </a:xfrm>
+          <a:prstGeom prst="rect">
+            <a:avLst/>
+          </a:prstGeom>
+          <a:noFill/>
+        </p:spPr>
+        <p:txBody>
+          <a:bodyPr wrap="square" anchor="t" lIns="0" rIns="0" tIns="0" bIns="0"/>
+          <a:lstStyle/>
+          <a:p>
+            <a:pPr algn="l">
+              <a:spcBef>
+                <a:spcPts val="0"/>
+              </a:spcBef>
+              <a:spcAft>
+                <a:spcPts val="900"/>
+              </a:spcAft>
+            </a:pPr>
+            <a:r>
+              <a:rPr sz="1450" b="1" i="0">
+                <a:solidFill>
+                  <a:srgbClr val="F5A623"/>
+                </a:solidFill>
+                <a:latin typeface="Cambria"/>
+              </a:rPr>
+              <a:t>Runs 6–9</a:t>
+            </a:r>
+          </a:p>
+          <a:p>
+            <a:pPr algn="l">
+              <a:lnSpc>
+                <a:spcPct val="106000"/>
+              </a:lnSpc>
+              <a:spcBef>
+                <a:spcPts val="0"/>
+              </a:spcBef>
+              <a:spcAft>
+                <a:spcPts val="700"/>
+              </a:spcAft>
+            </a:pPr>
+            <a:r>
+              <a:rPr sz="1150" b="1" i="0">
+                <a:solidFill>
+                  <a:srgbClr val="F5A623"/>
+                </a:solidFill>
+                <a:latin typeface="Calibri"/>
+              </a:rPr>
+              <a:t xml:space="preserve">6  Immutable evidence.  </a:t>
+            </a:r>
+            <a:r>
+              <a:rPr sz="1150" b="0" i="0">
+                <a:solidFill>
+                  <a:srgbClr val="F4F6F8"/>
+                </a:solidFill>
+                <a:latin typeface="Calibri"/>
+              </a:rPr>
+              <a:t>S3 Object Lock retention — locked-object delete denied.</a:t>
+            </a:r>
+          </a:p>
+          <a:p>
+            <a:pPr algn="l">
+              <a:lnSpc>
+                <a:spcPct val="106000"/>
+              </a:lnSpc>
+              <a:spcBef>
+                <a:spcPts val="0"/>
+              </a:spcBef>
+              <a:spcAft>
+                <a:spcPts val="700"/>
+              </a:spcAft>
+            </a:pPr>
+            <a:r>
+              <a:rPr sz="1150" b="1" i="0">
+                <a:solidFill>
+                  <a:srgbClr val="F5A623"/>
+                </a:solidFill>
+                <a:latin typeface="Calibri"/>
+              </a:rPr>
+              <a:t xml:space="preserve">7  Reviewer front door.  </a:t>
+            </a:r>
+            <a:r>
+              <a:rPr sz="1150" b="0" i="0">
+                <a:solidFill>
+                  <a:srgbClr val="F4F6F8"/>
+                </a:solidFill>
+                <a:latin typeface="Calibri"/>
+              </a:rPr>
+              <a:t>API Gateway + Cognito JWT authorizer — 401 unauth; authorized approve → SUCCEEDED.</a:t>
+            </a:r>
+          </a:p>
+          <a:p>
+            <a:pPr algn="l">
+              <a:lnSpc>
+                <a:spcPct val="106000"/>
+              </a:lnSpc>
+              <a:spcBef>
+                <a:spcPts val="0"/>
+              </a:spcBef>
+              <a:spcAft>
+                <a:spcPts val="700"/>
+              </a:spcAft>
+            </a:pPr>
+            <a:r>
+              <a:rPr sz="1150" b="1" i="0">
+                <a:solidFill>
+                  <a:srgbClr val="F5A623"/>
+                </a:solidFill>
+                <a:latin typeface="Calibri"/>
+              </a:rPr>
+              <a:t xml:space="preserve">8  Production components.  </a:t>
+            </a:r>
+            <a:r>
+              <a:rPr sz="1150" b="0" i="0">
+                <a:solidFill>
+                  <a:srgbClr val="F4F6F8"/>
+                </a:solidFill>
+                <a:latin typeface="Calibri"/>
+              </a:rPr>
+              <a:t>KMS-signed manifests + atomic token budgets (no oversell).</a:t>
+            </a:r>
+          </a:p>
+          <a:p>
+            <a:pPr algn="l">
+              <a:lnSpc>
+                <a:spcPct val="106000"/>
+              </a:lnSpc>
+              <a:spcBef>
+                <a:spcPts val="0"/>
+              </a:spcBef>
+              <a:spcAft>
+                <a:spcPts val="0"/>
+              </a:spcAft>
+            </a:pPr>
+            <a:r>
+              <a:rPr sz="1150" b="1" i="0">
+                <a:solidFill>
+                  <a:srgbClr val="F5A623"/>
+                </a:solidFill>
+                <a:latin typeface="Calibri"/>
+              </a:rPr>
+              <a:t xml:space="preserve">9  Governed connector.  </a:t>
+            </a:r>
+            <a:r>
+              <a:rPr sz="1150" b="0" i="0">
+                <a:solidFill>
+                  <a:srgbClr val="F4F6F8"/>
+                </a:solidFill>
+                <a:latin typeface="Calibri"/>
+              </a:rPr>
+              <a:t>Idempotency + saga rollback (auto-compensation).</a:t>
+            </a:r>
+          </a:p>
+        </p:txBody>
+      </p:sp>
+      <p:sp>
+        <p:nvSpPr>
+          <p:cNvPr id="10" name="Caption"/>
+          <p:cNvSpPr txBox="1"/>
+          <p:nvPr/>
+        </p:nvSpPr>
+        <p:spPr>
+          <a:xfrm>
+            <a:off x="640080" y="5836920"/>
+            <a:ext cx="9783960" cy="548640"/>
+          </a:xfrm>
+          <a:prstGeom prst="rect">
+            <a:avLst/>
+          </a:prstGeom>
+          <a:noFill/>
+        </p:spPr>
+        <p:txBody>
+          <a:bodyPr wrap="square" anchor="t" lIns="0" rIns="0" tIns="0" bIns="0"/>
+          <a:lstStyle/>
+          <a:p>
+            <a:pPr algn="l">
+              <a:lnSpc>
+                <a:spcPct val="108000"/>
+              </a:lnSpc>
+              <a:spcBef>
+                <a:spcPts val="0"/>
+              </a:spcBef>
+              <a:spcAft>
+                <a:spcPts val="0"/>
+              </a:spcAft>
+            </a:pPr>
+            <a:r>
+              <a:rPr sz="1000" b="0" i="0">
+                <a:solidFill>
+                  <a:srgbClr val="738292"/>
+                </a:solidFill>
+                <a:latin typeface="Calibri"/>
+              </a:rPr>
+              <a:t>Reproducible from infra/ (CloudFormation) and infra/terraform/. This is a live-validated reference platform, not yet an ATO’d product. Evidence: DEPLOYED-AND-VALIDATED.md.</a:t>
+            </a:r>
+          </a:p>
+        </p:txBody>
+      </p:sp>
+      <p:sp>
+        <p:nvSpPr>
+          <p:cNvPr id="11" name="PageNum"/>
+          <p:cNvSpPr txBox="1"/>
+          <p:nvPr/>
+        </p:nvSpPr>
+        <p:spPr>
+          <a:xfrm>
+            <a:off x="10607040" y="6455664"/>
+            <a:ext cx="1371600" cy="274320"/>
+          </a:xfrm>
+          <a:prstGeom prst="rect">
+            <a:avLst/>
+          </a:prstGeom>
+          <a:noFill/>
+        </p:spPr>
+        <p:txBody>
+          <a:bodyPr wrap="square" anchor="t" lIns="0" rIns="0" tIns="0" bIns="0">
+            <a:spAutoFit/>
+          </a:bodyPr>
+          <a:lstStyle/>
+          <a:p>
+            <a:pPr algn="r">
+              <a:spcBef>
+                <a:spcPts val="0"/>
+              </a:spcBef>
+              <a:spcAft>
+                <a:spcPts val="0"/>
+              </a:spcAft>
+            </a:pPr>
+            <a:r>
+              <a:rPr sz="900" b="0" i="0">
+                <a:solidFill>
+                  <a:srgbClr val="738292"/>
+                </a:solidFill>
+                <a:latin typeface="Calibri"/>
+              </a:rPr>
+              <a:t>Aegis  ·  16</a:t>
             </a:r>
           </a:p>
         </p:txBody>
@@ -22457,7 +23185,7 @@
                 </a:solidFill>
                 <a:latin typeface="Calibri"/>
               </a:rPr>
-              <a:t>✕  </a:t>
+              <a:t xml:space="preserve">✕  </a:t>
             </a:r>
             <a:r>
               <a:rPr sz="1450" b="0" i="0">
@@ -22488,7 +23216,7 @@
                 </a:solidFill>
                 <a:latin typeface="Calibri"/>
               </a:rPr>
-              <a:t>✕  </a:t>
+              <a:t xml:space="preserve">✕  </a:t>
             </a:r>
             <a:r>
               <a:rPr sz="1450" b="0" i="0">
@@ -22519,7 +23247,7 @@
                 </a:solidFill>
                 <a:latin typeface="Calibri"/>
               </a:rPr>
-              <a:t>✕  </a:t>
+              <a:t xml:space="preserve">✕  </a:t>
             </a:r>
             <a:r>
               <a:rPr sz="1450" b="0" i="0">
@@ -22550,7 +23278,7 @@
                 </a:solidFill>
                 <a:latin typeface="Calibri"/>
               </a:rPr>
-              <a:t>✕  </a:t>
+              <a:t xml:space="preserve">✕  </a:t>
             </a:r>
             <a:r>
               <a:rPr sz="1450" b="0" i="0">
@@ -22669,7 +23397,7 @@
                 </a:solidFill>
                 <a:latin typeface="Calibri"/>
               </a:rPr>
-              <a:t>✓  </a:t>
+              <a:t xml:space="preserve">✓  </a:t>
             </a:r>
             <a:r>
               <a:rPr sz="1450" b="0" i="0">
@@ -22700,7 +23428,7 @@
                 </a:solidFill>
                 <a:latin typeface="Calibri"/>
               </a:rPr>
-              <a:t>✓  </a:t>
+              <a:t xml:space="preserve">✓  </a:t>
             </a:r>
             <a:r>
               <a:rPr sz="1450" b="0" i="0">
@@ -22731,7 +23459,7 @@
                 </a:solidFill>
                 <a:latin typeface="Calibri"/>
               </a:rPr>
-              <a:t>✓  </a:t>
+              <a:t xml:space="preserve">✓  </a:t>
             </a:r>
             <a:r>
               <a:rPr sz="1450" b="0" i="0">
@@ -22762,7 +23490,7 @@
                 </a:solidFill>
                 <a:latin typeface="Calibri"/>
               </a:rPr>
-              <a:t>✓  </a:t>
+              <a:t xml:space="preserve">✓  </a:t>
             </a:r>
             <a:r>
               <a:rPr sz="1450" b="0" i="0">
@@ -25064,7 +25792,7 @@
                 </a:solidFill>
                 <a:latin typeface="Calibri"/>
               </a:rPr>
-              <a:t>Edge:  </a:t>
+              <a:t xml:space="preserve">Edge:  </a:t>
             </a:r>
             <a:r>
               <a:rPr sz="1150" b="0" i="0">
@@ -25112,7 +25840,7 @@
                 </a:solidFill>
                 <a:latin typeface="Calibri"/>
               </a:rPr>
-              <a:t>Identity:  </a:t>
+              <a:t xml:space="preserve">Identity:  </a:t>
             </a:r>
             <a:r>
               <a:rPr sz="1150" b="0" i="0">
@@ -25160,7 +25888,7 @@
                 </a:solidFill>
                 <a:latin typeface="Calibri"/>
               </a:rPr>
-              <a:t>Control plane:  </a:t>
+              <a:t xml:space="preserve">Control plane:  </a:t>
             </a:r>
             <a:r>
               <a:rPr sz="1150" b="0" i="0">
@@ -25208,7 +25936,7 @@
                 </a:solidFill>
                 <a:latin typeface="Calibri"/>
               </a:rPr>
-              <a:t>Model gateway:  </a:t>
+              <a:t xml:space="preserve">Model gateway:  </a:t>
             </a:r>
             <a:r>
               <a:rPr sz="1150" b="0" i="0">
@@ -25256,7 +25984,7 @@
                 </a:solidFill>
                 <a:latin typeface="Calibri"/>
               </a:rPr>
-              <a:t>Data / evidence:  </a:t>
+              <a:t xml:space="preserve">Data / evidence:  </a:t>
             </a:r>
             <a:r>
               <a:rPr sz="1150" b="0" i="0">
@@ -25304,7 +26032,7 @@
                 </a:solidFill>
                 <a:latin typeface="Calibri"/>
               </a:rPr>
-              <a:t>FinOps / obs:  </a:t>
+              <a:t xml:space="preserve">FinOps / obs:  </a:t>
             </a:r>
             <a:r>
               <a:rPr sz="1150" b="0" i="0">
@@ -25391,7 +26119,7 @@
                 </a:solidFill>
                 <a:latin typeface="Calibri"/>
               </a:rPr>
-              <a:t>Multi-account landing zone (Control Tower):  </a:t>
+              <a:t xml:space="preserve">Multi-account landing zone (Control Tower):  </a:t>
             </a:r>
             <a:r>
               <a:rPr sz="1150" b="0" i="0">

--- a/Aegis-Master-Deck.pptx
+++ b/Aegis-Master-Deck.pptx
@@ -5132,7 +5132,7 @@
           <a:noFill/>
           <a:ln w="31750">
             <a:solidFill>
-              <a:srgbClr val="F5A623"/>
+              <a:srgbClr val="FF9900"/>
             </a:solidFill>
           </a:ln>
           <a:effectLst/>
@@ -5218,7 +5218,7 @@
             <a:avLst/>
           </a:prstGeom>
           <a:solidFill>
-            <a:srgbClr val="F5A623"/>
+            <a:srgbClr val="FF9900"/>
           </a:solidFill>
           <a:ln>
             <a:noFill/>
@@ -5353,7 +5353,7 @@
             <a:r>
               <a:rPr sz="2200" b="0" i="1">
                 <a:solidFill>
-                  <a:srgbClr val="F5A623"/>
+                  <a:srgbClr val="FF9900"/>
                 </a:solidFill>
                 <a:latin typeface="Cambria"/>
               </a:rPr>
@@ -5589,7 +5589,7 @@
             <a:r>
               <a:rPr sz="3300" b="1" i="0">
                 <a:solidFill>
-                  <a:srgbClr val="1B242F"/>
+                  <a:srgbClr val="232F3E"/>
                 </a:solidFill>
                 <a:latin typeface="Cambria"/>
               </a:rPr>
@@ -5719,7 +5719,7 @@
             <a:r>
               <a:rPr sz="1250" b="1" i="0">
                 <a:solidFill>
-                  <a:srgbClr val="1B242F"/>
+                  <a:srgbClr val="232F3E"/>
                 </a:solidFill>
                 <a:latin typeface="Calibri"/>
               </a:rPr>
@@ -5849,7 +5849,7 @@
             <a:r>
               <a:rPr sz="1250" b="1" i="0">
                 <a:solidFill>
-                  <a:srgbClr val="1B242F"/>
+                  <a:srgbClr val="232F3E"/>
                 </a:solidFill>
                 <a:latin typeface="Calibri"/>
               </a:rPr>
@@ -5873,7 +5873,7 @@
             <a:avLst/>
           </a:prstGeom>
           <a:solidFill>
-            <a:srgbClr val="1B242F"/>
+            <a:srgbClr val="232F3E"/>
           </a:solidFill>
           <a:ln>
             <a:noFill/>
@@ -5950,7 +5950,7 @@
             <a:r>
               <a:rPr sz="1250" b="1" i="0">
                 <a:solidFill>
-                  <a:srgbClr val="F5A623"/>
+                  <a:srgbClr val="FF9900"/>
                 </a:solidFill>
                 <a:latin typeface="Calibri"/>
               </a:rPr>
@@ -5968,7 +5968,7 @@
             <a:r>
               <a:rPr sz="1250" b="1" i="0">
                 <a:solidFill>
-                  <a:srgbClr val="F5A623"/>
+                  <a:srgbClr val="FF9900"/>
                 </a:solidFill>
                 <a:latin typeface="Calibri"/>
               </a:rPr>
@@ -6022,7 +6022,7 @@
             <a:r>
               <a:rPr sz="1250" b="1" i="0">
                 <a:solidFill>
-                  <a:srgbClr val="F5A623"/>
+                  <a:srgbClr val="FF9900"/>
                 </a:solidFill>
                 <a:latin typeface="Calibri"/>
               </a:rPr>
@@ -6213,7 +6213,7 @@
             <a:r>
               <a:rPr sz="1250" b="1" i="0">
                 <a:solidFill>
-                  <a:srgbClr val="F5A623"/>
+                  <a:srgbClr val="FF9900"/>
                 </a:solidFill>
                 <a:latin typeface="Calibri"/>
               </a:rPr>
@@ -6410,7 +6410,7 @@
             <a:r>
               <a:rPr sz="1150" b="0" i="0">
                 <a:solidFill>
-                  <a:srgbClr val="F5A623"/>
+                  <a:srgbClr val="FF9900"/>
                 </a:solidFill>
                 <a:latin typeface="Consolas"/>
               </a:rPr>
@@ -6471,7 +6471,7 @@
             <a:r>
               <a:rPr sz="1300" b="1" i="0">
                 <a:solidFill>
-                  <a:srgbClr val="F5A623"/>
+                  <a:srgbClr val="FF9900"/>
                 </a:solidFill>
                 <a:latin typeface="Cambria"/>
               </a:rPr>
@@ -6607,11 +6607,11 @@
             <a:avLst/>
           </a:prstGeom>
           <a:solidFill>
-            <a:srgbClr val="1B242F"/>
+            <a:srgbClr val="232F3E"/>
           </a:solidFill>
           <a:ln w="12700">
             <a:solidFill>
-              <a:srgbClr val="F5A623"/>
+              <a:srgbClr val="FF9900"/>
             </a:solidFill>
           </a:ln>
           <a:effectLst/>
@@ -6671,7 +6671,7 @@
             <a:r>
               <a:rPr sz="1500" b="1" i="0">
                 <a:solidFill>
-                  <a:srgbClr val="F5A623"/>
+                  <a:srgbClr val="FF9900"/>
                 </a:solidFill>
                 <a:latin typeface="Cambria"/>
               </a:rPr>
@@ -6693,7 +6693,7 @@
             <a:r>
               <a:rPr sz="1250" b="1" i="0">
                 <a:solidFill>
-                  <a:srgbClr val="F5A623"/>
+                  <a:srgbClr val="FF9900"/>
                 </a:solidFill>
                 <a:latin typeface="Calibri"/>
               </a:rPr>
@@ -6724,7 +6724,7 @@
             <a:r>
               <a:rPr sz="1250" b="1" i="0">
                 <a:solidFill>
-                  <a:srgbClr val="F5A623"/>
+                  <a:srgbClr val="FF9900"/>
                 </a:solidFill>
                 <a:latin typeface="Calibri"/>
               </a:rPr>
@@ -6755,7 +6755,7 @@
             <a:r>
               <a:rPr sz="1250" b="1" i="0">
                 <a:solidFill>
-                  <a:srgbClr val="F5A623"/>
+                  <a:srgbClr val="FF9900"/>
                 </a:solidFill>
                 <a:latin typeface="Calibri"/>
               </a:rPr>
@@ -6786,7 +6786,7 @@
             <a:r>
               <a:rPr sz="1250" b="1" i="0">
                 <a:solidFill>
-                  <a:srgbClr val="F5A623"/>
+                  <a:srgbClr val="FF9900"/>
                 </a:solidFill>
                 <a:latin typeface="Calibri"/>
               </a:rPr>
@@ -6817,7 +6817,7 @@
             <a:r>
               <a:rPr sz="1250" b="1" i="0">
                 <a:solidFill>
-                  <a:srgbClr val="F5A623"/>
+                  <a:srgbClr val="FF9900"/>
                 </a:solidFill>
                 <a:latin typeface="Calibri"/>
               </a:rPr>
@@ -6848,7 +6848,7 @@
             <a:r>
               <a:rPr sz="1250" b="1" i="0">
                 <a:solidFill>
-                  <a:srgbClr val="F5A623"/>
+                  <a:srgbClr val="FF9900"/>
                 </a:solidFill>
                 <a:latin typeface="Calibri"/>
               </a:rPr>
@@ -6879,7 +6879,7 @@
             <a:r>
               <a:rPr sz="1250" b="1" i="0">
                 <a:solidFill>
-                  <a:srgbClr val="F5A623"/>
+                  <a:srgbClr val="FF9900"/>
                 </a:solidFill>
                 <a:latin typeface="Calibri"/>
               </a:rPr>
@@ -6910,7 +6910,7 @@
             <a:r>
               <a:rPr sz="1250" b="1" i="0">
                 <a:solidFill>
-                  <a:srgbClr val="F5A623"/>
+                  <a:srgbClr val="FF9900"/>
                 </a:solidFill>
                 <a:latin typeface="Calibri"/>
               </a:rPr>
@@ -6941,7 +6941,7 @@
             <a:r>
               <a:rPr sz="1250" b="1" i="0">
                 <a:solidFill>
-                  <a:srgbClr val="F5A623"/>
+                  <a:srgbClr val="FF9900"/>
                 </a:solidFill>
                 <a:latin typeface="Calibri"/>
               </a:rPr>
@@ -7138,7 +7138,7 @@
             <a:r>
               <a:rPr sz="1250" b="1" i="0">
                 <a:solidFill>
-                  <a:srgbClr val="F5A623"/>
+                  <a:srgbClr val="FF9900"/>
                 </a:solidFill>
                 <a:latin typeface="Calibri"/>
               </a:rPr>
@@ -7207,7 +7207,7 @@
             <a:avLst/>
           </a:prstGeom>
           <a:solidFill>
-            <a:srgbClr val="1B242F"/>
+            <a:srgbClr val="232F3E"/>
           </a:solidFill>
           <a:ln>
             <a:noFill/>
@@ -7251,7 +7251,7 @@
             <a:avLst/>
           </a:prstGeom>
           <a:solidFill>
-            <a:srgbClr val="F5A623"/>
+            <a:srgbClr val="FF9900"/>
           </a:solidFill>
           <a:ln>
             <a:noFill/>
@@ -7325,7 +7325,7 @@
             <a:r>
               <a:rPr sz="1600" b="1" i="0">
                 <a:solidFill>
-                  <a:srgbClr val="F5A623"/>
+                  <a:srgbClr val="FF9900"/>
                 </a:solidFill>
                 <a:latin typeface="Cambria"/>
               </a:rPr>
@@ -7390,7 +7390,7 @@
             <a:avLst/>
           </a:prstGeom>
           <a:solidFill>
-            <a:srgbClr val="F5A623"/>
+            <a:srgbClr val="FF9900"/>
           </a:solidFill>
           <a:ln>
             <a:noFill/>
@@ -7434,7 +7434,7 @@
             <a:avLst/>
           </a:prstGeom>
           <a:solidFill>
-            <a:srgbClr val="1B242F"/>
+            <a:srgbClr val="232F3E"/>
           </a:solidFill>
           <a:ln>
             <a:noFill/>
@@ -7617,7 +7617,7 @@
             <a:avLst/>
           </a:prstGeom>
           <a:solidFill>
-            <a:srgbClr val="F5A623"/>
+            <a:srgbClr val="FF9900"/>
           </a:solidFill>
           <a:ln>
             <a:noFill/>
@@ -7661,7 +7661,7 @@
             <a:avLst/>
           </a:prstGeom>
           <a:solidFill>
-            <a:srgbClr val="1B242F"/>
+            <a:srgbClr val="232F3E"/>
           </a:solidFill>
           <a:ln>
             <a:noFill/>
@@ -7865,7 +7865,7 @@
             <a:r>
               <a:rPr sz="1350" b="0" i="1">
                 <a:solidFill>
-                  <a:srgbClr val="F5A623"/>
+                  <a:srgbClr val="FF9900"/>
                 </a:solidFill>
                 <a:latin typeface="Calibri"/>
               </a:rPr>
@@ -8011,7 +8011,7 @@
             <a:r>
               <a:rPr sz="1250" b="1" i="0">
                 <a:solidFill>
-                  <a:srgbClr val="F5A623"/>
+                  <a:srgbClr val="FF9900"/>
                 </a:solidFill>
                 <a:latin typeface="Calibri"/>
               </a:rPr>
@@ -8125,7 +8125,7 @@
             <a:avLst/>
           </a:prstGeom>
           <a:solidFill>
-            <a:srgbClr val="1B242F"/>
+            <a:srgbClr val="232F3E"/>
           </a:solidFill>
           <a:ln>
             <a:noFill/>
@@ -8214,7 +8214,7 @@
             <a:avLst/>
           </a:prstGeom>
           <a:solidFill>
-            <a:srgbClr val="1B242F"/>
+            <a:srgbClr val="232F3E"/>
           </a:solidFill>
           <a:ln>
             <a:noFill/>
@@ -8394,7 +8394,7 @@
             <a:avLst/>
           </a:prstGeom>
           <a:solidFill>
-            <a:srgbClr val="1B242F"/>
+            <a:srgbClr val="232F3E"/>
           </a:solidFill>
           <a:ln>
             <a:noFill/>
@@ -8483,7 +8483,7 @@
             <a:avLst/>
           </a:prstGeom>
           <a:solidFill>
-            <a:srgbClr val="1B242F"/>
+            <a:srgbClr val="232F3E"/>
           </a:solidFill>
           <a:ln>
             <a:noFill/>
@@ -8548,7 +8548,7 @@
             <a:r>
               <a:rPr sz="1050" b="1" i="0">
                 <a:solidFill>
-                  <a:srgbClr val="F5A623"/>
+                  <a:srgbClr val="FF9900"/>
                 </a:solidFill>
                 <a:latin typeface="Calibri"/>
               </a:rPr>
@@ -8663,7 +8663,7 @@
             <a:avLst/>
           </a:prstGeom>
           <a:solidFill>
-            <a:srgbClr val="1B242F"/>
+            <a:srgbClr val="232F3E"/>
           </a:solidFill>
           <a:ln>
             <a:noFill/>
@@ -8752,7 +8752,7 @@
             <a:avLst/>
           </a:prstGeom>
           <a:solidFill>
-            <a:srgbClr val="1B242F"/>
+            <a:srgbClr val="232F3E"/>
           </a:solidFill>
           <a:ln>
             <a:noFill/>
@@ -8841,7 +8841,7 @@
             <a:avLst/>
           </a:prstGeom>
           <a:solidFill>
-            <a:srgbClr val="1B242F"/>
+            <a:srgbClr val="232F3E"/>
           </a:solidFill>
           <a:ln>
             <a:noFill/>
@@ -9561,7 +9561,7 @@
             <a:r>
               <a:rPr sz="2900" b="1" i="0">
                 <a:solidFill>
-                  <a:srgbClr val="1B242F"/>
+                  <a:srgbClr val="232F3E"/>
                 </a:solidFill>
                 <a:latin typeface="Cambria"/>
               </a:rPr>
@@ -9678,7 +9678,7 @@
             <a:r>
               <a:rPr sz="1150" b="0" i="0">
                 <a:solidFill>
-                  <a:srgbClr val="1B242F"/>
+                  <a:srgbClr val="232F3E"/>
                 </a:solidFill>
                 <a:latin typeface="Calibri"/>
               </a:rPr>
@@ -9709,7 +9709,7 @@
             <a:r>
               <a:rPr sz="1150" b="0" i="0">
                 <a:solidFill>
-                  <a:srgbClr val="1B242F"/>
+                  <a:srgbClr val="232F3E"/>
                 </a:solidFill>
                 <a:latin typeface="Calibri"/>
               </a:rPr>
@@ -9740,7 +9740,7 @@
             <a:r>
               <a:rPr sz="1150" b="0" i="0">
                 <a:solidFill>
-                  <a:srgbClr val="1B242F"/>
+                  <a:srgbClr val="232F3E"/>
                 </a:solidFill>
                 <a:latin typeface="Calibri"/>
               </a:rPr>
@@ -9771,7 +9771,7 @@
             <a:r>
               <a:rPr sz="1150" b="0" i="0">
                 <a:solidFill>
-                  <a:srgbClr val="1B242F"/>
+                  <a:srgbClr val="232F3E"/>
                 </a:solidFill>
                 <a:latin typeface="Calibri"/>
               </a:rPr>
@@ -9802,7 +9802,7 @@
             <a:r>
               <a:rPr sz="1150" b="0" i="0">
                 <a:solidFill>
-                  <a:srgbClr val="1B242F"/>
+                  <a:srgbClr val="232F3E"/>
                 </a:solidFill>
                 <a:latin typeface="Calibri"/>
               </a:rPr>
@@ -9833,7 +9833,7 @@
             <a:r>
               <a:rPr sz="1150" b="0" i="0">
                 <a:solidFill>
-                  <a:srgbClr val="1B242F"/>
+                  <a:srgbClr val="232F3E"/>
                 </a:solidFill>
                 <a:latin typeface="Calibri"/>
               </a:rPr>
@@ -9864,7 +9864,7 @@
             <a:r>
               <a:rPr sz="1150" b="0" i="0">
                 <a:solidFill>
-                  <a:srgbClr val="1B242F"/>
+                  <a:srgbClr val="232F3E"/>
                 </a:solidFill>
                 <a:latin typeface="Calibri"/>
               </a:rPr>
@@ -9895,7 +9895,7 @@
             <a:r>
               <a:rPr sz="1150" b="0" i="0">
                 <a:solidFill>
-                  <a:srgbClr val="1B242F"/>
+                  <a:srgbClr val="232F3E"/>
                 </a:solidFill>
                 <a:latin typeface="Calibri"/>
               </a:rPr>
@@ -9919,7 +9919,7 @@
             <a:avLst/>
           </a:prstGeom>
           <a:solidFill>
-            <a:srgbClr val="1B242F"/>
+            <a:srgbClr val="232F3E"/>
           </a:solidFill>
           <a:ln>
             <a:noFill/>
@@ -9981,7 +9981,7 @@
             <a:r>
               <a:rPr sz="1500" b="1" i="0">
                 <a:solidFill>
-                  <a:srgbClr val="F5A623"/>
+                  <a:srgbClr val="FF9900"/>
                 </a:solidFill>
                 <a:latin typeface="Cambria"/>
               </a:rPr>
@@ -10003,7 +10003,7 @@
             <a:r>
               <a:rPr sz="1150" b="1" i="0">
                 <a:solidFill>
-                  <a:srgbClr val="F5A623"/>
+                  <a:srgbClr val="FF9900"/>
                 </a:solidFill>
                 <a:latin typeface="Calibri"/>
               </a:rPr>
@@ -10034,7 +10034,7 @@
             <a:r>
               <a:rPr sz="1150" b="1" i="0">
                 <a:solidFill>
-                  <a:srgbClr val="F5A623"/>
+                  <a:srgbClr val="FF9900"/>
                 </a:solidFill>
                 <a:latin typeface="Calibri"/>
               </a:rPr>
@@ -10065,7 +10065,7 @@
             <a:r>
               <a:rPr sz="1150" b="1" i="0">
                 <a:solidFill>
-                  <a:srgbClr val="F5A623"/>
+                  <a:srgbClr val="FF9900"/>
                 </a:solidFill>
                 <a:latin typeface="Calibri"/>
               </a:rPr>
@@ -10096,7 +10096,7 @@
             <a:r>
               <a:rPr sz="1150" b="1" i="0">
                 <a:solidFill>
-                  <a:srgbClr val="F5A623"/>
+                  <a:srgbClr val="FF9900"/>
                 </a:solidFill>
                 <a:latin typeface="Calibri"/>
               </a:rPr>
@@ -10127,7 +10127,7 @@
             <a:r>
               <a:rPr sz="1150" b="1" i="0">
                 <a:solidFill>
-                  <a:srgbClr val="F5A623"/>
+                  <a:srgbClr val="FF9900"/>
                 </a:solidFill>
                 <a:latin typeface="Calibri"/>
               </a:rPr>
@@ -10158,7 +10158,7 @@
             <a:r>
               <a:rPr sz="1150" b="1" i="0">
                 <a:solidFill>
-                  <a:srgbClr val="F5A623"/>
+                  <a:srgbClr val="FF9900"/>
                 </a:solidFill>
                 <a:latin typeface="Calibri"/>
               </a:rPr>
@@ -10189,7 +10189,7 @@
             <a:r>
               <a:rPr sz="1150" b="1" i="0">
                 <a:solidFill>
-                  <a:srgbClr val="F5A623"/>
+                  <a:srgbClr val="FF9900"/>
                 </a:solidFill>
                 <a:latin typeface="Calibri"/>
               </a:rPr>
@@ -10344,7 +10344,7 @@
             <a:r>
               <a:rPr sz="1250" b="1" i="0">
                 <a:solidFill>
-                  <a:srgbClr val="F5A623"/>
+                  <a:srgbClr val="FF9900"/>
                 </a:solidFill>
                 <a:latin typeface="Calibri"/>
               </a:rPr>
@@ -10413,7 +10413,7 @@
             <a:avLst/>
           </a:prstGeom>
           <a:solidFill>
-            <a:srgbClr val="1B242F"/>
+            <a:srgbClr val="232F3E"/>
           </a:solidFill>
           <a:ln w="12700">
             <a:solidFill>
@@ -10749,11 +10749,11 @@
             <a:avLst/>
           </a:prstGeom>
           <a:solidFill>
-            <a:srgbClr val="1B242F"/>
+            <a:srgbClr val="232F3E"/>
           </a:solidFill>
           <a:ln w="12700">
             <a:solidFill>
-              <a:srgbClr val="F5A623"/>
+              <a:srgbClr val="FF9900"/>
             </a:solidFill>
           </a:ln>
           <a:effectLst/>
@@ -10813,7 +10813,7 @@
             <a:r>
               <a:rPr sz="1450" b="1" i="0">
                 <a:solidFill>
-                  <a:srgbClr val="F5A623"/>
+                  <a:srgbClr val="FF9900"/>
                 </a:solidFill>
                 <a:latin typeface="Cambria"/>
               </a:rPr>
@@ -10835,7 +10835,7 @@
             <a:r>
               <a:rPr sz="1150" b="1" i="0">
                 <a:solidFill>
-                  <a:srgbClr val="F5A623"/>
+                  <a:srgbClr val="FF9900"/>
                 </a:solidFill>
                 <a:latin typeface="Calibri"/>
               </a:rPr>
@@ -10866,7 +10866,7 @@
             <a:r>
               <a:rPr sz="1150" b="1" i="0">
                 <a:solidFill>
-                  <a:srgbClr val="F5A623"/>
+                  <a:srgbClr val="FF9900"/>
                 </a:solidFill>
                 <a:latin typeface="Calibri"/>
               </a:rPr>
@@ -10897,7 +10897,7 @@
             <a:r>
               <a:rPr sz="1150" b="1" i="0">
                 <a:solidFill>
-                  <a:srgbClr val="F5A623"/>
+                  <a:srgbClr val="FF9900"/>
                 </a:solidFill>
                 <a:latin typeface="Calibri"/>
               </a:rPr>
@@ -10928,7 +10928,7 @@
             <a:r>
               <a:rPr sz="1150" b="1" i="0">
                 <a:solidFill>
-                  <a:srgbClr val="F5A623"/>
+                  <a:srgbClr val="FF9900"/>
                 </a:solidFill>
                 <a:latin typeface="Calibri"/>
               </a:rPr>
@@ -10959,7 +10959,7 @@
             <a:r>
               <a:rPr sz="1150" b="1" i="0">
                 <a:solidFill>
-                  <a:srgbClr val="F5A623"/>
+                  <a:srgbClr val="FF9900"/>
                 </a:solidFill>
                 <a:latin typeface="Calibri"/>
               </a:rPr>
@@ -10990,7 +10990,7 @@
             <a:r>
               <a:rPr sz="1150" b="1" i="0">
                 <a:solidFill>
-                  <a:srgbClr val="F5A623"/>
+                  <a:srgbClr val="FF9900"/>
                 </a:solidFill>
                 <a:latin typeface="Calibri"/>
               </a:rPr>
@@ -11021,7 +11021,7 @@
             <a:r>
               <a:rPr sz="1150" b="1" i="0">
                 <a:solidFill>
-                  <a:srgbClr val="F5A623"/>
+                  <a:srgbClr val="FF9900"/>
                 </a:solidFill>
                 <a:latin typeface="Calibri"/>
               </a:rPr>
@@ -11052,7 +11052,7 @@
             <a:r>
               <a:rPr sz="1150" b="1" i="0">
                 <a:solidFill>
-                  <a:srgbClr val="F5A623"/>
+                  <a:srgbClr val="FF9900"/>
                 </a:solidFill>
                 <a:latin typeface="Calibri"/>
               </a:rPr>
@@ -11139,7 +11139,7 @@
             <a:r>
               <a:rPr sz="1400" b="1" i="0">
                 <a:solidFill>
-                  <a:srgbClr val="F5A623"/>
+                  <a:srgbClr val="FF9900"/>
                 </a:solidFill>
                 <a:latin typeface="Cambria"/>
               </a:rPr>
@@ -11338,7 +11338,7 @@
             <a:r>
               <a:rPr sz="1250" b="1" i="0">
                 <a:solidFill>
-                  <a:srgbClr val="F5A623"/>
+                  <a:srgbClr val="FF9900"/>
                 </a:solidFill>
                 <a:latin typeface="Calibri"/>
               </a:rPr>
@@ -11452,7 +11452,7 @@
             <a:avLst/>
           </a:prstGeom>
           <a:solidFill>
-            <a:srgbClr val="F5A623"/>
+            <a:srgbClr val="FF9900"/>
           </a:solidFill>
           <a:ln>
             <a:noFill/>
@@ -11520,7 +11520,7 @@
             <a:r>
               <a:rPr sz="1500" b="1" i="0">
                 <a:solidFill>
-                  <a:srgbClr val="F5A623"/>
+                  <a:srgbClr val="FF9900"/>
                 </a:solidFill>
                 <a:latin typeface="Cambria"/>
               </a:rPr>
@@ -11553,7 +11553,7 @@
             <a:avLst/>
           </a:prstGeom>
           <a:solidFill>
-            <a:srgbClr val="F5A623"/>
+            <a:srgbClr val="FF9900"/>
           </a:solidFill>
           <a:ln>
             <a:noFill/>
@@ -11621,7 +11621,7 @@
             <a:r>
               <a:rPr sz="1500" b="1" i="0">
                 <a:solidFill>
-                  <a:srgbClr val="F5A623"/>
+                  <a:srgbClr val="FF9900"/>
                 </a:solidFill>
                 <a:latin typeface="Cambria"/>
               </a:rPr>
@@ -11654,7 +11654,7 @@
             <a:avLst/>
           </a:prstGeom>
           <a:solidFill>
-            <a:srgbClr val="F5A623"/>
+            <a:srgbClr val="FF9900"/>
           </a:solidFill>
           <a:ln>
             <a:noFill/>
@@ -11722,7 +11722,7 @@
             <a:r>
               <a:rPr sz="1500" b="1" i="0">
                 <a:solidFill>
-                  <a:srgbClr val="F5A623"/>
+                  <a:srgbClr val="FF9900"/>
                 </a:solidFill>
                 <a:latin typeface="Cambria"/>
               </a:rPr>
@@ -11755,7 +11755,7 @@
             <a:avLst/>
           </a:prstGeom>
           <a:solidFill>
-            <a:srgbClr val="F5A623"/>
+            <a:srgbClr val="FF9900"/>
           </a:solidFill>
           <a:ln>
             <a:noFill/>
@@ -11823,7 +11823,7 @@
             <a:r>
               <a:rPr sz="1500" b="1" i="0">
                 <a:solidFill>
-                  <a:srgbClr val="F5A623"/>
+                  <a:srgbClr val="FF9900"/>
                 </a:solidFill>
                 <a:latin typeface="Cambria"/>
               </a:rPr>
@@ -11856,7 +11856,7 @@
             <a:avLst/>
           </a:prstGeom>
           <a:solidFill>
-            <a:srgbClr val="F5A623"/>
+            <a:srgbClr val="FF9900"/>
           </a:solidFill>
           <a:ln>
             <a:noFill/>
@@ -12049,7 +12049,7 @@
             <a:avLst/>
           </a:prstGeom>
           <a:solidFill>
-            <a:srgbClr val="F5A623"/>
+            <a:srgbClr val="FF9900"/>
           </a:solidFill>
           <a:ln>
             <a:noFill/>
@@ -12162,7 +12162,7 @@
             <a:r>
               <a:rPr sz="2200" b="0" i="1">
                 <a:solidFill>
-                  <a:srgbClr val="F5A623"/>
+                  <a:srgbClr val="FF9900"/>
                 </a:solidFill>
                 <a:latin typeface="Cambria"/>
               </a:rPr>
@@ -12372,7 +12372,7 @@
             <a:r>
               <a:rPr sz="3300" b="1" i="0">
                 <a:solidFill>
-                  <a:srgbClr val="1B242F"/>
+                  <a:srgbClr val="232F3E"/>
                 </a:solidFill>
                 <a:latin typeface="Cambria"/>
               </a:rPr>
@@ -12483,7 +12483,7 @@
             <a:r>
               <a:rPr sz="1250" b="0" i="0">
                 <a:solidFill>
-                  <a:srgbClr val="1B242F"/>
+                  <a:srgbClr val="232F3E"/>
                 </a:solidFill>
                 <a:latin typeface="Calibri"/>
               </a:rPr>
@@ -12594,7 +12594,7 @@
             <a:r>
               <a:rPr sz="1250" b="0" i="0">
                 <a:solidFill>
-                  <a:srgbClr val="1B242F"/>
+                  <a:srgbClr val="232F3E"/>
                 </a:solidFill>
                 <a:latin typeface="Calibri"/>
               </a:rPr>
@@ -12705,7 +12705,7 @@
             <a:r>
               <a:rPr sz="1250" b="0" i="0">
                 <a:solidFill>
-                  <a:srgbClr val="1B242F"/>
+                  <a:srgbClr val="232F3E"/>
                 </a:solidFill>
                 <a:latin typeface="Calibri"/>
               </a:rPr>
@@ -12816,7 +12816,7 @@
             <a:r>
               <a:rPr sz="1250" b="0" i="0">
                 <a:solidFill>
-                  <a:srgbClr val="1B242F"/>
+                  <a:srgbClr val="232F3E"/>
                 </a:solidFill>
                 <a:latin typeface="Calibri"/>
               </a:rPr>
@@ -12962,7 +12962,7 @@
             <a:r>
               <a:rPr sz="1250" b="1" i="0">
                 <a:solidFill>
-                  <a:srgbClr val="F5A623"/>
+                  <a:srgbClr val="FF9900"/>
                 </a:solidFill>
                 <a:latin typeface="Calibri"/>
               </a:rPr>
@@ -13052,7 +13052,7 @@
             <a:r>
               <a:rPr sz="950" b="1" i="0">
                 <a:solidFill>
-                  <a:srgbClr val="F5A623"/>
+                  <a:srgbClr val="FF9900"/>
                 </a:solidFill>
                 <a:latin typeface="Calibri"/>
               </a:rPr>
@@ -13097,7 +13097,7 @@
             <a:r>
               <a:rPr sz="950" b="1" i="0">
                 <a:solidFill>
-                  <a:srgbClr val="F5A623"/>
+                  <a:srgbClr val="FF9900"/>
                 </a:solidFill>
                 <a:latin typeface="Calibri"/>
               </a:rPr>
@@ -13142,7 +13142,7 @@
             <a:r>
               <a:rPr sz="950" b="1" i="0">
                 <a:solidFill>
-                  <a:srgbClr val="F5A623"/>
+                  <a:srgbClr val="FF9900"/>
                 </a:solidFill>
                 <a:latin typeface="Calibri"/>
               </a:rPr>
@@ -13187,7 +13187,7 @@
             <a:r>
               <a:rPr sz="950" b="1" i="0">
                 <a:solidFill>
-                  <a:srgbClr val="F5A623"/>
+                  <a:srgbClr val="FF9900"/>
                 </a:solidFill>
                 <a:latin typeface="Calibri"/>
               </a:rPr>
@@ -13232,7 +13232,7 @@
             <a:r>
               <a:rPr sz="950" b="1" i="0">
                 <a:solidFill>
-                  <a:srgbClr val="F5A623"/>
+                  <a:srgbClr val="FF9900"/>
                 </a:solidFill>
                 <a:latin typeface="Calibri"/>
               </a:rPr>
@@ -13277,7 +13277,7 @@
             <a:r>
               <a:rPr sz="950" b="1" i="0">
                 <a:solidFill>
-                  <a:srgbClr val="F5A623"/>
+                  <a:srgbClr val="FF9900"/>
                 </a:solidFill>
                 <a:latin typeface="Calibri"/>
               </a:rPr>
@@ -13322,7 +13322,7 @@
             <a:r>
               <a:rPr sz="950" b="1" i="0">
                 <a:solidFill>
-                  <a:srgbClr val="F5A623"/>
+                  <a:srgbClr val="FF9900"/>
                 </a:solidFill>
                 <a:latin typeface="Calibri"/>
               </a:rPr>
@@ -13367,7 +13367,7 @@
             <a:r>
               <a:rPr sz="950" b="1" i="0">
                 <a:solidFill>
-                  <a:srgbClr val="F5A623"/>
+                  <a:srgbClr val="FF9900"/>
                 </a:solidFill>
                 <a:latin typeface="Calibri"/>
               </a:rPr>
@@ -13412,7 +13412,7 @@
             <a:r>
               <a:rPr sz="950" b="1" i="0">
                 <a:solidFill>
-                  <a:srgbClr val="F5A623"/>
+                  <a:srgbClr val="FF9900"/>
                 </a:solidFill>
                 <a:latin typeface="Calibri"/>
               </a:rPr>
@@ -13436,7 +13436,7 @@
             <a:avLst/>
           </a:prstGeom>
           <a:solidFill>
-            <a:srgbClr val="1B242F"/>
+            <a:srgbClr val="232F3E"/>
           </a:solidFill>
           <a:ln>
             <a:noFill/>
@@ -14326,7 +14326,7 @@
             <a:avLst/>
           </a:prstGeom>
           <a:solidFill>
-            <a:srgbClr val="1B242F"/>
+            <a:srgbClr val="232F3E"/>
           </a:solidFill>
           <a:ln>
             <a:noFill/>
@@ -15216,7 +15216,7 @@
             <a:avLst/>
           </a:prstGeom>
           <a:solidFill>
-            <a:srgbClr val="1B242F"/>
+            <a:srgbClr val="232F3E"/>
           </a:solidFill>
           <a:ln>
             <a:noFill/>
@@ -16106,7 +16106,7 @@
             <a:avLst/>
           </a:prstGeom>
           <a:solidFill>
-            <a:srgbClr val="1B242F"/>
+            <a:srgbClr val="232F3E"/>
           </a:solidFill>
           <a:ln>
             <a:noFill/>
@@ -16996,7 +16996,7 @@
             <a:avLst/>
           </a:prstGeom>
           <a:solidFill>
-            <a:srgbClr val="1B242F"/>
+            <a:srgbClr val="232F3E"/>
           </a:solidFill>
           <a:ln>
             <a:noFill/>
@@ -17886,7 +17886,7 @@
             <a:avLst/>
           </a:prstGeom>
           <a:solidFill>
-            <a:srgbClr val="1B242F"/>
+            <a:srgbClr val="232F3E"/>
           </a:solidFill>
           <a:ln>
             <a:noFill/>
@@ -18562,7 +18562,7 @@
             <a:r>
               <a:rPr sz="3300" b="1" i="0">
                 <a:solidFill>
-                  <a:srgbClr val="1B242F"/>
+                  <a:srgbClr val="232F3E"/>
                 </a:solidFill>
                 <a:latin typeface="Cambria"/>
               </a:rPr>
@@ -18715,7 +18715,7 @@
             <a:r>
               <a:rPr sz="1350" b="1" i="0">
                 <a:solidFill>
-                  <a:srgbClr val="1B242F"/>
+                  <a:srgbClr val="232F3E"/>
                 </a:solidFill>
                 <a:latin typeface="Calibri"/>
               </a:rPr>
@@ -18842,7 +18842,7 @@
             <a:r>
               <a:rPr sz="1350" b="1" i="0">
                 <a:solidFill>
-                  <a:srgbClr val="1B242F"/>
+                  <a:srgbClr val="232F3E"/>
                 </a:solidFill>
                 <a:latin typeface="Calibri"/>
               </a:rPr>
@@ -18969,7 +18969,7 @@
             <a:r>
               <a:rPr sz="1350" b="1" i="0">
                 <a:solidFill>
-                  <a:srgbClr val="1B242F"/>
+                  <a:srgbClr val="232F3E"/>
                 </a:solidFill>
                 <a:latin typeface="Calibri"/>
               </a:rPr>
@@ -19012,7 +19012,7 @@
             <a:avLst/>
           </a:prstGeom>
           <a:solidFill>
-            <a:srgbClr val="1B242F"/>
+            <a:srgbClr val="232F3E"/>
           </a:solidFill>
           <a:ln>
             <a:noFill/>
@@ -19077,7 +19077,7 @@
             <a:r>
               <a:rPr sz="1450" b="1" i="0">
                 <a:solidFill>
-                  <a:srgbClr val="F5A623"/>
+                  <a:srgbClr val="FF9900"/>
                 </a:solidFill>
                 <a:latin typeface="Calibri"/>
               </a:rPr>
@@ -19144,7 +19144,7 @@
             <a:r>
               <a:rPr sz="1500" b="0" i="1">
                 <a:solidFill>
-                  <a:srgbClr val="1B242F"/>
+                  <a:srgbClr val="232F3E"/>
                 </a:solidFill>
                 <a:latin typeface="Calibri"/>
               </a:rPr>
@@ -19335,7 +19335,7 @@
             <a:r>
               <a:rPr sz="3300" b="1" i="0">
                 <a:solidFill>
-                  <a:srgbClr val="1B242F"/>
+                  <a:srgbClr val="232F3E"/>
                 </a:solidFill>
                 <a:latin typeface="Cambria"/>
               </a:rPr>
@@ -19496,7 +19496,7 @@
             <a:r>
               <a:rPr sz="1650" b="1" i="0">
                 <a:solidFill>
-                  <a:srgbClr val="1B242F"/>
+                  <a:srgbClr val="232F3E"/>
                 </a:solidFill>
                 <a:latin typeface="Cambria"/>
               </a:rPr>
@@ -19679,7 +19679,7 @@
             <a:r>
               <a:rPr sz="1650" b="1" i="0">
                 <a:solidFill>
-                  <a:srgbClr val="1B242F"/>
+                  <a:srgbClr val="232F3E"/>
                 </a:solidFill>
                 <a:latin typeface="Cambria"/>
               </a:rPr>
@@ -19862,7 +19862,7 @@
             <a:r>
               <a:rPr sz="1650" b="1" i="0">
                 <a:solidFill>
-                  <a:srgbClr val="1B242F"/>
+                  <a:srgbClr val="232F3E"/>
                 </a:solidFill>
                 <a:latin typeface="Cambria"/>
               </a:rPr>
@@ -19929,7 +19929,7 @@
             <a:r>
               <a:rPr sz="1300" b="0" i="1">
                 <a:solidFill>
-                  <a:srgbClr val="1B242F"/>
+                  <a:srgbClr val="232F3E"/>
                 </a:solidFill>
                 <a:latin typeface="Calibri"/>
               </a:rPr>
@@ -20057,7 +20057,7 @@
             <a:avLst/>
           </a:prstGeom>
           <a:solidFill>
-            <a:srgbClr val="F5A623"/>
+            <a:srgbClr val="FF9900"/>
           </a:solidFill>
           <a:ln>
             <a:noFill/>
@@ -20170,7 +20170,7 @@
             <a:r>
               <a:rPr sz="2200" b="0" i="1">
                 <a:solidFill>
-                  <a:srgbClr val="F5A623"/>
+                  <a:srgbClr val="FF9900"/>
                 </a:solidFill>
                 <a:latin typeface="Cambria"/>
               </a:rPr>
@@ -20335,7 +20335,7 @@
             <a:r>
               <a:rPr sz="1250" b="1" i="0">
                 <a:solidFill>
-                  <a:srgbClr val="F5A623"/>
+                  <a:srgbClr val="FF9900"/>
                 </a:solidFill>
                 <a:latin typeface="Calibri"/>
               </a:rPr>
@@ -20404,7 +20404,7 @@
             <a:avLst/>
           </a:prstGeom>
           <a:solidFill>
-            <a:srgbClr val="1B242F"/>
+            <a:srgbClr val="232F3E"/>
           </a:solidFill>
           <a:ln>
             <a:noFill/>
@@ -20466,7 +20466,7 @@
             <a:r>
               <a:rPr sz="1500" b="1" i="0">
                 <a:solidFill>
-                  <a:srgbClr val="F5A623"/>
+                  <a:srgbClr val="FF9900"/>
                 </a:solidFill>
                 <a:latin typeface="Cambria"/>
               </a:rPr>
@@ -20485,7 +20485,7 @@
             <a:r>
               <a:rPr sz="1200" b="1" i="0">
                 <a:solidFill>
-                  <a:srgbClr val="F5A623"/>
+                  <a:srgbClr val="FF9900"/>
                 </a:solidFill>
                 <a:latin typeface="Calibri"/>
               </a:rPr>
@@ -20522,7 +20522,7 @@
             <a:r>
               <a:rPr sz="1200" b="1" i="0">
                 <a:solidFill>
-                  <a:srgbClr val="F5A623"/>
+                  <a:srgbClr val="FF9900"/>
                 </a:solidFill>
                 <a:latin typeface="Calibri"/>
               </a:rPr>
@@ -20559,7 +20559,7 @@
             <a:r>
               <a:rPr sz="1200" b="1" i="0">
                 <a:solidFill>
-                  <a:srgbClr val="F5A623"/>
+                  <a:srgbClr val="FF9900"/>
                 </a:solidFill>
                 <a:latin typeface="Calibri"/>
               </a:rPr>
@@ -20596,7 +20596,7 @@
             <a:r>
               <a:rPr sz="1200" b="1" i="0">
                 <a:solidFill>
-                  <a:srgbClr val="F5A623"/>
+                  <a:srgbClr val="FF9900"/>
                 </a:solidFill>
                 <a:latin typeface="Calibri"/>
               </a:rPr>
@@ -20633,7 +20633,7 @@
             <a:r>
               <a:rPr sz="1200" b="1" i="0">
                 <a:solidFill>
-                  <a:srgbClr val="F5A623"/>
+                  <a:srgbClr val="FF9900"/>
                 </a:solidFill>
                 <a:latin typeface="Calibri"/>
               </a:rPr>
@@ -20670,7 +20670,7 @@
             <a:r>
               <a:rPr sz="1200" b="1" i="0">
                 <a:solidFill>
-                  <a:srgbClr val="F5A623"/>
+                  <a:srgbClr val="FF9900"/>
                 </a:solidFill>
                 <a:latin typeface="Calibri"/>
               </a:rPr>
@@ -20707,7 +20707,7 @@
             <a:r>
               <a:rPr sz="1200" b="1" i="0">
                 <a:solidFill>
-                  <a:srgbClr val="F5A623"/>
+                  <a:srgbClr val="FF9900"/>
                 </a:solidFill>
                 <a:latin typeface="Calibri"/>
               </a:rPr>
@@ -20749,11 +20749,11 @@
             <a:avLst/>
           </a:prstGeom>
           <a:solidFill>
-            <a:srgbClr val="1B242F"/>
+            <a:srgbClr val="232F3E"/>
           </a:solidFill>
           <a:ln w="12700">
             <a:solidFill>
-              <a:srgbClr val="F5A623"/>
+              <a:srgbClr val="FF9900"/>
             </a:solidFill>
           </a:ln>
           <a:effectLst/>
@@ -20813,7 +20813,7 @@
             <a:r>
               <a:rPr sz="1500" b="1" i="0">
                 <a:solidFill>
-                  <a:srgbClr val="F5A623"/>
+                  <a:srgbClr val="FF9900"/>
                 </a:solidFill>
                 <a:latin typeface="Cambria"/>
               </a:rPr>
@@ -20835,7 +20835,7 @@
             <a:r>
               <a:rPr sz="1250" b="1" i="0">
                 <a:solidFill>
-                  <a:srgbClr val="F5A623"/>
+                  <a:srgbClr val="FF9900"/>
                 </a:solidFill>
                 <a:latin typeface="Calibri"/>
               </a:rPr>
@@ -20866,7 +20866,7 @@
             <a:r>
               <a:rPr sz="1250" b="1" i="0">
                 <a:solidFill>
-                  <a:srgbClr val="F5A623"/>
+                  <a:srgbClr val="FF9900"/>
                 </a:solidFill>
                 <a:latin typeface="Calibri"/>
               </a:rPr>
@@ -20897,7 +20897,7 @@
             <a:r>
               <a:rPr sz="1250" b="1" i="0">
                 <a:solidFill>
-                  <a:srgbClr val="F5A623"/>
+                  <a:srgbClr val="FF9900"/>
                 </a:solidFill>
                 <a:latin typeface="Calibri"/>
               </a:rPr>
@@ -20928,7 +20928,7 @@
             <a:r>
               <a:rPr sz="1250" b="1" i="0">
                 <a:solidFill>
-                  <a:srgbClr val="F5A623"/>
+                  <a:srgbClr val="FF9900"/>
                 </a:solidFill>
                 <a:latin typeface="Calibri"/>
               </a:rPr>
@@ -21083,7 +21083,7 @@
             <a:r>
               <a:rPr sz="1250" b="1" i="0">
                 <a:solidFill>
-                  <a:srgbClr val="F5A623"/>
+                  <a:srgbClr val="FF9900"/>
                 </a:solidFill>
                 <a:latin typeface="Calibri"/>
               </a:rPr>
@@ -21152,7 +21152,7 @@
             <a:avLst/>
           </a:prstGeom>
           <a:solidFill>
-            <a:srgbClr val="1B242F"/>
+            <a:srgbClr val="232F3E"/>
           </a:solidFill>
           <a:ln>
             <a:noFill/>
@@ -21214,7 +21214,7 @@
             <a:r>
               <a:rPr sz="1500" b="1" i="0">
                 <a:solidFill>
-                  <a:srgbClr val="F5A623"/>
+                  <a:srgbClr val="FF9900"/>
                 </a:solidFill>
                 <a:latin typeface="Cambria"/>
               </a:rPr>
@@ -21238,7 +21238,7 @@
             <a:avLst/>
           </a:prstGeom>
           <a:solidFill>
-            <a:srgbClr val="F5A623"/>
+            <a:srgbClr val="FF9900"/>
           </a:solidFill>
           <a:ln>
             <a:noFill/>
@@ -21306,7 +21306,7 @@
             <a:r>
               <a:rPr sz="1300" b="1" i="0">
                 <a:solidFill>
-                  <a:srgbClr val="F5A623"/>
+                  <a:srgbClr val="FF9900"/>
                 </a:solidFill>
                 <a:latin typeface="Cambria"/>
               </a:rPr>
@@ -21339,7 +21339,7 @@
             <a:avLst/>
           </a:prstGeom>
           <a:solidFill>
-            <a:srgbClr val="F5A623"/>
+            <a:srgbClr val="FF9900"/>
           </a:solidFill>
           <a:ln>
             <a:noFill/>
@@ -21407,7 +21407,7 @@
             <a:r>
               <a:rPr sz="1300" b="1" i="0">
                 <a:solidFill>
-                  <a:srgbClr val="F5A623"/>
+                  <a:srgbClr val="FF9900"/>
                 </a:solidFill>
                 <a:latin typeface="Cambria"/>
               </a:rPr>
@@ -21440,7 +21440,7 @@
             <a:avLst/>
           </a:prstGeom>
           <a:solidFill>
-            <a:srgbClr val="F5A623"/>
+            <a:srgbClr val="FF9900"/>
           </a:solidFill>
           <a:ln>
             <a:noFill/>
@@ -21508,7 +21508,7 @@
             <a:r>
               <a:rPr sz="1300" b="1" i="0">
                 <a:solidFill>
-                  <a:srgbClr val="F5A623"/>
+                  <a:srgbClr val="FF9900"/>
                 </a:solidFill>
                 <a:latin typeface="Cambria"/>
               </a:rPr>
@@ -21541,7 +21541,7 @@
             <a:avLst/>
           </a:prstGeom>
           <a:solidFill>
-            <a:srgbClr val="F5A623"/>
+            <a:srgbClr val="FF9900"/>
           </a:solidFill>
           <a:ln>
             <a:noFill/>
@@ -21609,7 +21609,7 @@
             <a:r>
               <a:rPr sz="1300" b="1" i="0">
                 <a:solidFill>
-                  <a:srgbClr val="F5A623"/>
+                  <a:srgbClr val="FF9900"/>
                 </a:solidFill>
                 <a:latin typeface="Cambria"/>
               </a:rPr>
@@ -21642,11 +21642,11 @@
             <a:avLst/>
           </a:prstGeom>
           <a:solidFill>
-            <a:srgbClr val="1B242F"/>
+            <a:srgbClr val="232F3E"/>
           </a:solidFill>
           <a:ln w="12700">
             <a:solidFill>
-              <a:srgbClr val="F5A623"/>
+              <a:srgbClr val="FF9900"/>
             </a:solidFill>
           </a:ln>
           <a:effectLst/>
@@ -21706,7 +21706,7 @@
             <a:r>
               <a:rPr sz="1500" b="1" i="0">
                 <a:solidFill>
-                  <a:srgbClr val="F5A623"/>
+                  <a:srgbClr val="FF9900"/>
                 </a:solidFill>
                 <a:latin typeface="Cambria"/>
               </a:rPr>
@@ -22155,7 +22155,7 @@
             <a:r>
               <a:rPr sz="1250" b="0" i="1">
                 <a:solidFill>
-                  <a:srgbClr val="F5A623"/>
+                  <a:srgbClr val="FF9900"/>
                 </a:solidFill>
                 <a:latin typeface="Calibri"/>
               </a:rPr>
@@ -22301,7 +22301,7 @@
             <a:r>
               <a:rPr sz="1250" b="1" i="0">
                 <a:solidFill>
-                  <a:srgbClr val="F5A623"/>
+                  <a:srgbClr val="FF9900"/>
                 </a:solidFill>
                 <a:latin typeface="Calibri"/>
               </a:rPr>
@@ -22412,7 +22412,7 @@
             <a:avLst/>
           </a:prstGeom>
           <a:solidFill>
-            <a:srgbClr val="1B242F"/>
+            <a:srgbClr val="232F3E"/>
           </a:solidFill>
           <a:ln w="12700">
             <a:solidFill>
@@ -22653,11 +22653,11 @@
             <a:avLst/>
           </a:prstGeom>
           <a:solidFill>
-            <a:srgbClr val="1B242F"/>
+            <a:srgbClr val="232F3E"/>
           </a:solidFill>
           <a:ln w="12700">
             <a:solidFill>
-              <a:srgbClr val="F5A623"/>
+              <a:srgbClr val="FF9900"/>
             </a:solidFill>
           </a:ln>
           <a:effectLst/>
@@ -22715,7 +22715,7 @@
             <a:r>
               <a:rPr sz="1450" b="1" i="0">
                 <a:solidFill>
-                  <a:srgbClr val="F5A623"/>
+                  <a:srgbClr val="FF9900"/>
                 </a:solidFill>
                 <a:latin typeface="Cambria"/>
               </a:rPr>
@@ -22737,7 +22737,7 @@
             <a:r>
               <a:rPr sz="1150" b="1" i="0">
                 <a:solidFill>
-                  <a:srgbClr val="F5A623"/>
+                  <a:srgbClr val="FF9900"/>
                 </a:solidFill>
                 <a:latin typeface="Calibri"/>
               </a:rPr>
@@ -22768,7 +22768,7 @@
             <a:r>
               <a:rPr sz="1150" b="1" i="0">
                 <a:solidFill>
-                  <a:srgbClr val="F5A623"/>
+                  <a:srgbClr val="FF9900"/>
                 </a:solidFill>
                 <a:latin typeface="Calibri"/>
               </a:rPr>
@@ -22799,7 +22799,7 @@
             <a:r>
               <a:rPr sz="1150" b="1" i="0">
                 <a:solidFill>
-                  <a:srgbClr val="F5A623"/>
+                  <a:srgbClr val="FF9900"/>
                 </a:solidFill>
                 <a:latin typeface="Calibri"/>
               </a:rPr>
@@ -22830,7 +22830,7 @@
             <a:r>
               <a:rPr sz="1150" b="1" i="0">
                 <a:solidFill>
-                  <a:srgbClr val="F5A623"/>
+                  <a:srgbClr val="FF9900"/>
                 </a:solidFill>
                 <a:latin typeface="Calibri"/>
               </a:rPr>
@@ -23028,7 +23028,7 @@
             <a:r>
               <a:rPr sz="1250" b="1" i="0">
                 <a:solidFill>
-                  <a:srgbClr val="F5A623"/>
+                  <a:srgbClr val="FF9900"/>
                 </a:solidFill>
                 <a:latin typeface="Calibri"/>
               </a:rPr>
@@ -23097,7 +23097,7 @@
             <a:avLst/>
           </a:prstGeom>
           <a:solidFill>
-            <a:srgbClr val="1B242F"/>
+            <a:srgbClr val="232F3E"/>
           </a:solidFill>
           <a:ln>
             <a:noFill/>
@@ -23307,11 +23307,11 @@
             <a:avLst/>
           </a:prstGeom>
           <a:solidFill>
-            <a:srgbClr val="1B242F"/>
+            <a:srgbClr val="232F3E"/>
           </a:solidFill>
           <a:ln w="12700">
             <a:solidFill>
-              <a:srgbClr val="F5A623"/>
+              <a:srgbClr val="FF9900"/>
             </a:solidFill>
           </a:ln>
           <a:effectLst/>
@@ -23371,7 +23371,7 @@
             <a:r>
               <a:rPr sz="1600" b="1" i="0">
                 <a:solidFill>
-                  <a:srgbClr val="F5A623"/>
+                  <a:srgbClr val="FF9900"/>
                 </a:solidFill>
                 <a:latin typeface="Cambria"/>
               </a:rPr>
@@ -23393,7 +23393,7 @@
             <a:r>
               <a:rPr sz="1450" b="1" i="0">
                 <a:solidFill>
-                  <a:srgbClr val="F5A623"/>
+                  <a:srgbClr val="FF9900"/>
                 </a:solidFill>
                 <a:latin typeface="Calibri"/>
               </a:rPr>
@@ -23424,7 +23424,7 @@
             <a:r>
               <a:rPr sz="1450" b="1" i="0">
                 <a:solidFill>
-                  <a:srgbClr val="F5A623"/>
+                  <a:srgbClr val="FF9900"/>
                 </a:solidFill>
                 <a:latin typeface="Calibri"/>
               </a:rPr>
@@ -23455,7 +23455,7 @@
             <a:r>
               <a:rPr sz="1450" b="1" i="0">
                 <a:solidFill>
-                  <a:srgbClr val="F5A623"/>
+                  <a:srgbClr val="FF9900"/>
                 </a:solidFill>
                 <a:latin typeface="Calibri"/>
               </a:rPr>
@@ -23486,7 +23486,7 @@
             <a:r>
               <a:rPr sz="1450" b="1" i="0">
                 <a:solidFill>
-                  <a:srgbClr val="F5A623"/>
+                  <a:srgbClr val="FF9900"/>
                 </a:solidFill>
                 <a:latin typeface="Calibri"/>
               </a:rPr>
@@ -23686,7 +23686,7 @@
             <a:r>
               <a:rPr sz="1250" b="1" i="0">
                 <a:solidFill>
-                  <a:srgbClr val="F5A623"/>
+                  <a:srgbClr val="FF9900"/>
                 </a:solidFill>
                 <a:latin typeface="Calibri"/>
               </a:rPr>
@@ -23755,7 +23755,7 @@
             <a:avLst/>
           </a:prstGeom>
           <a:solidFill>
-            <a:srgbClr val="1B242F"/>
+            <a:srgbClr val="232F3E"/>
           </a:solidFill>
           <a:ln>
             <a:noFill/>
@@ -23799,7 +23799,7 @@
             <a:avLst/>
           </a:prstGeom>
           <a:solidFill>
-            <a:srgbClr val="F5A623"/>
+            <a:srgbClr val="FF9900"/>
           </a:solidFill>
           <a:ln>
             <a:noFill/>
@@ -23873,7 +23873,7 @@
             <a:r>
               <a:rPr sz="1450" b="1" i="0">
                 <a:solidFill>
-                  <a:srgbClr val="F5A623"/>
+                  <a:srgbClr val="FF9900"/>
                 </a:solidFill>
                 <a:latin typeface="Cambria"/>
               </a:rPr>
@@ -23986,7 +23986,7 @@
             <a:avLst/>
           </a:prstGeom>
           <a:solidFill>
-            <a:srgbClr val="F5A623"/>
+            <a:srgbClr val="FF9900"/>
           </a:solidFill>
           <a:ln>
             <a:noFill/>
@@ -24060,7 +24060,7 @@
             <a:r>
               <a:rPr sz="1450" b="1" i="0">
                 <a:solidFill>
-                  <a:srgbClr val="F5A623"/>
+                  <a:srgbClr val="FF9900"/>
                 </a:solidFill>
                 <a:latin typeface="Cambria"/>
               </a:rPr>
@@ -24129,7 +24129,7 @@
             <a:avLst/>
           </a:prstGeom>
           <a:solidFill>
-            <a:srgbClr val="1B242F"/>
+            <a:srgbClr val="232F3E"/>
           </a:solidFill>
           <a:ln>
             <a:noFill/>
@@ -24173,7 +24173,7 @@
             <a:avLst/>
           </a:prstGeom>
           <a:solidFill>
-            <a:srgbClr val="F5A623"/>
+            <a:srgbClr val="FF9900"/>
           </a:solidFill>
           <a:ln>
             <a:noFill/>
@@ -24247,7 +24247,7 @@
             <a:r>
               <a:rPr sz="1450" b="1" i="0">
                 <a:solidFill>
-                  <a:srgbClr val="F5A623"/>
+                  <a:srgbClr val="FF9900"/>
                 </a:solidFill>
                 <a:latin typeface="Cambria"/>
               </a:rPr>
@@ -24360,7 +24360,7 @@
             <a:avLst/>
           </a:prstGeom>
           <a:solidFill>
-            <a:srgbClr val="F5A623"/>
+            <a:srgbClr val="FF9900"/>
           </a:solidFill>
           <a:ln>
             <a:noFill/>
@@ -24434,7 +24434,7 @@
             <a:r>
               <a:rPr sz="1450" b="1" i="0">
                 <a:solidFill>
-                  <a:srgbClr val="F5A623"/>
+                  <a:srgbClr val="FF9900"/>
                 </a:solidFill>
                 <a:latin typeface="Cambria"/>
               </a:rPr>
@@ -24503,7 +24503,7 @@
             <a:avLst/>
           </a:prstGeom>
           <a:solidFill>
-            <a:srgbClr val="1B242F"/>
+            <a:srgbClr val="232F3E"/>
           </a:solidFill>
           <a:ln>
             <a:noFill/>
@@ -24547,7 +24547,7 @@
             <a:avLst/>
           </a:prstGeom>
           <a:solidFill>
-            <a:srgbClr val="F5A623"/>
+            <a:srgbClr val="FF9900"/>
           </a:solidFill>
           <a:ln>
             <a:noFill/>
@@ -24621,7 +24621,7 @@
             <a:r>
               <a:rPr sz="1450" b="1" i="0">
                 <a:solidFill>
-                  <a:srgbClr val="F5A623"/>
+                  <a:srgbClr val="FF9900"/>
                 </a:solidFill>
                 <a:latin typeface="Cambria"/>
               </a:rPr>
@@ -24812,7 +24812,7 @@
             <a:r>
               <a:rPr sz="1250" b="1" i="0">
                 <a:solidFill>
-                  <a:srgbClr val="F5A623"/>
+                  <a:srgbClr val="FF9900"/>
                 </a:solidFill>
                 <a:latin typeface="Calibri"/>
               </a:rPr>
@@ -24881,7 +24881,7 @@
             <a:avLst/>
           </a:prstGeom>
           <a:solidFill>
-            <a:srgbClr val="1B242F"/>
+            <a:srgbClr val="232F3E"/>
           </a:solidFill>
           <a:ln>
             <a:noFill/>
@@ -24946,7 +24946,7 @@
             <a:r>
               <a:rPr sz="1150" b="1" i="0">
                 <a:solidFill>
-                  <a:srgbClr val="F5A623"/>
+                  <a:srgbClr val="FF9900"/>
                 </a:solidFill>
                 <a:latin typeface="Cambria"/>
               </a:rPr>
@@ -24993,7 +24993,7 @@
             <a:avLst/>
           </a:prstGeom>
           <a:solidFill>
-            <a:srgbClr val="F5A623"/>
+            <a:srgbClr val="FF9900"/>
           </a:solidFill>
           <a:ln>
             <a:noFill/>
@@ -25037,7 +25037,7 @@
             <a:avLst/>
           </a:prstGeom>
           <a:solidFill>
-            <a:srgbClr val="1B242F"/>
+            <a:srgbClr val="232F3E"/>
           </a:solidFill>
           <a:ln>
             <a:noFill/>
@@ -25102,7 +25102,7 @@
             <a:r>
               <a:rPr sz="1150" b="1" i="0">
                 <a:solidFill>
-                  <a:srgbClr val="F5A623"/>
+                  <a:srgbClr val="FF9900"/>
                 </a:solidFill>
                 <a:latin typeface="Cambria"/>
               </a:rPr>
@@ -25149,7 +25149,7 @@
             <a:avLst/>
           </a:prstGeom>
           <a:solidFill>
-            <a:srgbClr val="F5A623"/>
+            <a:srgbClr val="FF9900"/>
           </a:solidFill>
           <a:ln>
             <a:noFill/>
@@ -25193,7 +25193,7 @@
             <a:avLst/>
           </a:prstGeom>
           <a:solidFill>
-            <a:srgbClr val="F5A623"/>
+            <a:srgbClr val="FF9900"/>
           </a:solidFill>
           <a:ln>
             <a:noFill/>
@@ -25305,7 +25305,7 @@
             <a:avLst/>
           </a:prstGeom>
           <a:solidFill>
-            <a:srgbClr val="F5A623"/>
+            <a:srgbClr val="FF9900"/>
           </a:solidFill>
           <a:ln>
             <a:noFill/>
@@ -25349,7 +25349,7 @@
             <a:avLst/>
           </a:prstGeom>
           <a:solidFill>
-            <a:srgbClr val="1B242F"/>
+            <a:srgbClr val="232F3E"/>
           </a:solidFill>
           <a:ln>
             <a:noFill/>
@@ -25414,7 +25414,7 @@
             <a:r>
               <a:rPr sz="1150" b="1" i="0">
                 <a:solidFill>
-                  <a:srgbClr val="F5A623"/>
+                  <a:srgbClr val="FF9900"/>
                 </a:solidFill>
                 <a:latin typeface="Cambria"/>
               </a:rPr>
@@ -25461,7 +25461,7 @@
             <a:avLst/>
           </a:prstGeom>
           <a:solidFill>
-            <a:srgbClr val="F5A623"/>
+            <a:srgbClr val="FF9900"/>
           </a:solidFill>
           <a:ln>
             <a:noFill/>
@@ -25505,7 +25505,7 @@
             <a:avLst/>
           </a:prstGeom>
           <a:solidFill>
-            <a:srgbClr val="1B242F"/>
+            <a:srgbClr val="232F3E"/>
           </a:solidFill>
           <a:ln>
             <a:noFill/>
@@ -25570,7 +25570,7 @@
             <a:r>
               <a:rPr sz="1150" b="1" i="0">
                 <a:solidFill>
-                  <a:srgbClr val="F5A623"/>
+                  <a:srgbClr val="FF9900"/>
                 </a:solidFill>
                 <a:latin typeface="Cambria"/>
               </a:rPr>
@@ -25617,7 +25617,7 @@
             <a:avLst/>
           </a:prstGeom>
           <a:solidFill>
-            <a:srgbClr val="F5A623"/>
+            <a:srgbClr val="FF9900"/>
           </a:solidFill>
           <a:ln>
             <a:noFill/>
@@ -25661,7 +25661,7 @@
             <a:avLst/>
           </a:prstGeom>
           <a:solidFill>
-            <a:srgbClr val="1B242F"/>
+            <a:srgbClr val="232F3E"/>
           </a:solidFill>
           <a:ln>
             <a:noFill/>
@@ -25726,7 +25726,7 @@
             <a:r>
               <a:rPr sz="1150" b="1" i="0">
                 <a:solidFill>
-                  <a:srgbClr val="F5A623"/>
+                  <a:srgbClr val="FF9900"/>
                 </a:solidFill>
                 <a:latin typeface="Cambria"/>
               </a:rPr>
@@ -25788,7 +25788,7 @@
             <a:r>
               <a:rPr sz="1200" b="1" i="0">
                 <a:solidFill>
-                  <a:srgbClr val="F5A623"/>
+                  <a:srgbClr val="FF9900"/>
                 </a:solidFill>
                 <a:latin typeface="Calibri"/>
               </a:rPr>
@@ -25836,7 +25836,7 @@
             <a:r>
               <a:rPr sz="1200" b="1" i="0">
                 <a:solidFill>
-                  <a:srgbClr val="F5A623"/>
+                  <a:srgbClr val="FF9900"/>
                 </a:solidFill>
                 <a:latin typeface="Calibri"/>
               </a:rPr>
@@ -25884,7 +25884,7 @@
             <a:r>
               <a:rPr sz="1200" b="1" i="0">
                 <a:solidFill>
-                  <a:srgbClr val="F5A623"/>
+                  <a:srgbClr val="FF9900"/>
                 </a:solidFill>
                 <a:latin typeface="Calibri"/>
               </a:rPr>
@@ -25932,7 +25932,7 @@
             <a:r>
               <a:rPr sz="1200" b="1" i="0">
                 <a:solidFill>
-                  <a:srgbClr val="F5A623"/>
+                  <a:srgbClr val="FF9900"/>
                 </a:solidFill>
                 <a:latin typeface="Calibri"/>
               </a:rPr>
@@ -25980,7 +25980,7 @@
             <a:r>
               <a:rPr sz="1200" b="1" i="0">
                 <a:solidFill>
-                  <a:srgbClr val="F5A623"/>
+                  <a:srgbClr val="FF9900"/>
                 </a:solidFill>
                 <a:latin typeface="Calibri"/>
               </a:rPr>
@@ -26028,7 +26028,7 @@
             <a:r>
               <a:rPr sz="1200" b="1" i="0">
                 <a:solidFill>
-                  <a:srgbClr val="F5A623"/>
+                  <a:srgbClr val="FF9900"/>
                 </a:solidFill>
                 <a:latin typeface="Calibri"/>
               </a:rPr>
@@ -26115,7 +26115,7 @@
             <a:r>
               <a:rPr sz="1200" b="1" i="0">
                 <a:solidFill>
-                  <a:srgbClr val="F5A623"/>
+                  <a:srgbClr val="FF9900"/>
                 </a:solidFill>
                 <a:latin typeface="Calibri"/>
               </a:rPr>
@@ -26270,7 +26270,7 @@
             <a:r>
               <a:rPr sz="1250" b="1" i="0">
                 <a:solidFill>
-                  <a:srgbClr val="F5A623"/>
+                  <a:srgbClr val="FF9900"/>
                 </a:solidFill>
                 <a:latin typeface="Calibri"/>
               </a:rPr>
@@ -26401,7 +26401,7 @@
             <a:r>
               <a:rPr sz="1500" b="1" i="0">
                 <a:solidFill>
-                  <a:srgbClr val="F5A623"/>
+                  <a:srgbClr val="FF9900"/>
                 </a:solidFill>
                 <a:latin typeface="Consolas"/>
               </a:rPr>
@@ -26642,7 +26642,7 @@
             <a:avLst/>
           </a:prstGeom>
           <a:solidFill>
-            <a:srgbClr val="1B242F"/>
+            <a:srgbClr val="232F3E"/>
           </a:solidFill>
           <a:ln>
             <a:noFill/>
@@ -26686,7 +26686,7 @@
             <a:avLst/>
           </a:prstGeom>
           <a:solidFill>
-            <a:srgbClr val="F5A623"/>
+            <a:srgbClr val="FF9900"/>
           </a:solidFill>
           <a:ln>
             <a:noFill/>
@@ -26760,7 +26760,7 @@
             <a:r>
               <a:rPr sz="1350" b="1" i="0">
                 <a:solidFill>
-                  <a:srgbClr val="F5A623"/>
+                  <a:srgbClr val="FF9900"/>
                 </a:solidFill>
                 <a:latin typeface="Cambria"/>
               </a:rPr>
@@ -26806,7 +26806,7 @@
             <a:avLst/>
           </a:prstGeom>
           <a:solidFill>
-            <a:srgbClr val="1B242F"/>
+            <a:srgbClr val="232F3E"/>
           </a:solidFill>
           <a:ln>
             <a:noFill/>
@@ -26850,7 +26850,7 @@
             <a:avLst/>
           </a:prstGeom>
           <a:solidFill>
-            <a:srgbClr val="F5A623"/>
+            <a:srgbClr val="FF9900"/>
           </a:solidFill>
           <a:ln>
             <a:noFill/>
@@ -26924,7 +26924,7 @@
             <a:r>
               <a:rPr sz="1350" b="1" i="0">
                 <a:solidFill>
-                  <a:srgbClr val="F5A623"/>
+                  <a:srgbClr val="FF9900"/>
                 </a:solidFill>
                 <a:latin typeface="Cambria"/>
               </a:rPr>
@@ -26970,7 +26970,7 @@
             <a:avLst/>
           </a:prstGeom>
           <a:solidFill>
-            <a:srgbClr val="1B242F"/>
+            <a:srgbClr val="232F3E"/>
           </a:solidFill>
           <a:ln>
             <a:noFill/>
@@ -27014,7 +27014,7 @@
             <a:avLst/>
           </a:prstGeom>
           <a:solidFill>
-            <a:srgbClr val="F5A623"/>
+            <a:srgbClr val="FF9900"/>
           </a:solidFill>
           <a:ln>
             <a:noFill/>
@@ -27088,7 +27088,7 @@
             <a:r>
               <a:rPr sz="1350" b="1" i="0">
                 <a:solidFill>
-                  <a:srgbClr val="F5A623"/>
+                  <a:srgbClr val="FF9900"/>
                 </a:solidFill>
                 <a:latin typeface="Cambria"/>
               </a:rPr>
@@ -27301,7 +27301,7 @@
             <a:r>
               <a:rPr sz="3300" b="1" i="0">
                 <a:solidFill>
-                  <a:srgbClr val="1B242F"/>
+                  <a:srgbClr val="232F3E"/>
                 </a:solidFill>
                 <a:latin typeface="Cambria"/>
               </a:rPr>
@@ -27369,7 +27369,7 @@
             <a:avLst/>
           </a:prstGeom>
           <a:solidFill>
-            <a:srgbClr val="F5A623"/>
+            <a:srgbClr val="FF9900"/>
           </a:solidFill>
           <a:ln>
             <a:noFill/>
@@ -27440,7 +27440,7 @@
             <a:r>
               <a:rPr sz="1600" b="1" i="0">
                 <a:solidFill>
-                  <a:srgbClr val="1B242F"/>
+                  <a:srgbClr val="232F3E"/>
                 </a:solidFill>
                 <a:latin typeface="Cambria"/>
               </a:rPr>
@@ -27595,7 +27595,7 @@
             <a:avLst/>
           </a:prstGeom>
           <a:solidFill>
-            <a:srgbClr val="F5A623"/>
+            <a:srgbClr val="FF9900"/>
           </a:solidFill>
           <a:ln>
             <a:noFill/>
@@ -27666,7 +27666,7 @@
             <a:r>
               <a:rPr sz="1600" b="1" i="0">
                 <a:solidFill>
-                  <a:srgbClr val="1B242F"/>
+                  <a:srgbClr val="232F3E"/>
                 </a:solidFill>
                 <a:latin typeface="Cambria"/>
               </a:rPr>
@@ -27821,7 +27821,7 @@
             <a:avLst/>
           </a:prstGeom>
           <a:solidFill>
-            <a:srgbClr val="F5A623"/>
+            <a:srgbClr val="FF9900"/>
           </a:solidFill>
           <a:ln>
             <a:noFill/>
@@ -27892,7 +27892,7 @@
             <a:r>
               <a:rPr sz="1600" b="1" i="0">
                 <a:solidFill>
-                  <a:srgbClr val="1B242F"/>
+                  <a:srgbClr val="232F3E"/>
                 </a:solidFill>
                 <a:latin typeface="Cambria"/>
               </a:rPr>
@@ -28047,7 +28047,7 @@
             <a:avLst/>
           </a:prstGeom>
           <a:solidFill>
-            <a:srgbClr val="F5A623"/>
+            <a:srgbClr val="FF9900"/>
           </a:solidFill>
           <a:ln>
             <a:noFill/>
@@ -28118,7 +28118,7 @@
             <a:r>
               <a:rPr sz="1600" b="1" i="0">
                 <a:solidFill>
-                  <a:srgbClr val="1B242F"/>
+                  <a:srgbClr val="232F3E"/>
                 </a:solidFill>
                 <a:latin typeface="Cambria"/>
               </a:rPr>
@@ -28273,7 +28273,7 @@
             <a:avLst/>
           </a:prstGeom>
           <a:solidFill>
-            <a:srgbClr val="F5A623"/>
+            <a:srgbClr val="FF9900"/>
           </a:solidFill>
           <a:ln>
             <a:noFill/>
@@ -28344,7 +28344,7 @@
             <a:r>
               <a:rPr sz="1600" b="1" i="0">
                 <a:solidFill>
-                  <a:srgbClr val="1B242F"/>
+                  <a:srgbClr val="232F3E"/>
                 </a:solidFill>
                 <a:latin typeface="Cambria"/>
               </a:rPr>
@@ -28577,7 +28577,7 @@
             <a:r>
               <a:rPr sz="1250" b="1" i="0">
                 <a:solidFill>
-                  <a:srgbClr val="F5A623"/>
+                  <a:srgbClr val="FF9900"/>
                 </a:solidFill>
                 <a:latin typeface="Calibri"/>
               </a:rPr>
@@ -28691,7 +28691,7 @@
             <a:avLst/>
           </a:prstGeom>
           <a:solidFill>
-            <a:srgbClr val="1B242F"/>
+            <a:srgbClr val="232F3E"/>
           </a:solidFill>
           <a:ln>
             <a:noFill/>
@@ -28756,7 +28756,7 @@
             <a:r>
               <a:rPr sz="1450" b="1" i="0">
                 <a:solidFill>
-                  <a:srgbClr val="F5A623"/>
+                  <a:srgbClr val="FF9900"/>
                 </a:solidFill>
                 <a:latin typeface="Consolas"/>
               </a:rPr>
@@ -28847,7 +28847,7 @@
             <a:avLst/>
           </a:prstGeom>
           <a:solidFill>
-            <a:srgbClr val="1B242F"/>
+            <a:srgbClr val="232F3E"/>
           </a:solidFill>
           <a:ln>
             <a:noFill/>
@@ -28912,7 +28912,7 @@
             <a:r>
               <a:rPr sz="1450" b="1" i="0">
                 <a:solidFill>
-                  <a:srgbClr val="F5A623"/>
+                  <a:srgbClr val="FF9900"/>
                 </a:solidFill>
                 <a:latin typeface="Consolas"/>
               </a:rPr>
@@ -29003,7 +29003,7 @@
             <a:avLst/>
           </a:prstGeom>
           <a:solidFill>
-            <a:srgbClr val="1B242F"/>
+            <a:srgbClr val="232F3E"/>
           </a:solidFill>
           <a:ln>
             <a:noFill/>
@@ -29068,7 +29068,7 @@
             <a:r>
               <a:rPr sz="1450" b="1" i="0">
                 <a:solidFill>
-                  <a:srgbClr val="F5A623"/>
+                  <a:srgbClr val="FF9900"/>
                 </a:solidFill>
                 <a:latin typeface="Consolas"/>
               </a:rPr>
@@ -29159,7 +29159,7 @@
             <a:avLst/>
           </a:prstGeom>
           <a:solidFill>
-            <a:srgbClr val="1B242F"/>
+            <a:srgbClr val="232F3E"/>
           </a:solidFill>
           <a:ln>
             <a:noFill/>
@@ -29224,7 +29224,7 @@
             <a:r>
               <a:rPr sz="1450" b="1" i="0">
                 <a:solidFill>
-                  <a:srgbClr val="F5A623"/>
+                  <a:srgbClr val="FF9900"/>
                 </a:solidFill>
                 <a:latin typeface="Consolas"/>
               </a:rPr>
@@ -29479,7 +29479,7 @@
             <a:r>
               <a:rPr sz="1250" b="1" i="0">
                 <a:solidFill>
-                  <a:srgbClr val="F5A623"/>
+                  <a:srgbClr val="FF9900"/>
                 </a:solidFill>
                 <a:latin typeface="Calibri"/>
               </a:rPr>
@@ -29548,7 +29548,7 @@
             <a:avLst/>
           </a:prstGeom>
           <a:solidFill>
-            <a:srgbClr val="F5A623"/>
+            <a:srgbClr val="FF9900"/>
           </a:solidFill>
           <a:ln>
             <a:noFill/>
@@ -29601,7 +29601,7 @@
             <a:avLst/>
           </a:prstGeom>
           <a:solidFill>
-            <a:srgbClr val="1B242F"/>
+            <a:srgbClr val="232F3E"/>
           </a:solidFill>
           <a:ln>
             <a:noFill/>
@@ -29666,7 +29666,7 @@
             <a:r>
               <a:rPr sz="1400" b="1" i="0">
                 <a:solidFill>
-                  <a:srgbClr val="F5A623"/>
+                  <a:srgbClr val="FF9900"/>
                 </a:solidFill>
                 <a:latin typeface="Cambria"/>
               </a:rPr>
@@ -29780,7 +29780,7 @@
             <a:avLst/>
           </a:prstGeom>
           <a:solidFill>
-            <a:srgbClr val="F5A623"/>
+            <a:srgbClr val="FF9900"/>
           </a:solidFill>
           <a:ln>
             <a:noFill/>
@@ -29898,7 +29898,7 @@
             <a:r>
               <a:rPr sz="1400" b="1" i="0">
                 <a:solidFill>
-                  <a:srgbClr val="F5A623"/>
+                  <a:srgbClr val="FF9900"/>
                 </a:solidFill>
                 <a:latin typeface="Cambria"/>
               </a:rPr>
@@ -30012,7 +30012,7 @@
             <a:avLst/>
           </a:prstGeom>
           <a:solidFill>
-            <a:srgbClr val="F5A623"/>
+            <a:srgbClr val="FF9900"/>
           </a:solidFill>
           <a:ln>
             <a:noFill/>
@@ -30065,7 +30065,7 @@
             <a:avLst/>
           </a:prstGeom>
           <a:solidFill>
-            <a:srgbClr val="1B242F"/>
+            <a:srgbClr val="232F3E"/>
           </a:solidFill>
           <a:ln>
             <a:noFill/>
@@ -30130,7 +30130,7 @@
             <a:r>
               <a:rPr sz="1400" b="1" i="0">
                 <a:solidFill>
-                  <a:srgbClr val="F5A623"/>
+                  <a:srgbClr val="FF9900"/>
                 </a:solidFill>
                 <a:latin typeface="Cambria"/>
               </a:rPr>
@@ -30244,7 +30244,7 @@
             <a:avLst/>
           </a:prstGeom>
           <a:solidFill>
-            <a:srgbClr val="F5A623"/>
+            <a:srgbClr val="FF9900"/>
           </a:solidFill>
           <a:ln>
             <a:noFill/>
@@ -30362,7 +30362,7 @@
             <a:r>
               <a:rPr sz="1400" b="1" i="0">
                 <a:solidFill>
-                  <a:srgbClr val="F5A623"/>
+                  <a:srgbClr val="FF9900"/>
                 </a:solidFill>
                 <a:latin typeface="Cambria"/>
               </a:rPr>
@@ -30476,7 +30476,7 @@
             <a:avLst/>
           </a:prstGeom>
           <a:solidFill>
-            <a:srgbClr val="F5A623"/>
+            <a:srgbClr val="FF9900"/>
           </a:solidFill>
           <a:ln>
             <a:noFill/>
@@ -30529,7 +30529,7 @@
             <a:avLst/>
           </a:prstGeom>
           <a:solidFill>
-            <a:srgbClr val="1B242F"/>
+            <a:srgbClr val="232F3E"/>
           </a:solidFill>
           <a:ln>
             <a:noFill/>
@@ -30594,7 +30594,7 @@
             <a:r>
               <a:rPr sz="1400" b="1" i="0">
                 <a:solidFill>
-                  <a:srgbClr val="F5A623"/>
+                  <a:srgbClr val="FF9900"/>
                 </a:solidFill>
                 <a:latin typeface="Cambria"/>
               </a:rPr>
@@ -30708,7 +30708,7 @@
             <a:avLst/>
           </a:prstGeom>
           <a:solidFill>
-            <a:srgbClr val="F5A623"/>
+            <a:srgbClr val="FF9900"/>
           </a:solidFill>
           <a:ln>
             <a:noFill/>
@@ -30826,7 +30826,7 @@
             <a:r>
               <a:rPr sz="1400" b="1" i="0">
                 <a:solidFill>
-                  <a:srgbClr val="F5A623"/>
+                  <a:srgbClr val="FF9900"/>
                 </a:solidFill>
                 <a:latin typeface="Cambria"/>
               </a:rPr>
@@ -30961,7 +30961,7 @@
             <a:r>
               <a:rPr sz="1300" b="1" i="1">
                 <a:solidFill>
-                  <a:srgbClr val="F5A623"/>
+                  <a:srgbClr val="FF9900"/>
                 </a:solidFill>
                 <a:latin typeface="Calibri"/>
               </a:rPr>
@@ -31031,28 +31031,28 @@
         <a:sysClr val="window" lastClr="FFFFFF"/>
       </a:lt1>
       <a:dk2>
-        <a:srgbClr val="1F497D"/>
+        <a:srgbClr val="232F3E"/>
       </a:dk2>
       <a:lt2>
         <a:srgbClr val="EEECE1"/>
       </a:lt2>
       <a:accent1>
-        <a:srgbClr val="4F81BD"/>
+        <a:srgbClr val="FF9900"/>
       </a:accent1>
       <a:accent2>
-        <a:srgbClr val="C0504D"/>
+        <a:srgbClr val="232F3E"/>
       </a:accent2>
       <a:accent3>
-        <a:srgbClr val="9BBB59"/>
+        <a:srgbClr val="01A88D"/>
       </a:accent3>
       <a:accent4>
-        <a:srgbClr val="8064A2"/>
+        <a:srgbClr val="8C4FFF"/>
       </a:accent4>
       <a:accent5>
-        <a:srgbClr val="4BACC6"/>
+        <a:srgbClr val="DD344C"/>
       </a:accent5>
       <a:accent6>
-        <a:srgbClr val="F79646"/>
+        <a:srgbClr val="ED7100"/>
       </a:accent6>
       <a:hlink>
         <a:srgbClr val="0000FF"/>
@@ -31351,28 +31351,28 @@
         <a:sysClr val="window" lastClr="FFFFFF"/>
       </a:lt1>
       <a:dk2>
-        <a:srgbClr val="1F497D"/>
+        <a:srgbClr val="232F3E"/>
       </a:dk2>
       <a:lt2>
         <a:srgbClr val="EEECE1"/>
       </a:lt2>
       <a:accent1>
-        <a:srgbClr val="4F81BD"/>
+        <a:srgbClr val="FF9900"/>
       </a:accent1>
       <a:accent2>
-        <a:srgbClr val="C0504D"/>
+        <a:srgbClr val="232F3E"/>
       </a:accent2>
       <a:accent3>
-        <a:srgbClr val="9BBB59"/>
+        <a:srgbClr val="01A88D"/>
       </a:accent3>
       <a:accent4>
-        <a:srgbClr val="8064A2"/>
+        <a:srgbClr val="8C4FFF"/>
       </a:accent4>
       <a:accent5>
-        <a:srgbClr val="4BACC6"/>
+        <a:srgbClr val="DD344C"/>
       </a:accent5>
       <a:accent6>
-        <a:srgbClr val="F79646"/>
+        <a:srgbClr val="ED7100"/>
       </a:accent6>
       <a:hlink>
         <a:srgbClr val="0000FF"/>

--- a/Aegis-Master-Deck.pptx
+++ b/Aegis-Master-Deck.pptx
@@ -4,34 +4,37 @@
   <p:sldMasterIdLst>
     <p:sldMasterId id="2147483648" r:id="rId1"/>
   </p:sldMasterIdLst>
+  <p:notesMasterIdLst>
+    <p:notesMasterId r:id="rId27"/>
+  </p:notesMasterIdLst>
   <p:sldIdLst>
-    <p:sldId id="256" r:id="rId7"/>
-    <p:sldId id="257" r:id="rId9"/>
-    <p:sldId id="258" r:id="rId10"/>
-    <p:sldId id="259" r:id="rId11"/>
-    <p:sldId id="260" r:id="rId12"/>
-    <p:sldId id="261" r:id="rId13"/>
-    <p:sldId id="262" r:id="rId14"/>
-    <p:sldId id="263" r:id="rId15"/>
-    <p:sldId id="264" r:id="rId16"/>
-    <p:sldId id="265" r:id="rId17"/>
-    <p:sldId id="266" r:id="rId18"/>
-    <p:sldId id="267" r:id="rId19"/>
-    <p:sldId id="268" r:id="rId20"/>
-    <p:sldId id="269" r:id="rId21"/>
-    <p:sldId id="270" r:id="rId22"/>
-    <p:sldId id="279" r:id="rId31"/>
-    <p:sldId id="271" r:id="rId23"/>
-    <p:sldId id="272" r:id="rId24"/>
-    <p:sldId id="273" r:id="rId25"/>
-    <p:sldId id="274" r:id="rId26"/>
-    <p:sldId id="275" r:id="rId27"/>
-    <p:sldId id="276" r:id="rId28"/>
-    <p:sldId id="277" r:id="rId29"/>
-    <p:sldId id="278" r:id="rId30"/>
-    <p:sldId id="280" r:id="rId32"/>
+    <p:sldId id="256" r:id="rId2"/>
+    <p:sldId id="257" r:id="rId3"/>
+    <p:sldId id="258" r:id="rId4"/>
+    <p:sldId id="259" r:id="rId5"/>
+    <p:sldId id="260" r:id="rId6"/>
+    <p:sldId id="261" r:id="rId7"/>
+    <p:sldId id="262" r:id="rId8"/>
+    <p:sldId id="263" r:id="rId9"/>
+    <p:sldId id="264" r:id="rId10"/>
+    <p:sldId id="265" r:id="rId11"/>
+    <p:sldId id="266" r:id="rId12"/>
+    <p:sldId id="267" r:id="rId13"/>
+    <p:sldId id="268" r:id="rId14"/>
+    <p:sldId id="269" r:id="rId15"/>
+    <p:sldId id="270" r:id="rId16"/>
+    <p:sldId id="279" r:id="rId17"/>
+    <p:sldId id="271" r:id="rId18"/>
+    <p:sldId id="272" r:id="rId19"/>
+    <p:sldId id="273" r:id="rId20"/>
+    <p:sldId id="274" r:id="rId21"/>
+    <p:sldId id="275" r:id="rId22"/>
+    <p:sldId id="276" r:id="rId23"/>
+    <p:sldId id="277" r:id="rId24"/>
+    <p:sldId id="278" r:id="rId25"/>
+    <p:sldId id="280" r:id="rId26"/>
   </p:sldIdLst>
-  <p:sldSz cx="12191695" cy="6858000" type="screen4x3"/>
+  <p:sldSz cx="12192000" cy="6858000"/>
   <p:notesSz cx="6858000" cy="9144000"/>
   <p:defaultTextStyle>
     <a:defPPr>
@@ -128,11 +131,27 @@
       </a:defRPr>
     </a:lvl9pPr>
   </p:defaultTextStyle>
+  <p:extLst>
+    <p:ext uri="{EFAFB233-063F-42B5-8137-9DF3F51BA10A}">
+      <p15:sldGuideLst xmlns:p15="http://schemas.microsoft.com/office/powerpoint/2012/main">
+        <p15:guide id="1" orient="horz" pos="2160">
+          <p15:clr>
+            <a:srgbClr val="A4A3A4"/>
+          </p15:clr>
+        </p15:guide>
+        <p15:guide id="2" pos="2880">
+          <p15:clr>
+            <a:srgbClr val="A4A3A4"/>
+          </p15:clr>
+        </p15:guide>
+      </p15:sldGuideLst>
+    </p:ext>
+  </p:extLst>
 </p:presentation>
 </file>
 
 <file path=ppt/notesMasters/notesMaster1.xml><?xml version="1.0" encoding="utf-8"?>
-<p:notesMaster xmlns:a="http://schemas.openxmlformats.org/drawingml/2006/main" xmlns:p="http://schemas.openxmlformats.org/presentationml/2006/main" xmlns:r="http://schemas.openxmlformats.org/officeDocument/2006/relationships">
+<p:notesMaster xmlns:a="http://schemas.openxmlformats.org/drawingml/2006/main" xmlns:r="http://schemas.openxmlformats.org/officeDocument/2006/relationships" xmlns:p="http://schemas.openxmlformats.org/presentationml/2006/main">
   <p:cSld>
     <p:bg>
       <p:bgRef idx="1001">
@@ -153,241 +172,16 @@
           <a:chExt cx="0" cy="0"/>
         </a:xfrm>
       </p:grpSpPr>
-      <p:sp>
-        <p:nvSpPr>
-          <p:cNvPr id="2" name="Header Placeholder 1"/>
-          <p:cNvSpPr>
-            <a:spLocks noGrp="1"/>
-          </p:cNvSpPr>
-          <p:nvPr>
-            <p:ph type="hdr" sz="quarter"/>
-          </p:nvPr>
-        </p:nvSpPr>
-        <p:spPr>
-          <a:xfrm>
-            <a:off x="0" y="0"/>
-            <a:ext cx="2971800" cy="457200"/>
-          </a:xfrm>
-          <a:prstGeom prst="rect">
-            <a:avLst/>
-          </a:prstGeom>
-        </p:spPr>
-        <p:txBody>
-          <a:bodyPr vert="horz" lIns="91440" tIns="45720" rIns="91440" bIns="45720" rtlCol="0"/>
-          <a:lstStyle>
-            <a:lvl1pPr algn="l">
-              <a:defRPr sz="1200"/>
-            </a:lvl1pPr>
-          </a:lstStyle>
-          <a:p>
-            <a:endParaRPr lang="en-US"/>
-          </a:p>
-        </p:txBody>
-      </p:sp>
-      <p:sp>
-        <p:nvSpPr>
-          <p:cNvPr id="3" name="Date Placeholder 2"/>
-          <p:cNvSpPr>
-            <a:spLocks noGrp="1"/>
-          </p:cNvSpPr>
-          <p:nvPr>
-            <p:ph type="dt" idx="1"/>
-          </p:nvPr>
-        </p:nvSpPr>
-        <p:spPr>
-          <a:xfrm>
-            <a:off x="3884613" y="0"/>
-            <a:ext cx="2971800" cy="457200"/>
-          </a:xfrm>
-          <a:prstGeom prst="rect">
-            <a:avLst/>
-          </a:prstGeom>
-        </p:spPr>
-        <p:txBody>
-          <a:bodyPr vert="horz" lIns="91440" tIns="45720" rIns="91440" bIns="45720" rtlCol="0"/>
-          <a:lstStyle>
-            <a:lvl1pPr algn="r">
-              <a:defRPr sz="1200"/>
-            </a:lvl1pPr>
-          </a:lstStyle>
-          <a:p>
-            <a:fld id="{0F89C1C7-3DCD-1040-A9CF-14679D8B5DDD}" type="datetimeFigureOut">
-              <a:rPr lang="en-US" smtClean="0"/>
-              <a:t>10/17/16</a:t>
-            </a:fld>
-            <a:endParaRPr lang="en-US"/>
-          </a:p>
-        </p:txBody>
-      </p:sp>
-      <p:sp>
-        <p:nvSpPr>
-          <p:cNvPr id="4" name="Slide Image Placeholder 3"/>
-          <p:cNvSpPr>
-            <a:spLocks noGrp="1" noRot="1" noChangeAspect="1"/>
-          </p:cNvSpPr>
-          <p:nvPr>
-            <p:ph type="sldImg" idx="2"/>
-          </p:nvPr>
-        </p:nvSpPr>
-        <p:spPr>
-          <a:xfrm>
-            <a:off x="1143000" y="685800"/>
-            <a:ext cx="4572000" cy="3429000"/>
-          </a:xfrm>
-          <a:prstGeom prst="rect">
-            <a:avLst/>
-          </a:prstGeom>
-          <a:noFill/>
-          <a:ln w="12700">
-            <a:solidFill>
-              <a:prstClr val="black"/>
-            </a:solidFill>
-          </a:ln>
-        </p:spPr>
-        <p:txBody>
-          <a:bodyPr vert="horz" lIns="91440" tIns="45720" rIns="91440" bIns="45720" rtlCol="0" anchor="ctr"/>
-          <a:lstStyle/>
-          <a:p>
-            <a:endParaRPr lang="en-US"/>
-          </a:p>
-        </p:txBody>
-      </p:sp>
-      <p:sp>
-        <p:nvSpPr>
-          <p:cNvPr id="5" name="Notes Placeholder 4"/>
-          <p:cNvSpPr>
-            <a:spLocks noGrp="1"/>
-          </p:cNvSpPr>
-          <p:nvPr>
-            <p:ph type="body" sz="quarter" idx="3"/>
-          </p:nvPr>
-        </p:nvSpPr>
-        <p:spPr>
-          <a:xfrm>
-            <a:off x="685800" y="4343400"/>
-            <a:ext cx="5486400" cy="4114800"/>
-          </a:xfrm>
-          <a:prstGeom prst="rect">
-            <a:avLst/>
-          </a:prstGeom>
-        </p:spPr>
-        <p:txBody>
-          <a:bodyPr vert="horz" lIns="91440" tIns="45720" rIns="91440" bIns="45720" rtlCol="0"/>
-          <a:lstStyle/>
-          <a:p>
-            <a:pPr lvl="0"/>
-            <a:r>
-              <a:rPr lang="en-US" smtClean="0"/>
-              <a:t>Click to edit Master text styles</a:t>
-            </a:r>
-          </a:p>
-          <a:p>
-            <a:pPr lvl="1"/>
-            <a:r>
-              <a:rPr lang="en-US" smtClean="0"/>
-              <a:t>Second level</a:t>
-            </a:r>
-          </a:p>
-          <a:p>
-            <a:pPr lvl="2"/>
-            <a:r>
-              <a:rPr lang="en-US" smtClean="0"/>
-              <a:t>Third level</a:t>
-            </a:r>
-          </a:p>
-          <a:p>
-            <a:pPr lvl="3"/>
-            <a:r>
-              <a:rPr lang="en-US" smtClean="0"/>
-              <a:t>Fourth level</a:t>
-            </a:r>
-          </a:p>
-          <a:p>
-            <a:pPr lvl="4"/>
-            <a:r>
-              <a:rPr lang="en-US" smtClean="0"/>
-              <a:t>Fifth level</a:t>
-            </a:r>
-            <a:endParaRPr lang="en-US"/>
-          </a:p>
-        </p:txBody>
-      </p:sp>
-      <p:sp>
-        <p:nvSpPr>
-          <p:cNvPr id="6" name="Footer Placeholder 5"/>
-          <p:cNvSpPr>
-            <a:spLocks noGrp="1"/>
-          </p:cNvSpPr>
-          <p:nvPr>
-            <p:ph type="ftr" sz="quarter" idx="4"/>
-          </p:nvPr>
-        </p:nvSpPr>
-        <p:spPr>
-          <a:xfrm>
-            <a:off x="0" y="8685213"/>
-            <a:ext cx="2971800" cy="457200"/>
-          </a:xfrm>
-          <a:prstGeom prst="rect">
-            <a:avLst/>
-          </a:prstGeom>
-        </p:spPr>
-        <p:txBody>
-          <a:bodyPr vert="horz" lIns="91440" tIns="45720" rIns="91440" bIns="45720" rtlCol="0" anchor="b"/>
-          <a:lstStyle>
-            <a:lvl1pPr algn="l">
-              <a:defRPr sz="1200"/>
-            </a:lvl1pPr>
-          </a:lstStyle>
-          <a:p>
-            <a:endParaRPr lang="en-US"/>
-          </a:p>
-        </p:txBody>
-      </p:sp>
-      <p:sp>
-        <p:nvSpPr>
-          <p:cNvPr id="7" name="Slide Number Placeholder 6"/>
-          <p:cNvSpPr>
-            <a:spLocks noGrp="1"/>
-          </p:cNvSpPr>
-          <p:nvPr>
-            <p:ph type="sldNum" sz="quarter" idx="5"/>
-          </p:nvPr>
-        </p:nvSpPr>
-        <p:spPr>
-          <a:xfrm>
-            <a:off x="3884613" y="8685213"/>
-            <a:ext cx="2971800" cy="457200"/>
-          </a:xfrm>
-          <a:prstGeom prst="rect">
-            <a:avLst/>
-          </a:prstGeom>
-        </p:spPr>
-        <p:txBody>
-          <a:bodyPr vert="horz" lIns="91440" tIns="45720" rIns="91440" bIns="45720" rtlCol="0" anchor="b"/>
-          <a:lstStyle>
-            <a:lvl1pPr algn="r">
-              <a:defRPr sz="1200"/>
-            </a:lvl1pPr>
-          </a:lstStyle>
-          <a:p>
-            <a:fld id="{BB5E49A5-4136-284D-997B-48E1D791AD67}" type="slidenum">
-              <a:rPr lang="en-US" smtClean="0"/>
-              <a:t>‹#›</a:t>
-            </a:fld>
-            <a:endParaRPr lang="en-US"/>
-          </a:p>
-        </p:txBody>
-      </p:sp>
     </p:spTree>
     <p:extLst>
       <p:ext uri="{BB962C8B-B14F-4D97-AF65-F5344CB8AC3E}">
-        <p14:creationId xmlns:p14="http://schemas.microsoft.com/office/powerpoint/2010/main" val="2623252185"/>
+        <p14:creationId xmlns:p14="http://schemas.microsoft.com/office/powerpoint/2010/main" val="3955068227"/>
       </p:ext>
     </p:extLst>
   </p:cSld>
   <p:clrMap bg1="lt1" tx1="dk1" bg2="lt2" tx2="dk2" accent1="accent1" accent2="accent2" accent3="accent3" accent4="accent4" accent5="accent5" accent6="accent6" hlink="hlink" folHlink="folHlink"/>
   <p:notesStyle>
-    <a:lvl1pPr marL="0" algn="l" defTabSz="457200" rtl="0" eaLnBrk="1" latinLnBrk="0" hangingPunct="1">
+    <a:lvl1pPr marL="0" algn="l" defTabSz="914400" rtl="0" eaLnBrk="1" latinLnBrk="0" hangingPunct="1">
       <a:defRPr sz="1200" kern="1200">
         <a:solidFill>
           <a:schemeClr val="tx1"/>
@@ -397,7 +191,7 @@
         <a:cs typeface="+mn-cs"/>
       </a:defRPr>
     </a:lvl1pPr>
-    <a:lvl2pPr marL="457200" algn="l" defTabSz="457200" rtl="0" eaLnBrk="1" latinLnBrk="0" hangingPunct="1">
+    <a:lvl2pPr marL="457200" algn="l" defTabSz="914400" rtl="0" eaLnBrk="1" latinLnBrk="0" hangingPunct="1">
       <a:defRPr sz="1200" kern="1200">
         <a:solidFill>
           <a:schemeClr val="tx1"/>
@@ -407,7 +201,7 @@
         <a:cs typeface="+mn-cs"/>
       </a:defRPr>
     </a:lvl2pPr>
-    <a:lvl3pPr marL="914400" algn="l" defTabSz="457200" rtl="0" eaLnBrk="1" latinLnBrk="0" hangingPunct="1">
+    <a:lvl3pPr marL="914400" algn="l" defTabSz="914400" rtl="0" eaLnBrk="1" latinLnBrk="0" hangingPunct="1">
       <a:defRPr sz="1200" kern="1200">
         <a:solidFill>
           <a:schemeClr val="tx1"/>
@@ -417,7 +211,7 @@
         <a:cs typeface="+mn-cs"/>
       </a:defRPr>
     </a:lvl3pPr>
-    <a:lvl4pPr marL="1371600" algn="l" defTabSz="457200" rtl="0" eaLnBrk="1" latinLnBrk="0" hangingPunct="1">
+    <a:lvl4pPr marL="1371600" algn="l" defTabSz="914400" rtl="0" eaLnBrk="1" latinLnBrk="0" hangingPunct="1">
       <a:defRPr sz="1200" kern="1200">
         <a:solidFill>
           <a:schemeClr val="tx1"/>
@@ -427,7 +221,7 @@
         <a:cs typeface="+mn-cs"/>
       </a:defRPr>
     </a:lvl4pPr>
-    <a:lvl5pPr marL="1828800" algn="l" defTabSz="457200" rtl="0" eaLnBrk="1" latinLnBrk="0" hangingPunct="1">
+    <a:lvl5pPr marL="1828800" algn="l" defTabSz="914400" rtl="0" eaLnBrk="1" latinLnBrk="0" hangingPunct="1">
       <a:defRPr sz="1200" kern="1200">
         <a:solidFill>
           <a:schemeClr val="tx1"/>
@@ -437,7 +231,7 @@
         <a:cs typeface="+mn-cs"/>
       </a:defRPr>
     </a:lvl5pPr>
-    <a:lvl6pPr marL="2286000" algn="l" defTabSz="457200" rtl="0" eaLnBrk="1" latinLnBrk="0" hangingPunct="1">
+    <a:lvl6pPr marL="2286000" algn="l" defTabSz="914400" rtl="0" eaLnBrk="1" latinLnBrk="0" hangingPunct="1">
       <a:defRPr sz="1200" kern="1200">
         <a:solidFill>
           <a:schemeClr val="tx1"/>
@@ -447,7 +241,7 @@
         <a:cs typeface="+mn-cs"/>
       </a:defRPr>
     </a:lvl6pPr>
-    <a:lvl7pPr marL="2743200" algn="l" defTabSz="457200" rtl="0" eaLnBrk="1" latinLnBrk="0" hangingPunct="1">
+    <a:lvl7pPr marL="2743200" algn="l" defTabSz="914400" rtl="0" eaLnBrk="1" latinLnBrk="0" hangingPunct="1">
       <a:defRPr sz="1200" kern="1200">
         <a:solidFill>
           <a:schemeClr val="tx1"/>
@@ -457,7 +251,7 @@
         <a:cs typeface="+mn-cs"/>
       </a:defRPr>
     </a:lvl7pPr>
-    <a:lvl8pPr marL="3200400" algn="l" defTabSz="457200" rtl="0" eaLnBrk="1" latinLnBrk="0" hangingPunct="1">
+    <a:lvl8pPr marL="3200400" algn="l" defTabSz="914400" rtl="0" eaLnBrk="1" latinLnBrk="0" hangingPunct="1">
       <a:defRPr sz="1200" kern="1200">
         <a:solidFill>
           <a:schemeClr val="tx1"/>
@@ -467,7 +261,7 @@
         <a:cs typeface="+mn-cs"/>
       </a:defRPr>
     </a:lvl8pPr>
-    <a:lvl9pPr marL="3657600" algn="l" defTabSz="457200" rtl="0" eaLnBrk="1" latinLnBrk="0" hangingPunct="1">
+    <a:lvl9pPr marL="3657600" algn="l" defTabSz="914400" rtl="0" eaLnBrk="1" latinLnBrk="0" hangingPunct="1">
       <a:defRPr sz="1200" kern="1200">
         <a:solidFill>
           <a:schemeClr val="tx1"/>
@@ -482,7 +276,7 @@
 </file>
 
 <file path=ppt/notesSlides/notesSlide1.xml><?xml version="1.0" encoding="utf-8"?>
-<p:notes xmlns:a="http://schemas.openxmlformats.org/drawingml/2006/main" xmlns:p="http://schemas.openxmlformats.org/presentationml/2006/main" xmlns:r="http://schemas.openxmlformats.org/officeDocument/2006/relationships">
+<p:notes xmlns:a="http://schemas.openxmlformats.org/drawingml/2006/main" xmlns:r="http://schemas.openxmlformats.org/officeDocument/2006/relationships" xmlns:p="http://schemas.openxmlformats.org/presentationml/2006/main">
   <p:cSld>
     <p:spTree>
       <p:nvGrpSpPr>
@@ -502,7 +296,7 @@
         <p:nvSpPr>
           <p:cNvPr id="2" name="Slide Image Placeholder 1"/>
           <p:cNvSpPr>
-            <a:spLocks noGrp="1"/>
+            <a:spLocks noGrp="1" noRot="1" noChangeAspect="1"/>
           </p:cNvSpPr>
           <p:nvPr>
             <p:ph type="sldImg" idx="2"/>
@@ -517,7 +311,7 @@
             <a:spLocks noGrp="1"/>
           </p:cNvSpPr>
           <p:nvPr>
-            <p:ph type="body" idx="3" sz="quarter"/>
+            <p:ph type="body" sz="quarter" idx="3"/>
           </p:nvPr>
         </p:nvSpPr>
         <p:spPr/>
@@ -526,6 +320,7 @@
           <a:lstStyle/>
           <a:p>
             <a:r>
+              <a:rPr dirty="0"/>
               <a:t>Aegis is the governance layer that makes any AI agent deployable in a regulated environment. The one-sentence positioning (GTM doc §1): build the paved road once on AWS, and every agent, model, and tool inherits identity, authorization, audit, compliance, hallucination control, and chargeback automatically. This is a modular deck: a shared executive core with swappable appendices for a customer audience and for AWS field/leadership. Set the frame: governance is the product; agents are add-ons that ride it.</a:t>
             </a:r>
           </a:p>
@@ -538,7 +333,7 @@
             <a:spLocks noGrp="1"/>
           </p:cNvSpPr>
           <p:nvPr>
-            <p:ph type="sldNum" idx="5" sz="quarter"/>
+            <p:ph type="sldNum" sz="quarter" idx="5"/>
           </p:nvPr>
         </p:nvSpPr>
         <p:spPr/>
@@ -552,7 +347,7 @@
 </file>
 
 <file path=ppt/notesSlides/notesSlide10.xml><?xml version="1.0" encoding="utf-8"?>
-<p:notes xmlns:a="http://schemas.openxmlformats.org/drawingml/2006/main" xmlns:p="http://schemas.openxmlformats.org/presentationml/2006/main" xmlns:r="http://schemas.openxmlformats.org/officeDocument/2006/relationships">
+<p:notes xmlns:a="http://schemas.openxmlformats.org/drawingml/2006/main" xmlns:r="http://schemas.openxmlformats.org/officeDocument/2006/relationships" xmlns:p="http://schemas.openxmlformats.org/presentationml/2006/main">
   <p:cSld>
     <p:spTree>
       <p:nvGrpSpPr>
@@ -572,7 +367,7 @@
         <p:nvSpPr>
           <p:cNvPr id="2" name="Slide Image Placeholder 1"/>
           <p:cNvSpPr>
-            <a:spLocks noGrp="1"/>
+            <a:spLocks noGrp="1" noRot="1" noChangeAspect="1"/>
           </p:cNvSpPr>
           <p:nvPr>
             <p:ph type="sldImg" idx="2"/>
@@ -587,7 +382,7 @@
             <a:spLocks noGrp="1"/>
           </p:cNvSpPr>
           <p:nvPr>
-            <p:ph type="body" idx="3" sz="quarter"/>
+            <p:ph type="body" sz="quarter" idx="3"/>
           </p:nvPr>
         </p:nvSpPr>
         <p:spPr/>
@@ -608,7 +403,7 @@
             <a:spLocks noGrp="1"/>
           </p:cNvSpPr>
           <p:nvPr>
-            <p:ph type="sldNum" idx="5" sz="quarter"/>
+            <p:ph type="sldNum" sz="quarter" idx="5"/>
           </p:nvPr>
         </p:nvSpPr>
         <p:spPr/>
@@ -622,7 +417,7 @@
 </file>
 
 <file path=ppt/notesSlides/notesSlide11.xml><?xml version="1.0" encoding="utf-8"?>
-<p:notes xmlns:a="http://schemas.openxmlformats.org/drawingml/2006/main" xmlns:p="http://schemas.openxmlformats.org/presentationml/2006/main" xmlns:r="http://schemas.openxmlformats.org/officeDocument/2006/relationships">
+<p:notes xmlns:a="http://schemas.openxmlformats.org/drawingml/2006/main" xmlns:r="http://schemas.openxmlformats.org/officeDocument/2006/relationships" xmlns:p="http://schemas.openxmlformats.org/presentationml/2006/main">
   <p:cSld>
     <p:spTree>
       <p:nvGrpSpPr>
@@ -642,7 +437,7 @@
         <p:nvSpPr>
           <p:cNvPr id="2" name="Slide Image Placeholder 1"/>
           <p:cNvSpPr>
-            <a:spLocks noGrp="1"/>
+            <a:spLocks noGrp="1" noRot="1" noChangeAspect="1"/>
           </p:cNvSpPr>
           <p:nvPr>
             <p:ph type="sldImg" idx="2"/>
@@ -657,7 +452,7 @@
             <a:spLocks noGrp="1"/>
           </p:cNvSpPr>
           <p:nvPr>
-            <p:ph type="body" idx="3" sz="quarter"/>
+            <p:ph type="body" sz="quarter" idx="3"/>
           </p:nvPr>
         </p:nvSpPr>
         <p:spPr/>
@@ -678,7 +473,7 @@
             <a:spLocks noGrp="1"/>
           </p:cNvSpPr>
           <p:nvPr>
-            <p:ph type="sldNum" idx="5" sz="quarter"/>
+            <p:ph type="sldNum" sz="quarter" idx="5"/>
           </p:nvPr>
         </p:nvSpPr>
         <p:spPr/>
@@ -692,7 +487,7 @@
 </file>
 
 <file path=ppt/notesSlides/notesSlide12.xml><?xml version="1.0" encoding="utf-8"?>
-<p:notes xmlns:a="http://schemas.openxmlformats.org/drawingml/2006/main" xmlns:p="http://schemas.openxmlformats.org/presentationml/2006/main" xmlns:r="http://schemas.openxmlformats.org/officeDocument/2006/relationships">
+<p:notes xmlns:a="http://schemas.openxmlformats.org/drawingml/2006/main" xmlns:r="http://schemas.openxmlformats.org/officeDocument/2006/relationships" xmlns:p="http://schemas.openxmlformats.org/presentationml/2006/main">
   <p:cSld>
     <p:spTree>
       <p:nvGrpSpPr>
@@ -712,7 +507,7 @@
         <p:nvSpPr>
           <p:cNvPr id="2" name="Slide Image Placeholder 1"/>
           <p:cNvSpPr>
-            <a:spLocks noGrp="1"/>
+            <a:spLocks noGrp="1" noRot="1" noChangeAspect="1"/>
           </p:cNvSpPr>
           <p:nvPr>
             <p:ph type="sldImg" idx="2"/>
@@ -727,7 +522,7 @@
             <a:spLocks noGrp="1"/>
           </p:cNvSpPr>
           <p:nvPr>
-            <p:ph type="body" idx="3" sz="quarter"/>
+            <p:ph type="body" sz="quarter" idx="3"/>
           </p:nvPr>
         </p:nvSpPr>
         <p:spPr/>
@@ -748,7 +543,7 @@
             <a:spLocks noGrp="1"/>
           </p:cNvSpPr>
           <p:nvPr>
-            <p:ph type="sldNum" idx="5" sz="quarter"/>
+            <p:ph type="sldNum" sz="quarter" idx="5"/>
           </p:nvPr>
         </p:nvSpPr>
         <p:spPr/>
@@ -762,7 +557,7 @@
 </file>
 
 <file path=ppt/notesSlides/notesSlide13.xml><?xml version="1.0" encoding="utf-8"?>
-<p:notes xmlns:a="http://schemas.openxmlformats.org/drawingml/2006/main" xmlns:p="http://schemas.openxmlformats.org/presentationml/2006/main" xmlns:r="http://schemas.openxmlformats.org/officeDocument/2006/relationships">
+<p:notes xmlns:a="http://schemas.openxmlformats.org/drawingml/2006/main" xmlns:r="http://schemas.openxmlformats.org/officeDocument/2006/relationships" xmlns:p="http://schemas.openxmlformats.org/presentationml/2006/main">
   <p:cSld>
     <p:spTree>
       <p:nvGrpSpPr>
@@ -782,7 +577,7 @@
         <p:nvSpPr>
           <p:cNvPr id="2" name="Slide Image Placeholder 1"/>
           <p:cNvSpPr>
-            <a:spLocks noGrp="1"/>
+            <a:spLocks noGrp="1" noRot="1" noChangeAspect="1"/>
           </p:cNvSpPr>
           <p:nvPr>
             <p:ph type="sldImg" idx="2"/>
@@ -797,7 +592,7 @@
             <a:spLocks noGrp="1"/>
           </p:cNvSpPr>
           <p:nvPr>
-            <p:ph type="body" idx="3" sz="quarter"/>
+            <p:ph type="body" sz="quarter" idx="3"/>
           </p:nvPr>
         </p:nvSpPr>
         <p:spPr/>
@@ -818,7 +613,7 @@
             <a:spLocks noGrp="1"/>
           </p:cNvSpPr>
           <p:nvPr>
-            <p:ph type="sldNum" idx="5" sz="quarter"/>
+            <p:ph type="sldNum" sz="quarter" idx="5"/>
           </p:nvPr>
         </p:nvSpPr>
         <p:spPr/>
@@ -832,7 +627,7 @@
 </file>
 
 <file path=ppt/notesSlides/notesSlide14.xml><?xml version="1.0" encoding="utf-8"?>
-<p:notes xmlns:a="http://schemas.openxmlformats.org/drawingml/2006/main" xmlns:p="http://schemas.openxmlformats.org/presentationml/2006/main" xmlns:r="http://schemas.openxmlformats.org/officeDocument/2006/relationships">
+<p:notes xmlns:a="http://schemas.openxmlformats.org/drawingml/2006/main" xmlns:r="http://schemas.openxmlformats.org/officeDocument/2006/relationships" xmlns:p="http://schemas.openxmlformats.org/presentationml/2006/main">
   <p:cSld>
     <p:spTree>
       <p:nvGrpSpPr>
@@ -852,7 +647,7 @@
         <p:nvSpPr>
           <p:cNvPr id="2" name="Slide Image Placeholder 1"/>
           <p:cNvSpPr>
-            <a:spLocks noGrp="1"/>
+            <a:spLocks noGrp="1" noRot="1" noChangeAspect="1"/>
           </p:cNvSpPr>
           <p:nvPr>
             <p:ph type="sldImg" idx="2"/>
@@ -867,7 +662,7 @@
             <a:spLocks noGrp="1"/>
           </p:cNvSpPr>
           <p:nvPr>
-            <p:ph type="body" idx="3" sz="quarter"/>
+            <p:ph type="body" sz="quarter" idx="3"/>
           </p:nvPr>
         </p:nvSpPr>
         <p:spPr/>
@@ -888,7 +683,7 @@
             <a:spLocks noGrp="1"/>
           </p:cNvSpPr>
           <p:nvPr>
-            <p:ph type="sldNum" idx="5" sz="quarter"/>
+            <p:ph type="sldNum" sz="quarter" idx="5"/>
           </p:nvPr>
         </p:nvSpPr>
         <p:spPr/>
@@ -902,7 +697,7 @@
 </file>
 
 <file path=ppt/notesSlides/notesSlide15.xml><?xml version="1.0" encoding="utf-8"?>
-<p:notes xmlns:a="http://schemas.openxmlformats.org/drawingml/2006/main" xmlns:p="http://schemas.openxmlformats.org/presentationml/2006/main" xmlns:r="http://schemas.openxmlformats.org/officeDocument/2006/relationships">
+<p:notes xmlns:a="http://schemas.openxmlformats.org/drawingml/2006/main" xmlns:r="http://schemas.openxmlformats.org/officeDocument/2006/relationships" xmlns:p="http://schemas.openxmlformats.org/presentationml/2006/main">
   <p:cSld>
     <p:spTree>
       <p:nvGrpSpPr>
@@ -922,7 +717,7 @@
         <p:nvSpPr>
           <p:cNvPr id="2" name="Slide Image Placeholder 1"/>
           <p:cNvSpPr>
-            <a:spLocks noGrp="1"/>
+            <a:spLocks noGrp="1" noRot="1" noChangeAspect="1"/>
           </p:cNvSpPr>
           <p:nvPr>
             <p:ph type="sldImg" idx="2"/>
@@ -937,7 +732,7 @@
             <a:spLocks noGrp="1"/>
           </p:cNvSpPr>
           <p:nvPr>
-            <p:ph type="body" idx="3" sz="quarter"/>
+            <p:ph type="body" sz="quarter" idx="3"/>
           </p:nvPr>
         </p:nvSpPr>
         <p:spPr/>
@@ -958,7 +753,7 @@
             <a:spLocks noGrp="1"/>
           </p:cNvSpPr>
           <p:nvPr>
-            <p:ph type="sldNum" idx="5" sz="quarter"/>
+            <p:ph type="sldNum" sz="quarter" idx="5"/>
           </p:nvPr>
         </p:nvSpPr>
         <p:spPr/>
@@ -972,7 +767,7 @@
 </file>
 
 <file path=ppt/notesSlides/notesSlide16.xml><?xml version="1.0" encoding="utf-8"?>
-<p:notes xmlns:a="http://schemas.openxmlformats.org/drawingml/2006/main" xmlns:p="http://schemas.openxmlformats.org/presentationml/2006/main" xmlns:r="http://schemas.openxmlformats.org/officeDocument/2006/relationships">
+<p:notes xmlns:a="http://schemas.openxmlformats.org/drawingml/2006/main" xmlns:r="http://schemas.openxmlformats.org/officeDocument/2006/relationships" xmlns:p="http://schemas.openxmlformats.org/presentationml/2006/main">
   <p:cSld>
     <p:spTree>
       <p:nvGrpSpPr>
@@ -992,7 +787,7 @@
         <p:nvSpPr>
           <p:cNvPr id="2" name="Slide Image Placeholder 1"/>
           <p:cNvSpPr>
-            <a:spLocks noGrp="1"/>
+            <a:spLocks noGrp="1" noRot="1" noChangeAspect="1"/>
           </p:cNvSpPr>
           <p:nvPr>
             <p:ph type="sldImg" idx="2"/>
@@ -1007,7 +802,7 @@
             <a:spLocks noGrp="1"/>
           </p:cNvSpPr>
           <p:nvPr>
-            <p:ph type="body" idx="3" sz="quarter"/>
+            <p:ph type="body" sz="quarter" idx="3"/>
           </p:nvPr>
         </p:nvSpPr>
         <p:spPr/>
@@ -1028,7 +823,7 @@
             <a:spLocks noGrp="1"/>
           </p:cNvSpPr>
           <p:nvPr>
-            <p:ph type="sldNum" idx="5" sz="quarter"/>
+            <p:ph type="sldNum" sz="quarter" idx="5"/>
           </p:nvPr>
         </p:nvSpPr>
         <p:spPr/>
@@ -1042,7 +837,7 @@
 </file>
 
 <file path=ppt/notesSlides/notesSlide17.xml><?xml version="1.0" encoding="utf-8"?>
-<p:notes xmlns:a="http://schemas.openxmlformats.org/drawingml/2006/main" xmlns:p="http://schemas.openxmlformats.org/presentationml/2006/main" xmlns:r="http://schemas.openxmlformats.org/officeDocument/2006/relationships">
+<p:notes xmlns:a="http://schemas.openxmlformats.org/drawingml/2006/main" xmlns:r="http://schemas.openxmlformats.org/officeDocument/2006/relationships" xmlns:p="http://schemas.openxmlformats.org/presentationml/2006/main">
   <p:cSld>
     <p:spTree>
       <p:nvGrpSpPr>
@@ -1062,7 +857,7 @@
         <p:nvSpPr>
           <p:cNvPr id="2" name="Slide Image Placeholder 1"/>
           <p:cNvSpPr>
-            <a:spLocks noGrp="1"/>
+            <a:spLocks noGrp="1" noRot="1" noChangeAspect="1"/>
           </p:cNvSpPr>
           <p:nvPr>
             <p:ph type="sldImg" idx="2"/>
@@ -1077,7 +872,7 @@
             <a:spLocks noGrp="1"/>
           </p:cNvSpPr>
           <p:nvPr>
-            <p:ph type="body" idx="3" sz="quarter"/>
+            <p:ph type="body" sz="quarter" idx="3"/>
           </p:nvPr>
         </p:nvSpPr>
         <p:spPr/>
@@ -1098,7 +893,7 @@
             <a:spLocks noGrp="1"/>
           </p:cNvSpPr>
           <p:nvPr>
-            <p:ph type="sldNum" idx="5" sz="quarter"/>
+            <p:ph type="sldNum" sz="quarter" idx="5"/>
           </p:nvPr>
         </p:nvSpPr>
         <p:spPr/>
@@ -1112,7 +907,7 @@
 </file>
 
 <file path=ppt/notesSlides/notesSlide18.xml><?xml version="1.0" encoding="utf-8"?>
-<p:notes xmlns:a="http://schemas.openxmlformats.org/drawingml/2006/main" xmlns:p="http://schemas.openxmlformats.org/presentationml/2006/main" xmlns:r="http://schemas.openxmlformats.org/officeDocument/2006/relationships">
+<p:notes xmlns:a="http://schemas.openxmlformats.org/drawingml/2006/main" xmlns:r="http://schemas.openxmlformats.org/officeDocument/2006/relationships" xmlns:p="http://schemas.openxmlformats.org/presentationml/2006/main">
   <p:cSld>
     <p:spTree>
       <p:nvGrpSpPr>
@@ -1132,7 +927,7 @@
         <p:nvSpPr>
           <p:cNvPr id="2" name="Slide Image Placeholder 1"/>
           <p:cNvSpPr>
-            <a:spLocks noGrp="1"/>
+            <a:spLocks noGrp="1" noRot="1" noChangeAspect="1"/>
           </p:cNvSpPr>
           <p:nvPr>
             <p:ph type="sldImg" idx="2"/>
@@ -1147,7 +942,7 @@
             <a:spLocks noGrp="1"/>
           </p:cNvSpPr>
           <p:nvPr>
-            <p:ph type="body" idx="3" sz="quarter"/>
+            <p:ph type="body" sz="quarter" idx="3"/>
           </p:nvPr>
         </p:nvSpPr>
         <p:spPr/>
@@ -1168,7 +963,7 @@
             <a:spLocks noGrp="1"/>
           </p:cNvSpPr>
           <p:nvPr>
-            <p:ph type="sldNum" idx="5" sz="quarter"/>
+            <p:ph type="sldNum" sz="quarter" idx="5"/>
           </p:nvPr>
         </p:nvSpPr>
         <p:spPr/>
@@ -1182,7 +977,7 @@
 </file>
 
 <file path=ppt/notesSlides/notesSlide19.xml><?xml version="1.0" encoding="utf-8"?>
-<p:notes xmlns:a="http://schemas.openxmlformats.org/drawingml/2006/main" xmlns:p="http://schemas.openxmlformats.org/presentationml/2006/main" xmlns:r="http://schemas.openxmlformats.org/officeDocument/2006/relationships">
+<p:notes xmlns:a="http://schemas.openxmlformats.org/drawingml/2006/main" xmlns:r="http://schemas.openxmlformats.org/officeDocument/2006/relationships" xmlns:p="http://schemas.openxmlformats.org/presentationml/2006/main">
   <p:cSld>
     <p:spTree>
       <p:nvGrpSpPr>
@@ -1202,7 +997,7 @@
         <p:nvSpPr>
           <p:cNvPr id="2" name="Slide Image Placeholder 1"/>
           <p:cNvSpPr>
-            <a:spLocks noGrp="1"/>
+            <a:spLocks noGrp="1" noRot="1" noChangeAspect="1"/>
           </p:cNvSpPr>
           <p:nvPr>
             <p:ph type="sldImg" idx="2"/>
@@ -1217,7 +1012,7 @@
             <a:spLocks noGrp="1"/>
           </p:cNvSpPr>
           <p:nvPr>
-            <p:ph type="body" idx="3" sz="quarter"/>
+            <p:ph type="body" sz="quarter" idx="3"/>
           </p:nvPr>
         </p:nvSpPr>
         <p:spPr/>
@@ -1238,7 +1033,7 @@
             <a:spLocks noGrp="1"/>
           </p:cNvSpPr>
           <p:nvPr>
-            <p:ph type="sldNum" idx="5" sz="quarter"/>
+            <p:ph type="sldNum" sz="quarter" idx="5"/>
           </p:nvPr>
         </p:nvSpPr>
         <p:spPr/>
@@ -1252,7 +1047,7 @@
 </file>
 
 <file path=ppt/notesSlides/notesSlide2.xml><?xml version="1.0" encoding="utf-8"?>
-<p:notes xmlns:a="http://schemas.openxmlformats.org/drawingml/2006/main" xmlns:p="http://schemas.openxmlformats.org/presentationml/2006/main" xmlns:r="http://schemas.openxmlformats.org/officeDocument/2006/relationships">
+<p:notes xmlns:a="http://schemas.openxmlformats.org/drawingml/2006/main" xmlns:r="http://schemas.openxmlformats.org/officeDocument/2006/relationships" xmlns:p="http://schemas.openxmlformats.org/presentationml/2006/main">
   <p:cSld>
     <p:spTree>
       <p:nvGrpSpPr>
@@ -1272,7 +1067,7 @@
         <p:nvSpPr>
           <p:cNvPr id="2" name="Slide Image Placeholder 1"/>
           <p:cNvSpPr>
-            <a:spLocks noGrp="1"/>
+            <a:spLocks noGrp="1" noRot="1" noChangeAspect="1"/>
           </p:cNvSpPr>
           <p:nvPr>
             <p:ph type="sldImg" idx="2"/>
@@ -1287,7 +1082,7 @@
             <a:spLocks noGrp="1"/>
           </p:cNvSpPr>
           <p:nvPr>
-            <p:ph type="body" idx="3" sz="quarter"/>
+            <p:ph type="body" sz="quarter" idx="3"/>
           </p:nvPr>
         </p:nvSpPr>
         <p:spPr/>
@@ -1308,7 +1103,7 @@
             <a:spLocks noGrp="1"/>
           </p:cNvSpPr>
           <p:nvPr>
-            <p:ph type="sldNum" idx="5" sz="quarter"/>
+            <p:ph type="sldNum" sz="quarter" idx="5"/>
           </p:nvPr>
         </p:nvSpPr>
         <p:spPr/>
@@ -1322,7 +1117,7 @@
 </file>
 
 <file path=ppt/notesSlides/notesSlide20.xml><?xml version="1.0" encoding="utf-8"?>
-<p:notes xmlns:a="http://schemas.openxmlformats.org/drawingml/2006/main" xmlns:p="http://schemas.openxmlformats.org/presentationml/2006/main" xmlns:r="http://schemas.openxmlformats.org/officeDocument/2006/relationships">
+<p:notes xmlns:a="http://schemas.openxmlformats.org/drawingml/2006/main" xmlns:r="http://schemas.openxmlformats.org/officeDocument/2006/relationships" xmlns:p="http://schemas.openxmlformats.org/presentationml/2006/main">
   <p:cSld>
     <p:spTree>
       <p:nvGrpSpPr>
@@ -1342,7 +1137,7 @@
         <p:nvSpPr>
           <p:cNvPr id="2" name="Slide Image Placeholder 1"/>
           <p:cNvSpPr>
-            <a:spLocks noGrp="1"/>
+            <a:spLocks noGrp="1" noRot="1" noChangeAspect="1"/>
           </p:cNvSpPr>
           <p:nvPr>
             <p:ph type="sldImg" idx="2"/>
@@ -1357,7 +1152,7 @@
             <a:spLocks noGrp="1"/>
           </p:cNvSpPr>
           <p:nvPr>
-            <p:ph type="body" idx="3" sz="quarter"/>
+            <p:ph type="body" sz="quarter" idx="3"/>
           </p:nvPr>
         </p:nvSpPr>
         <p:spPr/>
@@ -1378,7 +1173,7 @@
             <a:spLocks noGrp="1"/>
           </p:cNvSpPr>
           <p:nvPr>
-            <p:ph type="sldNum" idx="5" sz="quarter"/>
+            <p:ph type="sldNum" sz="quarter" idx="5"/>
           </p:nvPr>
         </p:nvSpPr>
         <p:spPr/>
@@ -1392,7 +1187,7 @@
 </file>
 
 <file path=ppt/notesSlides/notesSlide21.xml><?xml version="1.0" encoding="utf-8"?>
-<p:notes xmlns:a="http://schemas.openxmlformats.org/drawingml/2006/main" xmlns:p="http://schemas.openxmlformats.org/presentationml/2006/main" xmlns:r="http://schemas.openxmlformats.org/officeDocument/2006/relationships">
+<p:notes xmlns:a="http://schemas.openxmlformats.org/drawingml/2006/main" xmlns:r="http://schemas.openxmlformats.org/officeDocument/2006/relationships" xmlns:p="http://schemas.openxmlformats.org/presentationml/2006/main">
   <p:cSld>
     <p:spTree>
       <p:nvGrpSpPr>
@@ -1412,7 +1207,7 @@
         <p:nvSpPr>
           <p:cNvPr id="2" name="Slide Image Placeholder 1"/>
           <p:cNvSpPr>
-            <a:spLocks noGrp="1"/>
+            <a:spLocks noGrp="1" noRot="1" noChangeAspect="1"/>
           </p:cNvSpPr>
           <p:nvPr>
             <p:ph type="sldImg" idx="2"/>
@@ -1427,7 +1222,7 @@
             <a:spLocks noGrp="1"/>
           </p:cNvSpPr>
           <p:nvPr>
-            <p:ph type="body" idx="3" sz="quarter"/>
+            <p:ph type="body" sz="quarter" idx="3"/>
           </p:nvPr>
         </p:nvSpPr>
         <p:spPr/>
@@ -1448,7 +1243,7 @@
             <a:spLocks noGrp="1"/>
           </p:cNvSpPr>
           <p:nvPr>
-            <p:ph type="sldNum" idx="5" sz="quarter"/>
+            <p:ph type="sldNum" sz="quarter" idx="5"/>
           </p:nvPr>
         </p:nvSpPr>
         <p:spPr/>
@@ -1462,7 +1257,7 @@
 </file>
 
 <file path=ppt/notesSlides/notesSlide22.xml><?xml version="1.0" encoding="utf-8"?>
-<p:notes xmlns:a="http://schemas.openxmlformats.org/drawingml/2006/main" xmlns:p="http://schemas.openxmlformats.org/presentationml/2006/main" xmlns:r="http://schemas.openxmlformats.org/officeDocument/2006/relationships">
+<p:notes xmlns:a="http://schemas.openxmlformats.org/drawingml/2006/main" xmlns:r="http://schemas.openxmlformats.org/officeDocument/2006/relationships" xmlns:p="http://schemas.openxmlformats.org/presentationml/2006/main">
   <p:cSld>
     <p:spTree>
       <p:nvGrpSpPr>
@@ -1482,7 +1277,7 @@
         <p:nvSpPr>
           <p:cNvPr id="2" name="Slide Image Placeholder 1"/>
           <p:cNvSpPr>
-            <a:spLocks noGrp="1"/>
+            <a:spLocks noGrp="1" noRot="1" noChangeAspect="1"/>
           </p:cNvSpPr>
           <p:nvPr>
             <p:ph type="sldImg" idx="2"/>
@@ -1497,7 +1292,7 @@
             <a:spLocks noGrp="1"/>
           </p:cNvSpPr>
           <p:nvPr>
-            <p:ph type="body" idx="3" sz="quarter"/>
+            <p:ph type="body" sz="quarter" idx="3"/>
           </p:nvPr>
         </p:nvSpPr>
         <p:spPr/>
@@ -1518,7 +1313,7 @@
             <a:spLocks noGrp="1"/>
           </p:cNvSpPr>
           <p:nvPr>
-            <p:ph type="sldNum" idx="5" sz="quarter"/>
+            <p:ph type="sldNum" sz="quarter" idx="5"/>
           </p:nvPr>
         </p:nvSpPr>
         <p:spPr/>
@@ -1532,7 +1327,7 @@
 </file>
 
 <file path=ppt/notesSlides/notesSlide23.xml><?xml version="1.0" encoding="utf-8"?>
-<p:notes xmlns:a="http://schemas.openxmlformats.org/drawingml/2006/main" xmlns:p="http://schemas.openxmlformats.org/presentationml/2006/main" xmlns:r="http://schemas.openxmlformats.org/officeDocument/2006/relationships">
+<p:notes xmlns:a="http://schemas.openxmlformats.org/drawingml/2006/main" xmlns:r="http://schemas.openxmlformats.org/officeDocument/2006/relationships" xmlns:p="http://schemas.openxmlformats.org/presentationml/2006/main">
   <p:cSld>
     <p:spTree>
       <p:nvGrpSpPr>
@@ -1552,7 +1347,7 @@
         <p:nvSpPr>
           <p:cNvPr id="2" name="Slide Image Placeholder 1"/>
           <p:cNvSpPr>
-            <a:spLocks noGrp="1"/>
+            <a:spLocks noGrp="1" noRot="1" noChangeAspect="1"/>
           </p:cNvSpPr>
           <p:nvPr>
             <p:ph type="sldImg" idx="2"/>
@@ -1567,7 +1362,7 @@
             <a:spLocks noGrp="1"/>
           </p:cNvSpPr>
           <p:nvPr>
-            <p:ph type="body" idx="3" sz="quarter"/>
+            <p:ph type="body" sz="quarter" idx="3"/>
           </p:nvPr>
         </p:nvSpPr>
         <p:spPr/>
@@ -1588,7 +1383,7 @@
             <a:spLocks noGrp="1"/>
           </p:cNvSpPr>
           <p:nvPr>
-            <p:ph type="sldNum" idx="5" sz="quarter"/>
+            <p:ph type="sldNum" sz="quarter" idx="5"/>
           </p:nvPr>
         </p:nvSpPr>
         <p:spPr/>
@@ -1602,7 +1397,7 @@
 </file>
 
 <file path=ppt/notesSlides/notesSlide3.xml><?xml version="1.0" encoding="utf-8"?>
-<p:notes xmlns:a="http://schemas.openxmlformats.org/drawingml/2006/main" xmlns:p="http://schemas.openxmlformats.org/presentationml/2006/main" xmlns:r="http://schemas.openxmlformats.org/officeDocument/2006/relationships">
+<p:notes xmlns:a="http://schemas.openxmlformats.org/drawingml/2006/main" xmlns:r="http://schemas.openxmlformats.org/officeDocument/2006/relationships" xmlns:p="http://schemas.openxmlformats.org/presentationml/2006/main">
   <p:cSld>
     <p:spTree>
       <p:nvGrpSpPr>
@@ -1622,7 +1417,7 @@
         <p:nvSpPr>
           <p:cNvPr id="2" name="Slide Image Placeholder 1"/>
           <p:cNvSpPr>
-            <a:spLocks noGrp="1"/>
+            <a:spLocks noGrp="1" noRot="1" noChangeAspect="1"/>
           </p:cNvSpPr>
           <p:nvPr>
             <p:ph type="sldImg" idx="2"/>
@@ -1637,7 +1432,7 @@
             <a:spLocks noGrp="1"/>
           </p:cNvSpPr>
           <p:nvPr>
-            <p:ph type="body" idx="3" sz="quarter"/>
+            <p:ph type="body" sz="quarter" idx="3"/>
           </p:nvPr>
         </p:nvSpPr>
         <p:spPr/>
@@ -1658,7 +1453,7 @@
             <a:spLocks noGrp="1"/>
           </p:cNvSpPr>
           <p:nvPr>
-            <p:ph type="sldNum" idx="5" sz="quarter"/>
+            <p:ph type="sldNum" sz="quarter" idx="5"/>
           </p:nvPr>
         </p:nvSpPr>
         <p:spPr/>
@@ -1672,7 +1467,7 @@
 </file>
 
 <file path=ppt/notesSlides/notesSlide4.xml><?xml version="1.0" encoding="utf-8"?>
-<p:notes xmlns:a="http://schemas.openxmlformats.org/drawingml/2006/main" xmlns:p="http://schemas.openxmlformats.org/presentationml/2006/main" xmlns:r="http://schemas.openxmlformats.org/officeDocument/2006/relationships">
+<p:notes xmlns:a="http://schemas.openxmlformats.org/drawingml/2006/main" xmlns:r="http://schemas.openxmlformats.org/officeDocument/2006/relationships" xmlns:p="http://schemas.openxmlformats.org/presentationml/2006/main">
   <p:cSld>
     <p:spTree>
       <p:nvGrpSpPr>
@@ -1692,7 +1487,7 @@
         <p:nvSpPr>
           <p:cNvPr id="2" name="Slide Image Placeholder 1"/>
           <p:cNvSpPr>
-            <a:spLocks noGrp="1"/>
+            <a:spLocks noGrp="1" noRot="1" noChangeAspect="1"/>
           </p:cNvSpPr>
           <p:nvPr>
             <p:ph type="sldImg" idx="2"/>
@@ -1707,7 +1502,7 @@
             <a:spLocks noGrp="1"/>
           </p:cNvSpPr>
           <p:nvPr>
-            <p:ph type="body" idx="3" sz="quarter"/>
+            <p:ph type="body" sz="quarter" idx="3"/>
           </p:nvPr>
         </p:nvSpPr>
         <p:spPr/>
@@ -1728,7 +1523,7 @@
             <a:spLocks noGrp="1"/>
           </p:cNvSpPr>
           <p:nvPr>
-            <p:ph type="sldNum" idx="5" sz="quarter"/>
+            <p:ph type="sldNum" sz="quarter" idx="5"/>
           </p:nvPr>
         </p:nvSpPr>
         <p:spPr/>
@@ -1742,7 +1537,7 @@
 </file>
 
 <file path=ppt/notesSlides/notesSlide5.xml><?xml version="1.0" encoding="utf-8"?>
-<p:notes xmlns:a="http://schemas.openxmlformats.org/drawingml/2006/main" xmlns:p="http://schemas.openxmlformats.org/presentationml/2006/main" xmlns:r="http://schemas.openxmlformats.org/officeDocument/2006/relationships">
+<p:notes xmlns:a="http://schemas.openxmlformats.org/drawingml/2006/main" xmlns:r="http://schemas.openxmlformats.org/officeDocument/2006/relationships" xmlns:p="http://schemas.openxmlformats.org/presentationml/2006/main">
   <p:cSld>
     <p:spTree>
       <p:nvGrpSpPr>
@@ -1762,7 +1557,7 @@
         <p:nvSpPr>
           <p:cNvPr id="2" name="Slide Image Placeholder 1"/>
           <p:cNvSpPr>
-            <a:spLocks noGrp="1"/>
+            <a:spLocks noGrp="1" noRot="1" noChangeAspect="1"/>
           </p:cNvSpPr>
           <p:nvPr>
             <p:ph type="sldImg" idx="2"/>
@@ -1777,7 +1572,7 @@
             <a:spLocks noGrp="1"/>
           </p:cNvSpPr>
           <p:nvPr>
-            <p:ph type="body" idx="3" sz="quarter"/>
+            <p:ph type="body" sz="quarter" idx="3"/>
           </p:nvPr>
         </p:nvSpPr>
         <p:spPr/>
@@ -1798,7 +1593,7 @@
             <a:spLocks noGrp="1"/>
           </p:cNvSpPr>
           <p:nvPr>
-            <p:ph type="sldNum" idx="5" sz="quarter"/>
+            <p:ph type="sldNum" sz="quarter" idx="5"/>
           </p:nvPr>
         </p:nvSpPr>
         <p:spPr/>
@@ -1812,7 +1607,7 @@
 </file>
 
 <file path=ppt/notesSlides/notesSlide6.xml><?xml version="1.0" encoding="utf-8"?>
-<p:notes xmlns:a="http://schemas.openxmlformats.org/drawingml/2006/main" xmlns:p="http://schemas.openxmlformats.org/presentationml/2006/main" xmlns:r="http://schemas.openxmlformats.org/officeDocument/2006/relationships">
+<p:notes xmlns:a="http://schemas.openxmlformats.org/drawingml/2006/main" xmlns:r="http://schemas.openxmlformats.org/officeDocument/2006/relationships" xmlns:p="http://schemas.openxmlformats.org/presentationml/2006/main">
   <p:cSld>
     <p:spTree>
       <p:nvGrpSpPr>
@@ -1832,7 +1627,7 @@
         <p:nvSpPr>
           <p:cNvPr id="2" name="Slide Image Placeholder 1"/>
           <p:cNvSpPr>
-            <a:spLocks noGrp="1"/>
+            <a:spLocks noGrp="1" noRot="1" noChangeAspect="1"/>
           </p:cNvSpPr>
           <p:nvPr>
             <p:ph type="sldImg" idx="2"/>
@@ -1847,7 +1642,7 @@
             <a:spLocks noGrp="1"/>
           </p:cNvSpPr>
           <p:nvPr>
-            <p:ph type="body" idx="3" sz="quarter"/>
+            <p:ph type="body" sz="quarter" idx="3"/>
           </p:nvPr>
         </p:nvSpPr>
         <p:spPr/>
@@ -1868,7 +1663,7 @@
             <a:spLocks noGrp="1"/>
           </p:cNvSpPr>
           <p:nvPr>
-            <p:ph type="sldNum" idx="5" sz="quarter"/>
+            <p:ph type="sldNum" sz="quarter" idx="5"/>
           </p:nvPr>
         </p:nvSpPr>
         <p:spPr/>
@@ -1882,7 +1677,7 @@
 </file>
 
 <file path=ppt/notesSlides/notesSlide7.xml><?xml version="1.0" encoding="utf-8"?>
-<p:notes xmlns:a="http://schemas.openxmlformats.org/drawingml/2006/main" xmlns:p="http://schemas.openxmlformats.org/presentationml/2006/main" xmlns:r="http://schemas.openxmlformats.org/officeDocument/2006/relationships">
+<p:notes xmlns:a="http://schemas.openxmlformats.org/drawingml/2006/main" xmlns:r="http://schemas.openxmlformats.org/officeDocument/2006/relationships" xmlns:p="http://schemas.openxmlformats.org/presentationml/2006/main">
   <p:cSld>
     <p:spTree>
       <p:nvGrpSpPr>
@@ -1902,7 +1697,7 @@
         <p:nvSpPr>
           <p:cNvPr id="2" name="Slide Image Placeholder 1"/>
           <p:cNvSpPr>
-            <a:spLocks noGrp="1"/>
+            <a:spLocks noGrp="1" noRot="1" noChangeAspect="1"/>
           </p:cNvSpPr>
           <p:nvPr>
             <p:ph type="sldImg" idx="2"/>
@@ -1917,7 +1712,7 @@
             <a:spLocks noGrp="1"/>
           </p:cNvSpPr>
           <p:nvPr>
-            <p:ph type="body" idx="3" sz="quarter"/>
+            <p:ph type="body" sz="quarter" idx="3"/>
           </p:nvPr>
         </p:nvSpPr>
         <p:spPr/>
@@ -1938,7 +1733,7 @@
             <a:spLocks noGrp="1"/>
           </p:cNvSpPr>
           <p:nvPr>
-            <p:ph type="sldNum" idx="5" sz="quarter"/>
+            <p:ph type="sldNum" sz="quarter" idx="5"/>
           </p:nvPr>
         </p:nvSpPr>
         <p:spPr/>
@@ -1952,7 +1747,7 @@
 </file>
 
 <file path=ppt/notesSlides/notesSlide8.xml><?xml version="1.0" encoding="utf-8"?>
-<p:notes xmlns:a="http://schemas.openxmlformats.org/drawingml/2006/main" xmlns:p="http://schemas.openxmlformats.org/presentationml/2006/main" xmlns:r="http://schemas.openxmlformats.org/officeDocument/2006/relationships">
+<p:notes xmlns:a="http://schemas.openxmlformats.org/drawingml/2006/main" xmlns:r="http://schemas.openxmlformats.org/officeDocument/2006/relationships" xmlns:p="http://schemas.openxmlformats.org/presentationml/2006/main">
   <p:cSld>
     <p:spTree>
       <p:nvGrpSpPr>
@@ -1972,7 +1767,7 @@
         <p:nvSpPr>
           <p:cNvPr id="2" name="Slide Image Placeholder 1"/>
           <p:cNvSpPr>
-            <a:spLocks noGrp="1"/>
+            <a:spLocks noGrp="1" noRot="1" noChangeAspect="1"/>
           </p:cNvSpPr>
           <p:nvPr>
             <p:ph type="sldImg" idx="2"/>
@@ -1987,7 +1782,7 @@
             <a:spLocks noGrp="1"/>
           </p:cNvSpPr>
           <p:nvPr>
-            <p:ph type="body" idx="3" sz="quarter"/>
+            <p:ph type="body" sz="quarter" idx="3"/>
           </p:nvPr>
         </p:nvSpPr>
         <p:spPr/>
@@ -2008,7 +1803,7 @@
             <a:spLocks noGrp="1"/>
           </p:cNvSpPr>
           <p:nvPr>
-            <p:ph type="sldNum" idx="5" sz="quarter"/>
+            <p:ph type="sldNum" sz="quarter" idx="5"/>
           </p:nvPr>
         </p:nvSpPr>
         <p:spPr/>
@@ -2022,7 +1817,7 @@
 </file>
 
 <file path=ppt/notesSlides/notesSlide9.xml><?xml version="1.0" encoding="utf-8"?>
-<p:notes xmlns:a="http://schemas.openxmlformats.org/drawingml/2006/main" xmlns:p="http://schemas.openxmlformats.org/presentationml/2006/main" xmlns:r="http://schemas.openxmlformats.org/officeDocument/2006/relationships">
+<p:notes xmlns:a="http://schemas.openxmlformats.org/drawingml/2006/main" xmlns:r="http://schemas.openxmlformats.org/officeDocument/2006/relationships" xmlns:p="http://schemas.openxmlformats.org/presentationml/2006/main">
   <p:cSld>
     <p:spTree>
       <p:nvGrpSpPr>
@@ -2042,7 +1837,7 @@
         <p:nvSpPr>
           <p:cNvPr id="2" name="Slide Image Placeholder 1"/>
           <p:cNvSpPr>
-            <a:spLocks noGrp="1"/>
+            <a:spLocks noGrp="1" noRot="1" noChangeAspect="1"/>
           </p:cNvSpPr>
           <p:nvPr>
             <p:ph type="sldImg" idx="2"/>
@@ -2057,7 +1852,7 @@
             <a:spLocks noGrp="1"/>
           </p:cNvSpPr>
           <p:nvPr>
-            <p:ph type="body" idx="3" sz="quarter"/>
+            <p:ph type="body" sz="quarter" idx="3"/>
           </p:nvPr>
         </p:nvSpPr>
         <p:spPr/>
@@ -2078,7 +1873,7 @@
             <a:spLocks noGrp="1"/>
           </p:cNvSpPr>
           <p:nvPr>
-            <p:ph type="sldNum" idx="5" sz="quarter"/>
+            <p:ph type="sldNum" sz="quarter" idx="5"/>
           </p:nvPr>
         </p:nvSpPr>
         <p:spPr/>
@@ -2129,10 +1924,9 @@
           <a:lstStyle/>
           <a:p>
             <a:r>
-              <a:rPr lang="en-US" smtClean="0"/>
+              <a:rPr lang="en-US"/>
               <a:t>Click to edit Master title style</a:t>
             </a:r>
-            <a:endParaRPr lang="en-US"/>
           </a:p>
         </p:txBody>
       </p:sp>
@@ -2248,10 +2042,9 @@
           </a:lstStyle>
           <a:p>
             <a:r>
-              <a:rPr lang="en-US" smtClean="0"/>
+              <a:rPr lang="en-US"/>
               <a:t>Click to edit Master subtitle style</a:t>
             </a:r>
-            <a:endParaRPr lang="en-US"/>
           </a:p>
         </p:txBody>
       </p:sp>
@@ -2272,7 +2065,7 @@
           <a:p>
             <a:fld id="{5BCAD085-E8A6-8845-BD4E-CB4CCA059FC4}" type="datetimeFigureOut">
               <a:rPr lang="en-US" smtClean="0"/>
-              <a:t>1/27/13</a:t>
+              <a:t>7/11/2026</a:t>
             </a:fld>
             <a:endParaRPr lang="en-US"/>
           </a:p>
@@ -2366,10 +2159,9 @@
           <a:lstStyle/>
           <a:p>
             <a:r>
-              <a:rPr lang="en-US" smtClean="0"/>
+              <a:rPr lang="en-US"/>
               <a:t>Click to edit Master title style</a:t>
             </a:r>
-            <a:endParaRPr lang="en-US"/>
           </a:p>
         </p:txBody>
       </p:sp>
@@ -2390,38 +2182,37 @@
           <a:p>
             <a:pPr lvl="0"/>
             <a:r>
-              <a:rPr lang="en-US" smtClean="0"/>
+              <a:rPr lang="en-US"/>
               <a:t>Click to edit Master text styles</a:t>
             </a:r>
           </a:p>
           <a:p>
             <a:pPr lvl="1"/>
             <a:r>
-              <a:rPr lang="en-US" smtClean="0"/>
+              <a:rPr lang="en-US"/>
               <a:t>Second level</a:t>
             </a:r>
           </a:p>
           <a:p>
             <a:pPr lvl="2"/>
             <a:r>
-              <a:rPr lang="en-US" smtClean="0"/>
+              <a:rPr lang="en-US"/>
               <a:t>Third level</a:t>
             </a:r>
           </a:p>
           <a:p>
             <a:pPr lvl="3"/>
             <a:r>
-              <a:rPr lang="en-US" smtClean="0"/>
+              <a:rPr lang="en-US"/>
               <a:t>Fourth level</a:t>
             </a:r>
           </a:p>
           <a:p>
             <a:pPr lvl="4"/>
             <a:r>
-              <a:rPr lang="en-US" smtClean="0"/>
+              <a:rPr lang="en-US"/>
               <a:t>Fifth level</a:t>
             </a:r>
-            <a:endParaRPr lang="en-US"/>
           </a:p>
         </p:txBody>
       </p:sp>
@@ -2442,7 +2233,7 @@
           <a:p>
             <a:fld id="{5BCAD085-E8A6-8845-BD4E-CB4CCA059FC4}" type="datetimeFigureOut">
               <a:rPr lang="en-US" smtClean="0"/>
-              <a:t>1/27/13</a:t>
+              <a:t>7/11/2026</a:t>
             </a:fld>
             <a:endParaRPr lang="en-US"/>
           </a:p>
@@ -2541,10 +2332,9 @@
           <a:lstStyle/>
           <a:p>
             <a:r>
-              <a:rPr lang="en-US" smtClean="0"/>
+              <a:rPr lang="en-US"/>
               <a:t>Click to edit Master title style</a:t>
             </a:r>
-            <a:endParaRPr lang="en-US"/>
           </a:p>
         </p:txBody>
       </p:sp>
@@ -2570,38 +2360,37 @@
           <a:p>
             <a:pPr lvl="0"/>
             <a:r>
-              <a:rPr lang="en-US" smtClean="0"/>
+              <a:rPr lang="en-US"/>
               <a:t>Click to edit Master text styles</a:t>
             </a:r>
           </a:p>
           <a:p>
             <a:pPr lvl="1"/>
             <a:r>
-              <a:rPr lang="en-US" smtClean="0"/>
+              <a:rPr lang="en-US"/>
               <a:t>Second level</a:t>
             </a:r>
           </a:p>
           <a:p>
             <a:pPr lvl="2"/>
             <a:r>
-              <a:rPr lang="en-US" smtClean="0"/>
+              <a:rPr lang="en-US"/>
               <a:t>Third level</a:t>
             </a:r>
           </a:p>
           <a:p>
             <a:pPr lvl="3"/>
             <a:r>
-              <a:rPr lang="en-US" smtClean="0"/>
+              <a:rPr lang="en-US"/>
               <a:t>Fourth level</a:t>
             </a:r>
           </a:p>
           <a:p>
             <a:pPr lvl="4"/>
             <a:r>
-              <a:rPr lang="en-US" smtClean="0"/>
+              <a:rPr lang="en-US"/>
               <a:t>Fifth level</a:t>
             </a:r>
-            <a:endParaRPr lang="en-US"/>
           </a:p>
         </p:txBody>
       </p:sp>
@@ -2622,7 +2411,7 @@
           <a:p>
             <a:fld id="{5BCAD085-E8A6-8845-BD4E-CB4CCA059FC4}" type="datetimeFigureOut">
               <a:rPr lang="en-US" smtClean="0"/>
-              <a:t>1/27/13</a:t>
+              <a:t>7/11/2026</a:t>
             </a:fld>
             <a:endParaRPr lang="en-US"/>
           </a:p>
@@ -2716,10 +2505,9 @@
           <a:lstStyle/>
           <a:p>
             <a:r>
-              <a:rPr lang="en-US" smtClean="0"/>
+              <a:rPr lang="en-US"/>
               <a:t>Click to edit Master title style</a:t>
             </a:r>
-            <a:endParaRPr lang="en-US"/>
           </a:p>
         </p:txBody>
       </p:sp>
@@ -2740,38 +2528,37 @@
           <a:p>
             <a:pPr lvl="0"/>
             <a:r>
-              <a:rPr lang="en-US" smtClean="0"/>
+              <a:rPr lang="en-US"/>
               <a:t>Click to edit Master text styles</a:t>
             </a:r>
           </a:p>
           <a:p>
             <a:pPr lvl="1"/>
             <a:r>
-              <a:rPr lang="en-US" smtClean="0"/>
+              <a:rPr lang="en-US"/>
               <a:t>Second level</a:t>
             </a:r>
           </a:p>
           <a:p>
             <a:pPr lvl="2"/>
             <a:r>
-              <a:rPr lang="en-US" smtClean="0"/>
+              <a:rPr lang="en-US"/>
               <a:t>Third level</a:t>
             </a:r>
           </a:p>
           <a:p>
             <a:pPr lvl="3"/>
             <a:r>
-              <a:rPr lang="en-US" smtClean="0"/>
+              <a:rPr lang="en-US"/>
               <a:t>Fourth level</a:t>
             </a:r>
           </a:p>
           <a:p>
             <a:pPr lvl="4"/>
             <a:r>
-              <a:rPr lang="en-US" smtClean="0"/>
+              <a:rPr lang="en-US"/>
               <a:t>Fifth level</a:t>
             </a:r>
-            <a:endParaRPr lang="en-US"/>
           </a:p>
         </p:txBody>
       </p:sp>
@@ -2792,7 +2579,7 @@
           <a:p>
             <a:fld id="{5BCAD085-E8A6-8845-BD4E-CB4CCA059FC4}" type="datetimeFigureOut">
               <a:rPr lang="en-US" smtClean="0"/>
-              <a:t>1/27/13</a:t>
+              <a:t>7/11/2026</a:t>
             </a:fld>
             <a:endParaRPr lang="en-US"/>
           </a:p>
@@ -2895,10 +2682,9 @@
           </a:lstStyle>
           <a:p>
             <a:r>
-              <a:rPr lang="en-US" smtClean="0"/>
+              <a:rPr lang="en-US"/>
               <a:t>Click to edit Master title style</a:t>
             </a:r>
-            <a:endParaRPr lang="en-US"/>
           </a:p>
         </p:txBody>
       </p:sp>
@@ -3015,7 +2801,7 @@
           <a:p>
             <a:pPr lvl="0"/>
             <a:r>
-              <a:rPr lang="en-US" smtClean="0"/>
+              <a:rPr lang="en-US"/>
               <a:t>Click to edit Master text styles</a:t>
             </a:r>
           </a:p>
@@ -3038,7 +2824,7 @@
           <a:p>
             <a:fld id="{5BCAD085-E8A6-8845-BD4E-CB4CCA059FC4}" type="datetimeFigureOut">
               <a:rPr lang="en-US" smtClean="0"/>
-              <a:t>1/27/13</a:t>
+              <a:t>7/11/2026</a:t>
             </a:fld>
             <a:endParaRPr lang="en-US"/>
           </a:p>
@@ -3132,10 +2918,9 @@
           <a:lstStyle/>
           <a:p>
             <a:r>
-              <a:rPr lang="en-US" smtClean="0"/>
+              <a:rPr lang="en-US"/>
               <a:t>Click to edit Master title style</a:t>
             </a:r>
-            <a:endParaRPr lang="en-US"/>
           </a:p>
         </p:txBody>
       </p:sp>
@@ -3189,38 +2974,37 @@
           <a:p>
             <a:pPr lvl="0"/>
             <a:r>
-              <a:rPr lang="en-US" smtClean="0"/>
+              <a:rPr lang="en-US"/>
               <a:t>Click to edit Master text styles</a:t>
             </a:r>
           </a:p>
           <a:p>
             <a:pPr lvl="1"/>
             <a:r>
-              <a:rPr lang="en-US" smtClean="0"/>
+              <a:rPr lang="en-US"/>
               <a:t>Second level</a:t>
             </a:r>
           </a:p>
           <a:p>
             <a:pPr lvl="2"/>
             <a:r>
-              <a:rPr lang="en-US" smtClean="0"/>
+              <a:rPr lang="en-US"/>
               <a:t>Third level</a:t>
             </a:r>
           </a:p>
           <a:p>
             <a:pPr lvl="3"/>
             <a:r>
-              <a:rPr lang="en-US" smtClean="0"/>
+              <a:rPr lang="en-US"/>
               <a:t>Fourth level</a:t>
             </a:r>
           </a:p>
           <a:p>
             <a:pPr lvl="4"/>
             <a:r>
-              <a:rPr lang="en-US" smtClean="0"/>
+              <a:rPr lang="en-US"/>
               <a:t>Fifth level</a:t>
             </a:r>
-            <a:endParaRPr lang="en-US"/>
           </a:p>
         </p:txBody>
       </p:sp>
@@ -3274,38 +3058,37 @@
           <a:p>
             <a:pPr lvl="0"/>
             <a:r>
-              <a:rPr lang="en-US" smtClean="0"/>
+              <a:rPr lang="en-US"/>
               <a:t>Click to edit Master text styles</a:t>
             </a:r>
           </a:p>
           <a:p>
             <a:pPr lvl="1"/>
             <a:r>
-              <a:rPr lang="en-US" smtClean="0"/>
+              <a:rPr lang="en-US"/>
               <a:t>Second level</a:t>
             </a:r>
           </a:p>
           <a:p>
             <a:pPr lvl="2"/>
             <a:r>
-              <a:rPr lang="en-US" smtClean="0"/>
+              <a:rPr lang="en-US"/>
               <a:t>Third level</a:t>
             </a:r>
           </a:p>
           <a:p>
             <a:pPr lvl="3"/>
             <a:r>
-              <a:rPr lang="en-US" smtClean="0"/>
+              <a:rPr lang="en-US"/>
               <a:t>Fourth level</a:t>
             </a:r>
           </a:p>
           <a:p>
             <a:pPr lvl="4"/>
             <a:r>
-              <a:rPr lang="en-US" smtClean="0"/>
+              <a:rPr lang="en-US"/>
               <a:t>Fifth level</a:t>
             </a:r>
-            <a:endParaRPr lang="en-US"/>
           </a:p>
         </p:txBody>
       </p:sp>
@@ -3326,7 +3109,7 @@
           <a:p>
             <a:fld id="{5BCAD085-E8A6-8845-BD4E-CB4CCA059FC4}" type="datetimeFigureOut">
               <a:rPr lang="en-US" smtClean="0"/>
-              <a:t>1/27/13</a:t>
+              <a:t>7/11/2026</a:t>
             </a:fld>
             <a:endParaRPr lang="en-US"/>
           </a:p>
@@ -3424,10 +3207,9 @@
           </a:lstStyle>
           <a:p>
             <a:r>
-              <a:rPr lang="en-US" smtClean="0"/>
+              <a:rPr lang="en-US"/>
               <a:t>Click to edit Master title style</a:t>
             </a:r>
-            <a:endParaRPr lang="en-US"/>
           </a:p>
         </p:txBody>
       </p:sp>
@@ -3490,7 +3272,7 @@
           <a:p>
             <a:pPr lvl="0"/>
             <a:r>
-              <a:rPr lang="en-US" smtClean="0"/>
+              <a:rPr lang="en-US"/>
               <a:t>Click to edit Master text styles</a:t>
             </a:r>
           </a:p>
@@ -3546,38 +3328,37 @@
           <a:p>
             <a:pPr lvl="0"/>
             <a:r>
-              <a:rPr lang="en-US" smtClean="0"/>
+              <a:rPr lang="en-US"/>
               <a:t>Click to edit Master text styles</a:t>
             </a:r>
           </a:p>
           <a:p>
             <a:pPr lvl="1"/>
             <a:r>
-              <a:rPr lang="en-US" smtClean="0"/>
+              <a:rPr lang="en-US"/>
               <a:t>Second level</a:t>
             </a:r>
           </a:p>
           <a:p>
             <a:pPr lvl="2"/>
             <a:r>
-              <a:rPr lang="en-US" smtClean="0"/>
+              <a:rPr lang="en-US"/>
               <a:t>Third level</a:t>
             </a:r>
           </a:p>
           <a:p>
             <a:pPr lvl="3"/>
             <a:r>
-              <a:rPr lang="en-US" smtClean="0"/>
+              <a:rPr lang="en-US"/>
               <a:t>Fourth level</a:t>
             </a:r>
           </a:p>
           <a:p>
             <a:pPr lvl="4"/>
             <a:r>
-              <a:rPr lang="en-US" smtClean="0"/>
+              <a:rPr lang="en-US"/>
               <a:t>Fifth level</a:t>
             </a:r>
-            <a:endParaRPr lang="en-US"/>
           </a:p>
         </p:txBody>
       </p:sp>
@@ -3640,7 +3421,7 @@
           <a:p>
             <a:pPr lvl="0"/>
             <a:r>
-              <a:rPr lang="en-US" smtClean="0"/>
+              <a:rPr lang="en-US"/>
               <a:t>Click to edit Master text styles</a:t>
             </a:r>
           </a:p>
@@ -3696,38 +3477,37 @@
           <a:p>
             <a:pPr lvl="0"/>
             <a:r>
-              <a:rPr lang="en-US" smtClean="0"/>
+              <a:rPr lang="en-US"/>
               <a:t>Click to edit Master text styles</a:t>
             </a:r>
           </a:p>
           <a:p>
             <a:pPr lvl="1"/>
             <a:r>
-              <a:rPr lang="en-US" smtClean="0"/>
+              <a:rPr lang="en-US"/>
               <a:t>Second level</a:t>
             </a:r>
           </a:p>
           <a:p>
             <a:pPr lvl="2"/>
             <a:r>
-              <a:rPr lang="en-US" smtClean="0"/>
+              <a:rPr lang="en-US"/>
               <a:t>Third level</a:t>
             </a:r>
           </a:p>
           <a:p>
             <a:pPr lvl="3"/>
             <a:r>
-              <a:rPr lang="en-US" smtClean="0"/>
+              <a:rPr lang="en-US"/>
               <a:t>Fourth level</a:t>
             </a:r>
           </a:p>
           <a:p>
             <a:pPr lvl="4"/>
             <a:r>
-              <a:rPr lang="en-US" smtClean="0"/>
+              <a:rPr lang="en-US"/>
               <a:t>Fifth level</a:t>
             </a:r>
-            <a:endParaRPr lang="en-US"/>
           </a:p>
         </p:txBody>
       </p:sp>
@@ -3748,7 +3528,7 @@
           <a:p>
             <a:fld id="{5BCAD085-E8A6-8845-BD4E-CB4CCA059FC4}" type="datetimeFigureOut">
               <a:rPr lang="en-US" smtClean="0"/>
-              <a:t>1/27/13</a:t>
+              <a:t>7/11/2026</a:t>
             </a:fld>
             <a:endParaRPr lang="en-US"/>
           </a:p>
@@ -3842,10 +3622,9 @@
           <a:lstStyle/>
           <a:p>
             <a:r>
-              <a:rPr lang="en-US" smtClean="0"/>
+              <a:rPr lang="en-US"/>
               <a:t>Click to edit Master title style</a:t>
             </a:r>
-            <a:endParaRPr lang="en-US"/>
           </a:p>
         </p:txBody>
       </p:sp>
@@ -3866,7 +3645,7 @@
           <a:p>
             <a:fld id="{5BCAD085-E8A6-8845-BD4E-CB4CCA059FC4}" type="datetimeFigureOut">
               <a:rPr lang="en-US" smtClean="0"/>
-              <a:t>1/27/13</a:t>
+              <a:t>7/11/2026</a:t>
             </a:fld>
             <a:endParaRPr lang="en-US"/>
           </a:p>
@@ -3961,7 +3740,7 @@
           <a:p>
             <a:fld id="{5BCAD085-E8A6-8845-BD4E-CB4CCA059FC4}" type="datetimeFigureOut">
               <a:rPr lang="en-US" smtClean="0"/>
-              <a:t>1/27/13</a:t>
+              <a:t>7/11/2026</a:t>
             </a:fld>
             <a:endParaRPr lang="en-US"/>
           </a:p>
@@ -4064,10 +3843,9 @@
           </a:lstStyle>
           <a:p>
             <a:r>
-              <a:rPr lang="en-US" smtClean="0"/>
+              <a:rPr lang="en-US"/>
               <a:t>Click to edit Master title style</a:t>
             </a:r>
-            <a:endParaRPr lang="en-US"/>
           </a:p>
         </p:txBody>
       </p:sp>
@@ -4121,38 +3899,37 @@
           <a:p>
             <a:pPr lvl="0"/>
             <a:r>
-              <a:rPr lang="en-US" smtClean="0"/>
+              <a:rPr lang="en-US"/>
               <a:t>Click to edit Master text styles</a:t>
             </a:r>
           </a:p>
           <a:p>
             <a:pPr lvl="1"/>
             <a:r>
-              <a:rPr lang="en-US" smtClean="0"/>
+              <a:rPr lang="en-US"/>
               <a:t>Second level</a:t>
             </a:r>
           </a:p>
           <a:p>
             <a:pPr lvl="2"/>
             <a:r>
-              <a:rPr lang="en-US" smtClean="0"/>
+              <a:rPr lang="en-US"/>
               <a:t>Third level</a:t>
             </a:r>
           </a:p>
           <a:p>
             <a:pPr lvl="3"/>
             <a:r>
-              <a:rPr lang="en-US" smtClean="0"/>
+              <a:rPr lang="en-US"/>
               <a:t>Fourth level</a:t>
             </a:r>
           </a:p>
           <a:p>
             <a:pPr lvl="4"/>
             <a:r>
-              <a:rPr lang="en-US" smtClean="0"/>
+              <a:rPr lang="en-US"/>
               <a:t>Fifth level</a:t>
             </a:r>
-            <a:endParaRPr lang="en-US"/>
           </a:p>
         </p:txBody>
       </p:sp>
@@ -4215,7 +3992,7 @@
           <a:p>
             <a:pPr lvl="0"/>
             <a:r>
-              <a:rPr lang="en-US" smtClean="0"/>
+              <a:rPr lang="en-US"/>
               <a:t>Click to edit Master text styles</a:t>
             </a:r>
           </a:p>
@@ -4238,7 +4015,7 @@
           <a:p>
             <a:fld id="{5BCAD085-E8A6-8845-BD4E-CB4CCA059FC4}" type="datetimeFigureOut">
               <a:rPr lang="en-US" smtClean="0"/>
-              <a:t>1/27/13</a:t>
+              <a:t>7/11/2026</a:t>
             </a:fld>
             <a:endParaRPr lang="en-US"/>
           </a:p>
@@ -4341,10 +4118,9 @@
           </a:lstStyle>
           <a:p>
             <a:r>
-              <a:rPr lang="en-US" smtClean="0"/>
+              <a:rPr lang="en-US"/>
               <a:t>Click to edit Master title style</a:t>
             </a:r>
-            <a:endParaRPr lang="en-US"/>
           </a:p>
         </p:txBody>
       </p:sp>
@@ -4468,7 +4244,7 @@
           <a:p>
             <a:pPr lvl="0"/>
             <a:r>
-              <a:rPr lang="en-US" smtClean="0"/>
+              <a:rPr lang="en-US"/>
               <a:t>Click to edit Master text styles</a:t>
             </a:r>
           </a:p>
@@ -4491,7 +4267,7 @@
           <a:p>
             <a:fld id="{5BCAD085-E8A6-8845-BD4E-CB4CCA059FC4}" type="datetimeFigureOut">
               <a:rPr lang="en-US" smtClean="0"/>
-              <a:t>1/27/13</a:t>
+              <a:t>7/11/2026</a:t>
             </a:fld>
             <a:endParaRPr lang="en-US"/>
           </a:p>
@@ -4600,10 +4376,9 @@
           <a:lstStyle/>
           <a:p>
             <a:r>
-              <a:rPr lang="en-US" smtClean="0"/>
+              <a:rPr lang="en-US"/>
               <a:t>Click to edit Master title style</a:t>
             </a:r>
-            <a:endParaRPr lang="en-US"/>
           </a:p>
         </p:txBody>
       </p:sp>
@@ -4634,38 +4409,37 @@
           <a:p>
             <a:pPr lvl="0"/>
             <a:r>
-              <a:rPr lang="en-US" smtClean="0"/>
+              <a:rPr lang="en-US"/>
               <a:t>Click to edit Master text styles</a:t>
             </a:r>
           </a:p>
           <a:p>
             <a:pPr lvl="1"/>
             <a:r>
-              <a:rPr lang="en-US" smtClean="0"/>
+              <a:rPr lang="en-US"/>
               <a:t>Second level</a:t>
             </a:r>
           </a:p>
           <a:p>
             <a:pPr lvl="2"/>
             <a:r>
-              <a:rPr lang="en-US" smtClean="0"/>
+              <a:rPr lang="en-US"/>
               <a:t>Third level</a:t>
             </a:r>
           </a:p>
           <a:p>
             <a:pPr lvl="3"/>
             <a:r>
-              <a:rPr lang="en-US" smtClean="0"/>
+              <a:rPr lang="en-US"/>
               <a:t>Fourth level</a:t>
             </a:r>
           </a:p>
           <a:p>
             <a:pPr lvl="4"/>
             <a:r>
-              <a:rPr lang="en-US" smtClean="0"/>
+              <a:rPr lang="en-US"/>
               <a:t>Fifth level</a:t>
             </a:r>
-            <a:endParaRPr lang="en-US"/>
           </a:p>
         </p:txBody>
       </p:sp>
@@ -4704,7 +4478,7 @@
           <a:p>
             <a:fld id="{5BCAD085-E8A6-8845-BD4E-CB4CCA059FC4}" type="datetimeFigureOut">
               <a:rPr lang="en-US" smtClean="0"/>
-              <a:t>1/27/13</a:t>
+              <a:t>7/11/2026</a:t>
             </a:fld>
             <a:endParaRPr lang="en-US"/>
           </a:p>
@@ -5063,7 +4837,7 @@
 </file>
 
 <file path=ppt/slides/slide1.xml><?xml version="1.0" encoding="utf-8"?>
-<p:sld xmlns:a="http://schemas.openxmlformats.org/drawingml/2006/main" xmlns:p="http://schemas.openxmlformats.org/presentationml/2006/main" xmlns:r="http://schemas.openxmlformats.org/officeDocument/2006/relationships">
+<p:sld xmlns:a="http://schemas.openxmlformats.org/drawingml/2006/main" xmlns:r="http://schemas.openxmlformats.org/officeDocument/2006/relationships" xmlns:p="http://schemas.openxmlformats.org/presentationml/2006/main">
   <p:cSld>
     <p:spTree>
       <p:nvGrpSpPr>
@@ -5071,7 +4845,14 @@
         <p:cNvGrpSpPr/>
         <p:nvPr/>
       </p:nvGrpSpPr>
-      <p:grpSpPr/>
+      <p:grpSpPr>
+        <a:xfrm>
+          <a:off x="0" y="0"/>
+          <a:ext cx="0" cy="0"/>
+          <a:chOff x="0" y="0"/>
+          <a:chExt cx="0" cy="0"/>
+        </a:xfrm>
+      </p:grpSpPr>
       <p:sp>
         <p:nvSpPr>
           <p:cNvPr id="2" name="Rectangle 1"/>
@@ -5113,6 +4894,7 @@
           <a:lstStyle/>
           <a:p>
             <a:pPr algn="ctr"/>
+            <a:endParaRPr/>
           </a:p>
         </p:txBody>
       </p:sp>
@@ -5157,6 +4939,7 @@
           <a:lstStyle/>
           <a:p>
             <a:pPr algn="ctr"/>
+            <a:endParaRPr/>
           </a:p>
         </p:txBody>
       </p:sp>
@@ -5201,6 +4984,7 @@
           <a:lstStyle/>
           <a:p>
             <a:pPr algn="ctr"/>
+            <a:endParaRPr/>
           </a:p>
         </p:txBody>
       </p:sp>
@@ -5241,7 +5025,7 @@
           </a:fontRef>
         </p:style>
         <p:txBody>
-          <a:bodyPr rtlCol="0" anchor="ctr" wrap="none" lIns="0" rIns="0" tIns="0" bIns="0"/>
+          <a:bodyPr wrap="none" lIns="0" tIns="0" rIns="0" bIns="0" rtlCol="0" anchor="ctr"/>
           <a:lstStyle/>
           <a:p>
             <a:pPr algn="ctr"/>
@@ -5274,7 +5058,7 @@
           <a:noFill/>
         </p:spPr>
         <p:txBody>
-          <a:bodyPr wrap="square" anchor="t" lIns="0" rIns="0" tIns="0" bIns="0">
+          <a:bodyPr wrap="square" lIns="0" tIns="0" rIns="0" bIns="0" anchor="t">
             <a:spAutoFit/>
           </a:bodyPr>
           <a:lstStyle/>
@@ -5316,7 +5100,7 @@
           <a:noFill/>
         </p:spPr>
         <p:txBody>
-          <a:bodyPr wrap="square" anchor="t" lIns="0" rIns="0" tIns="0" bIns="0">
+          <a:bodyPr wrap="square" lIns="0" tIns="0" rIns="0" bIns="0" anchor="t">
             <a:spAutoFit/>
           </a:bodyPr>
           <a:lstStyle/>
@@ -5380,7 +5164,7 @@
           <a:noFill/>
         </p:spPr>
         <p:txBody>
-          <a:bodyPr wrap="square" anchor="t" lIns="0" rIns="0" tIns="0" bIns="0">
+          <a:bodyPr wrap="square" lIns="0" tIns="0" rIns="0" bIns="0" anchor="t">
             <a:spAutoFit/>
           </a:bodyPr>
           <a:lstStyle/>
@@ -5425,7 +5209,7 @@
           <a:noFill/>
         </p:spPr>
         <p:txBody>
-          <a:bodyPr wrap="square" anchor="t" lIns="0" rIns="0" tIns="0" bIns="0">
+          <a:bodyPr wrap="square" lIns="0" tIns="0" rIns="0" bIns="0" anchor="t">
             <a:spAutoFit/>
           </a:bodyPr>
           <a:lstStyle/>
@@ -5493,7 +5277,7 @@
 </file>
 
 <file path=ppt/slides/slide10.xml><?xml version="1.0" encoding="utf-8"?>
-<p:sld xmlns:a="http://schemas.openxmlformats.org/drawingml/2006/main" xmlns:p="http://schemas.openxmlformats.org/presentationml/2006/main" xmlns:r="http://schemas.openxmlformats.org/officeDocument/2006/relationships">
+<p:sld xmlns:a="http://schemas.openxmlformats.org/drawingml/2006/main" xmlns:r="http://schemas.openxmlformats.org/officeDocument/2006/relationships" xmlns:p="http://schemas.openxmlformats.org/presentationml/2006/main">
   <p:cSld>
     <p:spTree>
       <p:nvGrpSpPr>
@@ -5501,7 +5285,14 @@
         <p:cNvGrpSpPr/>
         <p:nvPr/>
       </p:nvGrpSpPr>
-      <p:grpSpPr/>
+      <p:grpSpPr>
+        <a:xfrm>
+          <a:off x="0" y="0"/>
+          <a:ext cx="0" cy="0"/>
+          <a:chOff x="0" y="0"/>
+          <a:chExt cx="0" cy="0"/>
+        </a:xfrm>
+      </p:grpSpPr>
       <p:sp>
         <p:nvSpPr>
           <p:cNvPr id="2" name="Rectangle 1"/>
@@ -5543,6 +5334,7 @@
           <a:lstStyle/>
           <a:p>
             <a:pPr algn="ctr"/>
+            <a:endParaRPr/>
           </a:p>
         </p:txBody>
       </p:sp>
@@ -5563,7 +5355,7 @@
           <a:noFill/>
         </p:spPr>
         <p:txBody>
-          <a:bodyPr wrap="square" anchor="t" lIns="0" rIns="0" tIns="0" bIns="0">
+          <a:bodyPr wrap="square" lIns="0" tIns="0" rIns="0" bIns="0" anchor="t">
             <a:spAutoFit/>
           </a:bodyPr>
           <a:lstStyle/>
@@ -5605,7 +5397,7 @@
           <a:noFill/>
         </p:spPr>
         <p:txBody>
-          <a:bodyPr wrap="square" anchor="t" lIns="0" rIns="0" tIns="0" bIns="0">
+          <a:bodyPr wrap="square" lIns="0" tIns="0" rIns="0" bIns="0" anchor="t">
             <a:spAutoFit/>
           </a:bodyPr>
           <a:lstStyle/>
@@ -5674,6 +5466,7 @@
           <a:lstStyle/>
           <a:p>
             <a:pPr algn="ctr"/>
+            <a:endParaRPr/>
           </a:p>
         </p:txBody>
       </p:sp>
@@ -5694,7 +5487,7 @@
           <a:noFill/>
         </p:spPr>
         <p:txBody>
-          <a:bodyPr wrap="square" anchor="t" lIns="0" rIns="0" tIns="0" bIns="0">
+          <a:bodyPr wrap="square" lIns="0" tIns="0" rIns="0" bIns="0" anchor="t">
             <a:spAutoFit/>
           </a:bodyPr>
           <a:lstStyle/>
@@ -5804,6 +5597,7 @@
           <a:lstStyle/>
           <a:p>
             <a:pPr algn="ctr"/>
+            <a:endParaRPr/>
           </a:p>
         </p:txBody>
       </p:sp>
@@ -5824,7 +5618,7 @@
           <a:noFill/>
         </p:spPr>
         <p:txBody>
-          <a:bodyPr wrap="square" anchor="t" lIns="0" rIns="0" tIns="0" bIns="0">
+          <a:bodyPr wrap="square" lIns="0" tIns="0" rIns="0" bIns="0" anchor="t">
             <a:spAutoFit/>
           </a:bodyPr>
           <a:lstStyle/>
@@ -5934,6 +5728,7 @@
           <a:lstStyle/>
           <a:p>
             <a:pPr algn="ctr"/>
+            <a:endParaRPr/>
           </a:p>
         </p:txBody>
       </p:sp>
@@ -5954,7 +5749,7 @@
           <a:noFill/>
         </p:spPr>
         <p:txBody>
-          <a:bodyPr wrap="square" anchor="ctr" lIns="0" rIns="0" tIns="0" bIns="0">
+          <a:bodyPr wrap="square" lIns="0" tIns="0" rIns="0" bIns="0" anchor="ctr">
             <a:spAutoFit/>
           </a:bodyPr>
           <a:lstStyle/>
@@ -5980,7 +5775,7 @@
                 </a:solidFill>
                 <a:latin typeface="Calibri"/>
               </a:rPr>
-              <a:t xml:space="preserve">   →   </a:t>
+              <a:t>   →   </a:t>
             </a:r>
             <a:r>
               <a:rPr sz="1250" b="1" i="0">
@@ -5998,7 +5793,7 @@
                 </a:solidFill>
                 <a:latin typeface="Calibri"/>
               </a:rPr>
-              <a:t xml:space="preserve">   →   </a:t>
+              <a:t>   →   </a:t>
             </a:r>
             <a:r>
               <a:rPr sz="1250" b="1" i="0">
@@ -6016,7 +5811,7 @@
                 </a:solidFill>
                 <a:latin typeface="Calibri"/>
               </a:rPr>
-              <a:t xml:space="preserve">   →   </a:t>
+              <a:t>   →   </a:t>
             </a:r>
             <a:r>
               <a:rPr sz="1250" b="0" i="0">
@@ -6034,7 +5829,7 @@
                 </a:solidFill>
                 <a:latin typeface="Calibri"/>
               </a:rPr>
-              <a:t xml:space="preserve">   →   </a:t>
+              <a:t>   →   </a:t>
             </a:r>
             <a:r>
               <a:rPr sz="1250" b="0" i="0">
@@ -6052,7 +5847,7 @@
                 </a:solidFill>
                 <a:latin typeface="Calibri"/>
               </a:rPr>
-              <a:t xml:space="preserve">   →   </a:t>
+              <a:t>   →   </a:t>
             </a:r>
             <a:r>
               <a:rPr sz="1250" b="1" i="0">
@@ -6083,7 +5878,7 @@
           <a:noFill/>
         </p:spPr>
         <p:txBody>
-          <a:bodyPr wrap="square" anchor="t" lIns="0" rIns="0" tIns="0" bIns="0">
+          <a:bodyPr wrap="square" lIns="0" tIns="0" rIns="0" bIns="0" anchor="t">
             <a:spAutoFit/>
           </a:bodyPr>
           <a:lstStyle/>
@@ -6128,7 +5923,7 @@
           <a:noFill/>
         </p:spPr>
         <p:txBody>
-          <a:bodyPr wrap="square" anchor="t" lIns="0" rIns="0" tIns="0" bIns="0">
+          <a:bodyPr wrap="square" lIns="0" tIns="0" rIns="0" bIns="0" anchor="t">
             <a:spAutoFit/>
           </a:bodyPr>
           <a:lstStyle/>
@@ -6162,7 +5957,7 @@
 </file>
 
 <file path=ppt/slides/slide11.xml><?xml version="1.0" encoding="utf-8"?>
-<p:sld xmlns:a="http://schemas.openxmlformats.org/drawingml/2006/main" xmlns:p="http://schemas.openxmlformats.org/presentationml/2006/main" xmlns:r="http://schemas.openxmlformats.org/officeDocument/2006/relationships">
+<p:sld xmlns:a="http://schemas.openxmlformats.org/drawingml/2006/main" xmlns:r="http://schemas.openxmlformats.org/officeDocument/2006/relationships" xmlns:p="http://schemas.openxmlformats.org/presentationml/2006/main">
   <p:cSld>
     <p:spTree>
       <p:nvGrpSpPr>
@@ -6170,7 +5965,14 @@
         <p:cNvGrpSpPr/>
         <p:nvPr/>
       </p:nvGrpSpPr>
-      <p:grpSpPr/>
+      <p:grpSpPr>
+        <a:xfrm>
+          <a:off x="0" y="0"/>
+          <a:ext cx="0" cy="0"/>
+          <a:chOff x="0" y="0"/>
+          <a:chExt cx="0" cy="0"/>
+        </a:xfrm>
+      </p:grpSpPr>
       <p:sp>
         <p:nvSpPr>
           <p:cNvPr id="2" name="Rectangle 1"/>
@@ -6212,6 +6014,7 @@
           <a:lstStyle/>
           <a:p>
             <a:pPr algn="ctr"/>
+            <a:endParaRPr/>
           </a:p>
         </p:txBody>
       </p:sp>
@@ -6232,7 +6035,7 @@
           <a:noFill/>
         </p:spPr>
         <p:txBody>
-          <a:bodyPr wrap="square" anchor="t" lIns="0" rIns="0" tIns="0" bIns="0">
+          <a:bodyPr wrap="square" lIns="0" tIns="0" rIns="0" bIns="0" anchor="t">
             <a:spAutoFit/>
           </a:bodyPr>
           <a:lstStyle/>
@@ -6274,7 +6077,7 @@
           <a:noFill/>
         </p:spPr>
         <p:txBody>
-          <a:bodyPr wrap="square" anchor="t" lIns="0" rIns="0" tIns="0" bIns="0">
+          <a:bodyPr wrap="square" lIns="0" tIns="0" rIns="0" bIns="0" anchor="t">
             <a:spAutoFit/>
           </a:bodyPr>
           <a:lstStyle/>
@@ -6343,6 +6146,7 @@
           <a:lstStyle/>
           <a:p>
             <a:pPr algn="ctr"/>
+            <a:endParaRPr/>
           </a:p>
         </p:txBody>
       </p:sp>
@@ -6363,7 +6167,7 @@
           <a:noFill/>
         </p:spPr>
         <p:txBody>
-          <a:bodyPr wrap="square" anchor="t" lIns="0" rIns="0" tIns="0" bIns="0">
+          <a:bodyPr wrap="square" lIns="0" tIns="0" rIns="0" bIns="0" anchor="t">
             <a:spAutoFit/>
           </a:bodyPr>
           <a:lstStyle/>
@@ -6408,7 +6212,7 @@
                 </a:solidFill>
                 <a:latin typeface="Consolas"/>
               </a:rPr>
-              <a:t xml:space="preserve">     --id billing-inquiry --owner dept-finance \</a:t>
+              <a:t>     --id billing-inquiry --owner dept-finance \</a:t>
             </a:r>
           </a:p>
           <a:p>
@@ -6430,7 +6234,7 @@
                 </a:solidFill>
                 <a:latin typeface="Consolas"/>
               </a:rPr>
-              <a:t xml:space="preserve">     --pack enterprise --blast-radius low</a:t>
+              <a:t>     --pack enterprise --blast-radius low</a:t>
             </a:r>
           </a:p>
           <a:p>
@@ -6490,7 +6294,7 @@
           <a:noFill/>
         </p:spPr>
         <p:txBody>
-          <a:bodyPr wrap="square" anchor="t" lIns="0" rIns="0" tIns="0" bIns="0">
+          <a:bodyPr wrap="square" lIns="0" tIns="0" rIns="0" bIns="0" anchor="t">
             <a:spAutoFit/>
           </a:bodyPr>
           <a:lstStyle/>
@@ -6529,7 +6333,7 @@
                 </a:solidFill>
                 <a:latin typeface="Consolas"/>
               </a:rPr>
-              <a:t xml:space="preserve">• agent.manifest.yaml  </a:t>
+              <a:t>• agent.manifest.yaml  </a:t>
             </a:r>
             <a:r>
               <a:rPr sz="1100" b="0" i="0">
@@ -6557,7 +6361,7 @@
                 </a:solidFill>
                 <a:latin typeface="Consolas"/>
               </a:rPr>
-              <a:t xml:space="preserve">• prompts/system.md  </a:t>
+              <a:t>• prompts/system.md  </a:t>
             </a:r>
             <a:r>
               <a:rPr sz="1100" b="0" i="0">
@@ -6585,7 +6389,7 @@
                 </a:solidFill>
                 <a:latin typeface="Consolas"/>
               </a:rPr>
-              <a:t xml:space="preserve">• evals/suite.md  </a:t>
+              <a:t>• evals/suite.md  </a:t>
             </a:r>
             <a:r>
               <a:rPr sz="1100" b="0" i="0">
@@ -6613,7 +6417,7 @@
                 </a:solidFill>
                 <a:latin typeface="Consolas"/>
               </a:rPr>
-              <a:t xml:space="preserve">• runbook.md  ·  README.md  </a:t>
+              <a:t>• runbook.md  ·  README.md  </a:t>
             </a:r>
             <a:r>
               <a:rPr sz="1100" b="0" i="0">
@@ -6670,6 +6474,7 @@
           <a:lstStyle/>
           <a:p>
             <a:pPr algn="ctr"/>
+            <a:endParaRPr/>
           </a:p>
         </p:txBody>
       </p:sp>
@@ -6690,7 +6495,7 @@
           <a:noFill/>
         </p:spPr>
         <p:txBody>
-          <a:bodyPr wrap="square" anchor="t" lIns="0" rIns="0" tIns="0" bIns="0">
+          <a:bodyPr wrap="square" lIns="0" tIns="0" rIns="0" bIns="0" anchor="t">
             <a:spAutoFit/>
           </a:bodyPr>
           <a:lstStyle/>
@@ -6732,7 +6537,7 @@
                 </a:solidFill>
                 <a:latin typeface="Calibri"/>
               </a:rPr>
-              <a:t xml:space="preserve">✓  </a:t>
+              <a:t>✓  </a:t>
             </a:r>
             <a:r>
               <a:rPr sz="1250" b="0" i="0">
@@ -6763,7 +6568,7 @@
                 </a:solidFill>
                 <a:latin typeface="Calibri"/>
               </a:rPr>
-              <a:t xml:space="preserve">✓  </a:t>
+              <a:t>✓  </a:t>
             </a:r>
             <a:r>
               <a:rPr sz="1250" b="0" i="0">
@@ -6794,7 +6599,7 @@
                 </a:solidFill>
                 <a:latin typeface="Calibri"/>
               </a:rPr>
-              <a:t xml:space="preserve">✓  </a:t>
+              <a:t>✓  </a:t>
             </a:r>
             <a:r>
               <a:rPr sz="1250" b="0" i="0">
@@ -6825,7 +6630,7 @@
                 </a:solidFill>
                 <a:latin typeface="Calibri"/>
               </a:rPr>
-              <a:t xml:space="preserve">✓  </a:t>
+              <a:t>✓  </a:t>
             </a:r>
             <a:r>
               <a:rPr sz="1250" b="0" i="0">
@@ -6856,7 +6661,7 @@
                 </a:solidFill>
                 <a:latin typeface="Calibri"/>
               </a:rPr>
-              <a:t xml:space="preserve">✓  </a:t>
+              <a:t>✓  </a:t>
             </a:r>
             <a:r>
               <a:rPr sz="1250" b="0" i="0">
@@ -6887,7 +6692,7 @@
                 </a:solidFill>
                 <a:latin typeface="Calibri"/>
               </a:rPr>
-              <a:t xml:space="preserve">✓  </a:t>
+              <a:t>✓  </a:t>
             </a:r>
             <a:r>
               <a:rPr sz="1250" b="0" i="0">
@@ -6918,7 +6723,7 @@
                 </a:solidFill>
                 <a:latin typeface="Calibri"/>
               </a:rPr>
-              <a:t xml:space="preserve">✓  </a:t>
+              <a:t>✓  </a:t>
             </a:r>
             <a:r>
               <a:rPr sz="1250" b="0" i="0">
@@ -6949,7 +6754,7 @@
                 </a:solidFill>
                 <a:latin typeface="Calibri"/>
               </a:rPr>
-              <a:t xml:space="preserve">✓  </a:t>
+              <a:t>✓  </a:t>
             </a:r>
             <a:r>
               <a:rPr sz="1250" b="0" i="0">
@@ -6980,7 +6785,7 @@
                 </a:solidFill>
                 <a:latin typeface="Calibri"/>
               </a:rPr>
-              <a:t xml:space="preserve">✓  </a:t>
+              <a:t>✓  </a:t>
             </a:r>
             <a:r>
               <a:rPr sz="1250" b="0" i="0">
@@ -7011,7 +6816,7 @@
           <a:noFill/>
         </p:spPr>
         <p:txBody>
-          <a:bodyPr wrap="square" anchor="t" lIns="0" rIns="0" tIns="0" bIns="0">
+          <a:bodyPr wrap="square" lIns="0" tIns="0" rIns="0" bIns="0" anchor="t">
             <a:spAutoFit/>
           </a:bodyPr>
           <a:lstStyle/>
@@ -7053,7 +6858,7 @@
           <a:noFill/>
         </p:spPr>
         <p:txBody>
-          <a:bodyPr wrap="square" anchor="t" lIns="0" rIns="0" tIns="0" bIns="0">
+          <a:bodyPr wrap="square" lIns="0" tIns="0" rIns="0" bIns="0" anchor="t">
             <a:spAutoFit/>
           </a:bodyPr>
           <a:lstStyle/>
@@ -7087,7 +6892,7 @@
 </file>
 
 <file path=ppt/slides/slide12.xml><?xml version="1.0" encoding="utf-8"?>
-<p:sld xmlns:a="http://schemas.openxmlformats.org/drawingml/2006/main" xmlns:p="http://schemas.openxmlformats.org/presentationml/2006/main" xmlns:r="http://schemas.openxmlformats.org/officeDocument/2006/relationships">
+<p:sld xmlns:a="http://schemas.openxmlformats.org/drawingml/2006/main" xmlns:r="http://schemas.openxmlformats.org/officeDocument/2006/relationships" xmlns:p="http://schemas.openxmlformats.org/presentationml/2006/main">
   <p:cSld>
     <p:spTree>
       <p:nvGrpSpPr>
@@ -7095,7 +6900,14 @@
         <p:cNvGrpSpPr/>
         <p:nvPr/>
       </p:nvGrpSpPr>
-      <p:grpSpPr/>
+      <p:grpSpPr>
+        <a:xfrm>
+          <a:off x="0" y="0"/>
+          <a:ext cx="0" cy="0"/>
+          <a:chOff x="0" y="0"/>
+          <a:chExt cx="0" cy="0"/>
+        </a:xfrm>
+      </p:grpSpPr>
       <p:sp>
         <p:nvSpPr>
           <p:cNvPr id="2" name="Rectangle 1"/>
@@ -7137,6 +6949,7 @@
           <a:lstStyle/>
           <a:p>
             <a:pPr algn="ctr"/>
+            <a:endParaRPr/>
           </a:p>
         </p:txBody>
       </p:sp>
@@ -7157,7 +6970,7 @@
           <a:noFill/>
         </p:spPr>
         <p:txBody>
-          <a:bodyPr wrap="square" anchor="t" lIns="0" rIns="0" tIns="0" bIns="0">
+          <a:bodyPr wrap="square" lIns="0" tIns="0" rIns="0" bIns="0" anchor="t">
             <a:spAutoFit/>
           </a:bodyPr>
           <a:lstStyle/>
@@ -7199,7 +7012,7 @@
           <a:noFill/>
         </p:spPr>
         <p:txBody>
-          <a:bodyPr wrap="square" anchor="t" lIns="0" rIns="0" tIns="0" bIns="0">
+          <a:bodyPr wrap="square" lIns="0" tIns="0" rIns="0" bIns="0" anchor="t">
             <a:spAutoFit/>
           </a:bodyPr>
           <a:lstStyle/>
@@ -7268,6 +7081,7 @@
           <a:lstStyle/>
           <a:p>
             <a:pPr algn="ctr"/>
+            <a:endParaRPr/>
           </a:p>
         </p:txBody>
       </p:sp>
@@ -7308,7 +7122,7 @@
           </a:fontRef>
         </p:style>
         <p:txBody>
-          <a:bodyPr rtlCol="0" anchor="ctr" wrap="none" lIns="0" rIns="0" tIns="0" bIns="0"/>
+          <a:bodyPr wrap="none" lIns="0" tIns="0" rIns="0" bIns="0" rtlCol="0" anchor="ctr"/>
           <a:lstStyle/>
           <a:p>
             <a:pPr algn="ctr"/>
@@ -7341,7 +7155,7 @@
           <a:noFill/>
         </p:spPr>
         <p:txBody>
-          <a:bodyPr wrap="square" anchor="t" lIns="0" rIns="0" tIns="0" bIns="0">
+          <a:bodyPr wrap="square" lIns="0" tIns="0" rIns="0" bIns="0" anchor="t">
             <a:spAutoFit/>
           </a:bodyPr>
           <a:lstStyle/>
@@ -7451,6 +7265,7 @@
           <a:lstStyle/>
           <a:p>
             <a:pPr algn="ctr"/>
+            <a:endParaRPr/>
           </a:p>
         </p:txBody>
       </p:sp>
@@ -7495,6 +7310,7 @@
           <a:lstStyle/>
           <a:p>
             <a:pPr algn="ctr"/>
+            <a:endParaRPr/>
           </a:p>
         </p:txBody>
       </p:sp>
@@ -7535,7 +7351,7 @@
           </a:fontRef>
         </p:style>
         <p:txBody>
-          <a:bodyPr rtlCol="0" anchor="ctr" wrap="none" lIns="0" rIns="0" tIns="0" bIns="0"/>
+          <a:bodyPr wrap="none" lIns="0" tIns="0" rIns="0" bIns="0" rtlCol="0" anchor="ctr"/>
           <a:lstStyle/>
           <a:p>
             <a:pPr algn="ctr"/>
@@ -7568,7 +7384,7 @@
           <a:noFill/>
         </p:spPr>
         <p:txBody>
-          <a:bodyPr wrap="square" anchor="t" lIns="0" rIns="0" tIns="0" bIns="0">
+          <a:bodyPr wrap="square" lIns="0" tIns="0" rIns="0" bIns="0" anchor="t">
             <a:spAutoFit/>
           </a:bodyPr>
           <a:lstStyle/>
@@ -7678,6 +7494,7 @@
           <a:lstStyle/>
           <a:p>
             <a:pPr algn="ctr"/>
+            <a:endParaRPr/>
           </a:p>
         </p:txBody>
       </p:sp>
@@ -7722,6 +7539,7 @@
           <a:lstStyle/>
           <a:p>
             <a:pPr algn="ctr"/>
+            <a:endParaRPr/>
           </a:p>
         </p:txBody>
       </p:sp>
@@ -7762,7 +7580,7 @@
           </a:fontRef>
         </p:style>
         <p:txBody>
-          <a:bodyPr rtlCol="0" anchor="ctr" wrap="none" lIns="0" rIns="0" tIns="0" bIns="0"/>
+          <a:bodyPr wrap="none" lIns="0" tIns="0" rIns="0" bIns="0" rtlCol="0" anchor="ctr"/>
           <a:lstStyle/>
           <a:p>
             <a:pPr algn="ctr"/>
@@ -7795,7 +7613,7 @@
           <a:noFill/>
         </p:spPr>
         <p:txBody>
-          <a:bodyPr wrap="square" anchor="t" lIns="0" rIns="0" tIns="0" bIns="0">
+          <a:bodyPr wrap="square" lIns="0" tIns="0" rIns="0" bIns="0" anchor="t">
             <a:spAutoFit/>
           </a:bodyPr>
           <a:lstStyle/>
@@ -7881,7 +7699,7 @@
           <a:noFill/>
         </p:spPr>
         <p:txBody>
-          <a:bodyPr wrap="square" anchor="t" lIns="0" rIns="0" tIns="0" bIns="0">
+          <a:bodyPr wrap="square" lIns="0" tIns="0" rIns="0" bIns="0" anchor="t">
             <a:spAutoFit/>
           </a:bodyPr>
           <a:lstStyle/>
@@ -7926,7 +7744,7 @@
           <a:noFill/>
         </p:spPr>
         <p:txBody>
-          <a:bodyPr wrap="square" anchor="t" lIns="0" rIns="0" tIns="0" bIns="0">
+          <a:bodyPr wrap="square" lIns="0" tIns="0" rIns="0" bIns="0" anchor="t">
             <a:spAutoFit/>
           </a:bodyPr>
           <a:lstStyle/>
@@ -7960,7 +7778,7 @@
 </file>
 
 <file path=ppt/slides/slide13.xml><?xml version="1.0" encoding="utf-8"?>
-<p:sld xmlns:a="http://schemas.openxmlformats.org/drawingml/2006/main" xmlns:p="http://schemas.openxmlformats.org/presentationml/2006/main" xmlns:r="http://schemas.openxmlformats.org/officeDocument/2006/relationships">
+<p:sld xmlns:a="http://schemas.openxmlformats.org/drawingml/2006/main" xmlns:r="http://schemas.openxmlformats.org/officeDocument/2006/relationships" xmlns:p="http://schemas.openxmlformats.org/presentationml/2006/main">
   <p:cSld>
     <p:spTree>
       <p:nvGrpSpPr>
@@ -7968,7 +7786,14 @@
         <p:cNvGrpSpPr/>
         <p:nvPr/>
       </p:nvGrpSpPr>
-      <p:grpSpPr/>
+      <p:grpSpPr>
+        <a:xfrm>
+          <a:off x="0" y="0"/>
+          <a:ext cx="0" cy="0"/>
+          <a:chOff x="0" y="0"/>
+          <a:chExt cx="0" cy="0"/>
+        </a:xfrm>
+      </p:grpSpPr>
       <p:sp>
         <p:nvSpPr>
           <p:cNvPr id="2" name="Rectangle 1"/>
@@ -8010,6 +7835,7 @@
           <a:lstStyle/>
           <a:p>
             <a:pPr algn="ctr"/>
+            <a:endParaRPr/>
           </a:p>
         </p:txBody>
       </p:sp>
@@ -8030,7 +7856,7 @@
           <a:noFill/>
         </p:spPr>
         <p:txBody>
-          <a:bodyPr wrap="square" anchor="t" lIns="0" rIns="0" tIns="0" bIns="0">
+          <a:bodyPr wrap="square" lIns="0" tIns="0" rIns="0" bIns="0" anchor="t">
             <a:spAutoFit/>
           </a:bodyPr>
           <a:lstStyle/>
@@ -8072,7 +7898,7 @@
           <a:noFill/>
         </p:spPr>
         <p:txBody>
-          <a:bodyPr wrap="square" anchor="t" lIns="0" rIns="0" tIns="0" bIns="0">
+          <a:bodyPr wrap="square" lIns="0" tIns="0" rIns="0" bIns="0" anchor="t">
             <a:spAutoFit/>
           </a:bodyPr>
           <a:lstStyle/>
@@ -8117,7 +7943,7 @@
           <a:noFill/>
         </p:spPr>
         <p:txBody>
-          <a:bodyPr wrap="square" anchor="t" lIns="0" rIns="0" tIns="0" bIns="0">
+          <a:bodyPr wrap="square" lIns="0" tIns="0" rIns="0" bIns="0" anchor="t">
             <a:spAutoFit/>
           </a:bodyPr>
           <a:lstStyle/>
@@ -8186,6 +8012,7 @@
           <a:lstStyle/>
           <a:p>
             <a:pPr algn="ctr"/>
+            <a:endParaRPr/>
           </a:p>
         </p:txBody>
       </p:sp>
@@ -8206,7 +8033,7 @@
           <a:noFill/>
         </p:spPr>
         <p:txBody>
-          <a:bodyPr wrap="square" anchor="ctr" lIns="0" rIns="0" tIns="0" bIns="0">
+          <a:bodyPr wrap="square" lIns="0" tIns="0" rIns="0" bIns="0" anchor="ctr">
             <a:spAutoFit/>
           </a:bodyPr>
           <a:lstStyle/>
@@ -8275,6 +8102,7 @@
           <a:lstStyle/>
           <a:p>
             <a:pPr algn="ctr"/>
+            <a:endParaRPr/>
           </a:p>
         </p:txBody>
       </p:sp>
@@ -8295,7 +8123,7 @@
           <a:noFill/>
         </p:spPr>
         <p:txBody>
-          <a:bodyPr wrap="square" anchor="ctr" lIns="0" rIns="0" tIns="0" bIns="0">
+          <a:bodyPr wrap="square" lIns="0" tIns="0" rIns="0" bIns="0" anchor="ctr">
             <a:spAutoFit/>
           </a:bodyPr>
           <a:lstStyle/>
@@ -8366,6 +8194,7 @@
           <a:lstStyle/>
           <a:p>
             <a:pPr algn="ctr"/>
+            <a:endParaRPr/>
           </a:p>
         </p:txBody>
       </p:sp>
@@ -8386,7 +8215,7 @@
           <a:noFill/>
         </p:spPr>
         <p:txBody>
-          <a:bodyPr wrap="square" anchor="ctr" lIns="0" rIns="0" tIns="0" bIns="0">
+          <a:bodyPr wrap="square" lIns="0" tIns="0" rIns="0" bIns="0" anchor="ctr">
             <a:spAutoFit/>
           </a:bodyPr>
           <a:lstStyle/>
@@ -8455,6 +8284,7 @@
           <a:lstStyle/>
           <a:p>
             <a:pPr algn="ctr"/>
+            <a:endParaRPr/>
           </a:p>
         </p:txBody>
       </p:sp>
@@ -8475,7 +8305,7 @@
           <a:noFill/>
         </p:spPr>
         <p:txBody>
-          <a:bodyPr wrap="square" anchor="ctr" lIns="0" rIns="0" tIns="0" bIns="0">
+          <a:bodyPr wrap="square" lIns="0" tIns="0" rIns="0" bIns="0" anchor="ctr">
             <a:spAutoFit/>
           </a:bodyPr>
           <a:lstStyle/>
@@ -8544,6 +8374,7 @@
           <a:lstStyle/>
           <a:p>
             <a:pPr algn="ctr"/>
+            <a:endParaRPr/>
           </a:p>
         </p:txBody>
       </p:sp>
@@ -8564,7 +8395,7 @@
           <a:noFill/>
         </p:spPr>
         <p:txBody>
-          <a:bodyPr wrap="square" anchor="ctr" lIns="0" rIns="0" tIns="0" bIns="0">
+          <a:bodyPr wrap="square" lIns="0" tIns="0" rIns="0" bIns="0" anchor="ctr">
             <a:spAutoFit/>
           </a:bodyPr>
           <a:lstStyle/>
@@ -8635,6 +8466,7 @@
           <a:lstStyle/>
           <a:p>
             <a:pPr algn="ctr"/>
+            <a:endParaRPr/>
           </a:p>
         </p:txBody>
       </p:sp>
@@ -8655,7 +8487,7 @@
           <a:noFill/>
         </p:spPr>
         <p:txBody>
-          <a:bodyPr wrap="square" anchor="ctr" lIns="0" rIns="0" tIns="0" bIns="0">
+          <a:bodyPr wrap="square" lIns="0" tIns="0" rIns="0" bIns="0" anchor="ctr">
             <a:spAutoFit/>
           </a:bodyPr>
           <a:lstStyle/>
@@ -8724,6 +8556,7 @@
           <a:lstStyle/>
           <a:p>
             <a:pPr algn="ctr"/>
+            <a:endParaRPr/>
           </a:p>
         </p:txBody>
       </p:sp>
@@ -8744,7 +8577,7 @@
           <a:noFill/>
         </p:spPr>
         <p:txBody>
-          <a:bodyPr wrap="square" anchor="ctr" lIns="0" rIns="0" tIns="0" bIns="0">
+          <a:bodyPr wrap="square" lIns="0" tIns="0" rIns="0" bIns="0" anchor="ctr">
             <a:spAutoFit/>
           </a:bodyPr>
           <a:lstStyle/>
@@ -8813,6 +8646,7 @@
           <a:lstStyle/>
           <a:p>
             <a:pPr algn="ctr"/>
+            <a:endParaRPr/>
           </a:p>
         </p:txBody>
       </p:sp>
@@ -8833,7 +8667,7 @@
           <a:noFill/>
         </p:spPr>
         <p:txBody>
-          <a:bodyPr wrap="square" anchor="ctr" lIns="0" rIns="0" tIns="0" bIns="0">
+          <a:bodyPr wrap="square" lIns="0" tIns="0" rIns="0" bIns="0" anchor="ctr">
             <a:spAutoFit/>
           </a:bodyPr>
           <a:lstStyle/>
@@ -8902,6 +8736,7 @@
           <a:lstStyle/>
           <a:p>
             <a:pPr algn="ctr"/>
+            <a:endParaRPr/>
           </a:p>
         </p:txBody>
       </p:sp>
@@ -8922,7 +8757,7 @@
           <a:noFill/>
         </p:spPr>
         <p:txBody>
-          <a:bodyPr wrap="square" anchor="ctr" lIns="0" rIns="0" tIns="0" bIns="0">
+          <a:bodyPr wrap="square" lIns="0" tIns="0" rIns="0" bIns="0" anchor="ctr">
             <a:spAutoFit/>
           </a:bodyPr>
           <a:lstStyle/>
@@ -8993,6 +8828,7 @@
           <a:lstStyle/>
           <a:p>
             <a:pPr algn="ctr"/>
+            <a:endParaRPr/>
           </a:p>
         </p:txBody>
       </p:sp>
@@ -9013,7 +8849,7 @@
           <a:noFill/>
         </p:spPr>
         <p:txBody>
-          <a:bodyPr wrap="square" anchor="ctr" lIns="0" rIns="0" tIns="0" bIns="0">
+          <a:bodyPr wrap="square" lIns="0" tIns="0" rIns="0" bIns="0" anchor="ctr">
             <a:spAutoFit/>
           </a:bodyPr>
           <a:lstStyle/>
@@ -9025,7 +8861,7 @@
                 </a:solidFill>
                 <a:latin typeface="Consolas"/>
               </a:rPr>
-              <a:t xml:space="preserve">RESULT:  </a:t>
+              <a:t>RESULT:  </a:t>
             </a:r>
             <a:r>
               <a:rPr sz="1500" b="1" i="0">
@@ -9043,7 +8879,7 @@
                 </a:solidFill>
                 <a:latin typeface="Consolas"/>
               </a:rPr>
-              <a:t xml:space="preserve">     ·  exits non-zero if any step fails</a:t>
+              <a:t>     ·  exits non-zero if any step fails</a:t>
             </a:r>
           </a:p>
         </p:txBody>
@@ -9065,7 +8901,7 @@
           <a:noFill/>
         </p:spPr>
         <p:txBody>
-          <a:bodyPr wrap="square" anchor="t" lIns="0" rIns="0" tIns="0" bIns="0">
+          <a:bodyPr wrap="square" lIns="0" tIns="0" rIns="0" bIns="0" anchor="t">
             <a:spAutoFit/>
           </a:bodyPr>
           <a:lstStyle/>
@@ -9088,7 +8924,7 @@
                 </a:solidFill>
                 <a:latin typeface="Calibri"/>
               </a:rPr>
-              <a:t xml:space="preserve">✓  </a:t>
+              <a:t>✓  </a:t>
             </a:r>
             <a:r>
               <a:rPr sz="1200" b="0" i="0">
@@ -9119,7 +8955,7 @@
           <a:noFill/>
         </p:spPr>
         <p:txBody>
-          <a:bodyPr wrap="square" anchor="t" lIns="0" rIns="0" tIns="0" bIns="0">
+          <a:bodyPr wrap="square" lIns="0" tIns="0" rIns="0" bIns="0" anchor="t">
             <a:spAutoFit/>
           </a:bodyPr>
           <a:lstStyle/>
@@ -9142,7 +8978,7 @@
                 </a:solidFill>
                 <a:latin typeface="Calibri"/>
               </a:rPr>
-              <a:t xml:space="preserve">✓  </a:t>
+              <a:t>✓  </a:t>
             </a:r>
             <a:r>
               <a:rPr sz="1200" b="0" i="0">
@@ -9173,7 +9009,7 @@
           <a:noFill/>
         </p:spPr>
         <p:txBody>
-          <a:bodyPr wrap="square" anchor="t" lIns="0" rIns="0" tIns="0" bIns="0">
+          <a:bodyPr wrap="square" lIns="0" tIns="0" rIns="0" bIns="0" anchor="t">
             <a:spAutoFit/>
           </a:bodyPr>
           <a:lstStyle/>
@@ -9196,7 +9032,7 @@
                 </a:solidFill>
                 <a:latin typeface="Calibri"/>
               </a:rPr>
-              <a:t xml:space="preserve">✓  </a:t>
+              <a:t>✓  </a:t>
             </a:r>
             <a:r>
               <a:rPr sz="1200" b="0" i="0">
@@ -9227,7 +9063,7 @@
           <a:noFill/>
         </p:spPr>
         <p:txBody>
-          <a:bodyPr wrap="square" anchor="t" lIns="0" rIns="0" tIns="0" bIns="0">
+          <a:bodyPr wrap="square" lIns="0" tIns="0" rIns="0" bIns="0" anchor="t">
             <a:spAutoFit/>
           </a:bodyPr>
           <a:lstStyle/>
@@ -9250,7 +9086,7 @@
                 </a:solidFill>
                 <a:latin typeface="Calibri"/>
               </a:rPr>
-              <a:t xml:space="preserve">✓  </a:t>
+              <a:t>✓  </a:t>
             </a:r>
             <a:r>
               <a:rPr sz="1200" b="0" i="0">
@@ -9281,7 +9117,7 @@
           <a:noFill/>
         </p:spPr>
         <p:txBody>
-          <a:bodyPr wrap="square" anchor="t" lIns="0" rIns="0" tIns="0" bIns="0">
+          <a:bodyPr wrap="square" lIns="0" tIns="0" rIns="0" bIns="0" anchor="t">
             <a:spAutoFit/>
           </a:bodyPr>
           <a:lstStyle/>
@@ -9304,7 +9140,7 @@
                 </a:solidFill>
                 <a:latin typeface="Calibri"/>
               </a:rPr>
-              <a:t xml:space="preserve">✓  </a:t>
+              <a:t>✓  </a:t>
             </a:r>
             <a:r>
               <a:rPr sz="1200" b="0" i="0">
@@ -9335,7 +9171,7 @@
           <a:noFill/>
         </p:spPr>
         <p:txBody>
-          <a:bodyPr wrap="square" anchor="t" lIns="0" rIns="0" tIns="0" bIns="0">
+          <a:bodyPr wrap="square" lIns="0" tIns="0" rIns="0" bIns="0" anchor="t">
             <a:spAutoFit/>
           </a:bodyPr>
           <a:lstStyle/>
@@ -9358,7 +9194,7 @@
                 </a:solidFill>
                 <a:latin typeface="Calibri"/>
               </a:rPr>
-              <a:t xml:space="preserve">✓  </a:t>
+              <a:t>✓  </a:t>
             </a:r>
             <a:r>
               <a:rPr sz="1200" b="0" i="0">
@@ -9389,7 +9225,7 @@
           <a:noFill/>
         </p:spPr>
         <p:txBody>
-          <a:bodyPr wrap="square" anchor="t" lIns="0" rIns="0" tIns="0" bIns="0">
+          <a:bodyPr wrap="square" lIns="0" tIns="0" rIns="0" bIns="0" anchor="t">
             <a:spAutoFit/>
           </a:bodyPr>
           <a:lstStyle/>
@@ -9431,7 +9267,7 @@
           <a:noFill/>
         </p:spPr>
         <p:txBody>
-          <a:bodyPr wrap="square" anchor="t" lIns="0" rIns="0" tIns="0" bIns="0">
+          <a:bodyPr wrap="square" lIns="0" tIns="0" rIns="0" bIns="0" anchor="t">
             <a:spAutoFit/>
           </a:bodyPr>
           <a:lstStyle/>
@@ -9465,7 +9301,7 @@
 </file>
 
 <file path=ppt/slides/slide14.xml><?xml version="1.0" encoding="utf-8"?>
-<p:sld xmlns:a="http://schemas.openxmlformats.org/drawingml/2006/main" xmlns:p="http://schemas.openxmlformats.org/presentationml/2006/main" xmlns:r="http://schemas.openxmlformats.org/officeDocument/2006/relationships">
+<p:sld xmlns:a="http://schemas.openxmlformats.org/drawingml/2006/main" xmlns:r="http://schemas.openxmlformats.org/officeDocument/2006/relationships" xmlns:p="http://schemas.openxmlformats.org/presentationml/2006/main">
   <p:cSld>
     <p:spTree>
       <p:nvGrpSpPr>
@@ -9473,7 +9309,14 @@
         <p:cNvGrpSpPr/>
         <p:nvPr/>
       </p:nvGrpSpPr>
-      <p:grpSpPr/>
+      <p:grpSpPr>
+        <a:xfrm>
+          <a:off x="0" y="0"/>
+          <a:ext cx="0" cy="0"/>
+          <a:chOff x="0" y="0"/>
+          <a:chExt cx="0" cy="0"/>
+        </a:xfrm>
+      </p:grpSpPr>
       <p:sp>
         <p:nvSpPr>
           <p:cNvPr id="2" name="Rectangle 1"/>
@@ -9515,6 +9358,7 @@
           <a:lstStyle/>
           <a:p>
             <a:pPr algn="ctr"/>
+            <a:endParaRPr/>
           </a:p>
         </p:txBody>
       </p:sp>
@@ -9535,7 +9379,7 @@
           <a:noFill/>
         </p:spPr>
         <p:txBody>
-          <a:bodyPr wrap="square" anchor="t" lIns="0" rIns="0" tIns="0" bIns="0">
+          <a:bodyPr wrap="square" lIns="0" tIns="0" rIns="0" bIns="0" anchor="t">
             <a:spAutoFit/>
           </a:bodyPr>
           <a:lstStyle/>
@@ -9577,7 +9421,7 @@
           <a:noFill/>
         </p:spPr>
         <p:txBody>
-          <a:bodyPr wrap="square" anchor="t" lIns="0" rIns="0" tIns="0" bIns="0">
+          <a:bodyPr wrap="square" lIns="0" tIns="0" rIns="0" bIns="0" anchor="t">
             <a:spAutoFit/>
           </a:bodyPr>
           <a:lstStyle/>
@@ -9646,6 +9490,7 @@
           <a:lstStyle/>
           <a:p>
             <a:pPr algn="ctr"/>
+            <a:endParaRPr/>
           </a:p>
         </p:txBody>
       </p:sp>
@@ -9666,7 +9511,7 @@
           <a:noFill/>
         </p:spPr>
         <p:txBody>
-          <a:bodyPr wrap="square" anchor="t" lIns="0" rIns="0" tIns="0" bIns="0">
+          <a:bodyPr wrap="square" lIns="0" tIns="0" rIns="0" bIns="0" anchor="t">
             <a:spAutoFit/>
           </a:bodyPr>
           <a:lstStyle/>
@@ -9708,7 +9553,7 @@
                 </a:solidFill>
                 <a:latin typeface="Calibri"/>
               </a:rPr>
-              <a:t xml:space="preserve">✓  </a:t>
+              <a:t>✓  </a:t>
             </a:r>
             <a:r>
               <a:rPr sz="1150" b="0" i="0">
@@ -9739,7 +9584,7 @@
                 </a:solidFill>
                 <a:latin typeface="Calibri"/>
               </a:rPr>
-              <a:t xml:space="preserve">✓  </a:t>
+              <a:t>✓  </a:t>
             </a:r>
             <a:r>
               <a:rPr sz="1150" b="0" i="0">
@@ -9770,7 +9615,7 @@
                 </a:solidFill>
                 <a:latin typeface="Calibri"/>
               </a:rPr>
-              <a:t xml:space="preserve">✓  </a:t>
+              <a:t>✓  </a:t>
             </a:r>
             <a:r>
               <a:rPr sz="1150" b="0" i="0">
@@ -9801,7 +9646,7 @@
                 </a:solidFill>
                 <a:latin typeface="Calibri"/>
               </a:rPr>
-              <a:t xml:space="preserve">✓  </a:t>
+              <a:t>✓  </a:t>
             </a:r>
             <a:r>
               <a:rPr sz="1150" b="0" i="0">
@@ -9832,7 +9677,7 @@
                 </a:solidFill>
                 <a:latin typeface="Calibri"/>
               </a:rPr>
-              <a:t xml:space="preserve">✓  </a:t>
+              <a:t>✓  </a:t>
             </a:r>
             <a:r>
               <a:rPr sz="1150" b="0" i="0">
@@ -9863,7 +9708,7 @@
                 </a:solidFill>
                 <a:latin typeface="Calibri"/>
               </a:rPr>
-              <a:t xml:space="preserve">✓  </a:t>
+              <a:t>✓  </a:t>
             </a:r>
             <a:r>
               <a:rPr sz="1150" b="0" i="0">
@@ -9894,7 +9739,7 @@
                 </a:solidFill>
                 <a:latin typeface="Calibri"/>
               </a:rPr>
-              <a:t xml:space="preserve">✓  </a:t>
+              <a:t>✓  </a:t>
             </a:r>
             <a:r>
               <a:rPr sz="1150" b="0" i="0">
@@ -9925,7 +9770,7 @@
                 </a:solidFill>
                 <a:latin typeface="Calibri"/>
               </a:rPr>
-              <a:t xml:space="preserve">✓  </a:t>
+              <a:t>✓  </a:t>
             </a:r>
             <a:r>
               <a:rPr sz="1150" b="0" i="0">
@@ -9980,6 +9825,7 @@
           <a:lstStyle/>
           <a:p>
             <a:pPr algn="ctr"/>
+            <a:endParaRPr/>
           </a:p>
         </p:txBody>
       </p:sp>
@@ -10000,7 +9846,7 @@
           <a:noFill/>
         </p:spPr>
         <p:txBody>
-          <a:bodyPr wrap="square" anchor="t" lIns="0" rIns="0" tIns="0" bIns="0">
+          <a:bodyPr wrap="square" lIns="0" tIns="0" rIns="0" bIns="0" anchor="t">
             <a:spAutoFit/>
           </a:bodyPr>
           <a:lstStyle/>
@@ -10042,7 +9888,7 @@
                 </a:solidFill>
                 <a:latin typeface="Calibri"/>
               </a:rPr>
-              <a:t xml:space="preserve">+  </a:t>
+              <a:t>+  </a:t>
             </a:r>
             <a:r>
               <a:rPr sz="1150" b="0" i="0">
@@ -10073,7 +9919,7 @@
                 </a:solidFill>
                 <a:latin typeface="Calibri"/>
               </a:rPr>
-              <a:t xml:space="preserve">+  </a:t>
+              <a:t>+  </a:t>
             </a:r>
             <a:r>
               <a:rPr sz="1150" b="0" i="0">
@@ -10104,7 +9950,7 @@
                 </a:solidFill>
                 <a:latin typeface="Calibri"/>
               </a:rPr>
-              <a:t xml:space="preserve">+  </a:t>
+              <a:t>+  </a:t>
             </a:r>
             <a:r>
               <a:rPr sz="1150" b="0" i="0">
@@ -10135,7 +9981,7 @@
                 </a:solidFill>
                 <a:latin typeface="Calibri"/>
               </a:rPr>
-              <a:t xml:space="preserve">+  </a:t>
+              <a:t>+  </a:t>
             </a:r>
             <a:r>
               <a:rPr sz="1150" b="0" i="0">
@@ -10166,7 +10012,7 @@
                 </a:solidFill>
                 <a:latin typeface="Calibri"/>
               </a:rPr>
-              <a:t xml:space="preserve">+  </a:t>
+              <a:t>+  </a:t>
             </a:r>
             <a:r>
               <a:rPr sz="1150" b="0" i="0">
@@ -10197,7 +10043,7 @@
                 </a:solidFill>
                 <a:latin typeface="Calibri"/>
               </a:rPr>
-              <a:t xml:space="preserve">+  </a:t>
+              <a:t>+  </a:t>
             </a:r>
             <a:r>
               <a:rPr sz="1150" b="0" i="0">
@@ -10228,7 +10074,7 @@
                 </a:solidFill>
                 <a:latin typeface="Calibri"/>
               </a:rPr>
-              <a:t xml:space="preserve">+  </a:t>
+              <a:t>+  </a:t>
             </a:r>
             <a:r>
               <a:rPr sz="1150" b="0" i="0">
@@ -10259,7 +10105,7 @@
           <a:noFill/>
         </p:spPr>
         <p:txBody>
-          <a:bodyPr wrap="square" anchor="t" lIns="0" rIns="0" tIns="0" bIns="0">
+          <a:bodyPr wrap="square" lIns="0" tIns="0" rIns="0" bIns="0" anchor="t">
             <a:spAutoFit/>
           </a:bodyPr>
           <a:lstStyle/>
@@ -10293,7 +10139,7 @@
 </file>
 
 <file path=ppt/slides/slide15.xml><?xml version="1.0" encoding="utf-8"?>
-<p:sld xmlns:a="http://schemas.openxmlformats.org/drawingml/2006/main" xmlns:p="http://schemas.openxmlformats.org/presentationml/2006/main" xmlns:r="http://schemas.openxmlformats.org/officeDocument/2006/relationships">
+<p:sld xmlns:a="http://schemas.openxmlformats.org/drawingml/2006/main" xmlns:r="http://schemas.openxmlformats.org/officeDocument/2006/relationships" xmlns:p="http://schemas.openxmlformats.org/presentationml/2006/main">
   <p:cSld>
     <p:spTree>
       <p:nvGrpSpPr>
@@ -10301,7 +10147,14 @@
         <p:cNvGrpSpPr/>
         <p:nvPr/>
       </p:nvGrpSpPr>
-      <p:grpSpPr/>
+      <p:grpSpPr>
+        <a:xfrm>
+          <a:off x="0" y="0"/>
+          <a:ext cx="0" cy="0"/>
+          <a:chOff x="0" y="0"/>
+          <a:chExt cx="0" cy="0"/>
+        </a:xfrm>
+      </p:grpSpPr>
       <p:sp>
         <p:nvSpPr>
           <p:cNvPr id="2" name="Rectangle 1"/>
@@ -10343,6 +10196,7 @@
           <a:lstStyle/>
           <a:p>
             <a:pPr algn="ctr"/>
+            <a:endParaRPr/>
           </a:p>
         </p:txBody>
       </p:sp>
@@ -10363,7 +10217,7 @@
           <a:noFill/>
         </p:spPr>
         <p:txBody>
-          <a:bodyPr wrap="square" anchor="t" lIns="0" rIns="0" tIns="0" bIns="0">
+          <a:bodyPr wrap="square" lIns="0" tIns="0" rIns="0" bIns="0" anchor="t">
             <a:spAutoFit/>
           </a:bodyPr>
           <a:lstStyle/>
@@ -10405,7 +10259,7 @@
           <a:noFill/>
         </p:spPr>
         <p:txBody>
-          <a:bodyPr wrap="square" anchor="t" lIns="0" rIns="0" tIns="0" bIns="0">
+          <a:bodyPr wrap="square" lIns="0" tIns="0" rIns="0" bIns="0" anchor="t">
             <a:spAutoFit/>
           </a:bodyPr>
           <a:lstStyle/>
@@ -10476,6 +10330,7 @@
           <a:lstStyle/>
           <a:p>
             <a:pPr algn="ctr"/>
+            <a:endParaRPr/>
           </a:p>
         </p:txBody>
       </p:sp>
@@ -10496,7 +10351,7 @@
           <a:noFill/>
         </p:spPr>
         <p:txBody>
-          <a:bodyPr wrap="square" anchor="t" lIns="0" rIns="0" tIns="0" bIns="0">
+          <a:bodyPr wrap="square" lIns="0" tIns="0" rIns="0" bIns="0" anchor="t">
             <a:spAutoFit/>
           </a:bodyPr>
           <a:lstStyle/>
@@ -10538,7 +10393,7 @@
                 </a:solidFill>
                 <a:latin typeface="Calibri"/>
               </a:rPr>
-              <a:t xml:space="preserve">✓  </a:t>
+              <a:t>✓  </a:t>
             </a:r>
             <a:r>
               <a:rPr sz="1150" b="0" i="0">
@@ -10569,7 +10424,7 @@
                 </a:solidFill>
                 <a:latin typeface="Calibri"/>
               </a:rPr>
-              <a:t xml:space="preserve">✓  </a:t>
+              <a:t>✓  </a:t>
             </a:r>
             <a:r>
               <a:rPr sz="1150" b="0" i="0">
@@ -10600,7 +10455,7 @@
                 </a:solidFill>
                 <a:latin typeface="Calibri"/>
               </a:rPr>
-              <a:t xml:space="preserve">✓  </a:t>
+              <a:t>✓  </a:t>
             </a:r>
             <a:r>
               <a:rPr sz="1150" b="0" i="0">
@@ -10631,7 +10486,7 @@
                 </a:solidFill>
                 <a:latin typeface="Calibri"/>
               </a:rPr>
-              <a:t xml:space="preserve">✓  </a:t>
+              <a:t>✓  </a:t>
             </a:r>
             <a:r>
               <a:rPr sz="1150" b="0" i="0">
@@ -10662,7 +10517,7 @@
                 </a:solidFill>
                 <a:latin typeface="Calibri"/>
               </a:rPr>
-              <a:t xml:space="preserve">✓  </a:t>
+              <a:t>✓  </a:t>
             </a:r>
             <a:r>
               <a:rPr sz="1150" b="0" i="0">
@@ -10693,7 +10548,7 @@
                 </a:solidFill>
                 <a:latin typeface="Calibri"/>
               </a:rPr>
-              <a:t xml:space="preserve">✓  </a:t>
+              <a:t>✓  </a:t>
             </a:r>
             <a:r>
               <a:rPr sz="1150" b="0" i="0">
@@ -10724,7 +10579,7 @@
                 </a:solidFill>
                 <a:latin typeface="Calibri"/>
               </a:rPr>
-              <a:t xml:space="preserve">✓  </a:t>
+              <a:t>✓  </a:t>
             </a:r>
             <a:r>
               <a:rPr sz="1150" b="0" i="0">
@@ -10755,7 +10610,7 @@
                 </a:solidFill>
                 <a:latin typeface="Calibri"/>
               </a:rPr>
-              <a:t xml:space="preserve">✓  </a:t>
+              <a:t>✓  </a:t>
             </a:r>
             <a:r>
               <a:rPr sz="1150" b="0" i="0">
@@ -10812,6 +10667,7 @@
           <a:lstStyle/>
           <a:p>
             <a:pPr algn="ctr"/>
+            <a:endParaRPr/>
           </a:p>
         </p:txBody>
       </p:sp>
@@ -10832,7 +10688,7 @@
           <a:noFill/>
         </p:spPr>
         <p:txBody>
-          <a:bodyPr wrap="square" anchor="t" lIns="0" rIns="0" tIns="0" bIns="0">
+          <a:bodyPr wrap="square" lIns="0" tIns="0" rIns="0" bIns="0" anchor="t">
             <a:spAutoFit/>
           </a:bodyPr>
           <a:lstStyle/>
@@ -10874,7 +10730,7 @@
                 </a:solidFill>
                 <a:latin typeface="Calibri"/>
               </a:rPr>
-              <a:t xml:space="preserve">○  </a:t>
+              <a:t>○  </a:t>
             </a:r>
             <a:r>
               <a:rPr sz="1150" b="0" i="0">
@@ -10905,7 +10761,7 @@
                 </a:solidFill>
                 <a:latin typeface="Calibri"/>
               </a:rPr>
-              <a:t xml:space="preserve">○  </a:t>
+              <a:t>○  </a:t>
             </a:r>
             <a:r>
               <a:rPr sz="1150" b="0" i="0">
@@ -10936,7 +10792,7 @@
                 </a:solidFill>
                 <a:latin typeface="Calibri"/>
               </a:rPr>
-              <a:t xml:space="preserve">○  </a:t>
+              <a:t>○  </a:t>
             </a:r>
             <a:r>
               <a:rPr sz="1150" b="0" i="0">
@@ -10967,7 +10823,7 @@
                 </a:solidFill>
                 <a:latin typeface="Calibri"/>
               </a:rPr>
-              <a:t xml:space="preserve">○  </a:t>
+              <a:t>○  </a:t>
             </a:r>
             <a:r>
               <a:rPr sz="1150" b="0" i="0">
@@ -10998,7 +10854,7 @@
                 </a:solidFill>
                 <a:latin typeface="Calibri"/>
               </a:rPr>
-              <a:t xml:space="preserve">○  </a:t>
+              <a:t>○  </a:t>
             </a:r>
             <a:r>
               <a:rPr sz="1150" b="0" i="0">
@@ -11029,7 +10885,7 @@
                 </a:solidFill>
                 <a:latin typeface="Calibri"/>
               </a:rPr>
-              <a:t xml:space="preserve">○  </a:t>
+              <a:t>○  </a:t>
             </a:r>
             <a:r>
               <a:rPr sz="1150" b="0" i="0">
@@ -11060,7 +10916,7 @@
                 </a:solidFill>
                 <a:latin typeface="Calibri"/>
               </a:rPr>
-              <a:t xml:space="preserve">○  </a:t>
+              <a:t>○  </a:t>
             </a:r>
             <a:r>
               <a:rPr sz="1150" b="0" i="0">
@@ -11091,7 +10947,7 @@
                 </a:solidFill>
                 <a:latin typeface="Calibri"/>
               </a:rPr>
-              <a:t xml:space="preserve">○  </a:t>
+              <a:t>○  </a:t>
             </a:r>
             <a:r>
               <a:rPr sz="1150" b="0" i="0">
@@ -11146,6 +11002,7 @@
           <a:lstStyle/>
           <a:p>
             <a:pPr algn="ctr"/>
+            <a:endParaRPr/>
           </a:p>
         </p:txBody>
       </p:sp>
@@ -11166,7 +11023,7 @@
           <a:noFill/>
         </p:spPr>
         <p:txBody>
-          <a:bodyPr wrap="square" anchor="ctr" lIns="0" rIns="0" tIns="0" bIns="0">
+          <a:bodyPr wrap="square" lIns="0" tIns="0" rIns="0" bIns="0" anchor="ctr">
             <a:spAutoFit/>
           </a:bodyPr>
           <a:lstStyle/>
@@ -11178,7 +11035,7 @@
                 </a:solidFill>
                 <a:latin typeface="Cambria"/>
               </a:rPr>
-              <a:t xml:space="preserve">"HIPAA-eligible" ≠ "HIPAA-compliant."  </a:t>
+              <a:t>"HIPAA-eligible" ≠ "HIPAA-compliant."  </a:t>
             </a:r>
             <a:r>
               <a:rPr sz="1200" b="0" i="0">
@@ -11209,7 +11066,7 @@
           <a:noFill/>
         </p:spPr>
         <p:txBody>
-          <a:bodyPr wrap="square" anchor="t" lIns="0" rIns="0" tIns="0" bIns="0">
+          <a:bodyPr wrap="square" lIns="0" tIns="0" rIns="0" bIns="0" anchor="t">
             <a:spAutoFit/>
           </a:bodyPr>
           <a:lstStyle/>
@@ -11243,7 +11100,7 @@
 </file>
 
 <file path=ppt/slides/slide16.xml><?xml version="1.0" encoding="utf-8"?>
-<p:sld xmlns:a="http://schemas.openxmlformats.org/drawingml/2006/main" xmlns:p="http://schemas.openxmlformats.org/presentationml/2006/main" xmlns:r="http://schemas.openxmlformats.org/officeDocument/2006/relationships">
+<p:sld xmlns:a="http://schemas.openxmlformats.org/drawingml/2006/main" xmlns:r="http://schemas.openxmlformats.org/officeDocument/2006/relationships" xmlns:p="http://schemas.openxmlformats.org/presentationml/2006/main">
   <p:cSld>
     <p:spTree>
       <p:nvGrpSpPr>
@@ -11251,7 +11108,14 @@
         <p:cNvGrpSpPr/>
         <p:nvPr/>
       </p:nvGrpSpPr>
-      <p:grpSpPr/>
+      <p:grpSpPr>
+        <a:xfrm>
+          <a:off x="0" y="0"/>
+          <a:ext cx="0" cy="0"/>
+          <a:chOff x="0" y="0"/>
+          <a:chExt cx="0" cy="0"/>
+        </a:xfrm>
+      </p:grpSpPr>
       <p:sp>
         <p:nvSpPr>
           <p:cNvPr id="2" name="Background"/>
@@ -11293,6 +11157,7 @@
           <a:lstStyle/>
           <a:p>
             <a:pPr algn="ctr"/>
+            <a:endParaRPr/>
           </a:p>
         </p:txBody>
       </p:sp>
@@ -11313,7 +11178,7 @@
           <a:noFill/>
         </p:spPr>
         <p:txBody>
-          <a:bodyPr wrap="square" anchor="t" lIns="0" rIns="0" tIns="0" bIns="0">
+          <a:bodyPr wrap="square" lIns="0" tIns="0" rIns="0" bIns="0" anchor="t">
             <a:spAutoFit/>
           </a:bodyPr>
           <a:lstStyle/>
@@ -11355,7 +11220,7 @@
           <a:noFill/>
         </p:spPr>
         <p:txBody>
-          <a:bodyPr wrap="square" anchor="t" lIns="0" rIns="0" tIns="0" bIns="0">
+          <a:bodyPr wrap="square" lIns="0" tIns="0" rIns="0" bIns="0" anchor="t">
             <a:spAutoFit/>
           </a:bodyPr>
           <a:lstStyle/>
@@ -11400,7 +11265,7 @@
           <a:noFill/>
         </p:spPr>
         <p:txBody>
-          <a:bodyPr wrap="square" anchor="t" lIns="0" rIns="0" tIns="0" bIns="0">
+          <a:bodyPr wrap="square" lIns="0" tIns="0" rIns="0" bIns="0" anchor="t">
             <a:spAutoFit/>
           </a:bodyPr>
           <a:lstStyle/>
@@ -11468,6 +11333,7 @@
           <a:lstStyle/>
           <a:p>
             <a:pPr algn="ctr"/>
+            <a:endParaRPr/>
           </a:p>
         </p:txBody>
       </p:sp>
@@ -11488,7 +11354,7 @@
           <a:noFill/>
         </p:spPr>
         <p:txBody>
-          <a:bodyPr wrap="square" anchor="t" lIns="0" rIns="0" tIns="0" bIns="0"/>
+          <a:bodyPr wrap="square" lIns="0" tIns="0" rIns="0" bIns="0" anchor="t"/>
           <a:lstStyle/>
           <a:p>
             <a:pPr algn="l">
@@ -11528,7 +11394,7 @@
                 </a:solidFill>
                 <a:latin typeface="Calibri"/>
               </a:rPr>
-              <a:t xml:space="preserve">1  Governance core.  </a:t>
+              <a:t>1  Governance core.  </a:t>
             </a:r>
             <a:r>
               <a:rPr sz="1150" b="0" i="0">
@@ -11559,7 +11425,7 @@
                 </a:solidFill>
                 <a:latin typeface="Calibri"/>
               </a:rPr>
-              <a:t xml:space="preserve">2  Human gate.  </a:t>
+              <a:t>2  Human gate.  </a:t>
             </a:r>
             <a:r>
               <a:rPr sz="1150" b="0" i="0">
@@ -11590,7 +11456,7 @@
                 </a:solidFill>
                 <a:latin typeface="Calibri"/>
               </a:rPr>
-              <a:t xml:space="preserve">3  Cedar authorization.  </a:t>
+              <a:t>3  Cedar authorization.  </a:t>
             </a:r>
             <a:r>
               <a:rPr sz="1150" b="0" i="0">
@@ -11621,7 +11487,7 @@
                 </a:solidFill>
                 <a:latin typeface="Calibri"/>
               </a:rPr>
-              <a:t xml:space="preserve">4  Hardened Cognito MFA.  </a:t>
+              <a:t>4  Hardened Cognito MFA.  </a:t>
             </a:r>
             <a:r>
               <a:rPr sz="1150" b="0" i="0">
@@ -11652,7 +11518,7 @@
                 </a:solidFill>
                 <a:latin typeface="Calibri"/>
               </a:rPr>
-              <a:t xml:space="preserve">5  Approval reviewer service.  </a:t>
+              <a:t>5  Approval reviewer service.  </a:t>
             </a:r>
             <a:r>
               <a:rPr sz="1150" b="0" i="0">
@@ -11709,6 +11575,7 @@
           <a:lstStyle/>
           <a:p>
             <a:pPr algn="ctr"/>
+            <a:endParaRPr/>
           </a:p>
         </p:txBody>
       </p:sp>
@@ -11729,7 +11596,7 @@
           <a:noFill/>
         </p:spPr>
         <p:txBody>
-          <a:bodyPr wrap="square" anchor="t" lIns="0" rIns="0" tIns="0" bIns="0"/>
+          <a:bodyPr wrap="square" lIns="0" tIns="0" rIns="0" bIns="0" anchor="t"/>
           <a:lstStyle/>
           <a:p>
             <a:pPr algn="l">
@@ -11769,7 +11636,7 @@
                 </a:solidFill>
                 <a:latin typeface="Calibri"/>
               </a:rPr>
-              <a:t xml:space="preserve">6  Immutable evidence.  </a:t>
+              <a:t>6  Immutable evidence.  </a:t>
             </a:r>
             <a:r>
               <a:rPr sz="1150" b="0" i="0">
@@ -11800,7 +11667,7 @@
                 </a:solidFill>
                 <a:latin typeface="Calibri"/>
               </a:rPr>
-              <a:t xml:space="preserve">7  Reviewer front door.  </a:t>
+              <a:t>7  Reviewer front door.  </a:t>
             </a:r>
             <a:r>
               <a:rPr sz="1150" b="0" i="0">
@@ -11831,7 +11698,7 @@
                 </a:solidFill>
                 <a:latin typeface="Calibri"/>
               </a:rPr>
-              <a:t xml:space="preserve">8  Production components.  </a:t>
+              <a:t>8  Production components.  </a:t>
             </a:r>
             <a:r>
               <a:rPr sz="1150" b="0" i="0">
@@ -11862,7 +11729,7 @@
                 </a:solidFill>
                 <a:latin typeface="Calibri"/>
               </a:rPr>
-              <a:t xml:space="preserve">9  Governed connector.  </a:t>
+              <a:t>9  Governed connector.  </a:t>
             </a:r>
             <a:r>
               <a:rPr sz="1150" b="0" i="0">
@@ -11893,7 +11760,7 @@
           <a:noFill/>
         </p:spPr>
         <p:txBody>
-          <a:bodyPr wrap="square" anchor="t" lIns="0" rIns="0" tIns="0" bIns="0"/>
+          <a:bodyPr wrap="square" lIns="0" tIns="0" rIns="0" bIns="0" anchor="t"/>
           <a:lstStyle/>
           <a:p>
             <a:pPr algn="l">
@@ -11936,7 +11803,7 @@
           <a:noFill/>
         </p:spPr>
         <p:txBody>
-          <a:bodyPr wrap="square" anchor="t" lIns="0" rIns="0" tIns="0" bIns="0">
+          <a:bodyPr wrap="square" lIns="0" tIns="0" rIns="0" bIns="0" anchor="t">
             <a:spAutoFit/>
           </a:bodyPr>
           <a:lstStyle/>
@@ -11970,7 +11837,7 @@
 </file>
 
 <file path=ppt/slides/slide17.xml><?xml version="1.0" encoding="utf-8"?>
-<p:sld xmlns:a="http://schemas.openxmlformats.org/drawingml/2006/main" xmlns:p="http://schemas.openxmlformats.org/presentationml/2006/main" xmlns:r="http://schemas.openxmlformats.org/officeDocument/2006/relationships">
+<p:sld xmlns:a="http://schemas.openxmlformats.org/drawingml/2006/main" xmlns:r="http://schemas.openxmlformats.org/officeDocument/2006/relationships" xmlns:p="http://schemas.openxmlformats.org/presentationml/2006/main">
   <p:cSld>
     <p:spTree>
       <p:nvGrpSpPr>
@@ -11978,7 +11845,14 @@
         <p:cNvGrpSpPr/>
         <p:nvPr/>
       </p:nvGrpSpPr>
-      <p:grpSpPr/>
+      <p:grpSpPr>
+        <a:xfrm>
+          <a:off x="0" y="0"/>
+          <a:ext cx="0" cy="0"/>
+          <a:chOff x="0" y="0"/>
+          <a:chExt cx="0" cy="0"/>
+        </a:xfrm>
+      </p:grpSpPr>
       <p:sp>
         <p:nvSpPr>
           <p:cNvPr id="2" name="Rectangle 1"/>
@@ -12020,6 +11894,7 @@
           <a:lstStyle/>
           <a:p>
             <a:pPr algn="ctr"/>
+            <a:endParaRPr/>
           </a:p>
         </p:txBody>
       </p:sp>
@@ -12064,6 +11939,7 @@
           <a:lstStyle/>
           <a:p>
             <a:pPr algn="ctr"/>
+            <a:endParaRPr/>
           </a:p>
         </p:txBody>
       </p:sp>
@@ -12084,7 +11960,7 @@
           <a:noFill/>
         </p:spPr>
         <p:txBody>
-          <a:bodyPr wrap="square" anchor="t" lIns="0" rIns="0" tIns="0" bIns="0">
+          <a:bodyPr wrap="square" lIns="0" tIns="0" rIns="0" bIns="0" anchor="t">
             <a:spAutoFit/>
           </a:bodyPr>
           <a:lstStyle/>
@@ -12126,7 +12002,7 @@
           <a:noFill/>
         </p:spPr>
         <p:txBody>
-          <a:bodyPr wrap="square" anchor="t" lIns="0" rIns="0" tIns="0" bIns="0">
+          <a:bodyPr wrap="square" lIns="0" tIns="0" rIns="0" bIns="0" anchor="t">
             <a:spAutoFit/>
           </a:bodyPr>
           <a:lstStyle/>
@@ -12171,7 +12047,7 @@
           <a:noFill/>
         </p:spPr>
         <p:txBody>
-          <a:bodyPr wrap="square" anchor="t" lIns="0" rIns="0" tIns="0" bIns="0">
+          <a:bodyPr wrap="square" lIns="0" tIns="0" rIns="0" bIns="0" anchor="t">
             <a:spAutoFit/>
           </a:bodyPr>
           <a:lstStyle/>
@@ -12236,7 +12112,7 @@
           </a:fontRef>
         </p:style>
         <p:txBody>
-          <a:bodyPr rtlCol="0" anchor="ctr" wrap="none" lIns="0" rIns="0" tIns="0" bIns="0"/>
+          <a:bodyPr wrap="none" lIns="0" tIns="0" rIns="0" bIns="0" rtlCol="0" anchor="ctr"/>
           <a:lstStyle/>
           <a:p>
             <a:pPr algn="ctr"/>
@@ -12269,7 +12145,7 @@
           <a:noFill/>
         </p:spPr>
         <p:txBody>
-          <a:bodyPr wrap="square" anchor="ctr" lIns="0" rIns="0" tIns="0" bIns="0">
+          <a:bodyPr wrap="square" lIns="0" tIns="0" rIns="0" bIns="0" anchor="ctr">
             <a:spAutoFit/>
           </a:bodyPr>
           <a:lstStyle/>
@@ -12286,7 +12162,7 @@
                 </a:solidFill>
                 <a:latin typeface="Cambria"/>
               </a:rPr>
-              <a:t xml:space="preserve">Discovery + architecture workshop   </a:t>
+              <a:t>Discovery + architecture workshop   </a:t>
             </a:r>
             <a:r>
               <a:rPr sz="1250" b="0" i="0">
@@ -12337,7 +12213,7 @@
           </a:fontRef>
         </p:style>
         <p:txBody>
-          <a:bodyPr rtlCol="0" anchor="ctr" wrap="none" lIns="0" rIns="0" tIns="0" bIns="0"/>
+          <a:bodyPr wrap="none" lIns="0" tIns="0" rIns="0" bIns="0" rtlCol="0" anchor="ctr"/>
           <a:lstStyle/>
           <a:p>
             <a:pPr algn="ctr"/>
@@ -12370,7 +12246,7 @@
           <a:noFill/>
         </p:spPr>
         <p:txBody>
-          <a:bodyPr wrap="square" anchor="ctr" lIns="0" rIns="0" tIns="0" bIns="0">
+          <a:bodyPr wrap="square" lIns="0" tIns="0" rIns="0" bIns="0" anchor="ctr">
             <a:spAutoFit/>
           </a:bodyPr>
           <a:lstStyle/>
@@ -12387,7 +12263,7 @@
                 </a:solidFill>
                 <a:latin typeface="Cambria"/>
               </a:rPr>
-              <a:t xml:space="preserve">Stand up the golden path   </a:t>
+              <a:t>Stand up the golden path   </a:t>
             </a:r>
             <a:r>
               <a:rPr sz="1250" b="0" i="0">
@@ -12438,7 +12314,7 @@
           </a:fontRef>
         </p:style>
         <p:txBody>
-          <a:bodyPr rtlCol="0" anchor="ctr" wrap="none" lIns="0" rIns="0" tIns="0" bIns="0"/>
+          <a:bodyPr wrap="none" lIns="0" tIns="0" rIns="0" bIns="0" rtlCol="0" anchor="ctr"/>
           <a:lstStyle/>
           <a:p>
             <a:pPr algn="ctr"/>
@@ -12471,7 +12347,7 @@
           <a:noFill/>
         </p:spPr>
         <p:txBody>
-          <a:bodyPr wrap="square" anchor="ctr" lIns="0" rIns="0" tIns="0" bIns="0">
+          <a:bodyPr wrap="square" lIns="0" tIns="0" rIns="0" bIns="0" anchor="ctr">
             <a:spAutoFit/>
           </a:bodyPr>
           <a:lstStyle/>
@@ -12488,7 +12364,7 @@
                 </a:solidFill>
                 <a:latin typeface="Cambria"/>
               </a:rPr>
-              <a:t xml:space="preserve">Prove a documented outcome   </a:t>
+              <a:t>Prove a documented outcome   </a:t>
             </a:r>
             <a:r>
               <a:rPr sz="1250" b="0" i="0">
@@ -12539,7 +12415,7 @@
           </a:fontRef>
         </p:style>
         <p:txBody>
-          <a:bodyPr rtlCol="0" anchor="ctr" wrap="none" lIns="0" rIns="0" tIns="0" bIns="0"/>
+          <a:bodyPr wrap="none" lIns="0" tIns="0" rIns="0" bIns="0" rtlCol="0" anchor="ctr"/>
           <a:lstStyle/>
           <a:p>
             <a:pPr algn="ctr"/>
@@ -12572,7 +12448,7 @@
           <a:noFill/>
         </p:spPr>
         <p:txBody>
-          <a:bodyPr wrap="square" anchor="ctr" lIns="0" rIns="0" tIns="0" bIns="0">
+          <a:bodyPr wrap="square" lIns="0" tIns="0" rIns="0" bIns="0" anchor="ctr">
             <a:spAutoFit/>
           </a:bodyPr>
           <a:lstStyle/>
@@ -12589,7 +12465,7 @@
                 </a:solidFill>
                 <a:latin typeface="Cambria"/>
               </a:rPr>
-              <a:t xml:space="preserve">Sign the shared-responsibility plan   </a:t>
+              <a:t>Sign the shared-responsibility plan   </a:t>
             </a:r>
             <a:r>
               <a:rPr sz="1250" b="0" i="0">
@@ -12644,6 +12520,7 @@
           <a:lstStyle/>
           <a:p>
             <a:pPr algn="ctr"/>
+            <a:endParaRPr/>
           </a:p>
         </p:txBody>
       </p:sp>
@@ -12664,7 +12541,7 @@
           <a:noFill/>
         </p:spPr>
         <p:txBody>
-          <a:bodyPr wrap="square" anchor="ctr" lIns="0" rIns="0" tIns="0" bIns="0">
+          <a:bodyPr wrap="square" lIns="0" tIns="0" rIns="0" bIns="0" anchor="ctr">
             <a:spAutoFit/>
           </a:bodyPr>
           <a:lstStyle/>
@@ -12709,7 +12586,7 @@
           <a:noFill/>
         </p:spPr>
         <p:txBody>
-          <a:bodyPr wrap="square" anchor="t" lIns="0" rIns="0" tIns="0" bIns="0">
+          <a:bodyPr wrap="square" lIns="0" tIns="0" rIns="0" bIns="0" anchor="t">
             <a:spAutoFit/>
           </a:bodyPr>
           <a:lstStyle/>
@@ -12743,7 +12620,7 @@
 </file>
 
 <file path=ppt/slides/slide18.xml><?xml version="1.0" encoding="utf-8"?>
-<p:sld xmlns:a="http://schemas.openxmlformats.org/drawingml/2006/main" xmlns:p="http://schemas.openxmlformats.org/presentationml/2006/main" xmlns:r="http://schemas.openxmlformats.org/officeDocument/2006/relationships">
+<p:sld xmlns:a="http://schemas.openxmlformats.org/drawingml/2006/main" xmlns:r="http://schemas.openxmlformats.org/officeDocument/2006/relationships" xmlns:p="http://schemas.openxmlformats.org/presentationml/2006/main">
   <p:cSld>
     <p:spTree>
       <p:nvGrpSpPr>
@@ -12751,7 +12628,14 @@
         <p:cNvGrpSpPr/>
         <p:nvPr/>
       </p:nvGrpSpPr>
-      <p:grpSpPr/>
+      <p:grpSpPr>
+        <a:xfrm>
+          <a:off x="0" y="0"/>
+          <a:ext cx="0" cy="0"/>
+          <a:chOff x="0" y="0"/>
+          <a:chExt cx="0" cy="0"/>
+        </a:xfrm>
+      </p:grpSpPr>
       <p:sp>
         <p:nvSpPr>
           <p:cNvPr id="2" name="Rectangle 1"/>
@@ -12793,6 +12677,7 @@
           <a:lstStyle/>
           <a:p>
             <a:pPr algn="ctr"/>
+            <a:endParaRPr/>
           </a:p>
         </p:txBody>
       </p:sp>
@@ -12833,7 +12718,7 @@
           </a:fontRef>
         </p:style>
         <p:txBody>
-          <a:bodyPr rtlCol="0" anchor="ctr" wrap="none" lIns="0" rIns="0" tIns="0" bIns="0"/>
+          <a:bodyPr wrap="none" lIns="0" tIns="0" rIns="0" bIns="0" rtlCol="0" anchor="ctr"/>
           <a:lstStyle/>
           <a:p>
             <a:pPr algn="ctr"/>
@@ -12866,7 +12751,7 @@
           <a:noFill/>
         </p:spPr>
         <p:txBody>
-          <a:bodyPr wrap="square" anchor="t" lIns="0" rIns="0" tIns="0" bIns="0">
+          <a:bodyPr wrap="square" lIns="0" tIns="0" rIns="0" bIns="0" anchor="t">
             <a:spAutoFit/>
           </a:bodyPr>
           <a:lstStyle/>
@@ -12908,7 +12793,7 @@
           <a:noFill/>
         </p:spPr>
         <p:txBody>
-          <a:bodyPr wrap="square" anchor="t" lIns="0" rIns="0" tIns="0" bIns="0">
+          <a:bodyPr wrap="square" lIns="0" tIns="0" rIns="0" bIns="0" anchor="t">
             <a:spAutoFit/>
           </a:bodyPr>
           <a:lstStyle/>
@@ -12969,7 +12854,7 @@
           <a:noFill/>
         </p:spPr>
         <p:txBody>
-          <a:bodyPr wrap="square" anchor="t" lIns="0" rIns="0" tIns="0" bIns="0">
+          <a:bodyPr wrap="square" lIns="0" tIns="0" rIns="0" bIns="0" anchor="t">
             <a:spAutoFit/>
           </a:bodyPr>
           <a:lstStyle/>
@@ -13003,7 +12888,7 @@
 </file>
 
 <file path=ppt/slides/slide19.xml><?xml version="1.0" encoding="utf-8"?>
-<p:sld xmlns:a="http://schemas.openxmlformats.org/drawingml/2006/main" xmlns:p="http://schemas.openxmlformats.org/presentationml/2006/main" xmlns:r="http://schemas.openxmlformats.org/officeDocument/2006/relationships">
+<p:sld xmlns:a="http://schemas.openxmlformats.org/drawingml/2006/main" xmlns:r="http://schemas.openxmlformats.org/officeDocument/2006/relationships" xmlns:p="http://schemas.openxmlformats.org/presentationml/2006/main">
   <p:cSld>
     <p:spTree>
       <p:nvGrpSpPr>
@@ -13011,7 +12896,14 @@
         <p:cNvGrpSpPr/>
         <p:nvPr/>
       </p:nvGrpSpPr>
-      <p:grpSpPr/>
+      <p:grpSpPr>
+        <a:xfrm>
+          <a:off x="0" y="0"/>
+          <a:ext cx="0" cy="0"/>
+          <a:chOff x="0" y="0"/>
+          <a:chExt cx="0" cy="0"/>
+        </a:xfrm>
+      </p:grpSpPr>
       <p:sp>
         <p:nvSpPr>
           <p:cNvPr id="2" name="Rectangle 1"/>
@@ -13053,6 +12945,7 @@
           <a:lstStyle/>
           <a:p>
             <a:pPr algn="ctr"/>
+            <a:endParaRPr/>
           </a:p>
         </p:txBody>
       </p:sp>
@@ -13073,7 +12966,7 @@
           <a:noFill/>
         </p:spPr>
         <p:txBody>
-          <a:bodyPr wrap="square" anchor="t" lIns="0" rIns="0" tIns="0" bIns="0">
+          <a:bodyPr wrap="square" lIns="0" tIns="0" rIns="0" bIns="0" anchor="t">
             <a:spAutoFit/>
           </a:bodyPr>
           <a:lstStyle/>
@@ -13115,7 +13008,7 @@
           <a:noFill/>
         </p:spPr>
         <p:txBody>
-          <a:bodyPr wrap="square" anchor="t" lIns="0" rIns="0" tIns="0" bIns="0">
+          <a:bodyPr wrap="square" lIns="0" tIns="0" rIns="0" bIns="0" anchor="t">
             <a:spAutoFit/>
           </a:bodyPr>
           <a:lstStyle/>
@@ -13184,6 +13077,7 @@
           <a:lstStyle/>
           <a:p>
             <a:pPr algn="ctr"/>
+            <a:endParaRPr/>
           </a:p>
         </p:txBody>
       </p:sp>
@@ -13204,7 +13098,7 @@
           <a:noFill/>
         </p:spPr>
         <p:txBody>
-          <a:bodyPr wrap="square" anchor="t" lIns="0" rIns="0" tIns="0" bIns="0">
+          <a:bodyPr wrap="square" lIns="0" tIns="0" rIns="0" bIns="0" anchor="t">
             <a:spAutoFit/>
           </a:bodyPr>
           <a:lstStyle/>
@@ -13295,6 +13189,7 @@
           <a:lstStyle/>
           <a:p>
             <a:pPr algn="ctr"/>
+            <a:endParaRPr/>
           </a:p>
         </p:txBody>
       </p:sp>
@@ -13315,7 +13210,7 @@
           <a:noFill/>
         </p:spPr>
         <p:txBody>
-          <a:bodyPr wrap="square" anchor="t" lIns="0" rIns="0" tIns="0" bIns="0">
+          <a:bodyPr wrap="square" lIns="0" tIns="0" rIns="0" bIns="0" anchor="t">
             <a:spAutoFit/>
           </a:bodyPr>
           <a:lstStyle/>
@@ -13406,6 +13301,7 @@
           <a:lstStyle/>
           <a:p>
             <a:pPr algn="ctr"/>
+            <a:endParaRPr/>
           </a:p>
         </p:txBody>
       </p:sp>
@@ -13426,7 +13322,7 @@
           <a:noFill/>
         </p:spPr>
         <p:txBody>
-          <a:bodyPr wrap="square" anchor="t" lIns="0" rIns="0" tIns="0" bIns="0">
+          <a:bodyPr wrap="square" lIns="0" tIns="0" rIns="0" bIns="0" anchor="t">
             <a:spAutoFit/>
           </a:bodyPr>
           <a:lstStyle/>
@@ -13517,6 +13413,7 @@
           <a:lstStyle/>
           <a:p>
             <a:pPr algn="ctr"/>
+            <a:endParaRPr/>
           </a:p>
         </p:txBody>
       </p:sp>
@@ -13537,7 +13434,7 @@
           <a:noFill/>
         </p:spPr>
         <p:txBody>
-          <a:bodyPr wrap="square" anchor="t" lIns="0" rIns="0" tIns="0" bIns="0">
+          <a:bodyPr wrap="square" lIns="0" tIns="0" rIns="0" bIns="0" anchor="t">
             <a:spAutoFit/>
           </a:bodyPr>
           <a:lstStyle/>
@@ -13604,7 +13501,7 @@
           <a:noFill/>
         </p:spPr>
         <p:txBody>
-          <a:bodyPr wrap="square" anchor="t" lIns="0" rIns="0" tIns="0" bIns="0">
+          <a:bodyPr wrap="square" lIns="0" tIns="0" rIns="0" bIns="0" anchor="t">
             <a:spAutoFit/>
           </a:bodyPr>
           <a:lstStyle/>
@@ -13638,7 +13535,7 @@
 </file>
 
 <file path=ppt/slides/slide2.xml><?xml version="1.0" encoding="utf-8"?>
-<p:sld xmlns:a="http://schemas.openxmlformats.org/drawingml/2006/main" xmlns:p="http://schemas.openxmlformats.org/presentationml/2006/main" xmlns:r="http://schemas.openxmlformats.org/officeDocument/2006/relationships">
+<p:sld xmlns:a="http://schemas.openxmlformats.org/drawingml/2006/main" xmlns:r="http://schemas.openxmlformats.org/officeDocument/2006/relationships" xmlns:p="http://schemas.openxmlformats.org/presentationml/2006/main">
   <p:cSld>
     <p:spTree>
       <p:nvGrpSpPr>
@@ -13646,7 +13543,14 @@
         <p:cNvGrpSpPr/>
         <p:nvPr/>
       </p:nvGrpSpPr>
-      <p:grpSpPr/>
+      <p:grpSpPr>
+        <a:xfrm>
+          <a:off x="0" y="0"/>
+          <a:ext cx="0" cy="0"/>
+          <a:chOff x="0" y="0"/>
+          <a:chExt cx="0" cy="0"/>
+        </a:xfrm>
+      </p:grpSpPr>
       <p:sp>
         <p:nvSpPr>
           <p:cNvPr id="2" name="Rectangle 1"/>
@@ -13688,6 +13592,7 @@
           <a:lstStyle/>
           <a:p>
             <a:pPr algn="ctr"/>
+            <a:endParaRPr/>
           </a:p>
         </p:txBody>
       </p:sp>
@@ -13708,7 +13613,7 @@
           <a:noFill/>
         </p:spPr>
         <p:txBody>
-          <a:bodyPr wrap="square" anchor="t" lIns="0" rIns="0" tIns="0" bIns="0">
+          <a:bodyPr wrap="square" lIns="0" tIns="0" rIns="0" bIns="0" anchor="t">
             <a:spAutoFit/>
           </a:bodyPr>
           <a:lstStyle/>
@@ -13750,7 +13655,7 @@
           <a:noFill/>
         </p:spPr>
         <p:txBody>
-          <a:bodyPr wrap="square" anchor="t" lIns="0" rIns="0" tIns="0" bIns="0">
+          <a:bodyPr wrap="square" lIns="0" tIns="0" rIns="0" bIns="0" anchor="t">
             <a:spAutoFit/>
           </a:bodyPr>
           <a:lstStyle/>
@@ -13795,7 +13700,7 @@
           <a:noFill/>
         </p:spPr>
         <p:txBody>
-          <a:bodyPr wrap="square" anchor="t" lIns="0" rIns="0" tIns="0" bIns="0">
+          <a:bodyPr wrap="square" lIns="0" tIns="0" rIns="0" bIns="0" anchor="t">
             <a:spAutoFit/>
           </a:bodyPr>
           <a:lstStyle/>
@@ -13864,6 +13769,7 @@
           <a:lstStyle/>
           <a:p>
             <a:pPr algn="ctr"/>
+            <a:endParaRPr/>
           </a:p>
         </p:txBody>
       </p:sp>
@@ -13884,7 +13790,7 @@
           <a:noFill/>
         </p:spPr>
         <p:txBody>
-          <a:bodyPr wrap="square" anchor="t" lIns="0" rIns="0" tIns="0" bIns="0">
+          <a:bodyPr wrap="square" lIns="0" tIns="0" rIns="0" bIns="0" anchor="t">
             <a:spAutoFit/>
           </a:bodyPr>
           <a:lstStyle/>
@@ -13991,6 +13897,7 @@
           <a:lstStyle/>
           <a:p>
             <a:pPr algn="ctr"/>
+            <a:endParaRPr/>
           </a:p>
         </p:txBody>
       </p:sp>
@@ -14011,7 +13918,7 @@
           <a:noFill/>
         </p:spPr>
         <p:txBody>
-          <a:bodyPr wrap="square" anchor="t" lIns="0" rIns="0" tIns="0" bIns="0">
+          <a:bodyPr wrap="square" lIns="0" tIns="0" rIns="0" bIns="0" anchor="t">
             <a:spAutoFit/>
           </a:bodyPr>
           <a:lstStyle/>
@@ -14118,6 +14025,7 @@
           <a:lstStyle/>
           <a:p>
             <a:pPr algn="ctr"/>
+            <a:endParaRPr/>
           </a:p>
         </p:txBody>
       </p:sp>
@@ -14130,15 +14038,15 @@
         <p:spPr>
           <a:xfrm>
             <a:off x="6592824" y="3136392"/>
-            <a:ext cx="2148840" cy="1280160"/>
-          </a:xfrm>
-          <a:prstGeom prst="rect">
-            <a:avLst/>
-          </a:prstGeom>
-          <a:noFill/>
-        </p:spPr>
-        <p:txBody>
-          <a:bodyPr wrap="square" anchor="t" lIns="0" rIns="0" tIns="0" bIns="0">
+            <a:ext cx="2148840" cy="861903"/>
+          </a:xfrm>
+          <a:prstGeom prst="rect">
+            <a:avLst/>
+          </a:prstGeom>
+          <a:noFill/>
+        </p:spPr>
+        <p:txBody>
+          <a:bodyPr wrap="square" lIns="0" tIns="0" rIns="0" bIns="0" anchor="t">
             <a:spAutoFit/>
           </a:bodyPr>
           <a:lstStyle/>
@@ -14152,7 +14060,7 @@
               </a:spcAft>
             </a:pPr>
             <a:r>
-              <a:rPr sz="3800" b="1" i="0">
+              <a:rPr sz="2800" b="1" i="0" dirty="0">
                 <a:solidFill>
                   <a:srgbClr val="C87E0E"/>
                 </a:solidFill>
@@ -14174,7 +14082,7 @@
               </a:spcAft>
             </a:pPr>
             <a:r>
-              <a:rPr sz="1350" b="1" i="0">
+              <a:rPr sz="1350" b="1" i="0" dirty="0">
                 <a:solidFill>
                   <a:srgbClr val="232F3E"/>
                 </a:solidFill>
@@ -14193,7 +14101,7 @@
               </a:spcAft>
             </a:pPr>
             <a:r>
-              <a:rPr sz="1050" b="0" i="0">
+              <a:rPr sz="1050" b="0" i="0" dirty="0">
                 <a:solidFill>
                   <a:srgbClr val="556370"/>
                 </a:solidFill>
@@ -14245,6 +14153,7 @@
           <a:lstStyle/>
           <a:p>
             <a:pPr algn="ctr"/>
+            <a:endParaRPr/>
           </a:p>
         </p:txBody>
       </p:sp>
@@ -14265,12 +14174,12 @@
           <a:noFill/>
         </p:spPr>
         <p:txBody>
-          <a:bodyPr wrap="square" anchor="t" lIns="0" rIns="0" tIns="0" bIns="0">
-            <a:spAutoFit/>
-          </a:bodyPr>
-          <a:lstStyle/>
-          <a:p>
-            <a:pPr algn="l">
+          <a:bodyPr wrap="square" lIns="0" tIns="0" rIns="0" bIns="0" anchor="t">
+            <a:spAutoFit/>
+          </a:bodyPr>
+          <a:lstStyle/>
+          <a:p>
+            <a:pPr algn="ctr">
               <a:lnSpc>
                 <a:spcPct val="105000"/>
               </a:lnSpc>
@@ -14282,7 +14191,7 @@
               </a:spcAft>
             </a:pPr>
             <a:r>
-              <a:rPr sz="1450" b="1" i="0">
+              <a:rPr sz="1450" b="1" i="0" dirty="0">
                 <a:solidFill>
                   <a:srgbClr val="FF9900"/>
                 </a:solidFill>
@@ -14304,7 +14213,7 @@
               </a:spcAft>
             </a:pPr>
             <a:r>
-              <a:rPr sz="1250" b="0" i="0">
+              <a:rPr sz="1050" b="0" i="0" dirty="0">
                 <a:solidFill>
                   <a:srgbClr val="F4F6F8"/>
                 </a:solidFill>
@@ -14332,7 +14241,7 @@
           <a:noFill/>
         </p:spPr>
         <p:txBody>
-          <a:bodyPr wrap="square" anchor="t" lIns="0" rIns="0" tIns="0" bIns="0">
+          <a:bodyPr wrap="square" lIns="0" tIns="0" rIns="0" bIns="0" anchor="t">
             <a:spAutoFit/>
           </a:bodyPr>
           <a:lstStyle/>
@@ -14377,7 +14286,7 @@
           <a:noFill/>
         </p:spPr>
         <p:txBody>
-          <a:bodyPr wrap="square" anchor="t" lIns="0" rIns="0" tIns="0" bIns="0">
+          <a:bodyPr wrap="square" lIns="0" tIns="0" rIns="0" bIns="0" anchor="t">
             <a:spAutoFit/>
           </a:bodyPr>
           <a:lstStyle/>
@@ -14411,7 +14320,7 @@
 </file>
 
 <file path=ppt/slides/slide20.xml><?xml version="1.0" encoding="utf-8"?>
-<p:sld xmlns:a="http://schemas.openxmlformats.org/drawingml/2006/main" xmlns:p="http://schemas.openxmlformats.org/presentationml/2006/main" xmlns:r="http://schemas.openxmlformats.org/officeDocument/2006/relationships">
+<p:sld xmlns:a="http://schemas.openxmlformats.org/drawingml/2006/main" xmlns:r="http://schemas.openxmlformats.org/officeDocument/2006/relationships" xmlns:p="http://schemas.openxmlformats.org/presentationml/2006/main">
   <p:cSld>
     <p:spTree>
       <p:nvGrpSpPr>
@@ -14419,7 +14328,14 @@
         <p:cNvGrpSpPr/>
         <p:nvPr/>
       </p:nvGrpSpPr>
-      <p:grpSpPr/>
+      <p:grpSpPr>
+        <a:xfrm>
+          <a:off x="0" y="0"/>
+          <a:ext cx="0" cy="0"/>
+          <a:chOff x="0" y="0"/>
+          <a:chExt cx="0" cy="0"/>
+        </a:xfrm>
+      </p:grpSpPr>
       <p:sp>
         <p:nvSpPr>
           <p:cNvPr id="2" name="Rectangle 1"/>
@@ -14461,6 +14377,7 @@
           <a:lstStyle/>
           <a:p>
             <a:pPr algn="ctr"/>
+            <a:endParaRPr/>
           </a:p>
         </p:txBody>
       </p:sp>
@@ -14481,7 +14398,7 @@
           <a:noFill/>
         </p:spPr>
         <p:txBody>
-          <a:bodyPr wrap="square" anchor="t" lIns="0" rIns="0" tIns="0" bIns="0">
+          <a:bodyPr wrap="square" lIns="0" tIns="0" rIns="0" bIns="0" anchor="t">
             <a:spAutoFit/>
           </a:bodyPr>
           <a:lstStyle/>
@@ -14523,7 +14440,7 @@
           <a:noFill/>
         </p:spPr>
         <p:txBody>
-          <a:bodyPr wrap="square" anchor="t" lIns="0" rIns="0" tIns="0" bIns="0">
+          <a:bodyPr wrap="square" lIns="0" tIns="0" rIns="0" bIns="0" anchor="t">
             <a:spAutoFit/>
           </a:bodyPr>
           <a:lstStyle/>
@@ -14568,7 +14485,7 @@
           <a:noFill/>
         </p:spPr>
         <p:txBody>
-          <a:bodyPr wrap="square" anchor="ctr" lIns="0" rIns="0" tIns="0" bIns="0">
+          <a:bodyPr wrap="square" lIns="0" tIns="0" rIns="0" bIns="0" anchor="ctr">
             <a:spAutoFit/>
           </a:bodyPr>
           <a:lstStyle/>
@@ -14613,7 +14530,7 @@
           <a:noFill/>
         </p:spPr>
         <p:txBody>
-          <a:bodyPr wrap="square" anchor="ctr" lIns="0" rIns="0" tIns="0" bIns="0">
+          <a:bodyPr wrap="square" lIns="0" tIns="0" rIns="0" bIns="0" anchor="ctr">
             <a:spAutoFit/>
           </a:bodyPr>
           <a:lstStyle/>
@@ -14658,7 +14575,7 @@
           <a:noFill/>
         </p:spPr>
         <p:txBody>
-          <a:bodyPr wrap="square" anchor="ctr" lIns="0" rIns="0" tIns="0" bIns="0">
+          <a:bodyPr wrap="square" lIns="0" tIns="0" rIns="0" bIns="0" anchor="ctr">
             <a:spAutoFit/>
           </a:bodyPr>
           <a:lstStyle/>
@@ -14703,7 +14620,7 @@
           <a:noFill/>
         </p:spPr>
         <p:txBody>
-          <a:bodyPr wrap="square" anchor="ctr" lIns="0" rIns="0" tIns="0" bIns="0">
+          <a:bodyPr wrap="square" lIns="0" tIns="0" rIns="0" bIns="0" anchor="ctr">
             <a:spAutoFit/>
           </a:bodyPr>
           <a:lstStyle/>
@@ -14748,7 +14665,7 @@
           <a:noFill/>
         </p:spPr>
         <p:txBody>
-          <a:bodyPr wrap="square" anchor="ctr" lIns="0" rIns="0" tIns="0" bIns="0">
+          <a:bodyPr wrap="square" lIns="0" tIns="0" rIns="0" bIns="0" anchor="ctr">
             <a:spAutoFit/>
           </a:bodyPr>
           <a:lstStyle/>
@@ -14793,7 +14710,7 @@
           <a:noFill/>
         </p:spPr>
         <p:txBody>
-          <a:bodyPr wrap="square" anchor="ctr" lIns="0" rIns="0" tIns="0" bIns="0">
+          <a:bodyPr wrap="square" lIns="0" tIns="0" rIns="0" bIns="0" anchor="ctr">
             <a:spAutoFit/>
           </a:bodyPr>
           <a:lstStyle/>
@@ -14838,7 +14755,7 @@
           <a:noFill/>
         </p:spPr>
         <p:txBody>
-          <a:bodyPr wrap="square" anchor="ctr" lIns="0" rIns="0" tIns="0" bIns="0">
+          <a:bodyPr wrap="square" lIns="0" tIns="0" rIns="0" bIns="0" anchor="ctr">
             <a:spAutoFit/>
           </a:bodyPr>
           <a:lstStyle/>
@@ -14883,7 +14800,7 @@
           <a:noFill/>
         </p:spPr>
         <p:txBody>
-          <a:bodyPr wrap="square" anchor="ctr" lIns="0" rIns="0" tIns="0" bIns="0">
+          <a:bodyPr wrap="square" lIns="0" tIns="0" rIns="0" bIns="0" anchor="ctr">
             <a:spAutoFit/>
           </a:bodyPr>
           <a:lstStyle/>
@@ -14928,7 +14845,7 @@
           <a:noFill/>
         </p:spPr>
         <p:txBody>
-          <a:bodyPr wrap="square" anchor="ctr" lIns="0" rIns="0" tIns="0" bIns="0">
+          <a:bodyPr wrap="square" lIns="0" tIns="0" rIns="0" bIns="0" anchor="ctr">
             <a:spAutoFit/>
           </a:bodyPr>
           <a:lstStyle/>
@@ -14997,6 +14914,7 @@
           <a:lstStyle/>
           <a:p>
             <a:pPr algn="ctr"/>
+            <a:endParaRPr/>
           </a:p>
         </p:txBody>
       </p:sp>
@@ -15017,7 +14935,7 @@
           <a:noFill/>
         </p:spPr>
         <p:txBody>
-          <a:bodyPr wrap="square" anchor="ctr" lIns="0" rIns="0" tIns="0" bIns="0">
+          <a:bodyPr wrap="square" lIns="0" tIns="0" rIns="0" bIns="0" anchor="ctr">
             <a:spAutoFit/>
           </a:bodyPr>
           <a:lstStyle/>
@@ -15062,7 +14980,7 @@
           <a:noFill/>
         </p:spPr>
         <p:txBody>
-          <a:bodyPr wrap="square" anchor="ctr" lIns="0" rIns="0" tIns="0" bIns="0">
+          <a:bodyPr wrap="square" lIns="0" tIns="0" rIns="0" bIns="0" anchor="ctr">
             <a:spAutoFit/>
           </a:bodyPr>
           <a:lstStyle/>
@@ -15104,7 +15022,7 @@
           <a:noFill/>
         </p:spPr>
         <p:txBody>
-          <a:bodyPr wrap="square" anchor="ctr" lIns="0" rIns="0" tIns="0" bIns="0">
+          <a:bodyPr wrap="square" lIns="0" tIns="0" rIns="0" bIns="0" anchor="ctr">
             <a:spAutoFit/>
           </a:bodyPr>
           <a:lstStyle/>
@@ -15146,7 +15064,7 @@
           <a:noFill/>
         </p:spPr>
         <p:txBody>
-          <a:bodyPr wrap="square" anchor="ctr" lIns="0" rIns="0" tIns="0" bIns="0">
+          <a:bodyPr wrap="square" lIns="0" tIns="0" rIns="0" bIns="0" anchor="ctr">
             <a:spAutoFit/>
           </a:bodyPr>
           <a:lstStyle/>
@@ -15188,7 +15106,7 @@
           <a:noFill/>
         </p:spPr>
         <p:txBody>
-          <a:bodyPr wrap="square" anchor="ctr" lIns="0" rIns="0" tIns="0" bIns="0">
+          <a:bodyPr wrap="square" lIns="0" tIns="0" rIns="0" bIns="0" anchor="ctr">
             <a:spAutoFit/>
           </a:bodyPr>
           <a:lstStyle/>
@@ -15230,7 +15148,7 @@
           <a:noFill/>
         </p:spPr>
         <p:txBody>
-          <a:bodyPr wrap="square" anchor="ctr" lIns="0" rIns="0" tIns="0" bIns="0">
+          <a:bodyPr wrap="square" lIns="0" tIns="0" rIns="0" bIns="0" anchor="ctr">
             <a:spAutoFit/>
           </a:bodyPr>
           <a:lstStyle/>
@@ -15272,7 +15190,7 @@
           <a:noFill/>
         </p:spPr>
         <p:txBody>
-          <a:bodyPr wrap="square" anchor="ctr" lIns="0" rIns="0" tIns="0" bIns="0">
+          <a:bodyPr wrap="square" lIns="0" tIns="0" rIns="0" bIns="0" anchor="ctr">
             <a:spAutoFit/>
           </a:bodyPr>
           <a:lstStyle/>
@@ -15314,7 +15232,7 @@
           <a:noFill/>
         </p:spPr>
         <p:txBody>
-          <a:bodyPr wrap="square" anchor="ctr" lIns="0" rIns="0" tIns="0" bIns="0">
+          <a:bodyPr wrap="square" lIns="0" tIns="0" rIns="0" bIns="0" anchor="ctr">
             <a:spAutoFit/>
           </a:bodyPr>
           <a:lstStyle/>
@@ -15356,7 +15274,7 @@
           <a:noFill/>
         </p:spPr>
         <p:txBody>
-          <a:bodyPr wrap="square" anchor="ctr" lIns="0" rIns="0" tIns="0" bIns="0">
+          <a:bodyPr wrap="square" lIns="0" tIns="0" rIns="0" bIns="0" anchor="ctr">
             <a:spAutoFit/>
           </a:bodyPr>
           <a:lstStyle/>
@@ -15398,7 +15316,7 @@
           <a:noFill/>
         </p:spPr>
         <p:txBody>
-          <a:bodyPr wrap="square" anchor="ctr" lIns="0" rIns="0" tIns="0" bIns="0">
+          <a:bodyPr wrap="square" lIns="0" tIns="0" rIns="0" bIns="0" anchor="ctr">
             <a:spAutoFit/>
           </a:bodyPr>
           <a:lstStyle/>
@@ -15440,7 +15358,7 @@
           <a:noFill/>
         </p:spPr>
         <p:txBody>
-          <a:bodyPr wrap="square" anchor="ctr" lIns="0" rIns="0" tIns="0" bIns="0">
+          <a:bodyPr wrap="square" lIns="0" tIns="0" rIns="0" bIns="0" anchor="ctr">
             <a:spAutoFit/>
           </a:bodyPr>
           <a:lstStyle/>
@@ -15485,7 +15403,7 @@
           <a:noFill/>
         </p:spPr>
         <p:txBody>
-          <a:bodyPr wrap="square" anchor="ctr" lIns="0" rIns="0" tIns="0" bIns="0">
+          <a:bodyPr wrap="square" lIns="0" tIns="0" rIns="0" bIns="0" anchor="ctr">
             <a:spAutoFit/>
           </a:bodyPr>
           <a:lstStyle/>
@@ -15527,7 +15445,7 @@
           <a:noFill/>
         </p:spPr>
         <p:txBody>
-          <a:bodyPr wrap="square" anchor="ctr" lIns="0" rIns="0" tIns="0" bIns="0">
+          <a:bodyPr wrap="square" lIns="0" tIns="0" rIns="0" bIns="0" anchor="ctr">
             <a:spAutoFit/>
           </a:bodyPr>
           <a:lstStyle/>
@@ -15569,7 +15487,7 @@
           <a:noFill/>
         </p:spPr>
         <p:txBody>
-          <a:bodyPr wrap="square" anchor="ctr" lIns="0" rIns="0" tIns="0" bIns="0">
+          <a:bodyPr wrap="square" lIns="0" tIns="0" rIns="0" bIns="0" anchor="ctr">
             <a:spAutoFit/>
           </a:bodyPr>
           <a:lstStyle/>
@@ -15611,7 +15529,7 @@
           <a:noFill/>
         </p:spPr>
         <p:txBody>
-          <a:bodyPr wrap="square" anchor="ctr" lIns="0" rIns="0" tIns="0" bIns="0">
+          <a:bodyPr wrap="square" lIns="0" tIns="0" rIns="0" bIns="0" anchor="ctr">
             <a:spAutoFit/>
           </a:bodyPr>
           <a:lstStyle/>
@@ -15653,7 +15571,7 @@
           <a:noFill/>
         </p:spPr>
         <p:txBody>
-          <a:bodyPr wrap="square" anchor="ctr" lIns="0" rIns="0" tIns="0" bIns="0">
+          <a:bodyPr wrap="square" lIns="0" tIns="0" rIns="0" bIns="0" anchor="ctr">
             <a:spAutoFit/>
           </a:bodyPr>
           <a:lstStyle/>
@@ -15695,7 +15613,7 @@
           <a:noFill/>
         </p:spPr>
         <p:txBody>
-          <a:bodyPr wrap="square" anchor="ctr" lIns="0" rIns="0" tIns="0" bIns="0">
+          <a:bodyPr wrap="square" lIns="0" tIns="0" rIns="0" bIns="0" anchor="ctr">
             <a:spAutoFit/>
           </a:bodyPr>
           <a:lstStyle/>
@@ -15737,7 +15655,7 @@
           <a:noFill/>
         </p:spPr>
         <p:txBody>
-          <a:bodyPr wrap="square" anchor="ctr" lIns="0" rIns="0" tIns="0" bIns="0">
+          <a:bodyPr wrap="square" lIns="0" tIns="0" rIns="0" bIns="0" anchor="ctr">
             <a:spAutoFit/>
           </a:bodyPr>
           <a:lstStyle/>
@@ -15779,7 +15697,7 @@
           <a:noFill/>
         </p:spPr>
         <p:txBody>
-          <a:bodyPr wrap="square" anchor="ctr" lIns="0" rIns="0" tIns="0" bIns="0">
+          <a:bodyPr wrap="square" lIns="0" tIns="0" rIns="0" bIns="0" anchor="ctr">
             <a:spAutoFit/>
           </a:bodyPr>
           <a:lstStyle/>
@@ -15821,7 +15739,7 @@
           <a:noFill/>
         </p:spPr>
         <p:txBody>
-          <a:bodyPr wrap="square" anchor="ctr" lIns="0" rIns="0" tIns="0" bIns="0">
+          <a:bodyPr wrap="square" lIns="0" tIns="0" rIns="0" bIns="0" anchor="ctr">
             <a:spAutoFit/>
           </a:bodyPr>
           <a:lstStyle/>
@@ -15887,6 +15805,7 @@
           <a:lstStyle/>
           <a:p>
             <a:pPr algn="ctr"/>
+            <a:endParaRPr/>
           </a:p>
         </p:txBody>
       </p:sp>
@@ -15907,7 +15826,7 @@
           <a:noFill/>
         </p:spPr>
         <p:txBody>
-          <a:bodyPr wrap="square" anchor="ctr" lIns="0" rIns="0" tIns="0" bIns="0">
+          <a:bodyPr wrap="square" lIns="0" tIns="0" rIns="0" bIns="0" anchor="ctr">
             <a:spAutoFit/>
           </a:bodyPr>
           <a:lstStyle/>
@@ -15952,7 +15871,7 @@
           <a:noFill/>
         </p:spPr>
         <p:txBody>
-          <a:bodyPr wrap="square" anchor="ctr" lIns="0" rIns="0" tIns="0" bIns="0">
+          <a:bodyPr wrap="square" lIns="0" tIns="0" rIns="0" bIns="0" anchor="ctr">
             <a:spAutoFit/>
           </a:bodyPr>
           <a:lstStyle/>
@@ -15994,7 +15913,7 @@
           <a:noFill/>
         </p:spPr>
         <p:txBody>
-          <a:bodyPr wrap="square" anchor="ctr" lIns="0" rIns="0" tIns="0" bIns="0">
+          <a:bodyPr wrap="square" lIns="0" tIns="0" rIns="0" bIns="0" anchor="ctr">
             <a:spAutoFit/>
           </a:bodyPr>
           <a:lstStyle/>
@@ -16036,7 +15955,7 @@
           <a:noFill/>
         </p:spPr>
         <p:txBody>
-          <a:bodyPr wrap="square" anchor="ctr" lIns="0" rIns="0" tIns="0" bIns="0">
+          <a:bodyPr wrap="square" lIns="0" tIns="0" rIns="0" bIns="0" anchor="ctr">
             <a:spAutoFit/>
           </a:bodyPr>
           <a:lstStyle/>
@@ -16078,7 +15997,7 @@
           <a:noFill/>
         </p:spPr>
         <p:txBody>
-          <a:bodyPr wrap="square" anchor="ctr" lIns="0" rIns="0" tIns="0" bIns="0">
+          <a:bodyPr wrap="square" lIns="0" tIns="0" rIns="0" bIns="0" anchor="ctr">
             <a:spAutoFit/>
           </a:bodyPr>
           <a:lstStyle/>
@@ -16120,7 +16039,7 @@
           <a:noFill/>
         </p:spPr>
         <p:txBody>
-          <a:bodyPr wrap="square" anchor="ctr" lIns="0" rIns="0" tIns="0" bIns="0">
+          <a:bodyPr wrap="square" lIns="0" tIns="0" rIns="0" bIns="0" anchor="ctr">
             <a:spAutoFit/>
           </a:bodyPr>
           <a:lstStyle/>
@@ -16162,7 +16081,7 @@
           <a:noFill/>
         </p:spPr>
         <p:txBody>
-          <a:bodyPr wrap="square" anchor="ctr" lIns="0" rIns="0" tIns="0" bIns="0">
+          <a:bodyPr wrap="square" lIns="0" tIns="0" rIns="0" bIns="0" anchor="ctr">
             <a:spAutoFit/>
           </a:bodyPr>
           <a:lstStyle/>
@@ -16204,7 +16123,7 @@
           <a:noFill/>
         </p:spPr>
         <p:txBody>
-          <a:bodyPr wrap="square" anchor="ctr" lIns="0" rIns="0" tIns="0" bIns="0">
+          <a:bodyPr wrap="square" lIns="0" tIns="0" rIns="0" bIns="0" anchor="ctr">
             <a:spAutoFit/>
           </a:bodyPr>
           <a:lstStyle/>
@@ -16246,7 +16165,7 @@
           <a:noFill/>
         </p:spPr>
         <p:txBody>
-          <a:bodyPr wrap="square" anchor="ctr" lIns="0" rIns="0" tIns="0" bIns="0">
+          <a:bodyPr wrap="square" lIns="0" tIns="0" rIns="0" bIns="0" anchor="ctr">
             <a:spAutoFit/>
           </a:bodyPr>
           <a:lstStyle/>
@@ -16288,7 +16207,7 @@
           <a:noFill/>
         </p:spPr>
         <p:txBody>
-          <a:bodyPr wrap="square" anchor="ctr" lIns="0" rIns="0" tIns="0" bIns="0">
+          <a:bodyPr wrap="square" lIns="0" tIns="0" rIns="0" bIns="0" anchor="ctr">
             <a:spAutoFit/>
           </a:bodyPr>
           <a:lstStyle/>
@@ -16330,7 +16249,7 @@
           <a:noFill/>
         </p:spPr>
         <p:txBody>
-          <a:bodyPr wrap="square" anchor="ctr" lIns="0" rIns="0" tIns="0" bIns="0">
+          <a:bodyPr wrap="square" lIns="0" tIns="0" rIns="0" bIns="0" anchor="ctr">
             <a:spAutoFit/>
           </a:bodyPr>
           <a:lstStyle/>
@@ -16375,7 +16294,7 @@
           <a:noFill/>
         </p:spPr>
         <p:txBody>
-          <a:bodyPr wrap="square" anchor="ctr" lIns="0" rIns="0" tIns="0" bIns="0">
+          <a:bodyPr wrap="square" lIns="0" tIns="0" rIns="0" bIns="0" anchor="ctr">
             <a:spAutoFit/>
           </a:bodyPr>
           <a:lstStyle/>
@@ -16417,7 +16336,7 @@
           <a:noFill/>
         </p:spPr>
         <p:txBody>
-          <a:bodyPr wrap="square" anchor="ctr" lIns="0" rIns="0" tIns="0" bIns="0">
+          <a:bodyPr wrap="square" lIns="0" tIns="0" rIns="0" bIns="0" anchor="ctr">
             <a:spAutoFit/>
           </a:bodyPr>
           <a:lstStyle/>
@@ -16459,7 +16378,7 @@
           <a:noFill/>
         </p:spPr>
         <p:txBody>
-          <a:bodyPr wrap="square" anchor="ctr" lIns="0" rIns="0" tIns="0" bIns="0">
+          <a:bodyPr wrap="square" lIns="0" tIns="0" rIns="0" bIns="0" anchor="ctr">
             <a:spAutoFit/>
           </a:bodyPr>
           <a:lstStyle/>
@@ -16501,7 +16420,7 @@
           <a:noFill/>
         </p:spPr>
         <p:txBody>
-          <a:bodyPr wrap="square" anchor="ctr" lIns="0" rIns="0" tIns="0" bIns="0">
+          <a:bodyPr wrap="square" lIns="0" tIns="0" rIns="0" bIns="0" anchor="ctr">
             <a:spAutoFit/>
           </a:bodyPr>
           <a:lstStyle/>
@@ -16543,7 +16462,7 @@
           <a:noFill/>
         </p:spPr>
         <p:txBody>
-          <a:bodyPr wrap="square" anchor="ctr" lIns="0" rIns="0" tIns="0" bIns="0">
+          <a:bodyPr wrap="square" lIns="0" tIns="0" rIns="0" bIns="0" anchor="ctr">
             <a:spAutoFit/>
           </a:bodyPr>
           <a:lstStyle/>
@@ -16585,7 +16504,7 @@
           <a:noFill/>
         </p:spPr>
         <p:txBody>
-          <a:bodyPr wrap="square" anchor="ctr" lIns="0" rIns="0" tIns="0" bIns="0">
+          <a:bodyPr wrap="square" lIns="0" tIns="0" rIns="0" bIns="0" anchor="ctr">
             <a:spAutoFit/>
           </a:bodyPr>
           <a:lstStyle/>
@@ -16627,7 +16546,7 @@
           <a:noFill/>
         </p:spPr>
         <p:txBody>
-          <a:bodyPr wrap="square" anchor="ctr" lIns="0" rIns="0" tIns="0" bIns="0">
+          <a:bodyPr wrap="square" lIns="0" tIns="0" rIns="0" bIns="0" anchor="ctr">
             <a:spAutoFit/>
           </a:bodyPr>
           <a:lstStyle/>
@@ -16669,7 +16588,7 @@
           <a:noFill/>
         </p:spPr>
         <p:txBody>
-          <a:bodyPr wrap="square" anchor="ctr" lIns="0" rIns="0" tIns="0" bIns="0">
+          <a:bodyPr wrap="square" lIns="0" tIns="0" rIns="0" bIns="0" anchor="ctr">
             <a:spAutoFit/>
           </a:bodyPr>
           <a:lstStyle/>
@@ -16711,7 +16630,7 @@
           <a:noFill/>
         </p:spPr>
         <p:txBody>
-          <a:bodyPr wrap="square" anchor="ctr" lIns="0" rIns="0" tIns="0" bIns="0">
+          <a:bodyPr wrap="square" lIns="0" tIns="0" rIns="0" bIns="0" anchor="ctr">
             <a:spAutoFit/>
           </a:bodyPr>
           <a:lstStyle/>
@@ -16777,6 +16696,7 @@
           <a:lstStyle/>
           <a:p>
             <a:pPr algn="ctr"/>
+            <a:endParaRPr/>
           </a:p>
         </p:txBody>
       </p:sp>
@@ -16797,7 +16717,7 @@
           <a:noFill/>
         </p:spPr>
         <p:txBody>
-          <a:bodyPr wrap="square" anchor="ctr" lIns="0" rIns="0" tIns="0" bIns="0">
+          <a:bodyPr wrap="square" lIns="0" tIns="0" rIns="0" bIns="0" anchor="ctr">
             <a:spAutoFit/>
           </a:bodyPr>
           <a:lstStyle/>
@@ -16842,7 +16762,7 @@
           <a:noFill/>
         </p:spPr>
         <p:txBody>
-          <a:bodyPr wrap="square" anchor="ctr" lIns="0" rIns="0" tIns="0" bIns="0">
+          <a:bodyPr wrap="square" lIns="0" tIns="0" rIns="0" bIns="0" anchor="ctr">
             <a:spAutoFit/>
           </a:bodyPr>
           <a:lstStyle/>
@@ -16884,7 +16804,7 @@
           <a:noFill/>
         </p:spPr>
         <p:txBody>
-          <a:bodyPr wrap="square" anchor="ctr" lIns="0" rIns="0" tIns="0" bIns="0">
+          <a:bodyPr wrap="square" lIns="0" tIns="0" rIns="0" bIns="0" anchor="ctr">
             <a:spAutoFit/>
           </a:bodyPr>
           <a:lstStyle/>
@@ -16926,7 +16846,7 @@
           <a:noFill/>
         </p:spPr>
         <p:txBody>
-          <a:bodyPr wrap="square" anchor="ctr" lIns="0" rIns="0" tIns="0" bIns="0">
+          <a:bodyPr wrap="square" lIns="0" tIns="0" rIns="0" bIns="0" anchor="ctr">
             <a:spAutoFit/>
           </a:bodyPr>
           <a:lstStyle/>
@@ -16968,7 +16888,7 @@
           <a:noFill/>
         </p:spPr>
         <p:txBody>
-          <a:bodyPr wrap="square" anchor="ctr" lIns="0" rIns="0" tIns="0" bIns="0">
+          <a:bodyPr wrap="square" lIns="0" tIns="0" rIns="0" bIns="0" anchor="ctr">
             <a:spAutoFit/>
           </a:bodyPr>
           <a:lstStyle/>
@@ -17010,7 +16930,7 @@
           <a:noFill/>
         </p:spPr>
         <p:txBody>
-          <a:bodyPr wrap="square" anchor="ctr" lIns="0" rIns="0" tIns="0" bIns="0">
+          <a:bodyPr wrap="square" lIns="0" tIns="0" rIns="0" bIns="0" anchor="ctr">
             <a:spAutoFit/>
           </a:bodyPr>
           <a:lstStyle/>
@@ -17052,7 +16972,7 @@
           <a:noFill/>
         </p:spPr>
         <p:txBody>
-          <a:bodyPr wrap="square" anchor="ctr" lIns="0" rIns="0" tIns="0" bIns="0">
+          <a:bodyPr wrap="square" lIns="0" tIns="0" rIns="0" bIns="0" anchor="ctr">
             <a:spAutoFit/>
           </a:bodyPr>
           <a:lstStyle/>
@@ -17094,7 +17014,7 @@
           <a:noFill/>
         </p:spPr>
         <p:txBody>
-          <a:bodyPr wrap="square" anchor="ctr" lIns="0" rIns="0" tIns="0" bIns="0">
+          <a:bodyPr wrap="square" lIns="0" tIns="0" rIns="0" bIns="0" anchor="ctr">
             <a:spAutoFit/>
           </a:bodyPr>
           <a:lstStyle/>
@@ -17136,7 +17056,7 @@
           <a:noFill/>
         </p:spPr>
         <p:txBody>
-          <a:bodyPr wrap="square" anchor="ctr" lIns="0" rIns="0" tIns="0" bIns="0">
+          <a:bodyPr wrap="square" lIns="0" tIns="0" rIns="0" bIns="0" anchor="ctr">
             <a:spAutoFit/>
           </a:bodyPr>
           <a:lstStyle/>
@@ -17178,7 +17098,7 @@
           <a:noFill/>
         </p:spPr>
         <p:txBody>
-          <a:bodyPr wrap="square" anchor="ctr" lIns="0" rIns="0" tIns="0" bIns="0">
+          <a:bodyPr wrap="square" lIns="0" tIns="0" rIns="0" bIns="0" anchor="ctr">
             <a:spAutoFit/>
           </a:bodyPr>
           <a:lstStyle/>
@@ -17220,7 +17140,7 @@
           <a:noFill/>
         </p:spPr>
         <p:txBody>
-          <a:bodyPr wrap="square" anchor="ctr" lIns="0" rIns="0" tIns="0" bIns="0">
+          <a:bodyPr wrap="square" lIns="0" tIns="0" rIns="0" bIns="0" anchor="ctr">
             <a:spAutoFit/>
           </a:bodyPr>
           <a:lstStyle/>
@@ -17265,7 +17185,7 @@
           <a:noFill/>
         </p:spPr>
         <p:txBody>
-          <a:bodyPr wrap="square" anchor="ctr" lIns="0" rIns="0" tIns="0" bIns="0">
+          <a:bodyPr wrap="square" lIns="0" tIns="0" rIns="0" bIns="0" anchor="ctr">
             <a:spAutoFit/>
           </a:bodyPr>
           <a:lstStyle/>
@@ -17307,7 +17227,7 @@
           <a:noFill/>
         </p:spPr>
         <p:txBody>
-          <a:bodyPr wrap="square" anchor="ctr" lIns="0" rIns="0" tIns="0" bIns="0">
+          <a:bodyPr wrap="square" lIns="0" tIns="0" rIns="0" bIns="0" anchor="ctr">
             <a:spAutoFit/>
           </a:bodyPr>
           <a:lstStyle/>
@@ -17349,7 +17269,7 @@
           <a:noFill/>
         </p:spPr>
         <p:txBody>
-          <a:bodyPr wrap="square" anchor="ctr" lIns="0" rIns="0" tIns="0" bIns="0">
+          <a:bodyPr wrap="square" lIns="0" tIns="0" rIns="0" bIns="0" anchor="ctr">
             <a:spAutoFit/>
           </a:bodyPr>
           <a:lstStyle/>
@@ -17391,7 +17311,7 @@
           <a:noFill/>
         </p:spPr>
         <p:txBody>
-          <a:bodyPr wrap="square" anchor="ctr" lIns="0" rIns="0" tIns="0" bIns="0">
+          <a:bodyPr wrap="square" lIns="0" tIns="0" rIns="0" bIns="0" anchor="ctr">
             <a:spAutoFit/>
           </a:bodyPr>
           <a:lstStyle/>
@@ -17433,7 +17353,7 @@
           <a:noFill/>
         </p:spPr>
         <p:txBody>
-          <a:bodyPr wrap="square" anchor="ctr" lIns="0" rIns="0" tIns="0" bIns="0">
+          <a:bodyPr wrap="square" lIns="0" tIns="0" rIns="0" bIns="0" anchor="ctr">
             <a:spAutoFit/>
           </a:bodyPr>
           <a:lstStyle/>
@@ -17475,7 +17395,7 @@
           <a:noFill/>
         </p:spPr>
         <p:txBody>
-          <a:bodyPr wrap="square" anchor="ctr" lIns="0" rIns="0" tIns="0" bIns="0">
+          <a:bodyPr wrap="square" lIns="0" tIns="0" rIns="0" bIns="0" anchor="ctr">
             <a:spAutoFit/>
           </a:bodyPr>
           <a:lstStyle/>
@@ -17517,7 +17437,7 @@
           <a:noFill/>
         </p:spPr>
         <p:txBody>
-          <a:bodyPr wrap="square" anchor="ctr" lIns="0" rIns="0" tIns="0" bIns="0">
+          <a:bodyPr wrap="square" lIns="0" tIns="0" rIns="0" bIns="0" anchor="ctr">
             <a:spAutoFit/>
           </a:bodyPr>
           <a:lstStyle/>
@@ -17559,7 +17479,7 @@
           <a:noFill/>
         </p:spPr>
         <p:txBody>
-          <a:bodyPr wrap="square" anchor="ctr" lIns="0" rIns="0" tIns="0" bIns="0">
+          <a:bodyPr wrap="square" lIns="0" tIns="0" rIns="0" bIns="0" anchor="ctr">
             <a:spAutoFit/>
           </a:bodyPr>
           <a:lstStyle/>
@@ -17601,7 +17521,7 @@
           <a:noFill/>
         </p:spPr>
         <p:txBody>
-          <a:bodyPr wrap="square" anchor="ctr" lIns="0" rIns="0" tIns="0" bIns="0">
+          <a:bodyPr wrap="square" lIns="0" tIns="0" rIns="0" bIns="0" anchor="ctr">
             <a:spAutoFit/>
           </a:bodyPr>
           <a:lstStyle/>
@@ -17667,6 +17587,7 @@
           <a:lstStyle/>
           <a:p>
             <a:pPr algn="ctr"/>
+            <a:endParaRPr/>
           </a:p>
         </p:txBody>
       </p:sp>
@@ -17687,7 +17608,7 @@
           <a:noFill/>
         </p:spPr>
         <p:txBody>
-          <a:bodyPr wrap="square" anchor="ctr" lIns="0" rIns="0" tIns="0" bIns="0">
+          <a:bodyPr wrap="square" lIns="0" tIns="0" rIns="0" bIns="0" anchor="ctr">
             <a:spAutoFit/>
           </a:bodyPr>
           <a:lstStyle/>
@@ -17732,7 +17653,7 @@
           <a:noFill/>
         </p:spPr>
         <p:txBody>
-          <a:bodyPr wrap="square" anchor="ctr" lIns="0" rIns="0" tIns="0" bIns="0">
+          <a:bodyPr wrap="square" lIns="0" tIns="0" rIns="0" bIns="0" anchor="ctr">
             <a:spAutoFit/>
           </a:bodyPr>
           <a:lstStyle/>
@@ -17774,7 +17695,7 @@
           <a:noFill/>
         </p:spPr>
         <p:txBody>
-          <a:bodyPr wrap="square" anchor="ctr" lIns="0" rIns="0" tIns="0" bIns="0">
+          <a:bodyPr wrap="square" lIns="0" tIns="0" rIns="0" bIns="0" anchor="ctr">
             <a:spAutoFit/>
           </a:bodyPr>
           <a:lstStyle/>
@@ -17816,7 +17737,7 @@
           <a:noFill/>
         </p:spPr>
         <p:txBody>
-          <a:bodyPr wrap="square" anchor="ctr" lIns="0" rIns="0" tIns="0" bIns="0">
+          <a:bodyPr wrap="square" lIns="0" tIns="0" rIns="0" bIns="0" anchor="ctr">
             <a:spAutoFit/>
           </a:bodyPr>
           <a:lstStyle/>
@@ -17858,7 +17779,7 @@
           <a:noFill/>
         </p:spPr>
         <p:txBody>
-          <a:bodyPr wrap="square" anchor="ctr" lIns="0" rIns="0" tIns="0" bIns="0">
+          <a:bodyPr wrap="square" lIns="0" tIns="0" rIns="0" bIns="0" anchor="ctr">
             <a:spAutoFit/>
           </a:bodyPr>
           <a:lstStyle/>
@@ -17900,7 +17821,7 @@
           <a:noFill/>
         </p:spPr>
         <p:txBody>
-          <a:bodyPr wrap="square" anchor="ctr" lIns="0" rIns="0" tIns="0" bIns="0">
+          <a:bodyPr wrap="square" lIns="0" tIns="0" rIns="0" bIns="0" anchor="ctr">
             <a:spAutoFit/>
           </a:bodyPr>
           <a:lstStyle/>
@@ -17942,7 +17863,7 @@
           <a:noFill/>
         </p:spPr>
         <p:txBody>
-          <a:bodyPr wrap="square" anchor="ctr" lIns="0" rIns="0" tIns="0" bIns="0">
+          <a:bodyPr wrap="square" lIns="0" tIns="0" rIns="0" bIns="0" anchor="ctr">
             <a:spAutoFit/>
           </a:bodyPr>
           <a:lstStyle/>
@@ -17984,7 +17905,7 @@
           <a:noFill/>
         </p:spPr>
         <p:txBody>
-          <a:bodyPr wrap="square" anchor="ctr" lIns="0" rIns="0" tIns="0" bIns="0">
+          <a:bodyPr wrap="square" lIns="0" tIns="0" rIns="0" bIns="0" anchor="ctr">
             <a:spAutoFit/>
           </a:bodyPr>
           <a:lstStyle/>
@@ -18026,7 +17947,7 @@
           <a:noFill/>
         </p:spPr>
         <p:txBody>
-          <a:bodyPr wrap="square" anchor="ctr" lIns="0" rIns="0" tIns="0" bIns="0">
+          <a:bodyPr wrap="square" lIns="0" tIns="0" rIns="0" bIns="0" anchor="ctr">
             <a:spAutoFit/>
           </a:bodyPr>
           <a:lstStyle/>
@@ -18068,7 +17989,7 @@
           <a:noFill/>
         </p:spPr>
         <p:txBody>
-          <a:bodyPr wrap="square" anchor="ctr" lIns="0" rIns="0" tIns="0" bIns="0">
+          <a:bodyPr wrap="square" lIns="0" tIns="0" rIns="0" bIns="0" anchor="ctr">
             <a:spAutoFit/>
           </a:bodyPr>
           <a:lstStyle/>
@@ -18110,7 +18031,7 @@
           <a:noFill/>
         </p:spPr>
         <p:txBody>
-          <a:bodyPr wrap="square" anchor="ctr" lIns="0" rIns="0" tIns="0" bIns="0">
+          <a:bodyPr wrap="square" lIns="0" tIns="0" rIns="0" bIns="0" anchor="ctr">
             <a:spAutoFit/>
           </a:bodyPr>
           <a:lstStyle/>
@@ -18155,7 +18076,7 @@
           <a:noFill/>
         </p:spPr>
         <p:txBody>
-          <a:bodyPr wrap="square" anchor="ctr" lIns="0" rIns="0" tIns="0" bIns="0">
+          <a:bodyPr wrap="square" lIns="0" tIns="0" rIns="0" bIns="0" anchor="ctr">
             <a:spAutoFit/>
           </a:bodyPr>
           <a:lstStyle/>
@@ -18197,7 +18118,7 @@
           <a:noFill/>
         </p:spPr>
         <p:txBody>
-          <a:bodyPr wrap="square" anchor="ctr" lIns="0" rIns="0" tIns="0" bIns="0">
+          <a:bodyPr wrap="square" lIns="0" tIns="0" rIns="0" bIns="0" anchor="ctr">
             <a:spAutoFit/>
           </a:bodyPr>
           <a:lstStyle/>
@@ -18239,7 +18160,7 @@
           <a:noFill/>
         </p:spPr>
         <p:txBody>
-          <a:bodyPr wrap="square" anchor="ctr" lIns="0" rIns="0" tIns="0" bIns="0">
+          <a:bodyPr wrap="square" lIns="0" tIns="0" rIns="0" bIns="0" anchor="ctr">
             <a:spAutoFit/>
           </a:bodyPr>
           <a:lstStyle/>
@@ -18281,7 +18202,7 @@
           <a:noFill/>
         </p:spPr>
         <p:txBody>
-          <a:bodyPr wrap="square" anchor="ctr" lIns="0" rIns="0" tIns="0" bIns="0">
+          <a:bodyPr wrap="square" lIns="0" tIns="0" rIns="0" bIns="0" anchor="ctr">
             <a:spAutoFit/>
           </a:bodyPr>
           <a:lstStyle/>
@@ -18323,7 +18244,7 @@
           <a:noFill/>
         </p:spPr>
         <p:txBody>
-          <a:bodyPr wrap="square" anchor="ctr" lIns="0" rIns="0" tIns="0" bIns="0">
+          <a:bodyPr wrap="square" lIns="0" tIns="0" rIns="0" bIns="0" anchor="ctr">
             <a:spAutoFit/>
           </a:bodyPr>
           <a:lstStyle/>
@@ -18365,7 +18286,7 @@
           <a:noFill/>
         </p:spPr>
         <p:txBody>
-          <a:bodyPr wrap="square" anchor="ctr" lIns="0" rIns="0" tIns="0" bIns="0">
+          <a:bodyPr wrap="square" lIns="0" tIns="0" rIns="0" bIns="0" anchor="ctr">
             <a:spAutoFit/>
           </a:bodyPr>
           <a:lstStyle/>
@@ -18407,7 +18328,7 @@
           <a:noFill/>
         </p:spPr>
         <p:txBody>
-          <a:bodyPr wrap="square" anchor="ctr" lIns="0" rIns="0" tIns="0" bIns="0">
+          <a:bodyPr wrap="square" lIns="0" tIns="0" rIns="0" bIns="0" anchor="ctr">
             <a:spAutoFit/>
           </a:bodyPr>
           <a:lstStyle/>
@@ -18449,7 +18370,7 @@
           <a:noFill/>
         </p:spPr>
         <p:txBody>
-          <a:bodyPr wrap="square" anchor="ctr" lIns="0" rIns="0" tIns="0" bIns="0">
+          <a:bodyPr wrap="square" lIns="0" tIns="0" rIns="0" bIns="0" anchor="ctr">
             <a:spAutoFit/>
           </a:bodyPr>
           <a:lstStyle/>
@@ -18491,7 +18412,7 @@
           <a:noFill/>
         </p:spPr>
         <p:txBody>
-          <a:bodyPr wrap="square" anchor="ctr" lIns="0" rIns="0" tIns="0" bIns="0">
+          <a:bodyPr wrap="square" lIns="0" tIns="0" rIns="0" bIns="0" anchor="ctr">
             <a:spAutoFit/>
           </a:bodyPr>
           <a:lstStyle/>
@@ -18557,6 +18478,7 @@
           <a:lstStyle/>
           <a:p>
             <a:pPr algn="ctr"/>
+            <a:endParaRPr/>
           </a:p>
         </p:txBody>
       </p:sp>
@@ -18577,7 +18499,7 @@
           <a:noFill/>
         </p:spPr>
         <p:txBody>
-          <a:bodyPr wrap="square" anchor="ctr" lIns="0" rIns="0" tIns="0" bIns="0">
+          <a:bodyPr wrap="square" lIns="0" tIns="0" rIns="0" bIns="0" anchor="ctr">
             <a:spAutoFit/>
           </a:bodyPr>
           <a:lstStyle/>
@@ -18622,7 +18544,7 @@
           <a:noFill/>
         </p:spPr>
         <p:txBody>
-          <a:bodyPr wrap="square" anchor="ctr" lIns="0" rIns="0" tIns="0" bIns="0">
+          <a:bodyPr wrap="square" lIns="0" tIns="0" rIns="0" bIns="0" anchor="ctr">
             <a:spAutoFit/>
           </a:bodyPr>
           <a:lstStyle/>
@@ -18664,7 +18586,7 @@
           <a:noFill/>
         </p:spPr>
         <p:txBody>
-          <a:bodyPr wrap="square" anchor="ctr" lIns="0" rIns="0" tIns="0" bIns="0">
+          <a:bodyPr wrap="square" lIns="0" tIns="0" rIns="0" bIns="0" anchor="ctr">
             <a:spAutoFit/>
           </a:bodyPr>
           <a:lstStyle/>
@@ -18706,7 +18628,7 @@
           <a:noFill/>
         </p:spPr>
         <p:txBody>
-          <a:bodyPr wrap="square" anchor="ctr" lIns="0" rIns="0" tIns="0" bIns="0">
+          <a:bodyPr wrap="square" lIns="0" tIns="0" rIns="0" bIns="0" anchor="ctr">
             <a:spAutoFit/>
           </a:bodyPr>
           <a:lstStyle/>
@@ -18748,7 +18670,7 @@
           <a:noFill/>
         </p:spPr>
         <p:txBody>
-          <a:bodyPr wrap="square" anchor="ctr" lIns="0" rIns="0" tIns="0" bIns="0">
+          <a:bodyPr wrap="square" lIns="0" tIns="0" rIns="0" bIns="0" anchor="ctr">
             <a:spAutoFit/>
           </a:bodyPr>
           <a:lstStyle/>
@@ -18790,7 +18712,7 @@
           <a:noFill/>
         </p:spPr>
         <p:txBody>
-          <a:bodyPr wrap="square" anchor="ctr" lIns="0" rIns="0" tIns="0" bIns="0">
+          <a:bodyPr wrap="square" lIns="0" tIns="0" rIns="0" bIns="0" anchor="ctr">
             <a:spAutoFit/>
           </a:bodyPr>
           <a:lstStyle/>
@@ -18832,7 +18754,7 @@
           <a:noFill/>
         </p:spPr>
         <p:txBody>
-          <a:bodyPr wrap="square" anchor="ctr" lIns="0" rIns="0" tIns="0" bIns="0">
+          <a:bodyPr wrap="square" lIns="0" tIns="0" rIns="0" bIns="0" anchor="ctr">
             <a:spAutoFit/>
           </a:bodyPr>
           <a:lstStyle/>
@@ -18874,7 +18796,7 @@
           <a:noFill/>
         </p:spPr>
         <p:txBody>
-          <a:bodyPr wrap="square" anchor="ctr" lIns="0" rIns="0" tIns="0" bIns="0">
+          <a:bodyPr wrap="square" lIns="0" tIns="0" rIns="0" bIns="0" anchor="ctr">
             <a:spAutoFit/>
           </a:bodyPr>
           <a:lstStyle/>
@@ -18916,7 +18838,7 @@
           <a:noFill/>
         </p:spPr>
         <p:txBody>
-          <a:bodyPr wrap="square" anchor="ctr" lIns="0" rIns="0" tIns="0" bIns="0">
+          <a:bodyPr wrap="square" lIns="0" tIns="0" rIns="0" bIns="0" anchor="ctr">
             <a:spAutoFit/>
           </a:bodyPr>
           <a:lstStyle/>
@@ -18958,7 +18880,7 @@
           <a:noFill/>
         </p:spPr>
         <p:txBody>
-          <a:bodyPr wrap="square" anchor="ctr" lIns="0" rIns="0" tIns="0" bIns="0">
+          <a:bodyPr wrap="square" lIns="0" tIns="0" rIns="0" bIns="0" anchor="ctr">
             <a:spAutoFit/>
           </a:bodyPr>
           <a:lstStyle/>
@@ -19000,7 +18922,7 @@
           <a:noFill/>
         </p:spPr>
         <p:txBody>
-          <a:bodyPr wrap="square" anchor="ctr" lIns="0" rIns="0" tIns="0" bIns="0">
+          <a:bodyPr wrap="square" lIns="0" tIns="0" rIns="0" bIns="0" anchor="ctr">
             <a:spAutoFit/>
           </a:bodyPr>
           <a:lstStyle/>
@@ -19045,7 +18967,7 @@
           <a:noFill/>
         </p:spPr>
         <p:txBody>
-          <a:bodyPr wrap="square" anchor="ctr" lIns="0" rIns="0" tIns="0" bIns="0">
+          <a:bodyPr wrap="square" lIns="0" tIns="0" rIns="0" bIns="0" anchor="ctr">
             <a:spAutoFit/>
           </a:bodyPr>
           <a:lstStyle/>
@@ -19087,7 +19009,7 @@
           <a:noFill/>
         </p:spPr>
         <p:txBody>
-          <a:bodyPr wrap="square" anchor="ctr" lIns="0" rIns="0" tIns="0" bIns="0">
+          <a:bodyPr wrap="square" lIns="0" tIns="0" rIns="0" bIns="0" anchor="ctr">
             <a:spAutoFit/>
           </a:bodyPr>
           <a:lstStyle/>
@@ -19129,7 +19051,7 @@
           <a:noFill/>
         </p:spPr>
         <p:txBody>
-          <a:bodyPr wrap="square" anchor="ctr" lIns="0" rIns="0" tIns="0" bIns="0">
+          <a:bodyPr wrap="square" lIns="0" tIns="0" rIns="0" bIns="0" anchor="ctr">
             <a:spAutoFit/>
           </a:bodyPr>
           <a:lstStyle/>
@@ -19171,7 +19093,7 @@
           <a:noFill/>
         </p:spPr>
         <p:txBody>
-          <a:bodyPr wrap="square" anchor="ctr" lIns="0" rIns="0" tIns="0" bIns="0">
+          <a:bodyPr wrap="square" lIns="0" tIns="0" rIns="0" bIns="0" anchor="ctr">
             <a:spAutoFit/>
           </a:bodyPr>
           <a:lstStyle/>
@@ -19213,7 +19135,7 @@
           <a:noFill/>
         </p:spPr>
         <p:txBody>
-          <a:bodyPr wrap="square" anchor="ctr" lIns="0" rIns="0" tIns="0" bIns="0">
+          <a:bodyPr wrap="square" lIns="0" tIns="0" rIns="0" bIns="0" anchor="ctr">
             <a:spAutoFit/>
           </a:bodyPr>
           <a:lstStyle/>
@@ -19255,7 +19177,7 @@
           <a:noFill/>
         </p:spPr>
         <p:txBody>
-          <a:bodyPr wrap="square" anchor="ctr" lIns="0" rIns="0" tIns="0" bIns="0">
+          <a:bodyPr wrap="square" lIns="0" tIns="0" rIns="0" bIns="0" anchor="ctr">
             <a:spAutoFit/>
           </a:bodyPr>
           <a:lstStyle/>
@@ -19297,7 +19219,7 @@
           <a:noFill/>
         </p:spPr>
         <p:txBody>
-          <a:bodyPr wrap="square" anchor="ctr" lIns="0" rIns="0" tIns="0" bIns="0">
+          <a:bodyPr wrap="square" lIns="0" tIns="0" rIns="0" bIns="0" anchor="ctr">
             <a:spAutoFit/>
           </a:bodyPr>
           <a:lstStyle/>
@@ -19339,7 +19261,7 @@
           <a:noFill/>
         </p:spPr>
         <p:txBody>
-          <a:bodyPr wrap="square" anchor="ctr" lIns="0" rIns="0" tIns="0" bIns="0">
+          <a:bodyPr wrap="square" lIns="0" tIns="0" rIns="0" bIns="0" anchor="ctr">
             <a:spAutoFit/>
           </a:bodyPr>
           <a:lstStyle/>
@@ -19381,7 +19303,7 @@
           <a:noFill/>
         </p:spPr>
         <p:txBody>
-          <a:bodyPr wrap="square" anchor="ctr" lIns="0" rIns="0" tIns="0" bIns="0">
+          <a:bodyPr wrap="square" lIns="0" tIns="0" rIns="0" bIns="0" anchor="ctr">
             <a:spAutoFit/>
           </a:bodyPr>
           <a:lstStyle/>
@@ -19447,6 +19369,7 @@
           <a:lstStyle/>
           <a:p>
             <a:pPr algn="ctr"/>
+            <a:endParaRPr/>
           </a:p>
         </p:txBody>
       </p:sp>
@@ -19467,7 +19390,7 @@
           <a:noFill/>
         </p:spPr>
         <p:txBody>
-          <a:bodyPr wrap="square" anchor="ctr" lIns="0" rIns="0" tIns="0" bIns="0">
+          <a:bodyPr wrap="square" lIns="0" tIns="0" rIns="0" bIns="0" anchor="ctr">
             <a:spAutoFit/>
           </a:bodyPr>
           <a:lstStyle/>
@@ -19512,7 +19435,7 @@
           <a:noFill/>
         </p:spPr>
         <p:txBody>
-          <a:bodyPr wrap="square" anchor="ctr" lIns="0" rIns="0" tIns="0" bIns="0">
+          <a:bodyPr wrap="square" lIns="0" tIns="0" rIns="0" bIns="0" anchor="ctr">
             <a:spAutoFit/>
           </a:bodyPr>
           <a:lstStyle/>
@@ -19554,7 +19477,7 @@
           <a:noFill/>
         </p:spPr>
         <p:txBody>
-          <a:bodyPr wrap="square" anchor="ctr" lIns="0" rIns="0" tIns="0" bIns="0">
+          <a:bodyPr wrap="square" lIns="0" tIns="0" rIns="0" bIns="0" anchor="ctr">
             <a:spAutoFit/>
           </a:bodyPr>
           <a:lstStyle/>
@@ -19596,7 +19519,7 @@
           <a:noFill/>
         </p:spPr>
         <p:txBody>
-          <a:bodyPr wrap="square" anchor="ctr" lIns="0" rIns="0" tIns="0" bIns="0">
+          <a:bodyPr wrap="square" lIns="0" tIns="0" rIns="0" bIns="0" anchor="ctr">
             <a:spAutoFit/>
           </a:bodyPr>
           <a:lstStyle/>
@@ -19638,7 +19561,7 @@
           <a:noFill/>
         </p:spPr>
         <p:txBody>
-          <a:bodyPr wrap="square" anchor="ctr" lIns="0" rIns="0" tIns="0" bIns="0">
+          <a:bodyPr wrap="square" lIns="0" tIns="0" rIns="0" bIns="0" anchor="ctr">
             <a:spAutoFit/>
           </a:bodyPr>
           <a:lstStyle/>
@@ -19680,7 +19603,7 @@
           <a:noFill/>
         </p:spPr>
         <p:txBody>
-          <a:bodyPr wrap="square" anchor="ctr" lIns="0" rIns="0" tIns="0" bIns="0">
+          <a:bodyPr wrap="square" lIns="0" tIns="0" rIns="0" bIns="0" anchor="ctr">
             <a:spAutoFit/>
           </a:bodyPr>
           <a:lstStyle/>
@@ -19722,7 +19645,7 @@
           <a:noFill/>
         </p:spPr>
         <p:txBody>
-          <a:bodyPr wrap="square" anchor="ctr" lIns="0" rIns="0" tIns="0" bIns="0">
+          <a:bodyPr wrap="square" lIns="0" tIns="0" rIns="0" bIns="0" anchor="ctr">
             <a:spAutoFit/>
           </a:bodyPr>
           <a:lstStyle/>
@@ -19764,7 +19687,7 @@
           <a:noFill/>
         </p:spPr>
         <p:txBody>
-          <a:bodyPr wrap="square" anchor="ctr" lIns="0" rIns="0" tIns="0" bIns="0">
+          <a:bodyPr wrap="square" lIns="0" tIns="0" rIns="0" bIns="0" anchor="ctr">
             <a:spAutoFit/>
           </a:bodyPr>
           <a:lstStyle/>
@@ -19806,7 +19729,7 @@
           <a:noFill/>
         </p:spPr>
         <p:txBody>
-          <a:bodyPr wrap="square" anchor="ctr" lIns="0" rIns="0" tIns="0" bIns="0">
+          <a:bodyPr wrap="square" lIns="0" tIns="0" rIns="0" bIns="0" anchor="ctr">
             <a:spAutoFit/>
           </a:bodyPr>
           <a:lstStyle/>
@@ -19848,7 +19771,7 @@
           <a:noFill/>
         </p:spPr>
         <p:txBody>
-          <a:bodyPr wrap="square" anchor="ctr" lIns="0" rIns="0" tIns="0" bIns="0">
+          <a:bodyPr wrap="square" lIns="0" tIns="0" rIns="0" bIns="0" anchor="ctr">
             <a:spAutoFit/>
           </a:bodyPr>
           <a:lstStyle/>
@@ -19890,7 +19813,7 @@
           <a:noFill/>
         </p:spPr>
         <p:txBody>
-          <a:bodyPr wrap="square" anchor="t" lIns="0" rIns="0" tIns="0" bIns="0">
+          <a:bodyPr wrap="square" lIns="0" tIns="0" rIns="0" bIns="0" anchor="t">
             <a:spAutoFit/>
           </a:bodyPr>
           <a:lstStyle/>
@@ -19932,7 +19855,7 @@
           <a:noFill/>
         </p:spPr>
         <p:txBody>
-          <a:bodyPr wrap="square" anchor="t" lIns="0" rIns="0" tIns="0" bIns="0">
+          <a:bodyPr wrap="square" lIns="0" tIns="0" rIns="0" bIns="0" anchor="t">
             <a:spAutoFit/>
           </a:bodyPr>
           <a:lstStyle/>
@@ -19966,7 +19889,7 @@
 </file>
 
 <file path=ppt/slides/slide21.xml><?xml version="1.0" encoding="utf-8"?>
-<p:sld xmlns:a="http://schemas.openxmlformats.org/drawingml/2006/main" xmlns:p="http://schemas.openxmlformats.org/presentationml/2006/main" xmlns:r="http://schemas.openxmlformats.org/officeDocument/2006/relationships">
+<p:sld xmlns:a="http://schemas.openxmlformats.org/drawingml/2006/main" xmlns:r="http://schemas.openxmlformats.org/officeDocument/2006/relationships" xmlns:p="http://schemas.openxmlformats.org/presentationml/2006/main">
   <p:cSld>
     <p:spTree>
       <p:nvGrpSpPr>
@@ -19974,7 +19897,14 @@
         <p:cNvGrpSpPr/>
         <p:nvPr/>
       </p:nvGrpSpPr>
-      <p:grpSpPr/>
+      <p:grpSpPr>
+        <a:xfrm>
+          <a:off x="0" y="0"/>
+          <a:ext cx="0" cy="0"/>
+          <a:chOff x="0" y="0"/>
+          <a:chExt cx="0" cy="0"/>
+        </a:xfrm>
+      </p:grpSpPr>
       <p:sp>
         <p:nvSpPr>
           <p:cNvPr id="2" name="Rectangle 1"/>
@@ -20016,6 +19946,7 @@
           <a:lstStyle/>
           <a:p>
             <a:pPr algn="ctr"/>
+            <a:endParaRPr/>
           </a:p>
         </p:txBody>
       </p:sp>
@@ -20036,7 +19967,7 @@
           <a:noFill/>
         </p:spPr>
         <p:txBody>
-          <a:bodyPr wrap="square" anchor="t" lIns="0" rIns="0" tIns="0" bIns="0">
+          <a:bodyPr wrap="square" lIns="0" tIns="0" rIns="0" bIns="0" anchor="t">
             <a:spAutoFit/>
           </a:bodyPr>
           <a:lstStyle/>
@@ -20078,7 +20009,7 @@
           <a:noFill/>
         </p:spPr>
         <p:txBody>
-          <a:bodyPr wrap="square" anchor="t" lIns="0" rIns="0" tIns="0" bIns="0">
+          <a:bodyPr wrap="square" lIns="0" tIns="0" rIns="0" bIns="0" anchor="t">
             <a:spAutoFit/>
           </a:bodyPr>
           <a:lstStyle/>
@@ -20147,6 +20078,7 @@
           <a:lstStyle/>
           <a:p>
             <a:pPr algn="ctr"/>
+            <a:endParaRPr/>
           </a:p>
         </p:txBody>
       </p:sp>
@@ -20187,7 +20119,7 @@
           </a:fontRef>
         </p:style>
         <p:txBody>
-          <a:bodyPr rtlCol="0" anchor="ctr" wrap="none" lIns="0" rIns="0" tIns="0" bIns="0"/>
+          <a:bodyPr wrap="none" lIns="0" tIns="0" rIns="0" bIns="0" rtlCol="0" anchor="ctr"/>
           <a:lstStyle/>
           <a:p>
             <a:pPr algn="ctr"/>
@@ -20220,7 +20152,7 @@
           <a:noFill/>
         </p:spPr>
         <p:txBody>
-          <a:bodyPr wrap="square" anchor="t" lIns="0" rIns="0" tIns="0" bIns="0">
+          <a:bodyPr wrap="square" lIns="0" tIns="0" rIns="0" bIns="0" anchor="t">
             <a:spAutoFit/>
           </a:bodyPr>
           <a:lstStyle/>
@@ -20330,6 +20262,7 @@
           <a:lstStyle/>
           <a:p>
             <a:pPr algn="ctr"/>
+            <a:endParaRPr/>
           </a:p>
         </p:txBody>
       </p:sp>
@@ -20370,7 +20303,7 @@
           </a:fontRef>
         </p:style>
         <p:txBody>
-          <a:bodyPr rtlCol="0" anchor="ctr" wrap="none" lIns="0" rIns="0" tIns="0" bIns="0"/>
+          <a:bodyPr wrap="none" lIns="0" tIns="0" rIns="0" bIns="0" rtlCol="0" anchor="ctr"/>
           <a:lstStyle/>
           <a:p>
             <a:pPr algn="ctr"/>
@@ -20403,7 +20336,7 @@
           <a:noFill/>
         </p:spPr>
         <p:txBody>
-          <a:bodyPr wrap="square" anchor="t" lIns="0" rIns="0" tIns="0" bIns="0">
+          <a:bodyPr wrap="square" lIns="0" tIns="0" rIns="0" bIns="0" anchor="t">
             <a:spAutoFit/>
           </a:bodyPr>
           <a:lstStyle/>
@@ -20513,6 +20446,7 @@
           <a:lstStyle/>
           <a:p>
             <a:pPr algn="ctr"/>
+            <a:endParaRPr/>
           </a:p>
         </p:txBody>
       </p:sp>
@@ -20553,7 +20487,7 @@
           </a:fontRef>
         </p:style>
         <p:txBody>
-          <a:bodyPr rtlCol="0" anchor="ctr" wrap="none" lIns="0" rIns="0" tIns="0" bIns="0"/>
+          <a:bodyPr wrap="none" lIns="0" tIns="0" rIns="0" bIns="0" rtlCol="0" anchor="ctr"/>
           <a:lstStyle/>
           <a:p>
             <a:pPr algn="ctr"/>
@@ -20586,7 +20520,7 @@
           <a:noFill/>
         </p:spPr>
         <p:txBody>
-          <a:bodyPr wrap="square" anchor="t" lIns="0" rIns="0" tIns="0" bIns="0">
+          <a:bodyPr wrap="square" lIns="0" tIns="0" rIns="0" bIns="0" anchor="t">
             <a:spAutoFit/>
           </a:bodyPr>
           <a:lstStyle/>
@@ -20672,7 +20606,7 @@
           <a:noFill/>
         </p:spPr>
         <p:txBody>
-          <a:bodyPr wrap="square" anchor="t" lIns="0" rIns="0" tIns="0" bIns="0">
+          <a:bodyPr wrap="square" lIns="0" tIns="0" rIns="0" bIns="0" anchor="t">
             <a:spAutoFit/>
           </a:bodyPr>
           <a:lstStyle/>
@@ -20717,7 +20651,7 @@
           <a:noFill/>
         </p:spPr>
         <p:txBody>
-          <a:bodyPr wrap="square" anchor="t" lIns="0" rIns="0" tIns="0" bIns="0">
+          <a:bodyPr wrap="square" lIns="0" tIns="0" rIns="0" bIns="0" anchor="t">
             <a:spAutoFit/>
           </a:bodyPr>
           <a:lstStyle/>
@@ -20751,7 +20685,7 @@
 </file>
 
 <file path=ppt/slides/slide22.xml><?xml version="1.0" encoding="utf-8"?>
-<p:sld xmlns:a="http://schemas.openxmlformats.org/drawingml/2006/main" xmlns:p="http://schemas.openxmlformats.org/presentationml/2006/main" xmlns:r="http://schemas.openxmlformats.org/officeDocument/2006/relationships">
+<p:sld xmlns:a="http://schemas.openxmlformats.org/drawingml/2006/main" xmlns:r="http://schemas.openxmlformats.org/officeDocument/2006/relationships" xmlns:p="http://schemas.openxmlformats.org/presentationml/2006/main">
   <p:cSld>
     <p:spTree>
       <p:nvGrpSpPr>
@@ -20759,7 +20693,14 @@
         <p:cNvGrpSpPr/>
         <p:nvPr/>
       </p:nvGrpSpPr>
-      <p:grpSpPr/>
+      <p:grpSpPr>
+        <a:xfrm>
+          <a:off x="0" y="0"/>
+          <a:ext cx="0" cy="0"/>
+          <a:chOff x="0" y="0"/>
+          <a:chExt cx="0" cy="0"/>
+        </a:xfrm>
+      </p:grpSpPr>
       <p:sp>
         <p:nvSpPr>
           <p:cNvPr id="2" name="Rectangle 1"/>
@@ -20801,6 +20742,7 @@
           <a:lstStyle/>
           <a:p>
             <a:pPr algn="ctr"/>
+            <a:endParaRPr/>
           </a:p>
         </p:txBody>
       </p:sp>
@@ -20841,7 +20783,7 @@
           </a:fontRef>
         </p:style>
         <p:txBody>
-          <a:bodyPr rtlCol="0" anchor="ctr" wrap="none" lIns="0" rIns="0" tIns="0" bIns="0"/>
+          <a:bodyPr wrap="none" lIns="0" tIns="0" rIns="0" bIns="0" rtlCol="0" anchor="ctr"/>
           <a:lstStyle/>
           <a:p>
             <a:pPr algn="ctr"/>
@@ -20874,7 +20816,7 @@
           <a:noFill/>
         </p:spPr>
         <p:txBody>
-          <a:bodyPr wrap="square" anchor="t" lIns="0" rIns="0" tIns="0" bIns="0">
+          <a:bodyPr wrap="square" lIns="0" tIns="0" rIns="0" bIns="0" anchor="t">
             <a:spAutoFit/>
           </a:bodyPr>
           <a:lstStyle/>
@@ -20916,7 +20858,7 @@
           <a:noFill/>
         </p:spPr>
         <p:txBody>
-          <a:bodyPr wrap="square" anchor="t" lIns="0" rIns="0" tIns="0" bIns="0">
+          <a:bodyPr wrap="square" lIns="0" tIns="0" rIns="0" bIns="0" anchor="t">
             <a:spAutoFit/>
           </a:bodyPr>
           <a:lstStyle/>
@@ -20977,7 +20919,7 @@
           <a:noFill/>
         </p:spPr>
         <p:txBody>
-          <a:bodyPr wrap="square" anchor="t" lIns="0" rIns="0" tIns="0" bIns="0">
+          <a:bodyPr wrap="square" lIns="0" tIns="0" rIns="0" bIns="0" anchor="t">
             <a:spAutoFit/>
           </a:bodyPr>
           <a:lstStyle/>
@@ -21011,7 +20953,7 @@
 </file>
 
 <file path=ppt/slides/slide23.xml><?xml version="1.0" encoding="utf-8"?>
-<p:sld xmlns:a="http://schemas.openxmlformats.org/drawingml/2006/main" xmlns:p="http://schemas.openxmlformats.org/presentationml/2006/main" xmlns:r="http://schemas.openxmlformats.org/officeDocument/2006/relationships">
+<p:sld xmlns:a="http://schemas.openxmlformats.org/drawingml/2006/main" xmlns:r="http://schemas.openxmlformats.org/officeDocument/2006/relationships" xmlns:p="http://schemas.openxmlformats.org/presentationml/2006/main">
   <p:cSld>
     <p:spTree>
       <p:nvGrpSpPr>
@@ -21019,7 +20961,14 @@
         <p:cNvGrpSpPr/>
         <p:nvPr/>
       </p:nvGrpSpPr>
-      <p:grpSpPr/>
+      <p:grpSpPr>
+        <a:xfrm>
+          <a:off x="0" y="0"/>
+          <a:ext cx="0" cy="0"/>
+          <a:chOff x="0" y="0"/>
+          <a:chExt cx="0" cy="0"/>
+        </a:xfrm>
+      </p:grpSpPr>
       <p:sp>
         <p:nvSpPr>
           <p:cNvPr id="2" name="Rectangle 1"/>
@@ -21061,6 +21010,7 @@
           <a:lstStyle/>
           <a:p>
             <a:pPr algn="ctr"/>
+            <a:endParaRPr/>
           </a:p>
         </p:txBody>
       </p:sp>
@@ -21081,7 +21031,7 @@
           <a:noFill/>
         </p:spPr>
         <p:txBody>
-          <a:bodyPr wrap="square" anchor="t" lIns="0" rIns="0" tIns="0" bIns="0">
+          <a:bodyPr wrap="square" lIns="0" tIns="0" rIns="0" bIns="0" anchor="t">
             <a:spAutoFit/>
           </a:bodyPr>
           <a:lstStyle/>
@@ -21123,7 +21073,7 @@
           <a:noFill/>
         </p:spPr>
         <p:txBody>
-          <a:bodyPr wrap="square" anchor="t" lIns="0" rIns="0" tIns="0" bIns="0">
+          <a:bodyPr wrap="square" lIns="0" tIns="0" rIns="0" bIns="0" anchor="t">
             <a:spAutoFit/>
           </a:bodyPr>
           <a:lstStyle/>
@@ -21192,6 +21142,7 @@
           <a:lstStyle/>
           <a:p>
             <a:pPr algn="ctr"/>
+            <a:endParaRPr/>
           </a:p>
         </p:txBody>
       </p:sp>
@@ -21212,7 +21163,7 @@
           <a:noFill/>
         </p:spPr>
         <p:txBody>
-          <a:bodyPr wrap="square" anchor="t" lIns="0" rIns="0" tIns="0" bIns="0">
+          <a:bodyPr wrap="square" lIns="0" tIns="0" rIns="0" bIns="0" anchor="t">
             <a:spAutoFit/>
           </a:bodyPr>
           <a:lstStyle/>
@@ -21251,7 +21202,7 @@
                 </a:solidFill>
                 <a:latin typeface="Calibri"/>
               </a:rPr>
-              <a:t xml:space="preserve">▪ </a:t>
+              <a:t>▪ </a:t>
             </a:r>
             <a:r>
               <a:rPr sz="1250" b="1" i="0">
@@ -21260,7 +21211,7 @@
                 </a:solidFill>
                 <a:latin typeface="Calibri"/>
               </a:rPr>
-              <a:t xml:space="preserve">Amazon Bedrock + Guardrails  </a:t>
+              <a:t>Amazon Bedrock + Guardrails  </a:t>
             </a:r>
             <a:r>
               <a:rPr sz="1100" b="0" i="0">
@@ -21288,7 +21239,7 @@
                 </a:solidFill>
                 <a:latin typeface="Calibri"/>
               </a:rPr>
-              <a:t xml:space="preserve">▪ </a:t>
+              <a:t>▪ </a:t>
             </a:r>
             <a:r>
               <a:rPr sz="1250" b="1" i="0">
@@ -21297,7 +21248,7 @@
                 </a:solidFill>
                 <a:latin typeface="Calibri"/>
               </a:rPr>
-              <a:t xml:space="preserve">AgentCore  </a:t>
+              <a:t>AgentCore  </a:t>
             </a:r>
             <a:r>
               <a:rPr sz="1100" b="0" i="0">
@@ -21325,7 +21276,7 @@
                 </a:solidFill>
                 <a:latin typeface="Calibri"/>
               </a:rPr>
-              <a:t xml:space="preserve">▪ </a:t>
+              <a:t>▪ </a:t>
             </a:r>
             <a:r>
               <a:rPr sz="1250" b="1" i="0">
@@ -21334,7 +21285,7 @@
                 </a:solidFill>
                 <a:latin typeface="Calibri"/>
               </a:rPr>
-              <a:t xml:space="preserve">AWS GovCloud (US)  </a:t>
+              <a:t>AWS GovCloud (US)  </a:t>
             </a:r>
             <a:r>
               <a:rPr sz="1100" b="0" i="0">
@@ -21362,7 +21313,7 @@
                 </a:solidFill>
                 <a:latin typeface="Calibri"/>
               </a:rPr>
-              <a:t xml:space="preserve">▪ </a:t>
+              <a:t>▪ </a:t>
             </a:r>
             <a:r>
               <a:rPr sz="1250" b="1" i="0">
@@ -21371,7 +21322,7 @@
                 </a:solidFill>
                 <a:latin typeface="Calibri"/>
               </a:rPr>
-              <a:t xml:space="preserve">KMS  </a:t>
+              <a:t>KMS  </a:t>
             </a:r>
             <a:r>
               <a:rPr sz="1100" b="0" i="0">
@@ -21399,7 +21350,7 @@
                 </a:solidFill>
                 <a:latin typeface="Calibri"/>
               </a:rPr>
-              <a:t xml:space="preserve">▪ </a:t>
+              <a:t>▪ </a:t>
             </a:r>
             <a:r>
               <a:rPr sz="1250" b="1" i="0">
@@ -21408,7 +21359,7 @@
                 </a:solidFill>
                 <a:latin typeface="Calibri"/>
               </a:rPr>
-              <a:t xml:space="preserve">Macie / Comprehend  </a:t>
+              <a:t>Macie / Comprehend  </a:t>
             </a:r>
             <a:r>
               <a:rPr sz="1100" b="0" i="0">
@@ -21436,7 +21387,7 @@
                 </a:solidFill>
                 <a:latin typeface="Calibri"/>
               </a:rPr>
-              <a:t xml:space="preserve">▪ </a:t>
+              <a:t>▪ </a:t>
             </a:r>
             <a:r>
               <a:rPr sz="1250" b="1" i="0">
@@ -21445,7 +21396,7 @@
                 </a:solidFill>
                 <a:latin typeface="Calibri"/>
               </a:rPr>
-              <a:t xml:space="preserve">FinOps stack  </a:t>
+              <a:t>FinOps stack  </a:t>
             </a:r>
             <a:r>
               <a:rPr sz="1100" b="0" i="0">
@@ -21473,7 +21424,7 @@
                 </a:solidFill>
                 <a:latin typeface="Calibri"/>
               </a:rPr>
-              <a:t xml:space="preserve">▪ </a:t>
+              <a:t>▪ </a:t>
             </a:r>
             <a:r>
               <a:rPr sz="1250" b="1" i="0">
@@ -21482,7 +21433,7 @@
                 </a:solidFill>
                 <a:latin typeface="Calibri"/>
               </a:rPr>
-              <a:t xml:space="preserve">Edge &amp; posture  </a:t>
+              <a:t>Edge &amp; posture  </a:t>
             </a:r>
             <a:r>
               <a:rPr sz="1100" b="0" i="0">
@@ -21539,6 +21490,7 @@
           <a:lstStyle/>
           <a:p>
             <a:pPr algn="ctr"/>
+            <a:endParaRPr/>
           </a:p>
         </p:txBody>
       </p:sp>
@@ -21559,7 +21511,7 @@
           <a:noFill/>
         </p:spPr>
         <p:txBody>
-          <a:bodyPr wrap="square" anchor="t" lIns="0" rIns="0" tIns="0" bIns="0">
+          <a:bodyPr wrap="square" lIns="0" tIns="0" rIns="0" bIns="0" anchor="t">
             <a:spAutoFit/>
           </a:bodyPr>
           <a:lstStyle/>
@@ -21601,7 +21553,7 @@
                 </a:solidFill>
                 <a:latin typeface="Calibri"/>
               </a:rPr>
-              <a:t xml:space="preserve">›  </a:t>
+              <a:t>›  </a:t>
             </a:r>
             <a:r>
               <a:rPr sz="1250" b="0" i="0">
@@ -21632,7 +21584,7 @@
                 </a:solidFill>
                 <a:latin typeface="Calibri"/>
               </a:rPr>
-              <a:t xml:space="preserve">›  </a:t>
+              <a:t>›  </a:t>
             </a:r>
             <a:r>
               <a:rPr sz="1250" b="0" i="0">
@@ -21663,7 +21615,7 @@
                 </a:solidFill>
                 <a:latin typeface="Calibri"/>
               </a:rPr>
-              <a:t xml:space="preserve">›  </a:t>
+              <a:t>›  </a:t>
             </a:r>
             <a:r>
               <a:rPr sz="1250" b="0" i="0">
@@ -21694,7 +21646,7 @@
                 </a:solidFill>
                 <a:latin typeface="Calibri"/>
               </a:rPr>
-              <a:t xml:space="preserve">›  </a:t>
+              <a:t>›  </a:t>
             </a:r>
             <a:r>
               <a:rPr sz="1250" b="0" i="0">
@@ -21725,7 +21677,7 @@
           <a:noFill/>
         </p:spPr>
         <p:txBody>
-          <a:bodyPr wrap="square" anchor="t" lIns="0" rIns="0" tIns="0" bIns="0">
+          <a:bodyPr wrap="square" lIns="0" tIns="0" rIns="0" bIns="0" anchor="t">
             <a:spAutoFit/>
           </a:bodyPr>
           <a:lstStyle/>
@@ -21759,7 +21711,7 @@
 </file>
 
 <file path=ppt/slides/slide24.xml><?xml version="1.0" encoding="utf-8"?>
-<p:sld xmlns:a="http://schemas.openxmlformats.org/drawingml/2006/main" xmlns:p="http://schemas.openxmlformats.org/presentationml/2006/main" xmlns:r="http://schemas.openxmlformats.org/officeDocument/2006/relationships">
+<p:sld xmlns:a="http://schemas.openxmlformats.org/drawingml/2006/main" xmlns:r="http://schemas.openxmlformats.org/officeDocument/2006/relationships" xmlns:p="http://schemas.openxmlformats.org/presentationml/2006/main">
   <p:cSld>
     <p:spTree>
       <p:nvGrpSpPr>
@@ -21767,7 +21719,14 @@
         <p:cNvGrpSpPr/>
         <p:nvPr/>
       </p:nvGrpSpPr>
-      <p:grpSpPr/>
+      <p:grpSpPr>
+        <a:xfrm>
+          <a:off x="0" y="0"/>
+          <a:ext cx="0" cy="0"/>
+          <a:chOff x="0" y="0"/>
+          <a:chExt cx="0" cy="0"/>
+        </a:xfrm>
+      </p:grpSpPr>
       <p:sp>
         <p:nvSpPr>
           <p:cNvPr id="2" name="Rectangle 1"/>
@@ -21809,6 +21768,7 @@
           <a:lstStyle/>
           <a:p>
             <a:pPr algn="ctr"/>
+            <a:endParaRPr/>
           </a:p>
         </p:txBody>
       </p:sp>
@@ -21829,7 +21789,7 @@
           <a:noFill/>
         </p:spPr>
         <p:txBody>
-          <a:bodyPr wrap="square" anchor="t" lIns="0" rIns="0" tIns="0" bIns="0">
+          <a:bodyPr wrap="square" lIns="0" tIns="0" rIns="0" bIns="0" anchor="t">
             <a:spAutoFit/>
           </a:bodyPr>
           <a:lstStyle/>
@@ -21871,7 +21831,7 @@
           <a:noFill/>
         </p:spPr>
         <p:txBody>
-          <a:bodyPr wrap="square" anchor="t" lIns="0" rIns="0" tIns="0" bIns="0">
+          <a:bodyPr wrap="square" lIns="0" tIns="0" rIns="0" bIns="0" anchor="t">
             <a:spAutoFit/>
           </a:bodyPr>
           <a:lstStyle/>
@@ -21940,6 +21900,7 @@
           <a:lstStyle/>
           <a:p>
             <a:pPr algn="ctr"/>
+            <a:endParaRPr/>
           </a:p>
         </p:txBody>
       </p:sp>
@@ -21960,7 +21921,7 @@
           <a:noFill/>
         </p:spPr>
         <p:txBody>
-          <a:bodyPr wrap="square" anchor="t" lIns="0" rIns="0" tIns="0" bIns="0">
+          <a:bodyPr wrap="square" lIns="0" tIns="0" rIns="0" bIns="0" anchor="t">
             <a:spAutoFit/>
           </a:bodyPr>
           <a:lstStyle/>
@@ -22022,7 +21983,7 @@
           </a:fontRef>
         </p:style>
         <p:txBody>
-          <a:bodyPr rtlCol="0" anchor="ctr" wrap="none" lIns="0" rIns="0" tIns="0" bIns="0"/>
+          <a:bodyPr wrap="none" lIns="0" tIns="0" rIns="0" bIns="0" rtlCol="0" anchor="ctr"/>
           <a:lstStyle/>
           <a:p>
             <a:pPr algn="ctr"/>
@@ -22055,7 +22016,7 @@
           <a:noFill/>
         </p:spPr>
         <p:txBody>
-          <a:bodyPr wrap="square" anchor="ctr" lIns="0" rIns="0" tIns="0" bIns="0">
+          <a:bodyPr wrap="square" lIns="0" tIns="0" rIns="0" bIns="0" anchor="ctr">
             <a:spAutoFit/>
           </a:bodyPr>
           <a:lstStyle/>
@@ -22072,7 +22033,7 @@
                 </a:solidFill>
                 <a:latin typeface="Cambria"/>
               </a:rPr>
-              <a:t xml:space="preserve">Package  </a:t>
+              <a:t>Package  </a:t>
             </a:r>
             <a:r>
               <a:rPr sz="1150" b="0" i="0">
@@ -22123,7 +22084,7 @@
           </a:fontRef>
         </p:style>
         <p:txBody>
-          <a:bodyPr rtlCol="0" anchor="ctr" wrap="none" lIns="0" rIns="0" tIns="0" bIns="0"/>
+          <a:bodyPr wrap="none" lIns="0" tIns="0" rIns="0" bIns="0" rtlCol="0" anchor="ctr"/>
           <a:lstStyle/>
           <a:p>
             <a:pPr algn="ctr"/>
@@ -22156,7 +22117,7 @@
           <a:noFill/>
         </p:spPr>
         <p:txBody>
-          <a:bodyPr wrap="square" anchor="ctr" lIns="0" rIns="0" tIns="0" bIns="0">
+          <a:bodyPr wrap="square" lIns="0" tIns="0" rIns="0" bIns="0" anchor="ctr">
             <a:spAutoFit/>
           </a:bodyPr>
           <a:lstStyle/>
@@ -22173,7 +22134,7 @@
                 </a:solidFill>
                 <a:latin typeface="Cambria"/>
               </a:rPr>
-              <a:t xml:space="preserve">List  </a:t>
+              <a:t>List  </a:t>
             </a:r>
             <a:r>
               <a:rPr sz="1150" b="0" i="0">
@@ -22224,7 +22185,7 @@
           </a:fontRef>
         </p:style>
         <p:txBody>
-          <a:bodyPr rtlCol="0" anchor="ctr" wrap="none" lIns="0" rIns="0" tIns="0" bIns="0"/>
+          <a:bodyPr wrap="none" lIns="0" tIns="0" rIns="0" bIns="0" rtlCol="0" anchor="ctr"/>
           <a:lstStyle/>
           <a:p>
             <a:pPr algn="ctr"/>
@@ -22257,7 +22218,7 @@
           <a:noFill/>
         </p:spPr>
         <p:txBody>
-          <a:bodyPr wrap="square" anchor="ctr" lIns="0" rIns="0" tIns="0" bIns="0">
+          <a:bodyPr wrap="square" lIns="0" tIns="0" rIns="0" bIns="0" anchor="ctr">
             <a:spAutoFit/>
           </a:bodyPr>
           <a:lstStyle/>
@@ -22274,7 +22235,7 @@
                 </a:solidFill>
                 <a:latin typeface="Cambria"/>
               </a:rPr>
-              <a:t xml:space="preserve">Deploy  </a:t>
+              <a:t>Deploy  </a:t>
             </a:r>
             <a:r>
               <a:rPr sz="1150" b="0" i="0">
@@ -22325,7 +22286,7 @@
           </a:fontRef>
         </p:style>
         <p:txBody>
-          <a:bodyPr rtlCol="0" anchor="ctr" wrap="none" lIns="0" rIns="0" tIns="0" bIns="0"/>
+          <a:bodyPr wrap="none" lIns="0" tIns="0" rIns="0" bIns="0" rtlCol="0" anchor="ctr"/>
           <a:lstStyle/>
           <a:p>
             <a:pPr algn="ctr"/>
@@ -22358,7 +22319,7 @@
           <a:noFill/>
         </p:spPr>
         <p:txBody>
-          <a:bodyPr wrap="square" anchor="ctr" lIns="0" rIns="0" tIns="0" bIns="0">
+          <a:bodyPr wrap="square" lIns="0" tIns="0" rIns="0" bIns="0" anchor="ctr">
             <a:spAutoFit/>
           </a:bodyPr>
           <a:lstStyle/>
@@ -22375,7 +22336,7 @@
                 </a:solidFill>
                 <a:latin typeface="Cambria"/>
               </a:rPr>
-              <a:t xml:space="preserve">Compound  </a:t>
+              <a:t>Compound  </a:t>
             </a:r>
             <a:r>
               <a:rPr sz="1150" b="0" i="0">
@@ -22432,6 +22393,7 @@
           <a:lstStyle/>
           <a:p>
             <a:pPr algn="ctr"/>
+            <a:endParaRPr/>
           </a:p>
         </p:txBody>
       </p:sp>
@@ -22452,7 +22414,7 @@
           <a:noFill/>
         </p:spPr>
         <p:txBody>
-          <a:bodyPr wrap="square" anchor="t" lIns="0" rIns="0" tIns="0" bIns="0">
+          <a:bodyPr wrap="square" lIns="0" tIns="0" rIns="0" bIns="0" anchor="t">
             <a:spAutoFit/>
           </a:bodyPr>
           <a:lstStyle/>
@@ -22514,7 +22476,7 @@
           </a:fontRef>
         </p:style>
         <p:txBody>
-          <a:bodyPr rtlCol="0" anchor="ctr" wrap="none" lIns="0" rIns="0" tIns="0" bIns="0"/>
+          <a:bodyPr wrap="none" lIns="0" tIns="0" rIns="0" bIns="0" rtlCol="0" anchor="ctr"/>
           <a:lstStyle/>
           <a:p>
             <a:pPr algn="ctr"/>
@@ -22547,7 +22509,7 @@
           <a:noFill/>
         </p:spPr>
         <p:txBody>
-          <a:bodyPr wrap="square" anchor="ctr" lIns="0" rIns="0" tIns="0" bIns="0">
+          <a:bodyPr wrap="square" lIns="0" tIns="0" rIns="0" bIns="0" anchor="ctr">
             <a:spAutoFit/>
           </a:bodyPr>
           <a:lstStyle/>
@@ -22564,7 +22526,7 @@
                 </a:solidFill>
                 <a:latin typeface="Cambria"/>
               </a:rPr>
-              <a:t xml:space="preserve">LAND  </a:t>
+              <a:t>LAND  </a:t>
             </a:r>
             <a:r>
               <a:rPr sz="1150" b="0" i="0">
@@ -22615,7 +22577,7 @@
           </a:fontRef>
         </p:style>
         <p:txBody>
-          <a:bodyPr rtlCol="0" anchor="ctr" wrap="none" lIns="0" rIns="0" tIns="0" bIns="0"/>
+          <a:bodyPr wrap="none" lIns="0" tIns="0" rIns="0" bIns="0" rtlCol="0" anchor="ctr"/>
           <a:lstStyle/>
           <a:p>
             <a:pPr algn="ctr"/>
@@ -22648,7 +22610,7 @@
           <a:noFill/>
         </p:spPr>
         <p:txBody>
-          <a:bodyPr wrap="square" anchor="ctr" lIns="0" rIns="0" tIns="0" bIns="0">
+          <a:bodyPr wrap="square" lIns="0" tIns="0" rIns="0" bIns="0" anchor="ctr">
             <a:spAutoFit/>
           </a:bodyPr>
           <a:lstStyle/>
@@ -22665,7 +22627,7 @@
                 </a:solidFill>
                 <a:latin typeface="Cambria"/>
               </a:rPr>
-              <a:t xml:space="preserve">PROVE  </a:t>
+              <a:t>PROVE  </a:t>
             </a:r>
             <a:r>
               <a:rPr sz="1150" b="0" i="0">
@@ -22716,7 +22678,7 @@
           </a:fontRef>
         </p:style>
         <p:txBody>
-          <a:bodyPr rtlCol="0" anchor="ctr" wrap="none" lIns="0" rIns="0" tIns="0" bIns="0"/>
+          <a:bodyPr wrap="none" lIns="0" tIns="0" rIns="0" bIns="0" rtlCol="0" anchor="ctr"/>
           <a:lstStyle/>
           <a:p>
             <a:pPr algn="ctr"/>
@@ -22749,7 +22711,7 @@
           <a:noFill/>
         </p:spPr>
         <p:txBody>
-          <a:bodyPr wrap="square" anchor="ctr" lIns="0" rIns="0" tIns="0" bIns="0">
+          <a:bodyPr wrap="square" lIns="0" tIns="0" rIns="0" bIns="0" anchor="ctr">
             <a:spAutoFit/>
           </a:bodyPr>
           <a:lstStyle/>
@@ -22766,7 +22728,7 @@
                 </a:solidFill>
                 <a:latin typeface="Cambria"/>
               </a:rPr>
-              <a:t xml:space="preserve">EXPAND  </a:t>
+              <a:t>EXPAND  </a:t>
             </a:r>
             <a:r>
               <a:rPr sz="1150" b="0" i="0">
@@ -22817,7 +22779,7 @@
           </a:fontRef>
         </p:style>
         <p:txBody>
-          <a:bodyPr rtlCol="0" anchor="ctr" wrap="none" lIns="0" rIns="0" tIns="0" bIns="0"/>
+          <a:bodyPr wrap="none" lIns="0" tIns="0" rIns="0" bIns="0" rtlCol="0" anchor="ctr"/>
           <a:lstStyle/>
           <a:p>
             <a:pPr algn="ctr"/>
@@ -22850,7 +22812,7 @@
           <a:noFill/>
         </p:spPr>
         <p:txBody>
-          <a:bodyPr wrap="square" anchor="ctr" lIns="0" rIns="0" tIns="0" bIns="0">
+          <a:bodyPr wrap="square" lIns="0" tIns="0" rIns="0" bIns="0" anchor="ctr">
             <a:spAutoFit/>
           </a:bodyPr>
           <a:lstStyle/>
@@ -22867,7 +22829,7 @@
                 </a:solidFill>
                 <a:latin typeface="Cambria"/>
               </a:rPr>
-              <a:t xml:space="preserve">ORCHESTRATE  </a:t>
+              <a:t>ORCHESTRATE  </a:t>
             </a:r>
             <a:r>
               <a:rPr sz="1150" b="0" i="0">
@@ -22898,7 +22860,7 @@
           <a:noFill/>
         </p:spPr>
         <p:txBody>
-          <a:bodyPr wrap="square" anchor="t" lIns="0" rIns="0" tIns="0" bIns="0">
+          <a:bodyPr wrap="square" lIns="0" tIns="0" rIns="0" bIns="0" anchor="t">
             <a:spAutoFit/>
           </a:bodyPr>
           <a:lstStyle/>
@@ -22943,7 +22905,7 @@
           <a:noFill/>
         </p:spPr>
         <p:txBody>
-          <a:bodyPr wrap="square" anchor="t" lIns="0" rIns="0" tIns="0" bIns="0">
+          <a:bodyPr wrap="square" lIns="0" tIns="0" rIns="0" bIns="0" anchor="t">
             <a:spAutoFit/>
           </a:bodyPr>
           <a:lstStyle/>
@@ -22977,7 +22939,7 @@
 </file>
 
 <file path=ppt/slides/slide25.xml><?xml version="1.0" encoding="utf-8"?>
-<p:sld xmlns:a="http://schemas.openxmlformats.org/drawingml/2006/main" xmlns:p="http://schemas.openxmlformats.org/presentationml/2006/main" xmlns:r="http://schemas.openxmlformats.org/officeDocument/2006/relationships">
+<p:sld xmlns:a="http://schemas.openxmlformats.org/drawingml/2006/main" xmlns:r="http://schemas.openxmlformats.org/officeDocument/2006/relationships" xmlns:p="http://schemas.openxmlformats.org/presentationml/2006/main">
   <p:cSld>
     <p:spTree>
       <p:nvGrpSpPr>
@@ -22985,7 +22947,14 @@
         <p:cNvGrpSpPr/>
         <p:nvPr/>
       </p:nvGrpSpPr>
-      <p:grpSpPr/>
+      <p:grpSpPr>
+        <a:xfrm>
+          <a:off x="0" y="0"/>
+          <a:ext cx="0" cy="0"/>
+          <a:chOff x="0" y="0"/>
+          <a:chExt cx="0" cy="0"/>
+        </a:xfrm>
+      </p:grpSpPr>
       <p:sp>
         <p:nvSpPr>
           <p:cNvPr id="2" name="Rectangle 1"/>
@@ -23027,6 +22996,7 @@
           <a:lstStyle/>
           <a:p>
             <a:pPr algn="ctr"/>
+            <a:endParaRPr/>
           </a:p>
         </p:txBody>
       </p:sp>
@@ -23071,6 +23041,7 @@
           <a:lstStyle/>
           <a:p>
             <a:pPr algn="ctr"/>
+            <a:endParaRPr/>
           </a:p>
         </p:txBody>
       </p:sp>
@@ -23169,7 +23140,7 @@
 </file>
 
 <file path=ppt/slides/slide3.xml><?xml version="1.0" encoding="utf-8"?>
-<p:sld xmlns:a="http://schemas.openxmlformats.org/drawingml/2006/main" xmlns:p="http://schemas.openxmlformats.org/presentationml/2006/main" xmlns:r="http://schemas.openxmlformats.org/officeDocument/2006/relationships">
+<p:sld xmlns:a="http://schemas.openxmlformats.org/drawingml/2006/main" xmlns:r="http://schemas.openxmlformats.org/officeDocument/2006/relationships" xmlns:p="http://schemas.openxmlformats.org/presentationml/2006/main">
   <p:cSld>
     <p:spTree>
       <p:nvGrpSpPr>
@@ -23177,7 +23148,14 @@
         <p:cNvGrpSpPr/>
         <p:nvPr/>
       </p:nvGrpSpPr>
-      <p:grpSpPr/>
+      <p:grpSpPr>
+        <a:xfrm>
+          <a:off x="0" y="0"/>
+          <a:ext cx="0" cy="0"/>
+          <a:chOff x="0" y="0"/>
+          <a:chExt cx="0" cy="0"/>
+        </a:xfrm>
+      </p:grpSpPr>
       <p:sp>
         <p:nvSpPr>
           <p:cNvPr id="2" name="Rectangle 1"/>
@@ -23219,6 +23197,7 @@
           <a:lstStyle/>
           <a:p>
             <a:pPr algn="ctr"/>
+            <a:endParaRPr/>
           </a:p>
         </p:txBody>
       </p:sp>
@@ -23239,7 +23218,7 @@
           <a:noFill/>
         </p:spPr>
         <p:txBody>
-          <a:bodyPr wrap="square" anchor="t" lIns="0" rIns="0" tIns="0" bIns="0">
+          <a:bodyPr wrap="square" lIns="0" tIns="0" rIns="0" bIns="0" anchor="t">
             <a:spAutoFit/>
           </a:bodyPr>
           <a:lstStyle/>
@@ -23281,7 +23260,7 @@
           <a:noFill/>
         </p:spPr>
         <p:txBody>
-          <a:bodyPr wrap="square" anchor="t" lIns="0" rIns="0" tIns="0" bIns="0">
+          <a:bodyPr wrap="square" lIns="0" tIns="0" rIns="0" bIns="0" anchor="t">
             <a:spAutoFit/>
           </a:bodyPr>
           <a:lstStyle/>
@@ -23350,6 +23329,7 @@
           <a:lstStyle/>
           <a:p>
             <a:pPr algn="ctr"/>
+            <a:endParaRPr/>
           </a:p>
         </p:txBody>
       </p:sp>
@@ -23370,7 +23350,7 @@
           <a:noFill/>
         </p:spPr>
         <p:txBody>
-          <a:bodyPr wrap="square" anchor="t" lIns="0" rIns="0" tIns="0" bIns="0">
+          <a:bodyPr wrap="square" lIns="0" tIns="0" rIns="0" bIns="0" anchor="t">
             <a:spAutoFit/>
           </a:bodyPr>
           <a:lstStyle/>
@@ -23412,7 +23392,7 @@
                 </a:solidFill>
                 <a:latin typeface="Calibri"/>
               </a:rPr>
-              <a:t xml:space="preserve">✕  </a:t>
+              <a:t>✕  </a:t>
             </a:r>
             <a:r>
               <a:rPr sz="1450" b="0" i="0">
@@ -23443,7 +23423,7 @@
                 </a:solidFill>
                 <a:latin typeface="Calibri"/>
               </a:rPr>
-              <a:t xml:space="preserve">✕  </a:t>
+              <a:t>✕  </a:t>
             </a:r>
             <a:r>
               <a:rPr sz="1450" b="0" i="0">
@@ -23474,7 +23454,7 @@
                 </a:solidFill>
                 <a:latin typeface="Calibri"/>
               </a:rPr>
-              <a:t xml:space="preserve">✕  </a:t>
+              <a:t>✕  </a:t>
             </a:r>
             <a:r>
               <a:rPr sz="1450" b="0" i="0">
@@ -23505,7 +23485,7 @@
                 </a:solidFill>
                 <a:latin typeface="Calibri"/>
               </a:rPr>
-              <a:t xml:space="preserve">✕  </a:t>
+              <a:t>✕  </a:t>
             </a:r>
             <a:r>
               <a:rPr sz="1450" b="0" i="0">
@@ -23562,6 +23542,7 @@
           <a:lstStyle/>
           <a:p>
             <a:pPr algn="ctr"/>
+            <a:endParaRPr/>
           </a:p>
         </p:txBody>
       </p:sp>
@@ -23582,7 +23563,7 @@
           <a:noFill/>
         </p:spPr>
         <p:txBody>
-          <a:bodyPr wrap="square" anchor="t" lIns="0" rIns="0" tIns="0" bIns="0">
+          <a:bodyPr wrap="square" lIns="0" tIns="0" rIns="0" bIns="0" anchor="t">
             <a:spAutoFit/>
           </a:bodyPr>
           <a:lstStyle/>
@@ -23624,7 +23605,7 @@
                 </a:solidFill>
                 <a:latin typeface="Calibri"/>
               </a:rPr>
-              <a:t xml:space="preserve">✓  </a:t>
+              <a:t>✓  </a:t>
             </a:r>
             <a:r>
               <a:rPr sz="1450" b="0" i="0">
@@ -23655,7 +23636,7 @@
                 </a:solidFill>
                 <a:latin typeface="Calibri"/>
               </a:rPr>
-              <a:t xml:space="preserve">✓  </a:t>
+              <a:t>✓  </a:t>
             </a:r>
             <a:r>
               <a:rPr sz="1450" b="0" i="0">
@@ -23686,7 +23667,7 @@
                 </a:solidFill>
                 <a:latin typeface="Calibri"/>
               </a:rPr>
-              <a:t xml:space="preserve">✓  </a:t>
+              <a:t>✓  </a:t>
             </a:r>
             <a:r>
               <a:rPr sz="1450" b="0" i="0">
@@ -23717,7 +23698,7 @@
                 </a:solidFill>
                 <a:latin typeface="Calibri"/>
               </a:rPr>
-              <a:t xml:space="preserve">✓  </a:t>
+              <a:t>✓  </a:t>
             </a:r>
             <a:r>
               <a:rPr sz="1450" b="0" i="0">
@@ -23748,7 +23729,7 @@
           <a:noFill/>
         </p:spPr>
         <p:txBody>
-          <a:bodyPr wrap="square" anchor="t" lIns="0" rIns="0" tIns="0" bIns="0">
+          <a:bodyPr wrap="square" lIns="0" tIns="0" rIns="0" bIns="0" anchor="t">
             <a:spAutoFit/>
           </a:bodyPr>
           <a:lstStyle/>
@@ -23793,7 +23774,7 @@
           <a:noFill/>
         </p:spPr>
         <p:txBody>
-          <a:bodyPr wrap="square" anchor="t" lIns="0" rIns="0" tIns="0" bIns="0">
+          <a:bodyPr wrap="square" lIns="0" tIns="0" rIns="0" bIns="0" anchor="t">
             <a:spAutoFit/>
           </a:bodyPr>
           <a:lstStyle/>
@@ -23827,7 +23808,7 @@
 </file>
 
 <file path=ppt/slides/slide4.xml><?xml version="1.0" encoding="utf-8"?>
-<p:sld xmlns:a="http://schemas.openxmlformats.org/drawingml/2006/main" xmlns:p="http://schemas.openxmlformats.org/presentationml/2006/main" xmlns:r="http://schemas.openxmlformats.org/officeDocument/2006/relationships">
+<p:sld xmlns:a="http://schemas.openxmlformats.org/drawingml/2006/main" xmlns:r="http://schemas.openxmlformats.org/officeDocument/2006/relationships" xmlns:p="http://schemas.openxmlformats.org/presentationml/2006/main">
   <p:cSld>
     <p:spTree>
       <p:nvGrpSpPr>
@@ -23835,7 +23816,14 @@
         <p:cNvGrpSpPr/>
         <p:nvPr/>
       </p:nvGrpSpPr>
-      <p:grpSpPr/>
+      <p:grpSpPr>
+        <a:xfrm>
+          <a:off x="0" y="0"/>
+          <a:ext cx="0" cy="0"/>
+          <a:chOff x="0" y="0"/>
+          <a:chExt cx="0" cy="0"/>
+        </a:xfrm>
+      </p:grpSpPr>
       <p:sp>
         <p:nvSpPr>
           <p:cNvPr id="2" name="Rectangle 1"/>
@@ -23877,6 +23865,7 @@
           <a:lstStyle/>
           <a:p>
             <a:pPr algn="ctr"/>
+            <a:endParaRPr/>
           </a:p>
         </p:txBody>
       </p:sp>
@@ -23897,7 +23886,7 @@
           <a:noFill/>
         </p:spPr>
         <p:txBody>
-          <a:bodyPr wrap="square" anchor="t" lIns="0" rIns="0" tIns="0" bIns="0">
+          <a:bodyPr wrap="square" lIns="0" tIns="0" rIns="0" bIns="0" anchor="t">
             <a:spAutoFit/>
           </a:bodyPr>
           <a:lstStyle/>
@@ -23939,7 +23928,7 @@
           <a:noFill/>
         </p:spPr>
         <p:txBody>
-          <a:bodyPr wrap="square" anchor="t" lIns="0" rIns="0" tIns="0" bIns="0">
+          <a:bodyPr wrap="square" lIns="0" tIns="0" rIns="0" bIns="0" anchor="t">
             <a:spAutoFit/>
           </a:bodyPr>
           <a:lstStyle/>
@@ -24008,6 +23997,7 @@
           <a:lstStyle/>
           <a:p>
             <a:pPr algn="ctr"/>
+            <a:endParaRPr/>
           </a:p>
         </p:txBody>
       </p:sp>
@@ -24048,7 +24038,7 @@
           </a:fontRef>
         </p:style>
         <p:txBody>
-          <a:bodyPr rtlCol="0" anchor="ctr" wrap="none" lIns="0" rIns="0" tIns="0" bIns="0"/>
+          <a:bodyPr wrap="none" lIns="0" tIns="0" rIns="0" bIns="0" rtlCol="0" anchor="ctr"/>
           <a:lstStyle/>
           <a:p>
             <a:pPr algn="ctr"/>
@@ -24081,7 +24071,7 @@
           <a:noFill/>
         </p:spPr>
         <p:txBody>
-          <a:bodyPr wrap="square" anchor="ctr" lIns="0" rIns="0" tIns="0" bIns="0">
+          <a:bodyPr wrap="square" lIns="0" tIns="0" rIns="0" bIns="0" anchor="ctr">
             <a:spAutoFit/>
           </a:bodyPr>
           <a:lstStyle/>
@@ -24126,7 +24116,7 @@
           <a:noFill/>
         </p:spPr>
         <p:txBody>
-          <a:bodyPr wrap="square" anchor="ctr" lIns="0" rIns="0" tIns="0" bIns="0">
+          <a:bodyPr wrap="square" lIns="0" tIns="0" rIns="0" bIns="0" anchor="ctr">
             <a:spAutoFit/>
           </a:bodyPr>
           <a:lstStyle/>
@@ -24195,6 +24185,7 @@
           <a:lstStyle/>
           <a:p>
             <a:pPr algn="ctr"/>
+            <a:endParaRPr/>
           </a:p>
         </p:txBody>
       </p:sp>
@@ -24235,7 +24226,7 @@
           </a:fontRef>
         </p:style>
         <p:txBody>
-          <a:bodyPr rtlCol="0" anchor="ctr" wrap="none" lIns="0" rIns="0" tIns="0" bIns="0"/>
+          <a:bodyPr wrap="none" lIns="0" tIns="0" rIns="0" bIns="0" rtlCol="0" anchor="ctr"/>
           <a:lstStyle/>
           <a:p>
             <a:pPr algn="ctr"/>
@@ -24268,7 +24259,7 @@
           <a:noFill/>
         </p:spPr>
         <p:txBody>
-          <a:bodyPr wrap="square" anchor="ctr" lIns="0" rIns="0" tIns="0" bIns="0">
+          <a:bodyPr wrap="square" lIns="0" tIns="0" rIns="0" bIns="0" anchor="ctr">
             <a:spAutoFit/>
           </a:bodyPr>
           <a:lstStyle/>
@@ -24313,7 +24304,7 @@
           <a:noFill/>
         </p:spPr>
         <p:txBody>
-          <a:bodyPr wrap="square" anchor="ctr" lIns="0" rIns="0" tIns="0" bIns="0">
+          <a:bodyPr wrap="square" lIns="0" tIns="0" rIns="0" bIns="0" anchor="ctr">
             <a:spAutoFit/>
           </a:bodyPr>
           <a:lstStyle/>
@@ -24382,6 +24373,7 @@
           <a:lstStyle/>
           <a:p>
             <a:pPr algn="ctr"/>
+            <a:endParaRPr/>
           </a:p>
         </p:txBody>
       </p:sp>
@@ -24422,7 +24414,7 @@
           </a:fontRef>
         </p:style>
         <p:txBody>
-          <a:bodyPr rtlCol="0" anchor="ctr" wrap="none" lIns="0" rIns="0" tIns="0" bIns="0"/>
+          <a:bodyPr wrap="none" lIns="0" tIns="0" rIns="0" bIns="0" rtlCol="0" anchor="ctr"/>
           <a:lstStyle/>
           <a:p>
             <a:pPr algn="ctr"/>
@@ -24455,7 +24447,7 @@
           <a:noFill/>
         </p:spPr>
         <p:txBody>
-          <a:bodyPr wrap="square" anchor="ctr" lIns="0" rIns="0" tIns="0" bIns="0">
+          <a:bodyPr wrap="square" lIns="0" tIns="0" rIns="0" bIns="0" anchor="ctr">
             <a:spAutoFit/>
           </a:bodyPr>
           <a:lstStyle/>
@@ -24500,7 +24492,7 @@
           <a:noFill/>
         </p:spPr>
         <p:txBody>
-          <a:bodyPr wrap="square" anchor="ctr" lIns="0" rIns="0" tIns="0" bIns="0">
+          <a:bodyPr wrap="square" lIns="0" tIns="0" rIns="0" bIns="0" anchor="ctr">
             <a:spAutoFit/>
           </a:bodyPr>
           <a:lstStyle/>
@@ -24569,6 +24561,7 @@
           <a:lstStyle/>
           <a:p>
             <a:pPr algn="ctr"/>
+            <a:endParaRPr/>
           </a:p>
         </p:txBody>
       </p:sp>
@@ -24609,7 +24602,7 @@
           </a:fontRef>
         </p:style>
         <p:txBody>
-          <a:bodyPr rtlCol="0" anchor="ctr" wrap="none" lIns="0" rIns="0" tIns="0" bIns="0"/>
+          <a:bodyPr wrap="none" lIns="0" tIns="0" rIns="0" bIns="0" rtlCol="0" anchor="ctr"/>
           <a:lstStyle/>
           <a:p>
             <a:pPr algn="ctr"/>
@@ -24642,7 +24635,7 @@
           <a:noFill/>
         </p:spPr>
         <p:txBody>
-          <a:bodyPr wrap="square" anchor="ctr" lIns="0" rIns="0" tIns="0" bIns="0">
+          <a:bodyPr wrap="square" lIns="0" tIns="0" rIns="0" bIns="0" anchor="ctr">
             <a:spAutoFit/>
           </a:bodyPr>
           <a:lstStyle/>
@@ -24687,7 +24680,7 @@
           <a:noFill/>
         </p:spPr>
         <p:txBody>
-          <a:bodyPr wrap="square" anchor="ctr" lIns="0" rIns="0" tIns="0" bIns="0">
+          <a:bodyPr wrap="square" lIns="0" tIns="0" rIns="0" bIns="0" anchor="ctr">
             <a:spAutoFit/>
           </a:bodyPr>
           <a:lstStyle/>
@@ -24756,6 +24749,7 @@
           <a:lstStyle/>
           <a:p>
             <a:pPr algn="ctr"/>
+            <a:endParaRPr/>
           </a:p>
         </p:txBody>
       </p:sp>
@@ -24796,7 +24790,7 @@
           </a:fontRef>
         </p:style>
         <p:txBody>
-          <a:bodyPr rtlCol="0" anchor="ctr" wrap="none" lIns="0" rIns="0" tIns="0" bIns="0"/>
+          <a:bodyPr wrap="none" lIns="0" tIns="0" rIns="0" bIns="0" rtlCol="0" anchor="ctr"/>
           <a:lstStyle/>
           <a:p>
             <a:pPr algn="ctr"/>
@@ -24829,7 +24823,7 @@
           <a:noFill/>
         </p:spPr>
         <p:txBody>
-          <a:bodyPr wrap="square" anchor="ctr" lIns="0" rIns="0" tIns="0" bIns="0">
+          <a:bodyPr wrap="square" lIns="0" tIns="0" rIns="0" bIns="0" anchor="ctr">
             <a:spAutoFit/>
           </a:bodyPr>
           <a:lstStyle/>
@@ -24874,7 +24868,7 @@
           <a:noFill/>
         </p:spPr>
         <p:txBody>
-          <a:bodyPr wrap="square" anchor="ctr" lIns="0" rIns="0" tIns="0" bIns="0">
+          <a:bodyPr wrap="square" lIns="0" tIns="0" rIns="0" bIns="0" anchor="ctr">
             <a:spAutoFit/>
           </a:bodyPr>
           <a:lstStyle/>
@@ -24919,7 +24913,7 @@
           <a:noFill/>
         </p:spPr>
         <p:txBody>
-          <a:bodyPr wrap="square" anchor="t" lIns="0" rIns="0" tIns="0" bIns="0">
+          <a:bodyPr wrap="square" lIns="0" tIns="0" rIns="0" bIns="0" anchor="t">
             <a:spAutoFit/>
           </a:bodyPr>
           <a:lstStyle/>
@@ -24953,7 +24947,7 @@
 </file>
 
 <file path=ppt/slides/slide5.xml><?xml version="1.0" encoding="utf-8"?>
-<p:sld xmlns:a="http://schemas.openxmlformats.org/drawingml/2006/main" xmlns:p="http://schemas.openxmlformats.org/presentationml/2006/main" xmlns:r="http://schemas.openxmlformats.org/officeDocument/2006/relationships">
+<p:sld xmlns:a="http://schemas.openxmlformats.org/drawingml/2006/main" xmlns:r="http://schemas.openxmlformats.org/officeDocument/2006/relationships" xmlns:p="http://schemas.openxmlformats.org/presentationml/2006/main">
   <p:cSld>
     <p:spTree>
       <p:nvGrpSpPr>
@@ -24961,7 +24955,14 @@
         <p:cNvGrpSpPr/>
         <p:nvPr/>
       </p:nvGrpSpPr>
-      <p:grpSpPr/>
+      <p:grpSpPr>
+        <a:xfrm>
+          <a:off x="0" y="0"/>
+          <a:ext cx="0" cy="0"/>
+          <a:chOff x="0" y="0"/>
+          <a:chExt cx="0" cy="0"/>
+        </a:xfrm>
+      </p:grpSpPr>
       <p:sp>
         <p:nvSpPr>
           <p:cNvPr id="2" name="Rectangle 1"/>
@@ -25003,6 +25004,7 @@
           <a:lstStyle/>
           <a:p>
             <a:pPr algn="ctr"/>
+            <a:endParaRPr/>
           </a:p>
         </p:txBody>
       </p:sp>
@@ -25023,7 +25025,7 @@
           <a:noFill/>
         </p:spPr>
         <p:txBody>
-          <a:bodyPr wrap="square" anchor="t" lIns="0" rIns="0" tIns="0" bIns="0">
+          <a:bodyPr wrap="square" lIns="0" tIns="0" rIns="0" bIns="0" anchor="t">
             <a:spAutoFit/>
           </a:bodyPr>
           <a:lstStyle/>
@@ -25065,7 +25067,7 @@
           <a:noFill/>
         </p:spPr>
         <p:txBody>
-          <a:bodyPr wrap="square" anchor="t" lIns="0" rIns="0" tIns="0" bIns="0">
+          <a:bodyPr wrap="square" lIns="0" tIns="0" rIns="0" bIns="0" anchor="t">
             <a:spAutoFit/>
           </a:bodyPr>
           <a:lstStyle/>
@@ -25134,6 +25136,7 @@
           <a:lstStyle/>
           <a:p>
             <a:pPr algn="ctr"/>
+            <a:endParaRPr/>
           </a:p>
         </p:txBody>
       </p:sp>
@@ -25154,7 +25157,7 @@
           <a:noFill/>
         </p:spPr>
         <p:txBody>
-          <a:bodyPr wrap="square" anchor="t" lIns="0" rIns="0" tIns="0" bIns="0">
+          <a:bodyPr wrap="square" lIns="0" tIns="0" rIns="0" bIns="0" anchor="t">
             <a:spAutoFit/>
           </a:bodyPr>
           <a:lstStyle/>
@@ -25246,6 +25249,7 @@
           <a:lstStyle/>
           <a:p>
             <a:pPr algn="ctr"/>
+            <a:endParaRPr/>
           </a:p>
         </p:txBody>
       </p:sp>
@@ -25290,6 +25294,7 @@
           <a:lstStyle/>
           <a:p>
             <a:pPr algn="ctr"/>
+            <a:endParaRPr/>
           </a:p>
         </p:txBody>
       </p:sp>
@@ -25310,7 +25315,7 @@
           <a:noFill/>
         </p:spPr>
         <p:txBody>
-          <a:bodyPr wrap="square" anchor="t" lIns="0" rIns="0" tIns="0" bIns="0">
+          <a:bodyPr wrap="square" lIns="0" tIns="0" rIns="0" bIns="0" anchor="t">
             <a:spAutoFit/>
           </a:bodyPr>
           <a:lstStyle/>
@@ -25402,6 +25407,7 @@
           <a:lstStyle/>
           <a:p>
             <a:pPr algn="ctr"/>
+            <a:endParaRPr/>
           </a:p>
         </p:txBody>
       </p:sp>
@@ -25446,6 +25452,7 @@
           <a:lstStyle/>
           <a:p>
             <a:pPr algn="ctr"/>
+            <a:endParaRPr/>
           </a:p>
         </p:txBody>
       </p:sp>
@@ -25466,7 +25473,7 @@
           <a:noFill/>
         </p:spPr>
         <p:txBody>
-          <a:bodyPr wrap="square" anchor="t" lIns="0" rIns="0" tIns="0" bIns="0">
+          <a:bodyPr wrap="square" lIns="0" tIns="0" rIns="0" bIns="0" anchor="t">
             <a:spAutoFit/>
           </a:bodyPr>
           <a:lstStyle/>
@@ -25558,6 +25565,7 @@
           <a:lstStyle/>
           <a:p>
             <a:pPr algn="ctr"/>
+            <a:endParaRPr/>
           </a:p>
         </p:txBody>
       </p:sp>
@@ -25602,6 +25610,7 @@
           <a:lstStyle/>
           <a:p>
             <a:pPr algn="ctr"/>
+            <a:endParaRPr/>
           </a:p>
         </p:txBody>
       </p:sp>
@@ -25622,7 +25631,7 @@
           <a:noFill/>
         </p:spPr>
         <p:txBody>
-          <a:bodyPr wrap="square" anchor="t" lIns="0" rIns="0" tIns="0" bIns="0">
+          <a:bodyPr wrap="square" lIns="0" tIns="0" rIns="0" bIns="0" anchor="t">
             <a:spAutoFit/>
           </a:bodyPr>
           <a:lstStyle/>
@@ -25714,6 +25723,7 @@
           <a:lstStyle/>
           <a:p>
             <a:pPr algn="ctr"/>
+            <a:endParaRPr/>
           </a:p>
         </p:txBody>
       </p:sp>
@@ -25758,6 +25768,7 @@
           <a:lstStyle/>
           <a:p>
             <a:pPr algn="ctr"/>
+            <a:endParaRPr/>
           </a:p>
         </p:txBody>
       </p:sp>
@@ -25778,7 +25789,7 @@
           <a:noFill/>
         </p:spPr>
         <p:txBody>
-          <a:bodyPr wrap="square" anchor="t" lIns="0" rIns="0" tIns="0" bIns="0">
+          <a:bodyPr wrap="square" lIns="0" tIns="0" rIns="0" bIns="0" anchor="t">
             <a:spAutoFit/>
           </a:bodyPr>
           <a:lstStyle/>
@@ -25870,6 +25881,7 @@
           <a:lstStyle/>
           <a:p>
             <a:pPr algn="ctr"/>
+            <a:endParaRPr/>
           </a:p>
         </p:txBody>
       </p:sp>
@@ -25914,6 +25926,7 @@
           <a:lstStyle/>
           <a:p>
             <a:pPr algn="ctr"/>
+            <a:endParaRPr/>
           </a:p>
         </p:txBody>
       </p:sp>
@@ -25934,7 +25947,7 @@
           <a:noFill/>
         </p:spPr>
         <p:txBody>
-          <a:bodyPr wrap="square" anchor="t" lIns="0" rIns="0" tIns="0" bIns="0">
+          <a:bodyPr wrap="square" lIns="0" tIns="0" rIns="0" bIns="0" anchor="t">
             <a:spAutoFit/>
           </a:bodyPr>
           <a:lstStyle/>
@@ -26002,7 +26015,7 @@
           <a:noFill/>
         </p:spPr>
         <p:txBody>
-          <a:bodyPr wrap="square" anchor="t" lIns="0" rIns="0" tIns="0" bIns="0">
+          <a:bodyPr wrap="square" lIns="0" tIns="0" rIns="0" bIns="0" anchor="t">
             <a:spAutoFit/>
           </a:bodyPr>
           <a:lstStyle/>
@@ -26019,7 +26032,7 @@
                 </a:solidFill>
                 <a:latin typeface="Calibri"/>
               </a:rPr>
-              <a:t xml:space="preserve">Edge:  </a:t>
+              <a:t>Edge:  </a:t>
             </a:r>
             <a:r>
               <a:rPr sz="1150" b="0" i="0">
@@ -26050,7 +26063,7 @@
           <a:noFill/>
         </p:spPr>
         <p:txBody>
-          <a:bodyPr wrap="square" anchor="t" lIns="0" rIns="0" tIns="0" bIns="0">
+          <a:bodyPr wrap="square" lIns="0" tIns="0" rIns="0" bIns="0" anchor="t">
             <a:spAutoFit/>
           </a:bodyPr>
           <a:lstStyle/>
@@ -26067,7 +26080,7 @@
                 </a:solidFill>
                 <a:latin typeface="Calibri"/>
               </a:rPr>
-              <a:t xml:space="preserve">Identity:  </a:t>
+              <a:t>Identity:  </a:t>
             </a:r>
             <a:r>
               <a:rPr sz="1150" b="0" i="0">
@@ -26098,7 +26111,7 @@
           <a:noFill/>
         </p:spPr>
         <p:txBody>
-          <a:bodyPr wrap="square" anchor="t" lIns="0" rIns="0" tIns="0" bIns="0">
+          <a:bodyPr wrap="square" lIns="0" tIns="0" rIns="0" bIns="0" anchor="t">
             <a:spAutoFit/>
           </a:bodyPr>
           <a:lstStyle/>
@@ -26115,7 +26128,7 @@
                 </a:solidFill>
                 <a:latin typeface="Calibri"/>
               </a:rPr>
-              <a:t xml:space="preserve">Control plane:  </a:t>
+              <a:t>Control plane:  </a:t>
             </a:r>
             <a:r>
               <a:rPr sz="1150" b="0" i="0">
@@ -26146,7 +26159,7 @@
           <a:noFill/>
         </p:spPr>
         <p:txBody>
-          <a:bodyPr wrap="square" anchor="t" lIns="0" rIns="0" tIns="0" bIns="0">
+          <a:bodyPr wrap="square" lIns="0" tIns="0" rIns="0" bIns="0" anchor="t">
             <a:spAutoFit/>
           </a:bodyPr>
           <a:lstStyle/>
@@ -26163,7 +26176,7 @@
                 </a:solidFill>
                 <a:latin typeface="Calibri"/>
               </a:rPr>
-              <a:t xml:space="preserve">Model gateway:  </a:t>
+              <a:t>Model gateway:  </a:t>
             </a:r>
             <a:r>
               <a:rPr sz="1150" b="0" i="0">
@@ -26194,7 +26207,7 @@
           <a:noFill/>
         </p:spPr>
         <p:txBody>
-          <a:bodyPr wrap="square" anchor="t" lIns="0" rIns="0" tIns="0" bIns="0">
+          <a:bodyPr wrap="square" lIns="0" tIns="0" rIns="0" bIns="0" anchor="t">
             <a:spAutoFit/>
           </a:bodyPr>
           <a:lstStyle/>
@@ -26211,7 +26224,7 @@
                 </a:solidFill>
                 <a:latin typeface="Calibri"/>
               </a:rPr>
-              <a:t xml:space="preserve">Data / evidence:  </a:t>
+              <a:t>Data / evidence:  </a:t>
             </a:r>
             <a:r>
               <a:rPr sz="1150" b="0" i="0">
@@ -26242,7 +26255,7 @@
           <a:noFill/>
         </p:spPr>
         <p:txBody>
-          <a:bodyPr wrap="square" anchor="t" lIns="0" rIns="0" tIns="0" bIns="0">
+          <a:bodyPr wrap="square" lIns="0" tIns="0" rIns="0" bIns="0" anchor="t">
             <a:spAutoFit/>
           </a:bodyPr>
           <a:lstStyle/>
@@ -26259,7 +26272,7 @@
                 </a:solidFill>
                 <a:latin typeface="Calibri"/>
               </a:rPr>
-              <a:t xml:space="preserve">FinOps / obs:  </a:t>
+              <a:t>FinOps / obs:  </a:t>
             </a:r>
             <a:r>
               <a:rPr sz="1150" b="0" i="0">
@@ -26314,6 +26327,7 @@
           <a:lstStyle/>
           <a:p>
             <a:pPr algn="ctr"/>
+            <a:endParaRPr/>
           </a:p>
         </p:txBody>
       </p:sp>
@@ -26334,7 +26348,7 @@
           <a:noFill/>
         </p:spPr>
         <p:txBody>
-          <a:bodyPr wrap="square" anchor="ctr" lIns="0" rIns="0" tIns="0" bIns="0">
+          <a:bodyPr wrap="square" lIns="0" tIns="0" rIns="0" bIns="0" anchor="ctr">
             <a:spAutoFit/>
           </a:bodyPr>
           <a:lstStyle/>
@@ -26346,7 +26360,7 @@
                 </a:solidFill>
                 <a:latin typeface="Calibri"/>
               </a:rPr>
-              <a:t xml:space="preserve">Multi-account landing zone (Control Tower):  </a:t>
+              <a:t>Multi-account landing zone (Control Tower):  </a:t>
             </a:r>
             <a:r>
               <a:rPr sz="1150" b="0" i="0">
@@ -26377,7 +26391,7 @@
           <a:noFill/>
         </p:spPr>
         <p:txBody>
-          <a:bodyPr wrap="square" anchor="t" lIns="0" rIns="0" tIns="0" bIns="0">
+          <a:bodyPr wrap="square" lIns="0" tIns="0" rIns="0" bIns="0" anchor="t">
             <a:spAutoFit/>
           </a:bodyPr>
           <a:lstStyle/>
@@ -26411,7 +26425,7 @@
 </file>
 
 <file path=ppt/slides/slide6.xml><?xml version="1.0" encoding="utf-8"?>
-<p:sld xmlns:a="http://schemas.openxmlformats.org/drawingml/2006/main" xmlns:p="http://schemas.openxmlformats.org/presentationml/2006/main" xmlns:r="http://schemas.openxmlformats.org/officeDocument/2006/relationships">
+<p:sld xmlns:a="http://schemas.openxmlformats.org/drawingml/2006/main" xmlns:r="http://schemas.openxmlformats.org/officeDocument/2006/relationships" xmlns:p="http://schemas.openxmlformats.org/presentationml/2006/main">
   <p:cSld>
     <p:spTree>
       <p:nvGrpSpPr>
@@ -26419,7 +26433,14 @@
         <p:cNvGrpSpPr/>
         <p:nvPr/>
       </p:nvGrpSpPr>
-      <p:grpSpPr/>
+      <p:grpSpPr>
+        <a:xfrm>
+          <a:off x="0" y="0"/>
+          <a:ext cx="0" cy="0"/>
+          <a:chOff x="0" y="0"/>
+          <a:chExt cx="0" cy="0"/>
+        </a:xfrm>
+      </p:grpSpPr>
       <p:sp>
         <p:nvSpPr>
           <p:cNvPr id="2" name="Rectangle 1"/>
@@ -26461,6 +26482,7 @@
           <a:lstStyle/>
           <a:p>
             <a:pPr algn="ctr"/>
+            <a:endParaRPr/>
           </a:p>
         </p:txBody>
       </p:sp>
@@ -26481,7 +26503,7 @@
           <a:noFill/>
         </p:spPr>
         <p:txBody>
-          <a:bodyPr wrap="square" anchor="t" lIns="0" rIns="0" tIns="0" bIns="0">
+          <a:bodyPr wrap="square" lIns="0" tIns="0" rIns="0" bIns="0" anchor="t">
             <a:spAutoFit/>
           </a:bodyPr>
           <a:lstStyle/>
@@ -26523,7 +26545,7 @@
           <a:noFill/>
         </p:spPr>
         <p:txBody>
-          <a:bodyPr wrap="square" anchor="t" lIns="0" rIns="0" tIns="0" bIns="0">
+          <a:bodyPr wrap="square" lIns="0" tIns="0" rIns="0" bIns="0" anchor="t">
             <a:spAutoFit/>
           </a:bodyPr>
           <a:lstStyle/>
@@ -26592,6 +26614,7 @@
           <a:lstStyle/>
           <a:p>
             <a:pPr algn="ctr"/>
+            <a:endParaRPr/>
           </a:p>
         </p:txBody>
       </p:sp>
@@ -26612,7 +26635,7 @@
           <a:noFill/>
         </p:spPr>
         <p:txBody>
-          <a:bodyPr wrap="square" anchor="t" lIns="0" rIns="0" tIns="0" bIns="0">
+          <a:bodyPr wrap="square" lIns="0" tIns="0" rIns="0" bIns="0" anchor="t">
             <a:spAutoFit/>
           </a:bodyPr>
           <a:lstStyle/>
@@ -26895,6 +26918,7 @@
           <a:lstStyle/>
           <a:p>
             <a:pPr algn="ctr"/>
+            <a:endParaRPr/>
           </a:p>
         </p:txBody>
       </p:sp>
@@ -26935,7 +26959,7 @@
           </a:fontRef>
         </p:style>
         <p:txBody>
-          <a:bodyPr rtlCol="0" anchor="ctr" wrap="none" lIns="0" rIns="0" tIns="0" bIns="0"/>
+          <a:bodyPr wrap="none" lIns="0" tIns="0" rIns="0" bIns="0" rtlCol="0" anchor="ctr"/>
           <a:lstStyle/>
           <a:p>
             <a:pPr algn="ctr"/>
@@ -26968,7 +26992,7 @@
           <a:noFill/>
         </p:spPr>
         <p:txBody>
-          <a:bodyPr wrap="square" anchor="t" lIns="0" rIns="0" tIns="0" bIns="0">
+          <a:bodyPr wrap="square" lIns="0" tIns="0" rIns="0" bIns="0" anchor="t">
             <a:spAutoFit/>
           </a:bodyPr>
           <a:lstStyle/>
@@ -27059,6 +27083,7 @@
           <a:lstStyle/>
           <a:p>
             <a:pPr algn="ctr"/>
+            <a:endParaRPr/>
           </a:p>
         </p:txBody>
       </p:sp>
@@ -27099,7 +27124,7 @@
           </a:fontRef>
         </p:style>
         <p:txBody>
-          <a:bodyPr rtlCol="0" anchor="ctr" wrap="none" lIns="0" rIns="0" tIns="0" bIns="0"/>
+          <a:bodyPr wrap="none" lIns="0" tIns="0" rIns="0" bIns="0" rtlCol="0" anchor="ctr"/>
           <a:lstStyle/>
           <a:p>
             <a:pPr algn="ctr"/>
@@ -27132,7 +27157,7 @@
           <a:noFill/>
         </p:spPr>
         <p:txBody>
-          <a:bodyPr wrap="square" anchor="t" lIns="0" rIns="0" tIns="0" bIns="0">
+          <a:bodyPr wrap="square" lIns="0" tIns="0" rIns="0" bIns="0" anchor="t">
             <a:spAutoFit/>
           </a:bodyPr>
           <a:lstStyle/>
@@ -27223,6 +27248,7 @@
           <a:lstStyle/>
           <a:p>
             <a:pPr algn="ctr"/>
+            <a:endParaRPr/>
           </a:p>
         </p:txBody>
       </p:sp>
@@ -27263,7 +27289,7 @@
           </a:fontRef>
         </p:style>
         <p:txBody>
-          <a:bodyPr rtlCol="0" anchor="ctr" wrap="none" lIns="0" rIns="0" tIns="0" bIns="0"/>
+          <a:bodyPr wrap="none" lIns="0" tIns="0" rIns="0" bIns="0" rtlCol="0" anchor="ctr"/>
           <a:lstStyle/>
           <a:p>
             <a:pPr algn="ctr"/>
@@ -27296,7 +27322,7 @@
           <a:noFill/>
         </p:spPr>
         <p:txBody>
-          <a:bodyPr wrap="square" anchor="t" lIns="0" rIns="0" tIns="0" bIns="0">
+          <a:bodyPr wrap="square" lIns="0" tIns="0" rIns="0" bIns="0" anchor="t">
             <a:spAutoFit/>
           </a:bodyPr>
           <a:lstStyle/>
@@ -27363,7 +27389,7 @@
           <a:noFill/>
         </p:spPr>
         <p:txBody>
-          <a:bodyPr wrap="square" anchor="t" lIns="0" rIns="0" tIns="0" bIns="0">
+          <a:bodyPr wrap="square" lIns="0" tIns="0" rIns="0" bIns="0" anchor="t">
             <a:spAutoFit/>
           </a:bodyPr>
           <a:lstStyle/>
@@ -27397,7 +27423,7 @@
 </file>
 
 <file path=ppt/slides/slide7.xml><?xml version="1.0" encoding="utf-8"?>
-<p:sld xmlns:a="http://schemas.openxmlformats.org/drawingml/2006/main" xmlns:p="http://schemas.openxmlformats.org/presentationml/2006/main" xmlns:r="http://schemas.openxmlformats.org/officeDocument/2006/relationships">
+<p:sld xmlns:a="http://schemas.openxmlformats.org/drawingml/2006/main" xmlns:r="http://schemas.openxmlformats.org/officeDocument/2006/relationships" xmlns:p="http://schemas.openxmlformats.org/presentationml/2006/main">
   <p:cSld>
     <p:spTree>
       <p:nvGrpSpPr>
@@ -27405,7 +27431,14 @@
         <p:cNvGrpSpPr/>
         <p:nvPr/>
       </p:nvGrpSpPr>
-      <p:grpSpPr/>
+      <p:grpSpPr>
+        <a:xfrm>
+          <a:off x="0" y="0"/>
+          <a:ext cx="0" cy="0"/>
+          <a:chOff x="0" y="0"/>
+          <a:chExt cx="0" cy="0"/>
+        </a:xfrm>
+      </p:grpSpPr>
       <p:sp>
         <p:nvSpPr>
           <p:cNvPr id="2" name="Rectangle 1"/>
@@ -27447,6 +27480,7 @@
           <a:lstStyle/>
           <a:p>
             <a:pPr algn="ctr"/>
+            <a:endParaRPr/>
           </a:p>
         </p:txBody>
       </p:sp>
@@ -27467,7 +27501,7 @@
           <a:noFill/>
         </p:spPr>
         <p:txBody>
-          <a:bodyPr wrap="square" anchor="t" lIns="0" rIns="0" tIns="0" bIns="0">
+          <a:bodyPr wrap="square" lIns="0" tIns="0" rIns="0" bIns="0" anchor="t">
             <a:spAutoFit/>
           </a:bodyPr>
           <a:lstStyle/>
@@ -27509,7 +27543,7 @@
           <a:noFill/>
         </p:spPr>
         <p:txBody>
-          <a:bodyPr wrap="square" anchor="t" lIns="0" rIns="0" tIns="0" bIns="0">
+          <a:bodyPr wrap="square" lIns="0" tIns="0" rIns="0" bIns="0" anchor="t">
             <a:spAutoFit/>
           </a:bodyPr>
           <a:lstStyle/>
@@ -27578,6 +27612,7 @@
           <a:lstStyle/>
           <a:p>
             <a:pPr algn="ctr"/>
+            <a:endParaRPr/>
           </a:p>
         </p:txBody>
       </p:sp>
@@ -27618,7 +27653,7 @@
           </a:fontRef>
         </p:style>
         <p:txBody>
-          <a:bodyPr rtlCol="0" anchor="ctr" wrap="none" lIns="0" rIns="0" tIns="0" bIns="0"/>
+          <a:bodyPr wrap="none" lIns="0" tIns="0" rIns="0" bIns="0" rtlCol="0" anchor="ctr"/>
           <a:lstStyle/>
           <a:p>
             <a:pPr algn="ctr"/>
@@ -27651,7 +27686,7 @@
           <a:noFill/>
         </p:spPr>
         <p:txBody>
-          <a:bodyPr wrap="square" anchor="t" lIns="0" rIns="0" tIns="0" bIns="0">
+          <a:bodyPr wrap="square" lIns="0" tIns="0" rIns="0" bIns="0" anchor="t">
             <a:spAutoFit/>
           </a:bodyPr>
           <a:lstStyle/>
@@ -27693,7 +27728,7 @@
           <a:noFill/>
         </p:spPr>
         <p:txBody>
-          <a:bodyPr wrap="square" anchor="t" lIns="0" rIns="0" tIns="0" bIns="0">
+          <a:bodyPr wrap="square" lIns="0" tIns="0" rIns="0" bIns="0" anchor="t">
             <a:spAutoFit/>
           </a:bodyPr>
           <a:lstStyle/>
@@ -27738,7 +27773,7 @@
           <a:noFill/>
         </p:spPr>
         <p:txBody>
-          <a:bodyPr wrap="square" anchor="t" lIns="0" rIns="0" tIns="0" bIns="0">
+          <a:bodyPr wrap="square" lIns="0" tIns="0" rIns="0" bIns="0" anchor="t">
             <a:spAutoFit/>
           </a:bodyPr>
           <a:lstStyle/>
@@ -27804,6 +27839,7 @@
           <a:lstStyle/>
           <a:p>
             <a:pPr algn="ctr"/>
+            <a:endParaRPr/>
           </a:p>
         </p:txBody>
       </p:sp>
@@ -27844,7 +27880,7 @@
           </a:fontRef>
         </p:style>
         <p:txBody>
-          <a:bodyPr rtlCol="0" anchor="ctr" wrap="none" lIns="0" rIns="0" tIns="0" bIns="0"/>
+          <a:bodyPr wrap="none" lIns="0" tIns="0" rIns="0" bIns="0" rtlCol="0" anchor="ctr"/>
           <a:lstStyle/>
           <a:p>
             <a:pPr algn="ctr"/>
@@ -27877,7 +27913,7 @@
           <a:noFill/>
         </p:spPr>
         <p:txBody>
-          <a:bodyPr wrap="square" anchor="t" lIns="0" rIns="0" tIns="0" bIns="0">
+          <a:bodyPr wrap="square" lIns="0" tIns="0" rIns="0" bIns="0" anchor="t">
             <a:spAutoFit/>
           </a:bodyPr>
           <a:lstStyle/>
@@ -27919,7 +27955,7 @@
           <a:noFill/>
         </p:spPr>
         <p:txBody>
-          <a:bodyPr wrap="square" anchor="t" lIns="0" rIns="0" tIns="0" bIns="0">
+          <a:bodyPr wrap="square" lIns="0" tIns="0" rIns="0" bIns="0" anchor="t">
             <a:spAutoFit/>
           </a:bodyPr>
           <a:lstStyle/>
@@ -27964,7 +28000,7 @@
           <a:noFill/>
         </p:spPr>
         <p:txBody>
-          <a:bodyPr wrap="square" anchor="t" lIns="0" rIns="0" tIns="0" bIns="0">
+          <a:bodyPr wrap="square" lIns="0" tIns="0" rIns="0" bIns="0" anchor="t">
             <a:spAutoFit/>
           </a:bodyPr>
           <a:lstStyle/>
@@ -28030,6 +28066,7 @@
           <a:lstStyle/>
           <a:p>
             <a:pPr algn="ctr"/>
+            <a:endParaRPr/>
           </a:p>
         </p:txBody>
       </p:sp>
@@ -28070,7 +28107,7 @@
           </a:fontRef>
         </p:style>
         <p:txBody>
-          <a:bodyPr rtlCol="0" anchor="ctr" wrap="none" lIns="0" rIns="0" tIns="0" bIns="0"/>
+          <a:bodyPr wrap="none" lIns="0" tIns="0" rIns="0" bIns="0" rtlCol="0" anchor="ctr"/>
           <a:lstStyle/>
           <a:p>
             <a:pPr algn="ctr"/>
@@ -28103,7 +28140,7 @@
           <a:noFill/>
         </p:spPr>
         <p:txBody>
-          <a:bodyPr wrap="square" anchor="t" lIns="0" rIns="0" tIns="0" bIns="0">
+          <a:bodyPr wrap="square" lIns="0" tIns="0" rIns="0" bIns="0" anchor="t">
             <a:spAutoFit/>
           </a:bodyPr>
           <a:lstStyle/>
@@ -28145,7 +28182,7 @@
           <a:noFill/>
         </p:spPr>
         <p:txBody>
-          <a:bodyPr wrap="square" anchor="t" lIns="0" rIns="0" tIns="0" bIns="0">
+          <a:bodyPr wrap="square" lIns="0" tIns="0" rIns="0" bIns="0" anchor="t">
             <a:spAutoFit/>
           </a:bodyPr>
           <a:lstStyle/>
@@ -28190,7 +28227,7 @@
           <a:noFill/>
         </p:spPr>
         <p:txBody>
-          <a:bodyPr wrap="square" anchor="t" lIns="0" rIns="0" tIns="0" bIns="0">
+          <a:bodyPr wrap="square" lIns="0" tIns="0" rIns="0" bIns="0" anchor="t">
             <a:spAutoFit/>
           </a:bodyPr>
           <a:lstStyle/>
@@ -28256,6 +28293,7 @@
           <a:lstStyle/>
           <a:p>
             <a:pPr algn="ctr"/>
+            <a:endParaRPr/>
           </a:p>
         </p:txBody>
       </p:sp>
@@ -28296,7 +28334,7 @@
           </a:fontRef>
         </p:style>
         <p:txBody>
-          <a:bodyPr rtlCol="0" anchor="ctr" wrap="none" lIns="0" rIns="0" tIns="0" bIns="0"/>
+          <a:bodyPr wrap="none" lIns="0" tIns="0" rIns="0" bIns="0" rtlCol="0" anchor="ctr"/>
           <a:lstStyle/>
           <a:p>
             <a:pPr algn="ctr"/>
@@ -28329,7 +28367,7 @@
           <a:noFill/>
         </p:spPr>
         <p:txBody>
-          <a:bodyPr wrap="square" anchor="t" lIns="0" rIns="0" tIns="0" bIns="0">
+          <a:bodyPr wrap="square" lIns="0" tIns="0" rIns="0" bIns="0" anchor="t">
             <a:spAutoFit/>
           </a:bodyPr>
           <a:lstStyle/>
@@ -28371,7 +28409,7 @@
           <a:noFill/>
         </p:spPr>
         <p:txBody>
-          <a:bodyPr wrap="square" anchor="t" lIns="0" rIns="0" tIns="0" bIns="0">
+          <a:bodyPr wrap="square" lIns="0" tIns="0" rIns="0" bIns="0" anchor="t">
             <a:spAutoFit/>
           </a:bodyPr>
           <a:lstStyle/>
@@ -28416,7 +28454,7 @@
           <a:noFill/>
         </p:spPr>
         <p:txBody>
-          <a:bodyPr wrap="square" anchor="t" lIns="0" rIns="0" tIns="0" bIns="0">
+          <a:bodyPr wrap="square" lIns="0" tIns="0" rIns="0" bIns="0" anchor="t">
             <a:spAutoFit/>
           </a:bodyPr>
           <a:lstStyle/>
@@ -28482,6 +28520,7 @@
           <a:lstStyle/>
           <a:p>
             <a:pPr algn="ctr"/>
+            <a:endParaRPr/>
           </a:p>
         </p:txBody>
       </p:sp>
@@ -28522,7 +28561,7 @@
           </a:fontRef>
         </p:style>
         <p:txBody>
-          <a:bodyPr rtlCol="0" anchor="ctr" wrap="none" lIns="0" rIns="0" tIns="0" bIns="0"/>
+          <a:bodyPr wrap="none" lIns="0" tIns="0" rIns="0" bIns="0" rtlCol="0" anchor="ctr"/>
           <a:lstStyle/>
           <a:p>
             <a:pPr algn="ctr"/>
@@ -28555,7 +28594,7 @@
           <a:noFill/>
         </p:spPr>
         <p:txBody>
-          <a:bodyPr wrap="square" anchor="t" lIns="0" rIns="0" tIns="0" bIns="0">
+          <a:bodyPr wrap="square" lIns="0" tIns="0" rIns="0" bIns="0" anchor="t">
             <a:spAutoFit/>
           </a:bodyPr>
           <a:lstStyle/>
@@ -28597,7 +28636,7 @@
           <a:noFill/>
         </p:spPr>
         <p:txBody>
-          <a:bodyPr wrap="square" anchor="t" lIns="0" rIns="0" tIns="0" bIns="0">
+          <a:bodyPr wrap="square" lIns="0" tIns="0" rIns="0" bIns="0" anchor="t">
             <a:spAutoFit/>
           </a:bodyPr>
           <a:lstStyle/>
@@ -28642,7 +28681,7 @@
           <a:noFill/>
         </p:spPr>
         <p:txBody>
-          <a:bodyPr wrap="square" anchor="t" lIns="0" rIns="0" tIns="0" bIns="0">
+          <a:bodyPr wrap="square" lIns="0" tIns="0" rIns="0" bIns="0" anchor="t">
             <a:spAutoFit/>
           </a:bodyPr>
           <a:lstStyle/>
@@ -28684,7 +28723,7 @@
           <a:noFill/>
         </p:spPr>
         <p:txBody>
-          <a:bodyPr wrap="square" anchor="t" lIns="0" rIns="0" tIns="0" bIns="0">
+          <a:bodyPr wrap="square" lIns="0" tIns="0" rIns="0" bIns="0" anchor="t">
             <a:spAutoFit/>
           </a:bodyPr>
           <a:lstStyle/>
@@ -28718,7 +28757,7 @@
 </file>
 
 <file path=ppt/slides/slide8.xml><?xml version="1.0" encoding="utf-8"?>
-<p:sld xmlns:a="http://schemas.openxmlformats.org/drawingml/2006/main" xmlns:p="http://schemas.openxmlformats.org/presentationml/2006/main" xmlns:r="http://schemas.openxmlformats.org/officeDocument/2006/relationships">
+<p:sld xmlns:a="http://schemas.openxmlformats.org/drawingml/2006/main" xmlns:r="http://schemas.openxmlformats.org/officeDocument/2006/relationships" xmlns:p="http://schemas.openxmlformats.org/presentationml/2006/main">
   <p:cSld>
     <p:spTree>
       <p:nvGrpSpPr>
@@ -28726,7 +28765,14 @@
         <p:cNvGrpSpPr/>
         <p:nvPr/>
       </p:nvGrpSpPr>
-      <p:grpSpPr/>
+      <p:grpSpPr>
+        <a:xfrm>
+          <a:off x="0" y="0"/>
+          <a:ext cx="0" cy="0"/>
+          <a:chOff x="0" y="0"/>
+          <a:chExt cx="0" cy="0"/>
+        </a:xfrm>
+      </p:grpSpPr>
       <p:sp>
         <p:nvSpPr>
           <p:cNvPr id="2" name="Rectangle 1"/>
@@ -28768,6 +28814,7 @@
           <a:lstStyle/>
           <a:p>
             <a:pPr algn="ctr"/>
+            <a:endParaRPr/>
           </a:p>
         </p:txBody>
       </p:sp>
@@ -28788,7 +28835,7 @@
           <a:noFill/>
         </p:spPr>
         <p:txBody>
-          <a:bodyPr wrap="square" anchor="t" lIns="0" rIns="0" tIns="0" bIns="0">
+          <a:bodyPr wrap="square" lIns="0" tIns="0" rIns="0" bIns="0" anchor="t">
             <a:spAutoFit/>
           </a:bodyPr>
           <a:lstStyle/>
@@ -28830,7 +28877,7 @@
           <a:noFill/>
         </p:spPr>
         <p:txBody>
-          <a:bodyPr wrap="square" anchor="t" lIns="0" rIns="0" tIns="0" bIns="0">
+          <a:bodyPr wrap="square" lIns="0" tIns="0" rIns="0" bIns="0" anchor="t">
             <a:spAutoFit/>
           </a:bodyPr>
           <a:lstStyle/>
@@ -28875,7 +28922,7 @@
           <a:noFill/>
         </p:spPr>
         <p:txBody>
-          <a:bodyPr wrap="square" anchor="t" lIns="0" rIns="0" tIns="0" bIns="0">
+          <a:bodyPr wrap="square" lIns="0" tIns="0" rIns="0" bIns="0" anchor="t">
             <a:spAutoFit/>
           </a:bodyPr>
           <a:lstStyle/>
@@ -28944,6 +28991,7 @@
           <a:lstStyle/>
           <a:p>
             <a:pPr algn="ctr"/>
+            <a:endParaRPr/>
           </a:p>
         </p:txBody>
       </p:sp>
@@ -28964,7 +29012,7 @@
           <a:noFill/>
         </p:spPr>
         <p:txBody>
-          <a:bodyPr wrap="square" anchor="ctr" lIns="0" rIns="0" tIns="0" bIns="0">
+          <a:bodyPr wrap="square" lIns="0" tIns="0" rIns="0" bIns="0" anchor="ctr">
             <a:spAutoFit/>
           </a:bodyPr>
           <a:lstStyle/>
@@ -29031,7 +29079,7 @@
           <a:noFill/>
         </p:spPr>
         <p:txBody>
-          <a:bodyPr wrap="square" anchor="ctr" lIns="0" rIns="0" tIns="0" bIns="0">
+          <a:bodyPr wrap="square" lIns="0" tIns="0" rIns="0" bIns="0" anchor="ctr">
             <a:spAutoFit/>
           </a:bodyPr>
           <a:lstStyle/>
@@ -29100,6 +29148,7 @@
           <a:lstStyle/>
           <a:p>
             <a:pPr algn="ctr"/>
+            <a:endParaRPr/>
           </a:p>
         </p:txBody>
       </p:sp>
@@ -29120,7 +29169,7 @@
           <a:noFill/>
         </p:spPr>
         <p:txBody>
-          <a:bodyPr wrap="square" anchor="ctr" lIns="0" rIns="0" tIns="0" bIns="0">
+          <a:bodyPr wrap="square" lIns="0" tIns="0" rIns="0" bIns="0" anchor="ctr">
             <a:spAutoFit/>
           </a:bodyPr>
           <a:lstStyle/>
@@ -29187,7 +29236,7 @@
           <a:noFill/>
         </p:spPr>
         <p:txBody>
-          <a:bodyPr wrap="square" anchor="ctr" lIns="0" rIns="0" tIns="0" bIns="0">
+          <a:bodyPr wrap="square" lIns="0" tIns="0" rIns="0" bIns="0" anchor="ctr">
             <a:spAutoFit/>
           </a:bodyPr>
           <a:lstStyle/>
@@ -29256,6 +29305,7 @@
           <a:lstStyle/>
           <a:p>
             <a:pPr algn="ctr"/>
+            <a:endParaRPr/>
           </a:p>
         </p:txBody>
       </p:sp>
@@ -29276,7 +29326,7 @@
           <a:noFill/>
         </p:spPr>
         <p:txBody>
-          <a:bodyPr wrap="square" anchor="ctr" lIns="0" rIns="0" tIns="0" bIns="0">
+          <a:bodyPr wrap="square" lIns="0" tIns="0" rIns="0" bIns="0" anchor="ctr">
             <a:spAutoFit/>
           </a:bodyPr>
           <a:lstStyle/>
@@ -29343,7 +29393,7 @@
           <a:noFill/>
         </p:spPr>
         <p:txBody>
-          <a:bodyPr wrap="square" anchor="ctr" lIns="0" rIns="0" tIns="0" bIns="0">
+          <a:bodyPr wrap="square" lIns="0" tIns="0" rIns="0" bIns="0" anchor="ctr">
             <a:spAutoFit/>
           </a:bodyPr>
           <a:lstStyle/>
@@ -29412,6 +29462,7 @@
           <a:lstStyle/>
           <a:p>
             <a:pPr algn="ctr"/>
+            <a:endParaRPr/>
           </a:p>
         </p:txBody>
       </p:sp>
@@ -29432,7 +29483,7 @@
           <a:noFill/>
         </p:spPr>
         <p:txBody>
-          <a:bodyPr wrap="square" anchor="ctr" lIns="0" rIns="0" tIns="0" bIns="0">
+          <a:bodyPr wrap="square" lIns="0" tIns="0" rIns="0" bIns="0" anchor="ctr">
             <a:spAutoFit/>
           </a:bodyPr>
           <a:lstStyle/>
@@ -29499,7 +29550,7 @@
           <a:noFill/>
         </p:spPr>
         <p:txBody>
-          <a:bodyPr wrap="square" anchor="ctr" lIns="0" rIns="0" tIns="0" bIns="0">
+          <a:bodyPr wrap="square" lIns="0" tIns="0" rIns="0" bIns="0" anchor="ctr">
             <a:spAutoFit/>
           </a:bodyPr>
           <a:lstStyle/>
@@ -29544,7 +29595,7 @@
           <a:noFill/>
         </p:spPr>
         <p:txBody>
-          <a:bodyPr wrap="square" anchor="t" lIns="0" rIns="0" tIns="0" bIns="0">
+          <a:bodyPr wrap="square" lIns="0" tIns="0" rIns="0" bIns="0" anchor="t">
             <a:spAutoFit/>
           </a:bodyPr>
           <a:lstStyle/>
@@ -29586,7 +29637,7 @@
           <a:noFill/>
         </p:spPr>
         <p:txBody>
-          <a:bodyPr wrap="square" anchor="t" lIns="0" rIns="0" tIns="0" bIns="0">
+          <a:bodyPr wrap="square" lIns="0" tIns="0" rIns="0" bIns="0" anchor="t">
             <a:spAutoFit/>
           </a:bodyPr>
           <a:lstStyle/>
@@ -29620,7 +29671,7 @@
 </file>
 
 <file path=ppt/slides/slide9.xml><?xml version="1.0" encoding="utf-8"?>
-<p:sld xmlns:a="http://schemas.openxmlformats.org/drawingml/2006/main" xmlns:p="http://schemas.openxmlformats.org/presentationml/2006/main" xmlns:r="http://schemas.openxmlformats.org/officeDocument/2006/relationships">
+<p:sld xmlns:a="http://schemas.openxmlformats.org/drawingml/2006/main" xmlns:r="http://schemas.openxmlformats.org/officeDocument/2006/relationships" xmlns:p="http://schemas.openxmlformats.org/presentationml/2006/main">
   <p:cSld>
     <p:spTree>
       <p:nvGrpSpPr>
@@ -29628,7 +29679,14 @@
         <p:cNvGrpSpPr/>
         <p:nvPr/>
       </p:nvGrpSpPr>
-      <p:grpSpPr/>
+      <p:grpSpPr>
+        <a:xfrm>
+          <a:off x="0" y="0"/>
+          <a:ext cx="0" cy="0"/>
+          <a:chOff x="0" y="0"/>
+          <a:chExt cx="0" cy="0"/>
+        </a:xfrm>
+      </p:grpSpPr>
       <p:sp>
         <p:nvSpPr>
           <p:cNvPr id="2" name="Rectangle 1"/>
@@ -29670,6 +29728,7 @@
           <a:lstStyle/>
           <a:p>
             <a:pPr algn="ctr"/>
+            <a:endParaRPr/>
           </a:p>
         </p:txBody>
       </p:sp>
@@ -29690,7 +29749,7 @@
           <a:noFill/>
         </p:spPr>
         <p:txBody>
-          <a:bodyPr wrap="square" anchor="t" lIns="0" rIns="0" tIns="0" bIns="0">
+          <a:bodyPr wrap="square" lIns="0" tIns="0" rIns="0" bIns="0" anchor="t">
             <a:spAutoFit/>
           </a:bodyPr>
           <a:lstStyle/>
@@ -29732,7 +29791,7 @@
           <a:noFill/>
         </p:spPr>
         <p:txBody>
-          <a:bodyPr wrap="square" anchor="t" lIns="0" rIns="0" tIns="0" bIns="0">
+          <a:bodyPr wrap="square" lIns="0" tIns="0" rIns="0" bIns="0" anchor="t">
             <a:spAutoFit/>
           </a:bodyPr>
           <a:lstStyle/>
@@ -29797,7 +29856,7 @@
           </a:fontRef>
         </p:style>
         <p:txBody>
-          <a:bodyPr rtlCol="0" anchor="ctr" wrap="none" lIns="0" rIns="0" tIns="0" bIns="0"/>
+          <a:bodyPr wrap="none" lIns="0" tIns="0" rIns="0" bIns="0" rtlCol="0" anchor="ctr"/>
           <a:lstStyle/>
           <a:p>
             <a:pPr algn="ctr"/>
@@ -29854,6 +29913,7 @@
           <a:lstStyle/>
           <a:p>
             <a:pPr algn="ctr"/>
+            <a:endParaRPr/>
           </a:p>
         </p:txBody>
       </p:sp>
@@ -29874,7 +29934,7 @@
           <a:noFill/>
         </p:spPr>
         <p:txBody>
-          <a:bodyPr wrap="square" anchor="ctr" lIns="0" rIns="0" tIns="0" bIns="0">
+          <a:bodyPr wrap="square" lIns="0" tIns="0" rIns="0" bIns="0" anchor="ctr">
             <a:spAutoFit/>
           </a:bodyPr>
           <a:lstStyle/>
@@ -29919,7 +29979,7 @@
           <a:noFill/>
         </p:spPr>
         <p:txBody>
-          <a:bodyPr wrap="square" anchor="ctr" lIns="0" rIns="0" tIns="0" bIns="0">
+          <a:bodyPr wrap="square" lIns="0" tIns="0" rIns="0" bIns="0" anchor="ctr">
             <a:spAutoFit/>
           </a:bodyPr>
           <a:lstStyle/>
@@ -29964,7 +30024,7 @@
           <a:noFill/>
         </p:spPr>
         <p:txBody>
-          <a:bodyPr wrap="square" anchor="ctr" lIns="0" rIns="0" tIns="0" bIns="0">
+          <a:bodyPr wrap="square" lIns="0" tIns="0" rIns="0" bIns="0" anchor="ctr">
             <a:spAutoFit/>
           </a:bodyPr>
           <a:lstStyle/>
@@ -30029,7 +30089,7 @@
           </a:fontRef>
         </p:style>
         <p:txBody>
-          <a:bodyPr rtlCol="0" anchor="ctr" wrap="none" lIns="0" rIns="0" tIns="0" bIns="0"/>
+          <a:bodyPr wrap="none" lIns="0" tIns="0" rIns="0" bIns="0" rtlCol="0" anchor="ctr"/>
           <a:lstStyle/>
           <a:p>
             <a:pPr algn="ctr"/>
@@ -30086,6 +30146,7 @@
           <a:lstStyle/>
           <a:p>
             <a:pPr algn="ctr"/>
+            <a:endParaRPr/>
           </a:p>
         </p:txBody>
       </p:sp>
@@ -30106,7 +30167,7 @@
           <a:noFill/>
         </p:spPr>
         <p:txBody>
-          <a:bodyPr wrap="square" anchor="ctr" lIns="0" rIns="0" tIns="0" bIns="0">
+          <a:bodyPr wrap="square" lIns="0" tIns="0" rIns="0" bIns="0" anchor="ctr">
             <a:spAutoFit/>
           </a:bodyPr>
           <a:lstStyle/>
@@ -30151,7 +30212,7 @@
           <a:noFill/>
         </p:spPr>
         <p:txBody>
-          <a:bodyPr wrap="square" anchor="ctr" lIns="0" rIns="0" tIns="0" bIns="0">
+          <a:bodyPr wrap="square" lIns="0" tIns="0" rIns="0" bIns="0" anchor="ctr">
             <a:spAutoFit/>
           </a:bodyPr>
           <a:lstStyle/>
@@ -30196,7 +30257,7 @@
           <a:noFill/>
         </p:spPr>
         <p:txBody>
-          <a:bodyPr wrap="square" anchor="ctr" lIns="0" rIns="0" tIns="0" bIns="0">
+          <a:bodyPr wrap="square" lIns="0" tIns="0" rIns="0" bIns="0" anchor="ctr">
             <a:spAutoFit/>
           </a:bodyPr>
           <a:lstStyle/>
@@ -30261,7 +30322,7 @@
           </a:fontRef>
         </p:style>
         <p:txBody>
-          <a:bodyPr rtlCol="0" anchor="ctr" wrap="none" lIns="0" rIns="0" tIns="0" bIns="0"/>
+          <a:bodyPr wrap="none" lIns="0" tIns="0" rIns="0" bIns="0" rtlCol="0" anchor="ctr"/>
           <a:lstStyle/>
           <a:p>
             <a:pPr algn="ctr"/>
@@ -30318,6 +30379,7 @@
           <a:lstStyle/>
           <a:p>
             <a:pPr algn="ctr"/>
+            <a:endParaRPr/>
           </a:p>
         </p:txBody>
       </p:sp>
@@ -30338,7 +30400,7 @@
           <a:noFill/>
         </p:spPr>
         <p:txBody>
-          <a:bodyPr wrap="square" anchor="ctr" lIns="0" rIns="0" tIns="0" bIns="0">
+          <a:bodyPr wrap="square" lIns="0" tIns="0" rIns="0" bIns="0" anchor="ctr">
             <a:spAutoFit/>
           </a:bodyPr>
           <a:lstStyle/>
@@ -30383,7 +30445,7 @@
           <a:noFill/>
         </p:spPr>
         <p:txBody>
-          <a:bodyPr wrap="square" anchor="ctr" lIns="0" rIns="0" tIns="0" bIns="0">
+          <a:bodyPr wrap="square" lIns="0" tIns="0" rIns="0" bIns="0" anchor="ctr">
             <a:spAutoFit/>
           </a:bodyPr>
           <a:lstStyle/>
@@ -30428,7 +30490,7 @@
           <a:noFill/>
         </p:spPr>
         <p:txBody>
-          <a:bodyPr wrap="square" anchor="ctr" lIns="0" rIns="0" tIns="0" bIns="0">
+          <a:bodyPr wrap="square" lIns="0" tIns="0" rIns="0" bIns="0" anchor="ctr">
             <a:spAutoFit/>
           </a:bodyPr>
           <a:lstStyle/>
@@ -30493,7 +30555,7 @@
           </a:fontRef>
         </p:style>
         <p:txBody>
-          <a:bodyPr rtlCol="0" anchor="ctr" wrap="none" lIns="0" rIns="0" tIns="0" bIns="0"/>
+          <a:bodyPr wrap="none" lIns="0" tIns="0" rIns="0" bIns="0" rtlCol="0" anchor="ctr"/>
           <a:lstStyle/>
           <a:p>
             <a:pPr algn="ctr"/>
@@ -30550,6 +30612,7 @@
           <a:lstStyle/>
           <a:p>
             <a:pPr algn="ctr"/>
+            <a:endParaRPr/>
           </a:p>
         </p:txBody>
       </p:sp>
@@ -30570,7 +30633,7 @@
           <a:noFill/>
         </p:spPr>
         <p:txBody>
-          <a:bodyPr wrap="square" anchor="ctr" lIns="0" rIns="0" tIns="0" bIns="0">
+          <a:bodyPr wrap="square" lIns="0" tIns="0" rIns="0" bIns="0" anchor="ctr">
             <a:spAutoFit/>
           </a:bodyPr>
           <a:lstStyle/>
@@ -30615,7 +30678,7 @@
           <a:noFill/>
         </p:spPr>
         <p:txBody>
-          <a:bodyPr wrap="square" anchor="ctr" lIns="0" rIns="0" tIns="0" bIns="0">
+          <a:bodyPr wrap="square" lIns="0" tIns="0" rIns="0" bIns="0" anchor="ctr">
             <a:spAutoFit/>
           </a:bodyPr>
           <a:lstStyle/>
@@ -30660,7 +30723,7 @@
           <a:noFill/>
         </p:spPr>
         <p:txBody>
-          <a:bodyPr wrap="square" anchor="ctr" lIns="0" rIns="0" tIns="0" bIns="0">
+          <a:bodyPr wrap="square" lIns="0" tIns="0" rIns="0" bIns="0" anchor="ctr">
             <a:spAutoFit/>
           </a:bodyPr>
           <a:lstStyle/>
@@ -30725,7 +30788,7 @@
           </a:fontRef>
         </p:style>
         <p:txBody>
-          <a:bodyPr rtlCol="0" anchor="ctr" wrap="none" lIns="0" rIns="0" tIns="0" bIns="0"/>
+          <a:bodyPr wrap="none" lIns="0" tIns="0" rIns="0" bIns="0" rtlCol="0" anchor="ctr"/>
           <a:lstStyle/>
           <a:p>
             <a:pPr algn="ctr"/>
@@ -30782,6 +30845,7 @@
           <a:lstStyle/>
           <a:p>
             <a:pPr algn="ctr"/>
+            <a:endParaRPr/>
           </a:p>
         </p:txBody>
       </p:sp>
@@ -30802,7 +30866,7 @@
           <a:noFill/>
         </p:spPr>
         <p:txBody>
-          <a:bodyPr wrap="square" anchor="ctr" lIns="0" rIns="0" tIns="0" bIns="0">
+          <a:bodyPr wrap="square" lIns="0" tIns="0" rIns="0" bIns="0" anchor="ctr">
             <a:spAutoFit/>
           </a:bodyPr>
           <a:lstStyle/>
@@ -30847,7 +30911,7 @@
           <a:noFill/>
         </p:spPr>
         <p:txBody>
-          <a:bodyPr wrap="square" anchor="ctr" lIns="0" rIns="0" tIns="0" bIns="0">
+          <a:bodyPr wrap="square" lIns="0" tIns="0" rIns="0" bIns="0" anchor="ctr">
             <a:spAutoFit/>
           </a:bodyPr>
           <a:lstStyle/>
@@ -30892,7 +30956,7 @@
           <a:noFill/>
         </p:spPr>
         <p:txBody>
-          <a:bodyPr wrap="square" anchor="ctr" lIns="0" rIns="0" tIns="0" bIns="0">
+          <a:bodyPr wrap="square" lIns="0" tIns="0" rIns="0" bIns="0" anchor="ctr">
             <a:spAutoFit/>
           </a:bodyPr>
           <a:lstStyle/>
@@ -30957,7 +31021,7 @@
           </a:fontRef>
         </p:style>
         <p:txBody>
-          <a:bodyPr rtlCol="0" anchor="ctr" wrap="none" lIns="0" rIns="0" tIns="0" bIns="0"/>
+          <a:bodyPr wrap="none" lIns="0" tIns="0" rIns="0" bIns="0" rtlCol="0" anchor="ctr"/>
           <a:lstStyle/>
           <a:p>
             <a:pPr algn="ctr"/>
@@ -31014,6 +31078,7 @@
           <a:lstStyle/>
           <a:p>
             <a:pPr algn="ctr"/>
+            <a:endParaRPr/>
           </a:p>
         </p:txBody>
       </p:sp>
@@ -31034,7 +31099,7 @@
           <a:noFill/>
         </p:spPr>
         <p:txBody>
-          <a:bodyPr wrap="square" anchor="ctr" lIns="0" rIns="0" tIns="0" bIns="0">
+          <a:bodyPr wrap="square" lIns="0" tIns="0" rIns="0" bIns="0" anchor="ctr">
             <a:spAutoFit/>
           </a:bodyPr>
           <a:lstStyle/>
@@ -31079,7 +31144,7 @@
           <a:noFill/>
         </p:spPr>
         <p:txBody>
-          <a:bodyPr wrap="square" anchor="ctr" lIns="0" rIns="0" tIns="0" bIns="0">
+          <a:bodyPr wrap="square" lIns="0" tIns="0" rIns="0" bIns="0" anchor="ctr">
             <a:spAutoFit/>
           </a:bodyPr>
           <a:lstStyle/>
@@ -31124,7 +31189,7 @@
           <a:noFill/>
         </p:spPr>
         <p:txBody>
-          <a:bodyPr wrap="square" anchor="ctr" lIns="0" rIns="0" tIns="0" bIns="0">
+          <a:bodyPr wrap="square" lIns="0" tIns="0" rIns="0" bIns="0" anchor="ctr">
             <a:spAutoFit/>
           </a:bodyPr>
           <a:lstStyle/>
@@ -31169,7 +31234,7 @@
           <a:noFill/>
         </p:spPr>
         <p:txBody>
-          <a:bodyPr wrap="square" anchor="t" lIns="0" rIns="0" tIns="0" bIns="0">
+          <a:bodyPr wrap="square" lIns="0" tIns="0" rIns="0" bIns="0" anchor="t">
             <a:spAutoFit/>
           </a:bodyPr>
           <a:lstStyle/>
@@ -31214,7 +31279,7 @@
           <a:noFill/>
         </p:spPr>
         <p:txBody>
-          <a:bodyPr wrap="square" anchor="t" lIns="0" rIns="0" tIns="0" bIns="0">
+          <a:bodyPr wrap="square" lIns="0" tIns="0" rIns="0" bIns="0" anchor="t">
             <a:spAutoFit/>
           </a:bodyPr>
           <a:lstStyle/>
@@ -31578,44 +31643,44 @@
         <a:sysClr val="window" lastClr="FFFFFF"/>
       </a:lt1>
       <a:dk2>
-        <a:srgbClr val="232F3E"/>
+        <a:srgbClr val="0E2841"/>
       </a:dk2>
       <a:lt2>
-        <a:srgbClr val="EEECE1"/>
+        <a:srgbClr val="E8E8E8"/>
       </a:lt2>
       <a:accent1>
-        <a:srgbClr val="FF9900"/>
+        <a:srgbClr val="156082"/>
       </a:accent1>
       <a:accent2>
-        <a:srgbClr val="232F3E"/>
+        <a:srgbClr val="E97132"/>
       </a:accent2>
       <a:accent3>
-        <a:srgbClr val="01A88D"/>
+        <a:srgbClr val="196B24"/>
       </a:accent3>
       <a:accent4>
-        <a:srgbClr val="8C4FFF"/>
+        <a:srgbClr val="0F9ED5"/>
       </a:accent4>
       <a:accent5>
-        <a:srgbClr val="DD344C"/>
+        <a:srgbClr val="A02B93"/>
       </a:accent5>
       <a:accent6>
-        <a:srgbClr val="ED7100"/>
+        <a:srgbClr val="4EA72E"/>
       </a:accent6>
       <a:hlink>
-        <a:srgbClr val="0000FF"/>
+        <a:srgbClr val="467886"/>
       </a:hlink>
       <a:folHlink>
-        <a:srgbClr val="800080"/>
+        <a:srgbClr val="96607D"/>
       </a:folHlink>
     </a:clrScheme>
     <a:fontScheme name="Office">
       <a:majorFont>
-        <a:latin typeface="Calibri"/>
+        <a:latin typeface="Aptos Display" panose="02110004020202020204"/>
         <a:ea typeface=""/>
         <a:cs typeface=""/>
-        <a:font script="Jpan" typeface="ＭＳ Ｐゴシック"/>
+        <a:font script="Jpan" typeface="游ゴシック Light"/>
         <a:font script="Hang" typeface="맑은 고딕"/>
-        <a:font script="Hans" typeface="宋体"/>
+        <a:font script="Hans" typeface="等线 Light"/>
         <a:font script="Hant" typeface="新細明體"/>
         <a:font script="Arab" typeface="Times New Roman"/>
         <a:font script="Hebr" typeface="Times New Roman"/>
@@ -31643,14 +31708,31 @@
         <a:font script="Viet" typeface="Times New Roman"/>
         <a:font script="Uigh" typeface="Microsoft Uighur"/>
         <a:font script="Geor" typeface="Sylfaen"/>
+        <a:font script="Armn" typeface="Arial"/>
+        <a:font script="Bugi" typeface="Leelawadee UI"/>
+        <a:font script="Bopo" typeface="Microsoft JhengHei"/>
+        <a:font script="Java" typeface="Javanese Text"/>
+        <a:font script="Lisu" typeface="Segoe UI"/>
+        <a:font script="Mymr" typeface="Myanmar Text"/>
+        <a:font script="Nkoo" typeface="Ebrima"/>
+        <a:font script="Olck" typeface="Nirmala UI"/>
+        <a:font script="Osma" typeface="Ebrima"/>
+        <a:font script="Phag" typeface="Phagspa"/>
+        <a:font script="Syrn" typeface="Estrangelo Edessa"/>
+        <a:font script="Syrj" typeface="Estrangelo Edessa"/>
+        <a:font script="Syre" typeface="Estrangelo Edessa"/>
+        <a:font script="Sora" typeface="Nirmala UI"/>
+        <a:font script="Tale" typeface="Microsoft Tai Le"/>
+        <a:font script="Talu" typeface="Microsoft New Tai Lue"/>
+        <a:font script="Tfng" typeface="Ebrima"/>
       </a:majorFont>
       <a:minorFont>
-        <a:latin typeface="Calibri"/>
+        <a:latin typeface="Aptos" panose="02110004020202020204"/>
         <a:ea typeface=""/>
         <a:cs typeface=""/>
-        <a:font script="Jpan" typeface="ＭＳ Ｐゴシック"/>
+        <a:font script="Jpan" typeface="游ゴシック"/>
         <a:font script="Hang" typeface="맑은 고딕"/>
-        <a:font script="Hans" typeface="宋体"/>
+        <a:font script="Hans" typeface="等线"/>
         <a:font script="Hant" typeface="新細明體"/>
         <a:font script="Arab" typeface="Arial"/>
         <a:font script="Hebr" typeface="Arial"/>
@@ -31678,6 +31760,23 @@
         <a:font script="Viet" typeface="Arial"/>
         <a:font script="Uigh" typeface="Microsoft Uighur"/>
         <a:font script="Geor" typeface="Sylfaen"/>
+        <a:font script="Armn" typeface="Arial"/>
+        <a:font script="Bugi" typeface="Leelawadee UI"/>
+        <a:font script="Bopo" typeface="Microsoft JhengHei"/>
+        <a:font script="Java" typeface="Javanese Text"/>
+        <a:font script="Lisu" typeface="Segoe UI"/>
+        <a:font script="Mymr" typeface="Myanmar Text"/>
+        <a:font script="Nkoo" typeface="Ebrima"/>
+        <a:font script="Olck" typeface="Nirmala UI"/>
+        <a:font script="Osma" typeface="Ebrima"/>
+        <a:font script="Phag" typeface="Phagspa"/>
+        <a:font script="Syrn" typeface="Estrangelo Edessa"/>
+        <a:font script="Syrj" typeface="Estrangelo Edessa"/>
+        <a:font script="Syre" typeface="Estrangelo Edessa"/>
+        <a:font script="Sora" typeface="Nirmala UI"/>
+        <a:font script="Tale" typeface="Microsoft Tai Le"/>
+        <a:font script="Talu" typeface="Microsoft New Tai Lue"/>
+        <a:font script="Tfng" typeface="Ebrima"/>
       </a:minorFont>
     </a:fontScheme>
     <a:fmtScheme name="Office">
@@ -31689,180 +31788,136 @@
           <a:gsLst>
             <a:gs pos="0">
               <a:schemeClr val="phClr">
-                <a:tint val="50000"/>
-                <a:satMod val="300000"/>
+                <a:lumMod val="110000"/>
+                <a:satMod val="105000"/>
+                <a:tint val="67000"/>
               </a:schemeClr>
             </a:gs>
-            <a:gs pos="35000">
+            <a:gs pos="50000">
               <a:schemeClr val="phClr">
-                <a:tint val="37000"/>
-                <a:satMod val="300000"/>
+                <a:lumMod val="105000"/>
+                <a:satMod val="103000"/>
+                <a:tint val="73000"/>
               </a:schemeClr>
             </a:gs>
             <a:gs pos="100000">
               <a:schemeClr val="phClr">
-                <a:tint val="15000"/>
-                <a:satMod val="350000"/>
+                <a:lumMod val="105000"/>
+                <a:satMod val="109000"/>
+                <a:tint val="81000"/>
               </a:schemeClr>
             </a:gs>
           </a:gsLst>
-          <a:lin ang="16200000" scaled="1"/>
+          <a:lin ang="5400000" scaled="0"/>
         </a:gradFill>
         <a:gradFill rotWithShape="1">
           <a:gsLst>
             <a:gs pos="0">
               <a:schemeClr val="phClr">
-                <a:tint val="100000"/>
+                <a:satMod val="103000"/>
+                <a:lumMod val="102000"/>
+                <a:tint val="94000"/>
+              </a:schemeClr>
+            </a:gs>
+            <a:gs pos="50000">
+              <a:schemeClr val="phClr">
+                <a:satMod val="110000"/>
+                <a:lumMod val="100000"/>
                 <a:shade val="100000"/>
-                <a:satMod val="130000"/>
               </a:schemeClr>
             </a:gs>
             <a:gs pos="100000">
               <a:schemeClr val="phClr">
-                <a:tint val="50000"/>
-                <a:shade val="100000"/>
-                <a:satMod val="350000"/>
+                <a:lumMod val="99000"/>
+                <a:satMod val="120000"/>
+                <a:shade val="78000"/>
               </a:schemeClr>
             </a:gs>
           </a:gsLst>
-          <a:lin ang="16200000" scaled="0"/>
+          <a:lin ang="5400000" scaled="0"/>
         </a:gradFill>
       </a:fillStyleLst>
       <a:lnStyleLst>
-        <a:ln w="9525" cap="flat" cmpd="sng" algn="ctr">
+        <a:ln w="12700" cap="flat" cmpd="sng" algn="ctr">
           <a:solidFill>
-            <a:schemeClr val="phClr">
-              <a:shade val="95000"/>
-              <a:satMod val="105000"/>
-            </a:schemeClr>
+            <a:schemeClr val="phClr"/>
           </a:solidFill>
           <a:prstDash val="solid"/>
+          <a:miter lim="800000"/>
+        </a:ln>
+        <a:ln w="19050" cap="flat" cmpd="sng" algn="ctr">
+          <a:solidFill>
+            <a:schemeClr val="phClr"/>
+          </a:solidFill>
+          <a:prstDash val="solid"/>
+          <a:miter lim="800000"/>
         </a:ln>
         <a:ln w="25400" cap="flat" cmpd="sng" algn="ctr">
           <a:solidFill>
             <a:schemeClr val="phClr"/>
           </a:solidFill>
           <a:prstDash val="solid"/>
-        </a:ln>
-        <a:ln w="38100" cap="flat" cmpd="sng" algn="ctr">
-          <a:solidFill>
-            <a:schemeClr val="phClr"/>
-          </a:solidFill>
-          <a:prstDash val="solid"/>
+          <a:miter lim="800000"/>
         </a:ln>
       </a:lnStyleLst>
       <a:effectStyleLst>
         <a:effectStyle>
+          <a:effectLst/>
+        </a:effectStyle>
+        <a:effectStyle>
+          <a:effectLst/>
+        </a:effectStyle>
+        <a:effectStyle>
           <a:effectLst>
-            <a:outerShdw blurRad="40000" dist="20000" dir="5400000" rotWithShape="0">
+            <a:outerShdw blurRad="57150" dist="19050" dir="5400000" algn="ctr" rotWithShape="0">
               <a:srgbClr val="000000">
-                <a:alpha val="38000"/>
+                <a:alpha val="63000"/>
               </a:srgbClr>
             </a:outerShdw>
           </a:effectLst>
-        </a:effectStyle>
-        <a:effectStyle>
-          <a:effectLst>
-            <a:outerShdw blurRad="40000" dist="23000" dir="5400000" rotWithShape="0">
-              <a:srgbClr val="000000">
-                <a:alpha val="35000"/>
-              </a:srgbClr>
-            </a:outerShdw>
-          </a:effectLst>
-        </a:effectStyle>
-        <a:effectStyle>
-          <a:effectLst>
-            <a:outerShdw blurRad="40000" dist="23000" dir="5400000" rotWithShape="0">
-              <a:srgbClr val="000000">
-                <a:alpha val="35000"/>
-              </a:srgbClr>
-            </a:outerShdw>
-          </a:effectLst>
-          <a:scene3d>
-            <a:camera prst="orthographicFront">
-              <a:rot lat="0" lon="0" rev="0"/>
-            </a:camera>
-            <a:lightRig rig="threePt" dir="t">
-              <a:rot lat="0" lon="0" rev="1200000"/>
-            </a:lightRig>
-          </a:scene3d>
-          <a:sp3d>
-            <a:bevelT w="63500" h="25400"/>
-          </a:sp3d>
         </a:effectStyle>
       </a:effectStyleLst>
       <a:bgFillStyleLst>
         <a:solidFill>
           <a:schemeClr val="phClr"/>
         </a:solidFill>
+        <a:solidFill>
+          <a:schemeClr val="phClr">
+            <a:tint val="95000"/>
+            <a:satMod val="170000"/>
+          </a:schemeClr>
+        </a:solidFill>
         <a:gradFill rotWithShape="1">
           <a:gsLst>
             <a:gs pos="0">
               <a:schemeClr val="phClr">
-                <a:tint val="40000"/>
-                <a:satMod val="350000"/>
+                <a:tint val="93000"/>
+                <a:satMod val="150000"/>
+                <a:shade val="98000"/>
+                <a:lumMod val="102000"/>
               </a:schemeClr>
             </a:gs>
-            <a:gs pos="40000">
+            <a:gs pos="50000">
               <a:schemeClr val="phClr">
-                <a:tint val="45000"/>
-                <a:shade val="99000"/>
-                <a:satMod val="350000"/>
+                <a:tint val="98000"/>
+                <a:satMod val="130000"/>
+                <a:shade val="90000"/>
+                <a:lumMod val="103000"/>
               </a:schemeClr>
             </a:gs>
             <a:gs pos="100000">
               <a:schemeClr val="phClr">
-                <a:shade val="20000"/>
-                <a:satMod val="255000"/>
+                <a:shade val="63000"/>
+                <a:satMod val="120000"/>
               </a:schemeClr>
             </a:gs>
           </a:gsLst>
-          <a:path path="circle">
-            <a:fillToRect l="50000" t="-80000" r="50000" b="180000"/>
-          </a:path>
-        </a:gradFill>
-        <a:gradFill rotWithShape="1">
-          <a:gsLst>
-            <a:gs pos="0">
-              <a:schemeClr val="phClr">
-                <a:tint val="80000"/>
-                <a:satMod val="300000"/>
-              </a:schemeClr>
-            </a:gs>
-            <a:gs pos="100000">
-              <a:schemeClr val="phClr">
-                <a:shade val="30000"/>
-                <a:satMod val="200000"/>
-              </a:schemeClr>
-            </a:gs>
-          </a:gsLst>
-          <a:path path="circle">
-            <a:fillToRect l="50000" t="50000" r="50000" b="50000"/>
-          </a:path>
+          <a:lin ang="5400000" scaled="0"/>
         </a:gradFill>
       </a:bgFillStyleLst>
     </a:fmtScheme>
   </a:themeElements>
   <a:objectDefaults>
-    <a:spDef>
-      <a:spPr/>
-      <a:bodyPr/>
-      <a:lstStyle/>
-      <a:style>
-        <a:lnRef idx="1">
-          <a:schemeClr val="accent1"/>
-        </a:lnRef>
-        <a:fillRef idx="3">
-          <a:schemeClr val="accent1"/>
-        </a:fillRef>
-        <a:effectRef idx="2">
-          <a:schemeClr val="accent1"/>
-        </a:effectRef>
-        <a:fontRef idx="minor">
-          <a:schemeClr val="lt1"/>
-        </a:fontRef>
-      </a:style>
-    </a:spDef>
     <a:lnDef>
       <a:spPr/>
       <a:bodyPr/>
@@ -31884,5 +31939,10 @@
     </a:lnDef>
   </a:objectDefaults>
   <a:extraClrSchemeLst/>
+  <a:extLst>
+    <a:ext uri="{05A4C25C-085E-4340-85A3-A5531E510DB2}">
+      <thm15:themeFamily xmlns:thm15="http://schemas.microsoft.com/office/thememl/2012/main" name="Office Theme" id="{2E142A2C-CD16-42D6-873A-C26D2A0506FA}" vid="{1BDDFF52-6CD6-40A5-AB3C-68EB2F1E4D0A}"/>
+    </a:ext>
+  </a:extLst>
 </a:theme>
 </file>
--- a/Aegis-Master-Deck.pptx
+++ b/Aegis-Master-Deck.pptx
@@ -5123,7 +5123,7 @@
                 </a:solidFill>
                 <a:latin typeface="Cambria"/>
               </a:rPr>
-              <a:t>The governed agent platform on AWS</a:t>
+              <a:t>The governed-agent reference architecture for AWS</a:t>
             </a:r>
           </a:p>
           <a:p>
@@ -5142,7 +5142,7 @@
                 </a:solidFill>
                 <a:latin typeface="Cambria"/>
               </a:rPr>
-              <a:t>Governance is the product. Agents are add-ons.</a:t>
+              <a:t>Governance is the point. Agents are add-ons.</a:t>
             </a:r>
           </a:p>
         </p:txBody>
@@ -7722,7 +7722,7 @@
                 </a:solidFill>
                 <a:latin typeface="Calibri"/>
               </a:rPr>
-              <a:t>A console doesn't give you least-privilege intersection, a human gate withheld in code, WORM audit, per-department chargeback, or a compliance pack that survives a review board. Aegis does — and add-on agents inherit all of it for free.</a:t>
+              <a:t>A console doesn't give you least-privilege intersection, a human gate withheld in code, WORM audit, per-department chargeback, or a control-mapping pack that survives a review board. Aegis does — and add-on agents inherit all of it for free.</a:t>
             </a:r>
           </a:p>
         </p:txBody>
